--- a/校园外卖两段式配送系统_答辩汇报.pptx
+++ b/校园外卖两段式配送系统_答辩汇报.pptx
@@ -4920,6 +4920,10 @@
           </a:solidFill>
           <a:ln/>
         </p:spPr>
+        <p:txBody>
+          <a:bodyPr/>
+          <a:p/>
+        </p:txBody>
       </p:sp>
       <p:sp>
         <p:nvSpPr>
@@ -5058,6 +5062,10 @@
           </a:solidFill>
           <a:ln/>
         </p:spPr>
+        <p:txBody>
+          <a:bodyPr/>
+          <a:p/>
+        </p:txBody>
       </p:sp>
       <p:sp>
         <p:nvSpPr>
@@ -5089,7 +5097,7 @@
                   <a:srgbClr val="94A3B8"/>
                 </a:solidFill>
               </a:rPr>
-              <a:t>答辩团队 | 2026年5月</a:t>
+              <a:t>2026年6月</a:t>
             </a:r>
             <a:endParaRPr lang="en-US" sz="1100" dirty="0"/>
           </a:p>
@@ -5257,6 +5265,10 @@
           </a:solidFill>
           <a:ln/>
         </p:spPr>
+        <p:txBody>
+          <a:bodyPr/>
+          <a:p/>
+        </p:txBody>
       </p:sp>
       <p:sp>
         <p:nvSpPr>
@@ -5407,6 +5419,10 @@
           </a:solidFill>
           <a:ln/>
         </p:spPr>
+        <p:txBody>
+          <a:bodyPr/>
+          <a:p/>
+        </p:txBody>
       </p:sp>
       <p:sp>
         <p:nvSpPr>
@@ -5470,6 +5486,10 @@
             </a:outerShdw>
           </a:effectLst>
         </p:spPr>
+        <p:txBody>
+          <a:bodyPr/>
+          <a:p/>
+        </p:txBody>
       </p:sp>
       <p:sp>
         <p:nvSpPr>
@@ -5647,6 +5667,10 @@
             </a:outerShdw>
           </a:effectLst>
         </p:spPr>
+        <p:txBody>
+          <a:bodyPr/>
+          <a:p/>
+        </p:txBody>
       </p:sp>
       <p:sp>
         <p:nvSpPr>
@@ -5824,6 +5848,10 @@
             </a:outerShdw>
           </a:effectLst>
         </p:spPr>
+        <p:txBody>
+          <a:bodyPr/>
+          <a:p/>
+        </p:txBody>
       </p:sp>
       <p:sp>
         <p:nvSpPr>
@@ -6001,6 +6029,10 @@
             </a:outerShdw>
           </a:effectLst>
         </p:spPr>
+        <p:txBody>
+          <a:bodyPr/>
+          <a:p/>
+        </p:txBody>
       </p:sp>
       <p:sp>
         <p:nvSpPr>
@@ -6178,6 +6210,10 @@
             </a:outerShdw>
           </a:effectLst>
         </p:spPr>
+        <p:txBody>
+          <a:bodyPr/>
+          <a:p/>
+        </p:txBody>
       </p:sp>
       <p:sp>
         <p:nvSpPr>
@@ -6355,6 +6391,10 @@
             </a:outerShdw>
           </a:effectLst>
         </p:spPr>
+        <p:txBody>
+          <a:bodyPr/>
+          <a:p/>
+        </p:txBody>
       </p:sp>
       <p:sp>
         <p:nvSpPr>
@@ -6532,6 +6572,10 @@
             </a:outerShdw>
           </a:effectLst>
         </p:spPr>
+        <p:txBody>
+          <a:bodyPr/>
+          <a:p/>
+        </p:txBody>
       </p:sp>
       <p:sp>
         <p:nvSpPr>
@@ -6566,7 +6610,7 @@
                 <a:ea typeface="Arial" pitchFamily="34" charset="-122"/>
                 <a:cs typeface="Arial" pitchFamily="34" charset="-120"/>
               </a:rPr>
-              <a:t>t_order_tracking</a:t>
+              <a:t>orders(order_status)</a:t>
             </a:r>
             <a:endParaRPr lang="en-US" sz="1100" dirty="0"/>
           </a:p>
@@ -6734,6 +6778,10 @@
           </a:solidFill>
           <a:ln/>
         </p:spPr>
+        <p:txBody>
+          <a:bodyPr/>
+          <a:p/>
+        </p:txBody>
       </p:sp>
       <p:sp>
         <p:nvSpPr>
@@ -6804,7 +6852,7 @@
                   <a:srgbClr val="0D9488"/>
                 </a:solidFill>
               </a:rPr>
-              <a:t>从下单到送达 · 全链路可追溯 · t_order_tracking</a:t>
+              <a:t>从下单到送达 · 全链路可追溯 · orders(order_status)</a:t>
             </a:r>
             <a:endParaRPr lang="en-US" sz="1500" dirty="0"/>
           </a:p>
@@ -6936,6 +6984,10 @@
           </a:solidFill>
           <a:ln/>
         </p:spPr>
+        <p:txBody>
+          <a:bodyPr/>
+          <a:p/>
+        </p:txBody>
       </p:sp>
       <p:sp>
         <p:nvSpPr>
@@ -6999,6 +7051,10 @@
             </a:outerShdw>
           </a:effectLst>
         </p:spPr>
+        <p:txBody>
+          <a:bodyPr/>
+          <a:p/>
+        </p:txBody>
       </p:sp>
       <p:sp>
         <p:nvSpPr>
@@ -7121,6 +7177,10 @@
             </a:outerShdw>
           </a:effectLst>
         </p:spPr>
+        <p:txBody>
+          <a:bodyPr/>
+          <a:p/>
+        </p:txBody>
       </p:sp>
       <p:sp>
         <p:nvSpPr>
@@ -7243,6 +7303,10 @@
             </a:outerShdw>
           </a:effectLst>
         </p:spPr>
+        <p:txBody>
+          <a:bodyPr/>
+          <a:p/>
+        </p:txBody>
       </p:sp>
       <p:sp>
         <p:nvSpPr>
@@ -7365,6 +7429,10 @@
             </a:outerShdw>
           </a:effectLst>
         </p:spPr>
+        <p:txBody>
+          <a:bodyPr/>
+          <a:p/>
+        </p:txBody>
       </p:sp>
       <p:sp>
         <p:nvSpPr>
@@ -7487,6 +7555,10 @@
             </a:outerShdw>
           </a:effectLst>
         </p:spPr>
+        <p:txBody>
+          <a:bodyPr/>
+          <a:p/>
+        </p:txBody>
       </p:sp>
       <p:sp>
         <p:nvSpPr>
@@ -7609,6 +7681,10 @@
             </a:outerShdw>
           </a:effectLst>
         </p:spPr>
+        <p:txBody>
+          <a:bodyPr/>
+          <a:p/>
+        </p:txBody>
       </p:sp>
       <p:sp>
         <p:nvSpPr>
@@ -7687,6 +7763,10 @@
           </a:solidFill>
           <a:ln/>
         </p:spPr>
+        <p:txBody>
+          <a:bodyPr/>
+          <a:p/>
+        </p:txBody>
       </p:sp>
       <p:sp>
         <p:nvSpPr>
@@ -7748,6 +7828,10 @@
           </a:solidFill>
           <a:ln/>
         </p:spPr>
+        <p:txBody>
+          <a:bodyPr/>
+          <a:p/>
+        </p:txBody>
       </p:sp>
       <p:sp>
         <p:nvSpPr>
@@ -7926,7 +8010,7 @@
                   <a:srgbClr val="1E293B"/>
                 </a:solidFill>
               </a:rPr>
-              <a:t>④送达寄存点(sp_deliver_to_pickup)·扣减余位·FOR UPDATE→AT_PICKUP</a:t>
+              <a:t>④送达寄存点(sp_arrive_at_pickup)·干线骑手自动释放(Idle)·包裹入库→AT_PICKUP</a:t>
             </a:r>
             <a:endParaRPr lang="en-US" sz="1000" dirty="0"/>
           </a:p>
@@ -7998,7 +8082,7 @@
                   <a:srgbClr val="1E293B"/>
                 </a:solidFill>
               </a:rPr>
-              <a:t>⑥学生确认收货→DELIVERED</a:t>
+              <a:t>⑥楼栋送达(sp_stage2_deliver)→楼栋骑手自动释放(Idle)→COMPLETED</a:t>
             </a:r>
             <a:endParaRPr lang="en-US" sz="1000" dirty="0"/>
           </a:p>
@@ -8094,6 +8178,10 @@
           </a:solidFill>
           <a:ln/>
         </p:spPr>
+        <p:txBody>
+          <a:bodyPr/>
+          <a:p/>
+        </p:txBody>
       </p:sp>
       <p:sp>
         <p:nvSpPr>
@@ -8157,6 +8245,10 @@
             </a:outerShdw>
           </a:effectLst>
         </p:spPr>
+        <p:txBody>
+          <a:bodyPr/>
+          <a:p/>
+        </p:txBody>
       </p:sp>
       <p:sp>
         <p:nvSpPr>
@@ -8335,7 +8427,7 @@
                   <a:srgbClr val="1E293B"/>
                 </a:solidFill>
               </a:rPr>
-              <a:t>4. 送达寄存点(sp_deliver_to_pickup)→扣减余位</a:t>
+              <a:t>4. 送达寄存点(sp_arrive_at_pickup_point)→扣减余位</a:t>
             </a:r>
             <a:endParaRPr lang="en-US" sz="1200" dirty="0"/>
           </a:p>
@@ -8367,6 +8459,10 @@
             </a:outerShdw>
           </a:effectLst>
         </p:spPr>
+        <p:txBody>
+          <a:bodyPr/>
+          <a:p/>
+        </p:txBody>
       </p:sp>
       <p:sp>
         <p:nvSpPr>
@@ -8581,7 +8677,7 @@
                   <a:srgbClr val="1E293B"/>
                 </a:solidFill>
               </a:rPr>
-              <a:t>▸ 每次状态变更写入t_order_tracking日志</a:t>
+              <a:t>▸ 每次状态变更写入orders(order_status)日志</a:t>
             </a:r>
             <a:endParaRPr lang="en-US" sz="1200" dirty="0"/>
           </a:p>
@@ -8677,6 +8773,10 @@
           </a:solidFill>
           <a:ln/>
         </p:spPr>
+        <p:txBody>
+          <a:bodyPr/>
+          <a:p/>
+        </p:txBody>
       </p:sp>
       <p:sp>
         <p:nvSpPr>
@@ -8740,6 +8840,10 @@
             </a:outerShdw>
           </a:effectLst>
         </p:spPr>
+        <p:txBody>
+          <a:bodyPr/>
+          <a:p/>
+        </p:txBody>
       </p:sp>
       <p:sp>
         <p:nvSpPr>
@@ -8950,6 +9054,10 @@
             </a:outerShdw>
           </a:effectLst>
         </p:spPr>
+        <p:txBody>
+          <a:bodyPr/>
+          <a:p/>
+        </p:txBody>
       </p:sp>
       <p:sp>
         <p:nvSpPr>
@@ -9221,6 +9329,10 @@
           </a:solidFill>
           <a:ln/>
         </p:spPr>
+        <p:txBody>
+          <a:bodyPr/>
+          <a:p/>
+        </p:txBody>
       </p:sp>
       <p:sp>
         <p:nvSpPr>
@@ -9423,6 +9535,10 @@
           </a:solidFill>
           <a:ln/>
         </p:spPr>
+        <p:txBody>
+          <a:bodyPr/>
+          <a:p/>
+        </p:txBody>
       </p:sp>
       <p:sp>
         <p:nvSpPr>
@@ -9486,6 +9602,10 @@
             </a:outerShdw>
           </a:effectLst>
         </p:spPr>
+        <p:txBody>
+          <a:bodyPr/>
+          <a:p/>
+        </p:txBody>
       </p:sp>
       <p:sp>
         <p:nvSpPr>
@@ -9630,6 +9750,10 @@
             </a:outerShdw>
           </a:effectLst>
         </p:spPr>
+        <p:txBody>
+          <a:bodyPr/>
+          <a:p/>
+        </p:txBody>
       </p:sp>
       <p:sp>
         <p:nvSpPr>
@@ -9774,6 +9898,10 @@
             </a:outerShdw>
           </a:effectLst>
         </p:spPr>
+        <p:txBody>
+          <a:bodyPr/>
+          <a:p/>
+        </p:txBody>
       </p:sp>
       <p:sp>
         <p:nvSpPr>
@@ -9972,7 +10100,7 @@
                 <a:ea typeface="Arial" pitchFamily="34" charset="-122"/>
                 <a:cs typeface="Arial" pitchFamily="34" charset="-120"/>
               </a:rPr>
-              <a:t>事务回滚 · 四大存储过程</a:t>
+              <a:t>事务回滚 · 4存储过程 + 6触发器</a:t>
             </a:r>
             <a:endParaRPr lang="en-US" sz="2600" dirty="0"/>
           </a:p>
@@ -9997,6 +10125,10 @@
           </a:solidFill>
           <a:ln/>
         </p:spPr>
+        <p:txBody>
+          <a:bodyPr/>
+          <a:p/>
+        </p:txBody>
       </p:sp>
       <p:sp>
         <p:nvSpPr>
@@ -10060,6 +10192,10 @@
             </a:outerShdw>
           </a:effectLst>
         </p:spPr>
+        <p:txBody>
+          <a:bodyPr/>
+          <a:p/>
+        </p:txBody>
       </p:sp>
       <p:sp>
         <p:nvSpPr>
@@ -10080,6 +10216,10 @@
           </a:solidFill>
           <a:ln/>
         </p:spPr>
+        <p:txBody>
+          <a:bodyPr/>
+          <a:p/>
+        </p:txBody>
       </p:sp>
       <p:sp>
         <p:nvSpPr>
@@ -10221,6 +10361,10 @@
             </a:outerShdw>
           </a:effectLst>
         </p:spPr>
+        <p:txBody>
+          <a:bodyPr/>
+          <a:p/>
+        </p:txBody>
       </p:sp>
       <p:sp>
         <p:nvSpPr>
@@ -10241,6 +10385,10 @@
           </a:solidFill>
           <a:ln/>
         </p:spPr>
+        <p:txBody>
+          <a:bodyPr/>
+          <a:p/>
+        </p:txBody>
       </p:sp>
       <p:sp>
         <p:nvSpPr>
@@ -10382,6 +10530,10 @@
             </a:outerShdw>
           </a:effectLst>
         </p:spPr>
+        <p:txBody>
+          <a:bodyPr/>
+          <a:p/>
+        </p:txBody>
       </p:sp>
       <p:sp>
         <p:nvSpPr>
@@ -10402,6 +10554,10 @@
           </a:solidFill>
           <a:ln/>
         </p:spPr>
+        <p:txBody>
+          <a:bodyPr/>
+          <a:p/>
+        </p:txBody>
       </p:sp>
       <p:sp>
         <p:nvSpPr>
@@ -10436,7 +10592,7 @@
                 <a:ea typeface="Arial" pitchFamily="34" charset="-122"/>
                 <a:cs typeface="Arial" pitchFamily="34" charset="-120"/>
               </a:rPr>
-              <a:t>sp_deliver_to_pickup</a:t>
+              <a:t>sp_arrive_at_pickup_point</a:t>
             </a:r>
             <a:endParaRPr lang="en-US" sz="1300" dirty="0"/>
           </a:p>
@@ -10543,6 +10699,10 @@
             </a:outerShdw>
           </a:effectLst>
         </p:spPr>
+        <p:txBody>
+          <a:bodyPr/>
+          <a:p/>
+        </p:txBody>
       </p:sp>
       <p:sp>
         <p:nvSpPr>
@@ -10563,6 +10723,10 @@
           </a:solidFill>
           <a:ln/>
         </p:spPr>
+        <p:txBody>
+          <a:bodyPr/>
+          <a:p/>
+        </p:txBody>
       </p:sp>
       <p:sp>
         <p:nvSpPr>
@@ -10711,7 +10875,8 @@
                 <a:ea typeface="Consolas" pitchFamily="34" charset="-122"/>
                 <a:cs typeface="Consolas" pitchFamily="34" charset="-120"/>
               </a:rPr>
-              <a:t>DECLARE EXIT HANDLER FOR SQLEXCEPTION  BEGIN  ROLLBACK;  SIGNAL ...;  END;</a:t>
+              <a:t>DECLARE EXIT HANDLER FOR SQLEXCEPTION  BEGIN  ROLLBACK;  SIGNAL ...;  END;
+Also: 6 triggers for stock validation, stock deduction, rider type enforcement, rider status auto-management</a:t>
             </a:r>
             <a:endParaRPr lang="en-US" sz="1100" dirty="0"/>
           </a:p>
@@ -10807,6 +10972,10 @@
           </a:solidFill>
           <a:ln/>
         </p:spPr>
+        <p:txBody>
+          <a:bodyPr/>
+          <a:p/>
+        </p:txBody>
       </p:sp>
       <p:sp>
         <p:nvSpPr>
@@ -10870,6 +11039,10 @@
             </a:outerShdw>
           </a:effectLst>
         </p:spPr>
+        <p:txBody>
+          <a:bodyPr/>
+          <a:p/>
+        </p:txBody>
       </p:sp>
       <p:sp>
         <p:nvSpPr>
@@ -11043,6 +11216,10 @@
             </a:outerShdw>
           </a:effectLst>
         </p:spPr>
+        <p:txBody>
+          <a:bodyPr/>
+          <a:p/>
+        </p:txBody>
       </p:sp>
       <p:sp>
         <p:nvSpPr>
@@ -11217,6 +11394,10 @@
             </a:outerShdw>
           </a:effectLst>
         </p:spPr>
+        <p:txBody>
+          <a:bodyPr/>
+          <a:p/>
+        </p:txBody>
       </p:sp>
       <p:sp>
         <p:nvSpPr>
@@ -11417,6 +11598,10 @@
           </a:solidFill>
           <a:ln/>
         </p:spPr>
+        <p:txBody>
+          <a:bodyPr/>
+          <a:p/>
+        </p:txBody>
       </p:sp>
       <p:sp>
         <p:nvSpPr>
@@ -11444,6 +11629,10 @@
             </a:outerShdw>
           </a:effectLst>
         </p:spPr>
+        <p:txBody>
+          <a:bodyPr/>
+          <a:p/>
+        </p:txBody>
       </p:sp>
       <p:sp>
         <p:nvSpPr>
@@ -11585,6 +11774,10 @@
             </a:outerShdw>
           </a:effectLst>
         </p:spPr>
+        <p:txBody>
+          <a:bodyPr/>
+          <a:p/>
+        </p:txBody>
       </p:sp>
       <p:sp>
         <p:nvSpPr>
@@ -11726,6 +11919,10 @@
             </a:outerShdw>
           </a:effectLst>
         </p:spPr>
+        <p:txBody>
+          <a:bodyPr/>
+          <a:p/>
+        </p:txBody>
       </p:sp>
       <p:sp>
         <p:nvSpPr>
@@ -11867,6 +12064,10 @@
             </a:outerShdw>
           </a:effectLst>
         </p:spPr>
+        <p:txBody>
+          <a:bodyPr/>
+          <a:p/>
+        </p:txBody>
       </p:sp>
       <p:sp>
         <p:nvSpPr>
@@ -12008,6 +12209,10 @@
             </a:outerShdw>
           </a:effectLst>
         </p:spPr>
+        <p:txBody>
+          <a:bodyPr/>
+          <a:p/>
+        </p:txBody>
       </p:sp>
       <p:sp>
         <p:nvSpPr>
@@ -12149,6 +12354,10 @@
             </a:outerShdw>
           </a:effectLst>
         </p:spPr>
+        <p:txBody>
+          <a:bodyPr/>
+          <a:p/>
+        </p:txBody>
       </p:sp>
       <p:sp>
         <p:nvSpPr>
@@ -12290,6 +12499,10 @@
             </a:outerShdw>
           </a:effectLst>
         </p:spPr>
+        <p:txBody>
+          <a:bodyPr/>
+          <a:p/>
+        </p:txBody>
       </p:sp>
       <p:sp>
         <p:nvSpPr>
@@ -12431,6 +12644,10 @@
             </a:outerShdw>
           </a:effectLst>
         </p:spPr>
+        <p:txBody>
+          <a:bodyPr/>
+          <a:p/>
+        </p:txBody>
       </p:sp>
       <p:sp>
         <p:nvSpPr>
@@ -12672,6 +12889,10 @@
           </a:solidFill>
           <a:ln/>
         </p:spPr>
+        <p:txBody>
+          <a:bodyPr/>
+          <a:p/>
+        </p:txBody>
       </p:sp>
       <p:sp>
         <p:nvSpPr>
@@ -12735,6 +12956,10 @@
             </a:outerShdw>
           </a:effectLst>
         </p:spPr>
+        <p:txBody>
+          <a:bodyPr/>
+          <a:p/>
+        </p:txBody>
       </p:sp>
       <p:sp>
         <p:nvSpPr>
@@ -13186,6 +13411,10 @@
             </a:outerShdw>
           </a:effectLst>
         </p:spPr>
+        <p:txBody>
+          <a:bodyPr/>
+          <a:p/>
+        </p:txBody>
       </p:sp>
       <p:sp>
         <p:nvSpPr>
@@ -13206,6 +13435,10 @@
           </a:solidFill>
           <a:ln/>
         </p:spPr>
+        <p:txBody>
+          <a:bodyPr/>
+          <a:p/>
+        </p:txBody>
       </p:sp>
       <p:sp>
         <p:nvSpPr>
@@ -13322,6 +13555,10 @@
             </a:outerShdw>
           </a:effectLst>
         </p:spPr>
+        <p:txBody>
+          <a:bodyPr/>
+          <a:p/>
+        </p:txBody>
       </p:sp>
       <p:sp>
         <p:nvSpPr>
@@ -13342,6 +13579,10 @@
           </a:solidFill>
           <a:ln/>
         </p:spPr>
+        <p:txBody>
+          <a:bodyPr/>
+          <a:p/>
+        </p:txBody>
       </p:sp>
       <p:sp>
         <p:nvSpPr>
@@ -13458,6 +13699,10 @@
             </a:outerShdw>
           </a:effectLst>
         </p:spPr>
+        <p:txBody>
+          <a:bodyPr/>
+          <a:p/>
+        </p:txBody>
       </p:sp>
       <p:sp>
         <p:nvSpPr>
@@ -13478,6 +13723,10 @@
           </a:solidFill>
           <a:ln/>
         </p:spPr>
+        <p:txBody>
+          <a:bodyPr/>
+          <a:p/>
+        </p:txBody>
       </p:sp>
       <p:sp>
         <p:nvSpPr>
@@ -13594,6 +13843,10 @@
             </a:outerShdw>
           </a:effectLst>
         </p:spPr>
+        <p:txBody>
+          <a:bodyPr/>
+          <a:p/>
+        </p:txBody>
       </p:sp>
       <p:sp>
         <p:nvSpPr>
@@ -13685,6 +13938,10 @@
           </a:solidFill>
           <a:ln/>
         </p:spPr>
+        <p:txBody>
+          <a:bodyPr/>
+          <a:p/>
+        </p:txBody>
       </p:sp>
       <p:sp>
         <p:nvSpPr>
@@ -13887,6 +14144,10 @@
           </a:solidFill>
           <a:ln/>
         </p:spPr>
+        <p:txBody>
+          <a:bodyPr/>
+          <a:p/>
+        </p:txBody>
       </p:sp>
       <p:sp>
         <p:nvSpPr>
@@ -13950,6 +14211,10 @@
             </a:outerShdw>
           </a:effectLst>
         </p:spPr>
+        <p:txBody>
+          <a:bodyPr/>
+          <a:p/>
+        </p:txBody>
       </p:sp>
       <p:sp>
         <p:nvSpPr>
@@ -14052,6 +14317,10 @@
             </a:outerShdw>
           </a:effectLst>
         </p:spPr>
+        <p:txBody>
+          <a:bodyPr/>
+          <a:p/>
+        </p:txBody>
       </p:sp>
       <p:sp>
         <p:nvSpPr>
@@ -14154,6 +14423,10 @@
             </a:outerShdw>
           </a:effectLst>
         </p:spPr>
+        <p:txBody>
+          <a:bodyPr/>
+          <a:p/>
+        </p:txBody>
       </p:sp>
       <p:sp>
         <p:nvSpPr>
@@ -14256,6 +14529,10 @@
             </a:outerShdw>
           </a:effectLst>
         </p:spPr>
+        <p:txBody>
+          <a:bodyPr/>
+          <a:p/>
+        </p:txBody>
       </p:sp>
       <p:sp>
         <p:nvSpPr>
@@ -14358,6 +14635,10 @@
             </a:outerShdw>
           </a:effectLst>
         </p:spPr>
+        <p:txBody>
+          <a:bodyPr/>
+          <a:p/>
+        </p:txBody>
       </p:sp>
       <p:sp>
         <p:nvSpPr>
@@ -14460,6 +14741,10 @@
             </a:outerShdw>
           </a:effectLst>
         </p:spPr>
+        <p:txBody>
+          <a:bodyPr/>
+          <a:p/>
+        </p:txBody>
       </p:sp>
       <p:sp>
         <p:nvSpPr>
@@ -14562,6 +14847,10 @@
             </a:outerShdw>
           </a:effectLst>
         </p:spPr>
+        <p:txBody>
+          <a:bodyPr/>
+          <a:p/>
+        </p:txBody>
       </p:sp>
       <p:sp>
         <p:nvSpPr>
@@ -14689,6 +14978,10 @@
           </a:solidFill>
           <a:ln/>
         </p:spPr>
+        <p:txBody>
+          <a:bodyPr/>
+          <a:p/>
+        </p:txBody>
       </p:sp>
       <p:sp>
         <p:nvSpPr>
@@ -14768,6 +15061,10 @@
             </a:outerShdw>
           </a:effectLst>
         </p:spPr>
+        <p:txBody>
+          <a:bodyPr/>
+          <a:p/>
+        </p:txBody>
       </p:sp>
       <p:sp>
         <p:nvSpPr>
@@ -15130,6 +15427,10 @@
           </a:solidFill>
           <a:ln/>
         </p:spPr>
+        <p:txBody>
+          <a:bodyPr/>
+          <a:p/>
+        </p:txBody>
       </p:sp>
       <p:sp>
         <p:nvSpPr>
@@ -15193,6 +15494,10 @@
             </a:outerShdw>
           </a:effectLst>
         </p:spPr>
+        <p:txBody>
+          <a:bodyPr/>
+          <a:p/>
+        </p:txBody>
       </p:sp>
       <p:sp>
         <p:nvSpPr>
@@ -15215,6 +15520,10 @@
           </a:solidFill>
           <a:ln/>
         </p:spPr>
+        <p:txBody>
+          <a:bodyPr/>
+          <a:p/>
+        </p:txBody>
       </p:sp>
       <p:sp>
         <p:nvSpPr>
@@ -15317,6 +15626,10 @@
             </a:outerShdw>
           </a:effectLst>
         </p:spPr>
+        <p:txBody>
+          <a:bodyPr/>
+          <a:p/>
+        </p:txBody>
       </p:sp>
       <p:sp>
         <p:nvSpPr>
@@ -15339,6 +15652,10 @@
           </a:solidFill>
           <a:ln/>
         </p:spPr>
+        <p:txBody>
+          <a:bodyPr/>
+          <a:p/>
+        </p:txBody>
       </p:sp>
       <p:sp>
         <p:nvSpPr>
@@ -15441,6 +15758,10 @@
             </a:outerShdw>
           </a:effectLst>
         </p:spPr>
+        <p:txBody>
+          <a:bodyPr/>
+          <a:p/>
+        </p:txBody>
       </p:sp>
       <p:sp>
         <p:nvSpPr>
@@ -15463,6 +15784,10 @@
           </a:solidFill>
           <a:ln/>
         </p:spPr>
+        <p:txBody>
+          <a:bodyPr/>
+          <a:p/>
+        </p:txBody>
       </p:sp>
       <p:sp>
         <p:nvSpPr>
@@ -15565,6 +15890,10 @@
             </a:outerShdw>
           </a:effectLst>
         </p:spPr>
+        <p:txBody>
+          <a:bodyPr/>
+          <a:p/>
+        </p:txBody>
       </p:sp>
       <p:sp>
         <p:nvSpPr>
@@ -15628,6 +15957,10 @@
             </a:outerShdw>
           </a:effectLst>
         </p:spPr>
+        <p:txBody>
+          <a:bodyPr/>
+          <a:p/>
+        </p:txBody>
       </p:sp>
       <p:sp>
         <p:nvSpPr>
@@ -15648,6 +15981,10 @@
           </a:solidFill>
           <a:ln/>
         </p:spPr>
+        <p:txBody>
+          <a:bodyPr/>
+          <a:p/>
+        </p:txBody>
       </p:sp>
       <p:sp>
         <p:nvSpPr>
@@ -15764,6 +16101,10 @@
             </a:outerShdw>
           </a:effectLst>
         </p:spPr>
+        <p:txBody>
+          <a:bodyPr/>
+          <a:p/>
+        </p:txBody>
       </p:sp>
       <p:sp>
         <p:nvSpPr>
@@ -15784,6 +16125,10 @@
           </a:solidFill>
           <a:ln/>
         </p:spPr>
+        <p:txBody>
+          <a:bodyPr/>
+          <a:p/>
+        </p:txBody>
       </p:sp>
       <p:sp>
         <p:nvSpPr>
@@ -15900,6 +16245,10 @@
             </a:outerShdw>
           </a:effectLst>
         </p:spPr>
+        <p:txBody>
+          <a:bodyPr/>
+          <a:p/>
+        </p:txBody>
       </p:sp>
       <p:sp>
         <p:nvSpPr>
@@ -15920,6 +16269,10 @@
           </a:solidFill>
           <a:ln/>
         </p:spPr>
+        <p:txBody>
+          <a:bodyPr/>
+          <a:p/>
+        </p:txBody>
       </p:sp>
       <p:sp>
         <p:nvSpPr>
@@ -16036,6 +16389,10 @@
             </a:outerShdw>
           </a:effectLst>
         </p:spPr>
+        <p:txBody>
+          <a:bodyPr/>
+          <a:p/>
+        </p:txBody>
       </p:sp>
       <p:sp>
         <p:nvSpPr>
@@ -16056,6 +16413,10 @@
           </a:solidFill>
           <a:ln/>
         </p:spPr>
+        <p:txBody>
+          <a:bodyPr/>
+          <a:p/>
+        </p:txBody>
       </p:sp>
       <p:sp>
         <p:nvSpPr>
@@ -16236,6 +16597,10 @@
           </a:solidFill>
           <a:ln/>
         </p:spPr>
+        <p:txBody>
+          <a:bodyPr/>
+          <a:p/>
+        </p:txBody>
       </p:sp>
       <p:sp>
         <p:nvSpPr>
@@ -16387,6 +16752,10 @@
           </a:solidFill>
           <a:ln/>
         </p:spPr>
+        <p:txBody>
+          <a:bodyPr/>
+          <a:p/>
+        </p:txBody>
       </p:sp>
       <p:sp>
         <p:nvSpPr>
@@ -16562,6 +16931,10 @@
           </a:solidFill>
           <a:ln/>
         </p:spPr>
+        <p:txBody>
+          <a:bodyPr/>
+          <a:p/>
+        </p:txBody>
       </p:sp>
       <p:sp>
         <p:nvSpPr>
@@ -16684,6 +17057,10 @@
             </a:outerShdw>
           </a:effectLst>
         </p:spPr>
+        <p:txBody>
+          <a:bodyPr/>
+          <a:p/>
+        </p:txBody>
       </p:sp>
       <p:sp>
         <p:nvSpPr>
@@ -16811,6 +17188,10 @@
           </a:solidFill>
           <a:ln/>
         </p:spPr>
+        <p:txBody>
+          <a:bodyPr/>
+          <a:p/>
+        </p:txBody>
       </p:sp>
       <p:sp>
         <p:nvSpPr>
@@ -17013,6 +17394,10 @@
           </a:solidFill>
           <a:ln/>
         </p:spPr>
+        <p:txBody>
+          <a:bodyPr/>
+          <a:p/>
+        </p:txBody>
       </p:sp>
       <p:sp>
         <p:nvSpPr>
@@ -17076,6 +17461,10 @@
             </a:outerShdw>
           </a:effectLst>
         </p:spPr>
+        <p:txBody>
+          <a:bodyPr/>
+          <a:p/>
+        </p:txBody>
       </p:sp>
       <p:sp>
         <p:nvSpPr>
@@ -17178,6 +17567,10 @@
             </a:outerShdw>
           </a:effectLst>
         </p:spPr>
+        <p:txBody>
+          <a:bodyPr/>
+          <a:p/>
+        </p:txBody>
       </p:sp>
       <p:sp>
         <p:nvSpPr>
@@ -17280,6 +17673,10 @@
             </a:outerShdw>
           </a:effectLst>
         </p:spPr>
+        <p:txBody>
+          <a:bodyPr/>
+          <a:p/>
+        </p:txBody>
       </p:sp>
       <p:sp>
         <p:nvSpPr>
@@ -17382,6 +17779,10 @@
             </a:outerShdw>
           </a:effectLst>
         </p:spPr>
+        <p:txBody>
+          <a:bodyPr/>
+          <a:p/>
+        </p:txBody>
       </p:sp>
       <p:sp>
         <p:nvSpPr>
@@ -17484,6 +17885,10 @@
             </a:outerShdw>
           </a:effectLst>
         </p:spPr>
+        <p:txBody>
+          <a:bodyPr/>
+          <a:p/>
+        </p:txBody>
       </p:sp>
       <p:sp>
         <p:nvSpPr>
@@ -17586,6 +17991,10 @@
             </a:outerShdw>
           </a:effectLst>
         </p:spPr>
+        <p:txBody>
+          <a:bodyPr/>
+          <a:p/>
+        </p:txBody>
       </p:sp>
       <p:sp>
         <p:nvSpPr>
@@ -17688,6 +18097,10 @@
             </a:outerShdw>
           </a:effectLst>
         </p:spPr>
+        <p:txBody>
+          <a:bodyPr/>
+          <a:p/>
+        </p:txBody>
       </p:sp>
       <p:sp>
         <p:nvSpPr>
@@ -17722,7 +18135,7 @@
                 <a:ea typeface="Arial" pitchFamily="34" charset="-122"/>
                 <a:cs typeface="Arial" pitchFamily="34" charset="-120"/>
               </a:rPr>
-              <a:t>⑦全链路状态追踪</a:t>
+              <a:t>⑦骑手类型校验与状态自动化 ─ 数据库6触发器全自动管理Idle/Delivering状态，杜绝跨类型误派</a:t>
             </a:r>
             <a:endParaRPr lang="en-US" sz="1300" dirty="0"/>
           </a:p>
@@ -17758,7 +18171,7 @@
                   <a:srgbClr val="64748B"/>
                 </a:solidFill>
               </a:rPr>
-              <a:t>t_order_tracking每步可追溯</a:t>
+              <a:t>orders(order_status)每步可追溯</a:t>
             </a:r>
             <a:endParaRPr lang="en-US" sz="1100" dirty="0"/>
           </a:p>
@@ -17815,6 +18228,10 @@
           </a:solidFill>
           <a:ln/>
         </p:spPr>
+        <p:txBody>
+          <a:bodyPr/>
+          <a:p/>
+        </p:txBody>
       </p:sp>
       <p:sp>
         <p:nvSpPr>
@@ -18017,6 +18434,10 @@
           </a:solidFill>
           <a:ln/>
         </p:spPr>
+        <p:txBody>
+          <a:bodyPr/>
+          <a:p/>
+        </p:txBody>
       </p:sp>
       <p:sp>
         <p:nvSpPr>
@@ -18080,6 +18501,10 @@
             </a:outerShdw>
           </a:effectLst>
         </p:spPr>
+        <p:txBody>
+          <a:bodyPr/>
+          <a:p/>
+        </p:txBody>
       </p:sp>
       <p:sp>
         <p:nvSpPr>
@@ -18100,6 +18525,10 @@
           </a:solidFill>
           <a:ln/>
         </p:spPr>
+        <p:txBody>
+          <a:bodyPr/>
+          <a:p/>
+        </p:txBody>
       </p:sp>
       <p:sp>
         <p:nvSpPr>
@@ -18170,7 +18599,7 @@
                   <a:srgbClr val="64748B"/>
                 </a:solidFill>
               </a:rPr>
-              <a:t>7表·3NF·4存储过程·3视图</a:t>
+              <a:t>7表·3NF·6触发器·4存储过程·2视图</a:t>
             </a:r>
             <a:endParaRPr lang="en-US" sz="1100" dirty="0"/>
           </a:p>
@@ -18202,6 +18631,10 @@
             </a:outerShdw>
           </a:effectLst>
         </p:spPr>
+        <p:txBody>
+          <a:bodyPr/>
+          <a:p/>
+        </p:txBody>
       </p:sp>
       <p:sp>
         <p:nvSpPr>
@@ -18222,6 +18655,10 @@
           </a:solidFill>
           <a:ln/>
         </p:spPr>
+        <p:txBody>
+          <a:bodyPr/>
+          <a:p/>
+        </p:txBody>
       </p:sp>
       <p:sp>
         <p:nvSpPr>
@@ -18324,6 +18761,10 @@
             </a:outerShdw>
           </a:effectLst>
         </p:spPr>
+        <p:txBody>
+          <a:bodyPr/>
+          <a:p/>
+        </p:txBody>
       </p:sp>
       <p:sp>
         <p:nvSpPr>
@@ -18344,6 +18785,10 @@
           </a:solidFill>
           <a:ln/>
         </p:spPr>
+        <p:txBody>
+          <a:bodyPr/>
+          <a:p/>
+        </p:txBody>
       </p:sp>
       <p:sp>
         <p:nvSpPr>
@@ -18446,6 +18891,10 @@
             </a:outerShdw>
           </a:effectLst>
         </p:spPr>
+        <p:txBody>
+          <a:bodyPr/>
+          <a:p/>
+        </p:txBody>
       </p:sp>
       <p:sp>
         <p:nvSpPr>
@@ -18466,6 +18915,10 @@
           </a:solidFill>
           <a:ln/>
         </p:spPr>
+        <p:txBody>
+          <a:bodyPr/>
+          <a:p/>
+        </p:txBody>
       </p:sp>
       <p:sp>
         <p:nvSpPr>
@@ -18568,6 +19021,10 @@
             </a:outerShdw>
           </a:effectLst>
         </p:spPr>
+        <p:txBody>
+          <a:bodyPr/>
+          <a:p/>
+        </p:txBody>
       </p:sp>
       <p:sp>
         <p:nvSpPr>
@@ -18588,6 +19045,10 @@
           </a:solidFill>
           <a:ln/>
         </p:spPr>
+        <p:txBody>
+          <a:bodyPr/>
+          <a:p/>
+        </p:txBody>
       </p:sp>
       <p:sp>
         <p:nvSpPr>
@@ -18690,6 +19151,10 @@
             </a:outerShdw>
           </a:effectLst>
         </p:spPr>
+        <p:txBody>
+          <a:bodyPr/>
+          <a:p/>
+        </p:txBody>
       </p:sp>
       <p:sp>
         <p:nvSpPr>
@@ -18710,6 +19175,10 @@
           </a:solidFill>
           <a:ln/>
         </p:spPr>
+        <p:txBody>
+          <a:bodyPr/>
+          <a:p/>
+        </p:txBody>
       </p:sp>
       <p:sp>
         <p:nvSpPr>
@@ -18876,6 +19345,10 @@
           </a:solidFill>
           <a:ln/>
         </p:spPr>
+        <p:txBody>
+          <a:bodyPr/>
+          <a:p/>
+        </p:txBody>
       </p:sp>
       <p:sp>
         <p:nvSpPr>
@@ -18939,6 +19412,10 @@
             </a:outerShdw>
           </a:effectLst>
         </p:spPr>
+        <p:txBody>
+          <a:bodyPr/>
+          <a:p/>
+        </p:txBody>
       </p:sp>
       <p:sp>
         <p:nvSpPr>
@@ -18959,6 +19436,10 @@
           </a:solidFill>
           <a:ln/>
         </p:spPr>
+        <p:txBody>
+          <a:bodyPr/>
+          <a:p/>
+        </p:txBody>
       </p:sp>
       <p:sp>
         <p:nvSpPr>
@@ -19111,6 +19592,10 @@
             </a:outerShdw>
           </a:effectLst>
         </p:spPr>
+        <p:txBody>
+          <a:bodyPr/>
+          <a:p/>
+        </p:txBody>
       </p:sp>
       <p:sp>
         <p:nvSpPr>
@@ -19131,6 +19616,10 @@
           </a:solidFill>
           <a:ln/>
         </p:spPr>
+        <p:txBody>
+          <a:bodyPr/>
+          <a:p/>
+        </p:txBody>
       </p:sp>
       <p:sp>
         <p:nvSpPr>
@@ -19208,6 +19697,10 @@
             </a:outerShdw>
           </a:effectLst>
         </p:spPr>
+        <p:txBody>
+          <a:bodyPr/>
+          <a:p/>
+        </p:txBody>
       </p:sp>
       <p:sp>
         <p:nvSpPr>
@@ -19228,6 +19721,10 @@
           </a:solidFill>
           <a:ln/>
         </p:spPr>
+        <p:txBody>
+          <a:bodyPr/>
+          <a:p/>
+        </p:txBody>
       </p:sp>
       <p:sp>
         <p:nvSpPr>
@@ -19380,6 +19877,10 @@
             </a:outerShdw>
           </a:effectLst>
         </p:spPr>
+        <p:txBody>
+          <a:bodyPr/>
+          <a:p/>
+        </p:txBody>
       </p:sp>
       <p:sp>
         <p:nvSpPr>
@@ -19400,6 +19901,10 @@
           </a:solidFill>
           <a:ln/>
         </p:spPr>
+        <p:txBody>
+          <a:bodyPr/>
+          <a:p/>
+        </p:txBody>
       </p:sp>
       <p:sp>
         <p:nvSpPr>
@@ -19477,6 +19982,10 @@
             </a:outerShdw>
           </a:effectLst>
         </p:spPr>
+        <p:txBody>
+          <a:bodyPr/>
+          <a:p/>
+        </p:txBody>
       </p:sp>
       <p:sp>
         <p:nvSpPr>
@@ -19497,6 +20006,10 @@
           </a:solidFill>
           <a:ln/>
         </p:spPr>
+        <p:txBody>
+          <a:bodyPr/>
+          <a:p/>
+        </p:txBody>
       </p:sp>
       <p:sp>
         <p:nvSpPr>
@@ -19649,6 +20162,10 @@
             </a:outerShdw>
           </a:effectLst>
         </p:spPr>
+        <p:txBody>
+          <a:bodyPr/>
+          <a:p/>
+        </p:txBody>
       </p:sp>
       <p:sp>
         <p:nvSpPr>
@@ -19669,6 +20186,10 @@
           </a:solidFill>
           <a:ln/>
         </p:spPr>
+        <p:txBody>
+          <a:bodyPr/>
+          <a:p/>
+        </p:txBody>
       </p:sp>
       <p:sp>
         <p:nvSpPr>
@@ -19746,6 +20267,10 @@
             </a:outerShdw>
           </a:effectLst>
         </p:spPr>
+        <p:txBody>
+          <a:bodyPr/>
+          <a:p/>
+        </p:txBody>
       </p:sp>
       <p:sp>
         <p:nvSpPr>
@@ -19766,6 +20291,10 @@
           </a:solidFill>
           <a:ln/>
         </p:spPr>
+        <p:txBody>
+          <a:bodyPr/>
+          <a:p/>
+        </p:txBody>
       </p:sp>
       <p:sp>
         <p:nvSpPr>
@@ -19918,6 +20447,10 @@
             </a:outerShdw>
           </a:effectLst>
         </p:spPr>
+        <p:txBody>
+          <a:bodyPr/>
+          <a:p/>
+        </p:txBody>
       </p:sp>
       <p:sp>
         <p:nvSpPr>
@@ -19938,6 +20471,10 @@
           </a:solidFill>
           <a:ln/>
         </p:spPr>
+        <p:txBody>
+          <a:bodyPr/>
+          <a:p/>
+        </p:txBody>
       </p:sp>
       <p:sp>
         <p:nvSpPr>
@@ -20079,6 +20616,10 @@
           </a:solidFill>
           <a:ln/>
         </p:spPr>
+        <p:txBody>
+          <a:bodyPr/>
+          <a:p/>
+        </p:txBody>
       </p:sp>
       <p:sp>
         <p:nvSpPr>
@@ -20142,6 +20683,10 @@
             </a:outerShdw>
           </a:effectLst>
         </p:spPr>
+        <p:txBody>
+          <a:bodyPr/>
+          <a:p/>
+        </p:txBody>
       </p:sp>
       <p:sp>
         <p:nvSpPr>
@@ -20162,6 +20707,10 @@
           </a:solidFill>
           <a:ln/>
         </p:spPr>
+        <p:txBody>
+          <a:bodyPr/>
+          <a:p/>
+        </p:txBody>
       </p:sp>
       <p:sp>
         <p:nvSpPr>
@@ -20278,6 +20827,10 @@
             </a:outerShdw>
           </a:effectLst>
         </p:spPr>
+        <p:txBody>
+          <a:bodyPr/>
+          <a:p/>
+        </p:txBody>
       </p:sp>
       <p:sp>
         <p:nvSpPr>
@@ -20298,6 +20851,10 @@
           </a:solidFill>
           <a:ln/>
         </p:spPr>
+        <p:txBody>
+          <a:bodyPr/>
+          <a:p/>
+        </p:txBody>
       </p:sp>
       <p:sp>
         <p:nvSpPr>
@@ -20414,6 +20971,10 @@
             </a:outerShdw>
           </a:effectLst>
         </p:spPr>
+        <p:txBody>
+          <a:bodyPr/>
+          <a:p/>
+        </p:txBody>
       </p:sp>
       <p:sp>
         <p:nvSpPr>
@@ -20434,6 +20995,10 @@
           </a:solidFill>
           <a:ln/>
         </p:spPr>
+        <p:txBody>
+          <a:bodyPr/>
+          <a:p/>
+        </p:txBody>
       </p:sp>
       <p:sp>
         <p:nvSpPr>
@@ -20550,6 +21115,10 @@
             </a:outerShdw>
           </a:effectLst>
         </p:spPr>
+        <p:txBody>
+          <a:bodyPr/>
+          <a:p/>
+        </p:txBody>
       </p:sp>
       <p:sp>
         <p:nvSpPr>
@@ -20570,6 +21139,10 @@
           </a:solidFill>
           <a:ln/>
         </p:spPr>
+        <p:txBody>
+          <a:bodyPr/>
+          <a:p/>
+        </p:txBody>
       </p:sp>
       <p:sp>
         <p:nvSpPr>
@@ -20682,6 +21255,10 @@
             <a:prstDash val="solid"/>
           </a:ln>
         </p:spPr>
+        <p:txBody>
+          <a:bodyPr/>
+          <a:p/>
+        </p:txBody>
       </p:sp>
       <p:sp>
         <p:nvSpPr>
@@ -20702,6 +21279,10 @@
           </a:solidFill>
           <a:ln/>
         </p:spPr>
+        <p:txBody>
+          <a:bodyPr/>
+          <a:p/>
+        </p:txBody>
       </p:sp>
       <p:sp>
         <p:nvSpPr>
@@ -20772,6 +21353,10 @@
           </a:solidFill>
           <a:ln/>
         </p:spPr>
+        <p:txBody>
+          <a:bodyPr/>
+          <a:p/>
+        </p:txBody>
       </p:sp>
       <p:sp>
         <p:nvSpPr>
@@ -20842,6 +21427,10 @@
           </a:solidFill>
           <a:ln/>
         </p:spPr>
+        <p:txBody>
+          <a:bodyPr/>
+          <a:p/>
+        </p:txBody>
       </p:sp>
       <p:sp>
         <p:nvSpPr>
@@ -20912,6 +21501,10 @@
           </a:solidFill>
           <a:ln/>
         </p:spPr>
+        <p:txBody>
+          <a:bodyPr/>
+          <a:p/>
+        </p:txBody>
       </p:sp>
       <p:sp>
         <p:nvSpPr>
@@ -21014,6 +21607,10 @@
           </a:solidFill>
           <a:ln/>
         </p:spPr>
+        <p:txBody>
+          <a:bodyPr/>
+          <a:p/>
+        </p:txBody>
       </p:sp>
       <p:sp>
         <p:nvSpPr>
@@ -21109,6 +21706,10 @@
           </a:solidFill>
           <a:ln/>
         </p:spPr>
+        <p:txBody>
+          <a:bodyPr/>
+          <a:p/>
+        </p:txBody>
       </p:sp>
       <p:sp>
         <p:nvSpPr>
@@ -21140,7 +21741,7 @@
                   <a:srgbClr val="94A3B8"/>
                 </a:solidFill>
               </a:rPr>
-              <a:t>数据库系统课程项目 | 2026年5月</a:t>
+              <a:t>2026年6月</a:t>
             </a:r>
             <a:endParaRPr lang="en-US" sz="1200" dirty="0"/>
           </a:p>
@@ -21272,6 +21873,10 @@
           </a:solidFill>
           <a:ln/>
         </p:spPr>
+        <p:txBody>
+          <a:bodyPr/>
+          <a:p/>
+        </p:txBody>
       </p:sp>
       <p:sp>
         <p:nvSpPr>
@@ -21335,6 +21940,10 @@
             </a:outerShdw>
           </a:effectLst>
         </p:spPr>
+        <p:txBody>
+          <a:bodyPr/>
+          <a:p/>
+        </p:txBody>
       </p:sp>
       <p:sp>
         <p:nvSpPr>
@@ -21473,6 +22082,10 @@
             </a:outerShdw>
           </a:effectLst>
         </p:spPr>
+        <p:txBody>
+          <a:bodyPr/>
+          <a:p/>
+        </p:txBody>
       </p:sp>
       <p:sp>
         <p:nvSpPr>
@@ -21611,6 +22224,10 @@
             </a:outerShdw>
           </a:effectLst>
         </p:spPr>
+        <p:txBody>
+          <a:bodyPr/>
+          <a:p/>
+        </p:txBody>
       </p:sp>
       <p:sp>
         <p:nvSpPr>
@@ -21749,6 +22366,10 @@
             </a:outerShdw>
           </a:effectLst>
         </p:spPr>
+        <p:txBody>
+          <a:bodyPr/>
+          <a:p/>
+        </p:txBody>
       </p:sp>
       <p:sp>
         <p:nvSpPr>
@@ -21903,6 +22524,10 @@
             </a:outerShdw>
           </a:effectLst>
         </p:spPr>
+        <p:txBody>
+          <a:bodyPr/>
+          <a:p/>
+        </p:txBody>
       </p:sp>
       <p:sp>
         <p:nvSpPr>
@@ -22126,6 +22751,10 @@
           </a:solidFill>
           <a:ln/>
         </p:spPr>
+        <p:txBody>
+          <a:bodyPr/>
+          <a:p/>
+        </p:txBody>
       </p:sp>
       <p:sp>
         <p:nvSpPr>
@@ -22189,6 +22818,10 @@
             </a:outerShdw>
           </a:effectLst>
         </p:spPr>
+        <p:txBody>
+          <a:bodyPr/>
+          <a:p/>
+        </p:txBody>
       </p:sp>
       <p:sp>
         <p:nvSpPr>
@@ -22211,6 +22844,10 @@
           </a:solidFill>
           <a:ln/>
         </p:spPr>
+        <p:txBody>
+          <a:bodyPr/>
+          <a:p/>
+        </p:txBody>
       </p:sp>
       <p:sp>
         <p:nvSpPr>
@@ -22380,6 +23017,10 @@
             </a:outerShdw>
           </a:effectLst>
         </p:spPr>
+        <p:txBody>
+          <a:bodyPr/>
+          <a:p/>
+        </p:txBody>
       </p:sp>
       <p:sp>
         <p:nvSpPr>
@@ -22402,6 +23043,10 @@
           </a:solidFill>
           <a:ln/>
         </p:spPr>
+        <p:txBody>
+          <a:bodyPr/>
+          <a:p/>
+        </p:txBody>
       </p:sp>
       <p:sp>
         <p:nvSpPr>
@@ -22571,6 +23216,10 @@
             </a:outerShdw>
           </a:effectLst>
         </p:spPr>
+        <p:txBody>
+          <a:bodyPr/>
+          <a:p/>
+        </p:txBody>
       </p:sp>
       <p:sp>
         <p:nvSpPr>
@@ -22593,6 +23242,10 @@
           </a:solidFill>
           <a:ln/>
         </p:spPr>
+        <p:txBody>
+          <a:bodyPr/>
+          <a:p/>
+        </p:txBody>
       </p:sp>
       <p:sp>
         <p:nvSpPr>
@@ -22826,6 +23479,10 @@
           </a:solidFill>
           <a:ln/>
         </p:spPr>
+        <p:txBody>
+          <a:bodyPr/>
+          <a:p/>
+        </p:txBody>
       </p:sp>
       <p:sp>
         <p:nvSpPr>
@@ -22889,6 +23546,10 @@
             </a:outerShdw>
           </a:effectLst>
         </p:spPr>
+        <p:txBody>
+          <a:bodyPr/>
+          <a:p/>
+        </p:txBody>
       </p:sp>
       <p:sp>
         <p:nvSpPr>
@@ -23011,6 +23672,10 @@
             </a:outerShdw>
           </a:effectLst>
         </p:spPr>
+        <p:txBody>
+          <a:bodyPr/>
+          <a:p/>
+        </p:txBody>
       </p:sp>
       <p:sp>
         <p:nvSpPr>
@@ -23133,6 +23798,10 @@
             </a:outerShdw>
           </a:effectLst>
         </p:spPr>
+        <p:txBody>
+          <a:bodyPr/>
+          <a:p/>
+        </p:txBody>
       </p:sp>
       <p:sp>
         <p:nvSpPr>
@@ -23255,6 +23924,10 @@
             </a:outerShdw>
           </a:effectLst>
         </p:spPr>
+        <p:txBody>
+          <a:bodyPr/>
+          <a:p/>
+        </p:txBody>
       </p:sp>
       <p:sp>
         <p:nvSpPr>
@@ -23377,6 +24050,10 @@
             </a:outerShdw>
           </a:effectLst>
         </p:spPr>
+        <p:txBody>
+          <a:bodyPr/>
+          <a:p/>
+        </p:txBody>
       </p:sp>
       <p:sp>
         <p:nvSpPr>
@@ -23455,6 +24132,10 @@
           </a:solidFill>
           <a:ln/>
         </p:spPr>
+        <p:txBody>
+          <a:bodyPr/>
+          <a:p/>
+        </p:txBody>
       </p:sp>
       <p:sp>
         <p:nvSpPr>
@@ -23516,6 +24197,10 @@
           </a:solidFill>
           <a:ln/>
         </p:spPr>
+        <p:txBody>
+          <a:bodyPr/>
+          <a:p/>
+        </p:txBody>
       </p:sp>
       <p:sp>
         <p:nvSpPr>
@@ -23697,7 +24382,8 @@
                   <a:srgbClr val="1E293B"/>
                 </a:solidFill>
               </a:rPr>
-              <a:t>▸ 全程可追溯：t_order_tracking 记录每一次状态变更</a:t>
+              <a:t>▸ 全程可追溯：orders(order_status)记录每一次状态变更
+▸ 骑手自动化：数据库触发器自动管理骑手Idle/Delivering状态，无须应用层干预</a:t>
             </a:r>
             <a:endParaRPr lang="en-US" sz="1100" dirty="0"/>
           </a:p>
@@ -23754,6 +24440,10 @@
           </a:solidFill>
           <a:ln/>
         </p:spPr>
+        <p:txBody>
+          <a:bodyPr/>
+          <a:p/>
+        </p:txBody>
       </p:sp>
       <p:sp>
         <p:nvSpPr>
@@ -23956,6 +24646,10 @@
           </a:solidFill>
           <a:ln/>
         </p:spPr>
+        <p:txBody>
+          <a:bodyPr/>
+          <a:p/>
+        </p:txBody>
       </p:sp>
       <p:sp>
         <p:nvSpPr>
@@ -24019,6 +24713,10 @@
             </a:outerShdw>
           </a:effectLst>
         </p:spPr>
+        <p:txBody>
+          <a:bodyPr/>
+          <a:p/>
+        </p:txBody>
       </p:sp>
       <p:sp>
         <p:nvSpPr>
@@ -24039,6 +24737,10 @@
           </a:solidFill>
           <a:ln/>
         </p:spPr>
+        <p:txBody>
+          <a:bodyPr/>
+          <a:p/>
+        </p:txBody>
       </p:sp>
       <p:sp>
         <p:nvSpPr>
@@ -24177,6 +24879,10 @@
             </a:outerShdw>
           </a:effectLst>
         </p:spPr>
+        <p:txBody>
+          <a:bodyPr/>
+          <a:p/>
+        </p:txBody>
       </p:sp>
       <p:sp>
         <p:nvSpPr>
@@ -24197,6 +24903,10 @@
           </a:solidFill>
           <a:ln/>
         </p:spPr>
+        <p:txBody>
+          <a:bodyPr/>
+          <a:p/>
+        </p:txBody>
       </p:sp>
       <p:sp>
         <p:nvSpPr>
@@ -24335,6 +25045,10 @@
             </a:outerShdw>
           </a:effectLst>
         </p:spPr>
+        <p:txBody>
+          <a:bodyPr/>
+          <a:p/>
+        </p:txBody>
       </p:sp>
       <p:sp>
         <p:nvSpPr>
@@ -24355,6 +25069,10 @@
           </a:solidFill>
           <a:ln/>
         </p:spPr>
+        <p:txBody>
+          <a:bodyPr/>
+          <a:p/>
+        </p:txBody>
       </p:sp>
       <p:sp>
         <p:nvSpPr>
@@ -24521,6 +25239,10 @@
           </a:solidFill>
           <a:ln/>
         </p:spPr>
+        <p:txBody>
+          <a:bodyPr/>
+          <a:p/>
+        </p:txBody>
       </p:sp>
       <p:sp>
         <p:nvSpPr>
@@ -24584,6 +25306,10 @@
             </a:outerShdw>
           </a:effectLst>
         </p:spPr>
+        <p:txBody>
+          <a:bodyPr/>
+          <a:p/>
+        </p:txBody>
       </p:sp>
       <p:sp>
         <p:nvSpPr>
@@ -24604,6 +25330,10 @@
           </a:solidFill>
           <a:ln/>
         </p:spPr>
+        <p:txBody>
+          <a:bodyPr/>
+          <a:p/>
+        </p:txBody>
       </p:sp>
       <p:sp>
         <p:nvSpPr>
@@ -24742,6 +25472,10 @@
             </a:outerShdw>
           </a:effectLst>
         </p:spPr>
+        <p:txBody>
+          <a:bodyPr/>
+          <a:p/>
+        </p:txBody>
       </p:sp>
       <p:sp>
         <p:nvSpPr>
@@ -24762,6 +25496,10 @@
           </a:solidFill>
           <a:ln/>
         </p:spPr>
+        <p:txBody>
+          <a:bodyPr/>
+          <a:p/>
+        </p:txBody>
       </p:sp>
       <p:sp>
         <p:nvSpPr>
@@ -24900,6 +25638,10 @@
             </a:outerShdw>
           </a:effectLst>
         </p:spPr>
+        <p:txBody>
+          <a:bodyPr/>
+          <a:p/>
+        </p:txBody>
       </p:sp>
       <p:sp>
         <p:nvSpPr>
@@ -24920,6 +25662,10 @@
           </a:solidFill>
           <a:ln/>
         </p:spPr>
+        <p:txBody>
+          <a:bodyPr/>
+          <a:p/>
+        </p:txBody>
       </p:sp>
       <p:sp>
         <p:nvSpPr>
@@ -25058,6 +25804,10 @@
             </a:outerShdw>
           </a:effectLst>
         </p:spPr>
+        <p:txBody>
+          <a:bodyPr/>
+          <a:p/>
+        </p:txBody>
       </p:sp>
       <p:sp>
         <p:nvSpPr>
@@ -25078,6 +25828,10 @@
           </a:solidFill>
           <a:ln/>
         </p:spPr>
+        <p:txBody>
+          <a:bodyPr/>
+          <a:p/>
+        </p:txBody>
       </p:sp>
       <p:sp>
         <p:nvSpPr>
@@ -25216,6 +25970,10 @@
             </a:outerShdw>
           </a:effectLst>
         </p:spPr>
+        <p:txBody>
+          <a:bodyPr/>
+          <a:p/>
+        </p:txBody>
       </p:sp>
       <p:sp>
         <p:nvSpPr>
@@ -25236,6 +25994,10 @@
           </a:solidFill>
           <a:ln/>
         </p:spPr>
+        <p:txBody>
+          <a:bodyPr/>
+          <a:p/>
+        </p:txBody>
       </p:sp>
       <p:sp>
         <p:nvSpPr>
@@ -25374,6 +26136,10 @@
             </a:outerShdw>
           </a:effectLst>
         </p:spPr>
+        <p:txBody>
+          <a:bodyPr/>
+          <a:p/>
+        </p:txBody>
       </p:sp>
       <p:sp>
         <p:nvSpPr>
@@ -25394,6 +26160,10 @@
           </a:solidFill>
           <a:ln/>
         </p:spPr>
+        <p:txBody>
+          <a:bodyPr/>
+          <a:p/>
+        </p:txBody>
       </p:sp>
       <p:sp>
         <p:nvSpPr>

--- a/校园外卖两段式配送系统_答辩汇报.pptx
+++ b/校园外卖两段式配送系统_答辩汇报.pptx
@@ -4,6 +4,9 @@
   <p:sldMasterIdLst>
     <p:sldMasterId id="2147483648" r:id="rId1"/>
   </p:sldMasterIdLst>
+  <p:notesMasterIdLst>
+    <p:notesMasterId r:id="rId35"/>
+  </p:notesMasterIdLst>
   <p:sldIdLst>
     <p:sldId id="256" r:id="rId2"/>
     <p:sldId id="257" r:id="rId3"/>
@@ -39,10 +42,7 @@
     <p:sldId id="287" r:id="rId33"/>
     <p:sldId id="288" r:id="rId34"/>
   </p:sldIdLst>
-  <p:notesMasterIdLst>
-    <p:notesMasterId r:id="rId35"/>
-  </p:notesMasterIdLst>
-  <p:sldSz cx="9144000" cy="5143500"/>
+  <p:sldSz cx="9144000" cy="5143500" type="screen16x9"/>
   <p:notesSz cx="5143500" cy="9144000"/>
   <p:defaultTextStyle>
     <a:lvl1pPr marL="0" algn="l" defTabSz="914400" rtl="0" eaLnBrk="1" latinLnBrk="0" hangingPunct="1">
@@ -136,13 +136,20 @@
       </a:defRPr>
     </a:lvl9pPr>
   </p:defaultTextStyle>
+  <p:extLst>
+    <p:ext uri="{EFAFB233-063F-42B5-8137-9DF3F51BA10A}">
+      <p15:sldGuideLst xmlns:p15="http://schemas.microsoft.com/office/powerpoint/2012/main"/>
+    </p:ext>
+  </p:extLst>
 </p:presentation>
 </file>
 
 <file path=ppt/charts/chart1.xml><?xml version="1.0" encoding="utf-8"?>
-<c:chartSpace xmlns:c="http://schemas.openxmlformats.org/drawingml/2006/chart" xmlns:a="http://schemas.openxmlformats.org/drawingml/2006/main" xmlns:r="http://schemas.openxmlformats.org/officeDocument/2006/relationships">
+<c:chartSpace xmlns:c="http://schemas.openxmlformats.org/drawingml/2006/chart" xmlns:a="http://schemas.openxmlformats.org/drawingml/2006/main" xmlns:r="http://schemas.openxmlformats.org/officeDocument/2006/relationships" xmlns:c16r2="http://schemas.microsoft.com/office/drawing/2015/06/chart">
   <c:date1904 val="0"/>
+  <c:lang val="zh-CN"/>
   <c:roundedCorners val="1"/>
+  <c:style val="2"/>
   <c:chart>
     <c:autoTitleDeleted val="1"/>
     <c:plotArea>
@@ -174,18 +181,26 @@
           <c:invertIfNegative val="0"/>
           <c:dLbls>
             <c:numFmt formatCode="#,##0" sourceLinked="0"/>
+            <c:spPr>
+              <a:noFill/>
+              <a:ln>
+                <a:noFill/>
+              </a:ln>
+              <a:effectLst/>
+            </c:spPr>
             <c:txPr>
               <a:bodyPr/>
               <a:lstStyle/>
               <a:p>
                 <a:pPr>
-                  <a:defRPr b="0" i="0" strike="noStrike" sz="1200" u="none">
+                  <a:defRPr sz="1200" b="0" i="0" u="none" strike="noStrike">
                     <a:solidFill>
                       <a:srgbClr val="1E293B"/>
                     </a:solidFill>
                     <a:latin typeface="Arial"/>
                   </a:defRPr>
                 </a:pPr>
+                <a:endParaRPr lang="zh-CN"/>
               </a:p>
             </c:txPr>
             <c:showLegendKey val="0"/>
@@ -195,28 +210,31 @@
             <c:showPercent val="0"/>
             <c:showBubbleSize val="0"/>
             <c:showLeaderLines val="0"/>
+            <c:extLst>
+              <c:ext xmlns:c15="http://schemas.microsoft.com/office/drawing/2012/chart" uri="{CE6537A1-D6FC-4f65-9D91-7224C49458BB}">
+                <c15:showLeaderLines val="0"/>
+              </c:ext>
+            </c:extLst>
           </c:dLbls>
           <c:cat>
-            <c:multiLvlStrRef>
+            <c:strRef>
               <c:f>Sheet1!$A$2:$A$5</c:f>
-              <c:multiLvlStrCache>
+              <c:strCache>
                 <c:ptCount val="4"/>
-                <c:lvl>
-                  <c:pt idx="0">
-                    <c:v>早餐</c:v>
-                  </c:pt>
-                  <c:pt idx="1">
-                    <c:v>午餐</c:v>
-                  </c:pt>
-                  <c:pt idx="2">
-                    <c:v>晚餐</c:v>
-                  </c:pt>
-                  <c:pt idx="3">
-                    <c:v>夜宵</c:v>
-                  </c:pt>
-                </c:lvl>
-              </c:multiLvlStrCache>
-            </c:multiLvlStrRef>
+                <c:pt idx="0">
+                  <c:v>早餐</c:v>
+                </c:pt>
+                <c:pt idx="1">
+                  <c:v>午餐</c:v>
+                </c:pt>
+                <c:pt idx="2">
+                  <c:v>晚餐</c:v>
+                </c:pt>
+                <c:pt idx="3">
+                  <c:v>夜宵</c:v>
+                </c:pt>
+              </c:strCache>
+            </c:strRef>
           </c:cat>
           <c:val>
             <c:numRef>
@@ -239,36 +257,23 @@
               </c:numCache>
             </c:numRef>
           </c:val>
+          <c:extLst>
+            <c:ext xmlns:c16="http://schemas.microsoft.com/office/drawing/2014/chart" uri="{C3380CC4-5D6E-409C-BE32-E72D297353CC}">
+              <c16:uniqueId val="{00000000-9925-43CE-ADF7-F8B77CD7F7FA}"/>
+            </c:ext>
+          </c:extLst>
         </c:ser>
         <c:dLbls>
-          <c:numFmt formatCode="#,##0" sourceLinked="0"/>
-          <c:txPr>
-            <a:bodyPr/>
-            <a:lstStyle/>
-            <a:p>
-              <a:pPr>
-                <a:defRPr b="0" i="0" strike="noStrike" sz="1200" u="none">
-                  <a:solidFill>
-                    <a:srgbClr val="1E293B"/>
-                  </a:solidFill>
-                  <a:latin typeface="Arial"/>
-                </a:defRPr>
-              </a:pPr>
-            </a:p>
-          </c:txPr>
           <c:showLegendKey val="0"/>
           <c:showVal val="1"/>
           <c:showCatName val="0"/>
           <c:showSerName val="0"/>
           <c:showPercent val="0"/>
           <c:showBubbleSize val="0"/>
-          <c:showLeaderLines val="0"/>
         </c:dLbls>
         <c:gapWidth val="150"/>
-        <c:overlap val="0"/>
         <c:axId val="2094734554"/>
         <c:axId val="2094734552"/>
-        <c:axId val="2094734556"/>
       </c:barChart>
       <c:catAx>
         <c:axId val="2094734554"/>
@@ -309,6 +314,7 @@
         <c:crosses val="autoZero"/>
         <c:auto val="1"/>
         <c:lblAlgn val="ctr"/>
+        <c:lblOffset val="100"/>
         <c:noMultiLvlLbl val="1"/>
       </c:catAx>
       <c:valAx>
@@ -371,6 +377,7 @@
     </c:plotArea>
     <c:plotVisOnly val="1"/>
     <c:dispBlanksAs val="span"/>
+    <c:showDLblsOverMax val="1"/>
   </c:chart>
   <c:spPr>
     <a:noFill/>
@@ -386,9 +393,11 @@
 </file>
 
 <file path=ppt/charts/chart2.xml><?xml version="1.0" encoding="utf-8"?>
-<c:chartSpace xmlns:c="http://schemas.openxmlformats.org/drawingml/2006/chart" xmlns:a="http://schemas.openxmlformats.org/drawingml/2006/main" xmlns:r="http://schemas.openxmlformats.org/officeDocument/2006/relationships">
+<c:chartSpace xmlns:c="http://schemas.openxmlformats.org/drawingml/2006/chart" xmlns:a="http://schemas.openxmlformats.org/drawingml/2006/main" xmlns:r="http://schemas.openxmlformats.org/officeDocument/2006/relationships" xmlns:c16r2="http://schemas.microsoft.com/office/drawing/2015/06/chart">
   <c:date1904 val="0"/>
+  <c:lang val="zh-CN"/>
   <c:roundedCorners val="1"/>
+  <c:style val="2"/>
   <c:chart>
     <c:autoTitleDeleted val="1"/>
     <c:plotArea>
@@ -418,40 +427,15 @@
             <a:effectLst/>
           </c:spPr>
           <c:invertIfNegative val="0"/>
-          <c:dLbls>
-            <c:numFmt formatCode="#,##0" sourceLinked="0"/>
-            <c:txPr>
-              <a:bodyPr/>
-              <a:lstStyle/>
-              <a:p>
-                <a:pPr>
-                  <a:defRPr b="0" i="0" strike="noStrike" sz="1200" u="none">
-                    <a:solidFill>
-                      <a:srgbClr val="1E293B"/>
-                    </a:solidFill>
-                    <a:latin typeface="Arial"/>
-                  </a:defRPr>
-                </a:pPr>
-              </a:p>
-            </c:txPr>
-            <c:showLegendKey val="0"/>
-            <c:showVal val="1"/>
-            <c:showCatName val="0"/>
-            <c:showSerName val="0"/>
-            <c:showPercent val="0"/>
-            <c:showBubbleSize val="0"/>
-            <c:showLeaderLines val="0"/>
-          </c:dLbls>
           <c:dPt>
             <c:idx val="0"/>
             <c:invertIfNegative val="0"/>
             <c:bubble3D val="0"/>
-            <c:spPr>
-              <a:solidFill>
-                <a:srgbClr val="0891B2"/>
-              </a:solidFill>
-              <a:effectLst/>
-            </c:spPr>
+            <c:extLst>
+              <c:ext xmlns:c16="http://schemas.microsoft.com/office/drawing/2014/chart" uri="{C3380CC4-5D6E-409C-BE32-E72D297353CC}">
+                <c16:uniqueId val="{00000001-65A6-4224-9B90-21E7A14E06CD}"/>
+              </c:ext>
+            </c:extLst>
           </c:dPt>
           <c:dPt>
             <c:idx val="1"/>
@@ -463,6 +447,11 @@
               </a:solidFill>
               <a:effectLst/>
             </c:spPr>
+            <c:extLst>
+              <c:ext xmlns:c16="http://schemas.microsoft.com/office/drawing/2014/chart" uri="{C3380CC4-5D6E-409C-BE32-E72D297353CC}">
+                <c16:uniqueId val="{00000003-65A6-4224-9B90-21E7A14E06CD}"/>
+              </c:ext>
+            </c:extLst>
           </c:dPt>
           <c:dPt>
             <c:idx val="2"/>
@@ -474,25 +463,65 @@
               </a:solidFill>
               <a:effectLst/>
             </c:spPr>
+            <c:extLst>
+              <c:ext xmlns:c16="http://schemas.microsoft.com/office/drawing/2014/chart" uri="{C3380CC4-5D6E-409C-BE32-E72D297353CC}">
+                <c16:uniqueId val="{00000005-65A6-4224-9B90-21E7A14E06CD}"/>
+              </c:ext>
+            </c:extLst>
           </c:dPt>
+          <c:dLbls>
+            <c:numFmt formatCode="#,##0" sourceLinked="0"/>
+            <c:spPr>
+              <a:noFill/>
+              <a:ln>
+                <a:noFill/>
+              </a:ln>
+              <a:effectLst/>
+            </c:spPr>
+            <c:txPr>
+              <a:bodyPr/>
+              <a:lstStyle/>
+              <a:p>
+                <a:pPr>
+                  <a:defRPr sz="1200" b="0" i="0" u="none" strike="noStrike">
+                    <a:solidFill>
+                      <a:srgbClr val="1E293B"/>
+                    </a:solidFill>
+                    <a:latin typeface="Arial"/>
+                  </a:defRPr>
+                </a:pPr>
+                <a:endParaRPr lang="zh-CN"/>
+              </a:p>
+            </c:txPr>
+            <c:showLegendKey val="0"/>
+            <c:showVal val="1"/>
+            <c:showCatName val="0"/>
+            <c:showSerName val="0"/>
+            <c:showPercent val="0"/>
+            <c:showBubbleSize val="0"/>
+            <c:showLeaderLines val="0"/>
+            <c:extLst>
+              <c:ext xmlns:c15="http://schemas.microsoft.com/office/drawing/2012/chart" uri="{CE6537A1-D6FC-4f65-9D91-7224C49458BB}">
+                <c15:showLeaderLines val="0"/>
+              </c:ext>
+            </c:extLst>
+          </c:dLbls>
           <c:cat>
-            <c:multiLvlStrRef>
+            <c:strRef>
               <c:f>Sheet1!$A$2:$A$4</c:f>
-              <c:multiLvlStrCache>
+              <c:strCache>
                 <c:ptCount val="3"/>
-                <c:lvl>
-                  <c:pt idx="0">
-                    <c:v>商家A</c:v>
-                  </c:pt>
-                  <c:pt idx="1">
-                    <c:v>商家B</c:v>
-                  </c:pt>
-                  <c:pt idx="2">
-                    <c:v>商家C</c:v>
-                  </c:pt>
-                </c:lvl>
-              </c:multiLvlStrCache>
-            </c:multiLvlStrRef>
+                <c:pt idx="0">
+                  <c:v>商家A</c:v>
+                </c:pt>
+                <c:pt idx="1">
+                  <c:v>商家B</c:v>
+                </c:pt>
+                <c:pt idx="2">
+                  <c:v>商家C</c:v>
+                </c:pt>
+              </c:strCache>
+            </c:strRef>
           </c:cat>
           <c:val>
             <c:numRef>
@@ -512,36 +541,23 @@
               </c:numCache>
             </c:numRef>
           </c:val>
+          <c:extLst>
+            <c:ext xmlns:c16="http://schemas.microsoft.com/office/drawing/2014/chart" uri="{C3380CC4-5D6E-409C-BE32-E72D297353CC}">
+              <c16:uniqueId val="{00000006-65A6-4224-9B90-21E7A14E06CD}"/>
+            </c:ext>
+          </c:extLst>
         </c:ser>
         <c:dLbls>
-          <c:numFmt formatCode="#,##0" sourceLinked="0"/>
-          <c:txPr>
-            <a:bodyPr/>
-            <a:lstStyle/>
-            <a:p>
-              <a:pPr>
-                <a:defRPr b="0" i="0" strike="noStrike" sz="1200" u="none">
-                  <a:solidFill>
-                    <a:srgbClr val="1E293B"/>
-                  </a:solidFill>
-                  <a:latin typeface="Arial"/>
-                </a:defRPr>
-              </a:pPr>
-            </a:p>
-          </c:txPr>
           <c:showLegendKey val="0"/>
           <c:showVal val="1"/>
           <c:showCatName val="0"/>
           <c:showSerName val="0"/>
           <c:showPercent val="0"/>
           <c:showBubbleSize val="0"/>
-          <c:showLeaderLines val="0"/>
         </c:dLbls>
         <c:gapWidth val="150"/>
-        <c:overlap val="0"/>
         <c:axId val="2094734554"/>
         <c:axId val="2094734552"/>
-        <c:axId val="2094734556"/>
       </c:barChart>
       <c:catAx>
         <c:axId val="2094734554"/>
@@ -582,6 +598,7 @@
         <c:crosses val="autoZero"/>
         <c:auto val="1"/>
         <c:lblAlgn val="ctr"/>
+        <c:lblOffset val="100"/>
         <c:noMultiLvlLbl val="1"/>
       </c:catAx>
       <c:valAx>
@@ -644,6 +661,7 @@
     </c:plotArea>
     <c:plotVisOnly val="1"/>
     <c:dispBlanksAs val="span"/>
+    <c:showDLblsOverMax val="1"/>
   </c:chart>
   <c:spPr>
     <a:noFill/>
@@ -659,9 +677,11 @@
 </file>
 
 <file path=ppt/charts/chart3.xml><?xml version="1.0" encoding="utf-8"?>
-<c:chartSpace xmlns:c="http://schemas.openxmlformats.org/drawingml/2006/chart" xmlns:a="http://schemas.openxmlformats.org/drawingml/2006/main" xmlns:r="http://schemas.openxmlformats.org/officeDocument/2006/relationships">
+<c:chartSpace xmlns:c="http://schemas.openxmlformats.org/drawingml/2006/chart" xmlns:a="http://schemas.openxmlformats.org/drawingml/2006/main" xmlns:r="http://schemas.openxmlformats.org/officeDocument/2006/relationships" xmlns:c16r2="http://schemas.microsoft.com/office/drawing/2015/06/chart">
   <c:date1904 val="0"/>
+  <c:lang val="zh-CN"/>
   <c:roundedCorners val="1"/>
+  <c:style val="2"/>
   <c:chart>
     <c:autoTitleDeleted val="1"/>
     <c:plotArea>
@@ -704,6 +724,11 @@
               </a:solidFill>
               <a:effectLst/>
             </c:spPr>
+            <c:extLst>
+              <c:ext xmlns:c16="http://schemas.microsoft.com/office/drawing/2014/chart" uri="{C3380CC4-5D6E-409C-BE32-E72D297353CC}">
+                <c16:uniqueId val="{00000001-28E9-4312-B544-FB4ED549010F}"/>
+              </c:ext>
+            </c:extLst>
           </c:dPt>
           <c:dPt>
             <c:idx val="1"/>
@@ -714,6 +739,11 @@
               </a:solidFill>
               <a:effectLst/>
             </c:spPr>
+            <c:extLst>
+              <c:ext xmlns:c16="http://schemas.microsoft.com/office/drawing/2014/chart" uri="{C3380CC4-5D6E-409C-BE32-E72D297353CC}">
+                <c16:uniqueId val="{00000003-28E9-4312-B544-FB4ED549010F}"/>
+              </c:ext>
+            </c:extLst>
           </c:dPt>
           <c:dPt>
             <c:idx val="2"/>
@@ -724,6 +754,11 @@
               </a:solidFill>
               <a:effectLst/>
             </c:spPr>
+            <c:extLst>
+              <c:ext xmlns:c16="http://schemas.microsoft.com/office/drawing/2014/chart" uri="{C3380CC4-5D6E-409C-BE32-E72D297353CC}">
+                <c16:uniqueId val="{00000005-28E9-4312-B544-FB4ED549010F}"/>
+              </c:ext>
+            </c:extLst>
           </c:dPt>
           <c:dPt>
             <c:idx val="3"/>
@@ -734,6 +769,11 @@
               </a:solidFill>
               <a:effectLst/>
             </c:spPr>
+            <c:extLst>
+              <c:ext xmlns:c16="http://schemas.microsoft.com/office/drawing/2014/chart" uri="{C3380CC4-5D6E-409C-BE32-E72D297353CC}">
+                <c16:uniqueId val="{00000007-28E9-4312-B544-FB4ED549010F}"/>
+              </c:ext>
+            </c:extLst>
           </c:dPt>
           <c:dPt>
             <c:idx val="4"/>
@@ -744,6 +784,11 @@
               </a:solidFill>
               <a:effectLst/>
             </c:spPr>
+            <c:extLst>
+              <c:ext xmlns:c16="http://schemas.microsoft.com/office/drawing/2014/chart" uri="{C3380CC4-5D6E-409C-BE32-E72D297353CC}">
+                <c16:uniqueId val="{00000009-28E9-4312-B544-FB4ED549010F}"/>
+              </c:ext>
+            </c:extLst>
           </c:dPt>
           <c:dPt>
             <c:idx val="5"/>
@@ -754,6 +799,11 @@
               </a:solidFill>
               <a:effectLst/>
             </c:spPr>
+            <c:extLst>
+              <c:ext xmlns:c16="http://schemas.microsoft.com/office/drawing/2014/chart" uri="{C3380CC4-5D6E-409C-BE32-E72D297353CC}">
+                <c16:uniqueId val="{0000000B-28E9-4312-B544-FB4ED549010F}"/>
+              </c:ext>
+            </c:extLst>
           </c:dPt>
           <c:dLbls>
             <c:dLbl>
@@ -772,6 +822,7 @@
                       <a:latin typeface="Arial"/>
                     </a:defRPr>
                   </a:pPr>
+                  <a:endParaRPr lang="zh-CN"/>
                 </a:p>
               </c:txPr>
               <c:showLegendKey val="0"/>
@@ -780,6 +831,12 @@
               <c:showSerName val="0"/>
               <c:showPercent val="1"/>
               <c:showBubbleSize val="0"/>
+              <c:extLst>
+                <c:ext xmlns:c15="http://schemas.microsoft.com/office/drawing/2012/chart" uri="{CE6537A1-D6FC-4f65-9D91-7224C49458BB}"/>
+                <c:ext xmlns:c16="http://schemas.microsoft.com/office/drawing/2014/chart" uri="{C3380CC4-5D6E-409C-BE32-E72D297353CC}">
+                  <c16:uniqueId val="{00000001-28E9-4312-B544-FB4ED549010F}"/>
+                </c:ext>
+              </c:extLst>
             </c:dLbl>
             <c:dLbl>
               <c:idx val="1"/>
@@ -797,6 +854,7 @@
                       <a:latin typeface="Arial"/>
                     </a:defRPr>
                   </a:pPr>
+                  <a:endParaRPr lang="zh-CN"/>
                 </a:p>
               </c:txPr>
               <c:showLegendKey val="0"/>
@@ -805,6 +863,12 @@
               <c:showSerName val="0"/>
               <c:showPercent val="1"/>
               <c:showBubbleSize val="0"/>
+              <c:extLst>
+                <c:ext xmlns:c15="http://schemas.microsoft.com/office/drawing/2012/chart" uri="{CE6537A1-D6FC-4f65-9D91-7224C49458BB}"/>
+                <c:ext xmlns:c16="http://schemas.microsoft.com/office/drawing/2014/chart" uri="{C3380CC4-5D6E-409C-BE32-E72D297353CC}">
+                  <c16:uniqueId val="{00000003-28E9-4312-B544-FB4ED549010F}"/>
+                </c:ext>
+              </c:extLst>
             </c:dLbl>
             <c:dLbl>
               <c:idx val="2"/>
@@ -822,6 +886,7 @@
                       <a:latin typeface="Arial"/>
                     </a:defRPr>
                   </a:pPr>
+                  <a:endParaRPr lang="zh-CN"/>
                 </a:p>
               </c:txPr>
               <c:showLegendKey val="0"/>
@@ -830,6 +895,12 @@
               <c:showSerName val="0"/>
               <c:showPercent val="1"/>
               <c:showBubbleSize val="0"/>
+              <c:extLst>
+                <c:ext xmlns:c15="http://schemas.microsoft.com/office/drawing/2012/chart" uri="{CE6537A1-D6FC-4f65-9D91-7224C49458BB}"/>
+                <c:ext xmlns:c16="http://schemas.microsoft.com/office/drawing/2014/chart" uri="{C3380CC4-5D6E-409C-BE32-E72D297353CC}">
+                  <c16:uniqueId val="{00000005-28E9-4312-B544-FB4ED549010F}"/>
+                </c:ext>
+              </c:extLst>
             </c:dLbl>
             <c:dLbl>
               <c:idx val="3"/>
@@ -847,6 +918,7 @@
                       <a:latin typeface="Arial"/>
                     </a:defRPr>
                   </a:pPr>
+                  <a:endParaRPr lang="zh-CN"/>
                 </a:p>
               </c:txPr>
               <c:showLegendKey val="0"/>
@@ -855,6 +927,12 @@
               <c:showSerName val="0"/>
               <c:showPercent val="1"/>
               <c:showBubbleSize val="0"/>
+              <c:extLst>
+                <c:ext xmlns:c15="http://schemas.microsoft.com/office/drawing/2012/chart" uri="{CE6537A1-D6FC-4f65-9D91-7224C49458BB}"/>
+                <c:ext xmlns:c16="http://schemas.microsoft.com/office/drawing/2014/chart" uri="{C3380CC4-5D6E-409C-BE32-E72D297353CC}">
+                  <c16:uniqueId val="{00000007-28E9-4312-B544-FB4ED549010F}"/>
+                </c:ext>
+              </c:extLst>
             </c:dLbl>
             <c:dLbl>
               <c:idx val="4"/>
@@ -872,6 +950,7 @@
                       <a:latin typeface="Arial"/>
                     </a:defRPr>
                   </a:pPr>
+                  <a:endParaRPr lang="zh-CN"/>
                 </a:p>
               </c:txPr>
               <c:showLegendKey val="0"/>
@@ -880,6 +959,12 @@
               <c:showSerName val="0"/>
               <c:showPercent val="1"/>
               <c:showBubbleSize val="0"/>
+              <c:extLst>
+                <c:ext xmlns:c15="http://schemas.microsoft.com/office/drawing/2012/chart" uri="{CE6537A1-D6FC-4f65-9D91-7224C49458BB}"/>
+                <c:ext xmlns:c16="http://schemas.microsoft.com/office/drawing/2014/chart" uri="{C3380CC4-5D6E-409C-BE32-E72D297353CC}">
+                  <c16:uniqueId val="{00000009-28E9-4312-B544-FB4ED549010F}"/>
+                </c:ext>
+              </c:extLst>
             </c:dLbl>
             <c:dLbl>
               <c:idx val="5"/>
@@ -897,6 +982,7 @@
                       <a:latin typeface="Arial"/>
                     </a:defRPr>
                   </a:pPr>
+                  <a:endParaRPr lang="zh-CN"/>
                 </a:p>
               </c:txPr>
               <c:showLegendKey val="0"/>
@@ -905,8 +991,21 @@
               <c:showSerName val="0"/>
               <c:showPercent val="1"/>
               <c:showBubbleSize val="0"/>
+              <c:extLst>
+                <c:ext xmlns:c15="http://schemas.microsoft.com/office/drawing/2012/chart" uri="{CE6537A1-D6FC-4f65-9D91-7224C49458BB}"/>
+                <c:ext xmlns:c16="http://schemas.microsoft.com/office/drawing/2014/chart" uri="{C3380CC4-5D6E-409C-BE32-E72D297353CC}">
+                  <c16:uniqueId val="{0000000B-28E9-4312-B544-FB4ED549010F}"/>
+                </c:ext>
+              </c:extLst>
             </c:dLbl>
             <c:numFmt formatCode="0%" sourceLinked="0"/>
+            <c:spPr>
+              <a:noFill/>
+              <a:ln>
+                <a:noFill/>
+              </a:ln>
+              <a:effectLst/>
+            </c:spPr>
             <c:txPr>
               <a:bodyPr/>
               <a:lstStyle/>
@@ -919,6 +1018,7 @@
                     <a:latin typeface="Arial"/>
                   </a:defRPr>
                 </a:pPr>
+                <a:endParaRPr lang="zh-CN"/>
               </a:p>
             </c:txPr>
             <c:dLblPos val="ctr"/>
@@ -929,6 +1029,9 @@
             <c:showPercent val="1"/>
             <c:showBubbleSize val="0"/>
             <c:showLeaderLines val="0"/>
+            <c:extLst>
+              <c:ext xmlns:c15="http://schemas.microsoft.com/office/drawing/2012/chart" uri="{CE6537A1-D6FC-4f65-9D91-7224C49458BB}"/>
+            </c:extLst>
           </c:dLbls>
           <c:cat>
             <c:strRef>
@@ -960,6 +1063,7 @@
             <c:numRef>
               <c:f>Sheet1!$B$2:$B$7</c:f>
               <c:numCache>
+                <c:formatCode>General</c:formatCode>
                 <c:ptCount val="6"/>
                 <c:pt idx="0">
                   <c:v>520</c:v>
@@ -982,7 +1086,21 @@
               </c:numCache>
             </c:numRef>
           </c:val>
+          <c:extLst>
+            <c:ext xmlns:c16="http://schemas.microsoft.com/office/drawing/2014/chart" uri="{C3380CC4-5D6E-409C-BE32-E72D297353CC}">
+              <c16:uniqueId val="{0000000C-28E9-4312-B544-FB4ED549010F}"/>
+            </c:ext>
+          </c:extLst>
         </c:ser>
+        <c:dLbls>
+          <c:showLegendKey val="0"/>
+          <c:showVal val="0"/>
+          <c:showCatName val="0"/>
+          <c:showSerName val="0"/>
+          <c:showPercent val="0"/>
+          <c:showBubbleSize val="0"/>
+          <c:showLeaderLines val="0"/>
+        </c:dLbls>
         <c:firstSliceAng val="0"/>
       </c:pieChart>
       <c:spPr>
@@ -1001,7 +1119,7 @@
         <a:lstStyle/>
         <a:p>
           <a:pPr>
-            <a:defRPr sz="900">      </a:defRPr>
+            <a:defRPr sz="900"/>
           </a:pPr>
           <a:endParaRPr lang="en-US"/>
         </a:p>
@@ -1009,6 +1127,7 @@
     </c:legend>
     <c:plotVisOnly val="1"/>
     <c:dispBlanksAs val="span"/>
+    <c:showDLblsOverMax val="1"/>
   </c:chart>
   <c:spPr>
     <a:noFill/>
@@ -1024,9 +1143,11 @@
 </file>
 
 <file path=ppt/charts/chart4.xml><?xml version="1.0" encoding="utf-8"?>
-<c:chartSpace xmlns:c="http://schemas.openxmlformats.org/drawingml/2006/chart" xmlns:a="http://schemas.openxmlformats.org/drawingml/2006/main" xmlns:r="http://schemas.openxmlformats.org/officeDocument/2006/relationships">
+<c:chartSpace xmlns:c="http://schemas.openxmlformats.org/drawingml/2006/chart" xmlns:a="http://schemas.openxmlformats.org/drawingml/2006/main" xmlns:r="http://schemas.openxmlformats.org/officeDocument/2006/relationships" xmlns:c16r2="http://schemas.microsoft.com/office/drawing/2015/06/chart">
   <c:date1904 val="0"/>
+  <c:lang val="zh-CN"/>
   <c:roundedCorners val="1"/>
+  <c:style val="2"/>
   <c:chart>
     <c:autoTitleDeleted val="1"/>
     <c:plotArea>
@@ -1056,75 +1177,49 @@
             <a:effectLst/>
           </c:spPr>
           <c:invertIfNegative val="0"/>
-          <c:dLbls>
-            <c:numFmt formatCode="#,##0" sourceLinked="0"/>
-            <c:txPr>
-              <a:bodyPr/>
-              <a:lstStyle/>
-              <a:p>
-                <a:pPr>
-                  <a:defRPr b="0" i="0" strike="noStrike" sz="1200" u="none">
-                    <a:solidFill>
-                      <a:srgbClr val="000000"/>
-                    </a:solidFill>
-                    <a:latin typeface="Arial"/>
-                  </a:defRPr>
-                </a:pPr>
-              </a:p>
-            </c:txPr>
-            <c:showLegendKey val="0"/>
-            <c:showVal val="0"/>
-            <c:showCatName val="0"/>
-            <c:showSerName val="0"/>
-            <c:showPercent val="0"/>
-            <c:showBubbleSize val="0"/>
-            <c:showLeaderLines val="0"/>
-          </c:dLbls>
           <c:cat>
-            <c:multiLvlStrRef>
+            <c:strRef>
               <c:f>Sheet1!$A$2:$A$13</c:f>
-              <c:multiLvlStrCache>
+              <c:strCache>
                 <c:ptCount val="12"/>
-                <c:lvl>
-                  <c:pt idx="0">
-                    <c:v>P1</c:v>
-                  </c:pt>
-                  <c:pt idx="1">
-                    <c:v>P2</c:v>
-                  </c:pt>
-                  <c:pt idx="2">
-                    <c:v>P3</c:v>
-                  </c:pt>
-                  <c:pt idx="3">
-                    <c:v>P4</c:v>
-                  </c:pt>
-                  <c:pt idx="4">
-                    <c:v>P5</c:v>
-                  </c:pt>
-                  <c:pt idx="5">
-                    <c:v>P6</c:v>
-                  </c:pt>
-                  <c:pt idx="6">
-                    <c:v>P7</c:v>
-                  </c:pt>
-                  <c:pt idx="7">
-                    <c:v>P8</c:v>
-                  </c:pt>
-                  <c:pt idx="8">
-                    <c:v>P9</c:v>
-                  </c:pt>
-                  <c:pt idx="9">
-                    <c:v>P10</c:v>
-                  </c:pt>
-                  <c:pt idx="10">
-                    <c:v>P11</c:v>
-                  </c:pt>
-                  <c:pt idx="11">
-                    <c:v>P12</c:v>
-                  </c:pt>
-                </c:lvl>
-              </c:multiLvlStrCache>
-            </c:multiLvlStrRef>
+                <c:pt idx="0">
+                  <c:v>P1</c:v>
+                </c:pt>
+                <c:pt idx="1">
+                  <c:v>P2</c:v>
+                </c:pt>
+                <c:pt idx="2">
+                  <c:v>P3</c:v>
+                </c:pt>
+                <c:pt idx="3">
+                  <c:v>P4</c:v>
+                </c:pt>
+                <c:pt idx="4">
+                  <c:v>P5</c:v>
+                </c:pt>
+                <c:pt idx="5">
+                  <c:v>P6</c:v>
+                </c:pt>
+                <c:pt idx="6">
+                  <c:v>P7</c:v>
+                </c:pt>
+                <c:pt idx="7">
+                  <c:v>P8</c:v>
+                </c:pt>
+                <c:pt idx="8">
+                  <c:v>P9</c:v>
+                </c:pt>
+                <c:pt idx="9">
+                  <c:v>P10</c:v>
+                </c:pt>
+                <c:pt idx="10">
+                  <c:v>P11</c:v>
+                </c:pt>
+                <c:pt idx="11">
+                  <c:v>P12</c:v>
+                </c:pt>
+              </c:strCache>
+            </c:strRef>
           </c:cat>
           <c:val>
             <c:numRef>
@@ -1171,36 +1266,23 @@
               </c:numCache>
             </c:numRef>
           </c:val>
+          <c:extLst>
+            <c:ext xmlns:c16="http://schemas.microsoft.com/office/drawing/2014/chart" uri="{C3380CC4-5D6E-409C-BE32-E72D297353CC}">
+              <c16:uniqueId val="{00000000-CFBA-497F-9691-002A7BEF4F47}"/>
+            </c:ext>
+          </c:extLst>
         </c:ser>
         <c:dLbls>
-          <c:numFmt formatCode="#,##0" sourceLinked="0"/>
-          <c:txPr>
-            <a:bodyPr/>
-            <a:lstStyle/>
-            <a:p>
-              <a:pPr>
-                <a:defRPr b="0" i="0" strike="noStrike" sz="1200" u="none">
-                  <a:solidFill>
-                    <a:srgbClr val="000000"/>
-                  </a:solidFill>
-                  <a:latin typeface="Arial"/>
-                </a:defRPr>
-              </a:pPr>
-            </a:p>
-          </c:txPr>
           <c:showLegendKey val="0"/>
           <c:showVal val="0"/>
           <c:showCatName val="0"/>
           <c:showSerName val="0"/>
           <c:showPercent val="0"/>
           <c:showBubbleSize val="0"/>
-          <c:showLeaderLines val="0"/>
         </c:dLbls>
         <c:gapWidth val="150"/>
-        <c:overlap val="0"/>
         <c:axId val="2094734554"/>
         <c:axId val="2094734552"/>
-        <c:axId val="2094734556"/>
       </c:barChart>
       <c:catAx>
         <c:axId val="2094734554"/>
@@ -1241,6 +1323,7 @@
         <c:crosses val="autoZero"/>
         <c:auto val="1"/>
         <c:lblAlgn val="ctr"/>
+        <c:lblOffset val="100"/>
         <c:noMultiLvlLbl val="1"/>
       </c:catAx>
       <c:valAx>
@@ -1303,6 +1386,7 @@
     </c:plotArea>
     <c:plotVisOnly val="1"/>
     <c:dispBlanksAs val="span"/>
+    <c:showDLblsOverMax val="1"/>
   </c:chart>
   <c:spPr>
     <a:noFill/>
@@ -1339,234 +1423,10 @@
           <a:chExt cx="0" cy="0"/>
         </a:xfrm>
       </p:grpSpPr>
-      <p:sp>
-        <p:nvSpPr>
-          <p:cNvPr id="2" name="Header Placeholder 1"/>
-          <p:cNvSpPr>
-            <a:spLocks noGrp="1"/>
-          </p:cNvSpPr>
-          <p:nvPr>
-            <p:ph type="hdr" sz="quarter"/>
-          </p:nvPr>
-        </p:nvSpPr>
-        <p:spPr>
-          <a:xfrm>
-            <a:off x="0" y="0"/>
-            <a:ext cx="2971800" cy="458788"/>
-          </a:xfrm>
-          <a:prstGeom prst="rect">
-            <a:avLst/>
-          </a:prstGeom>
-        </p:spPr>
-        <p:txBody>
-          <a:bodyPr vert="horz" lIns="91440" tIns="45720" rIns="91440" bIns="45720" rtlCol="0"/>
-          <a:lstStyle>
-            <a:lvl1pPr algn="l">
-              <a:defRPr sz="1200"/>
-            </a:lvl1pPr>
-          </a:lstStyle>
-          <a:p>
-            <a:endParaRPr lang="en-US"/>
-          </a:p>
-        </p:txBody>
-      </p:sp>
-      <p:sp>
-        <p:nvSpPr>
-          <p:cNvPr id="3" name="Date Placeholder 2"/>
-          <p:cNvSpPr>
-            <a:spLocks noGrp="1"/>
-          </p:cNvSpPr>
-          <p:nvPr>
-            <p:ph type="dt" idx="1"/>
-          </p:nvPr>
-        </p:nvSpPr>
-        <p:spPr>
-          <a:xfrm>
-            <a:off x="3884613" y="0"/>
-            <a:ext cx="2971800" cy="458788"/>
-          </a:xfrm>
-          <a:prstGeom prst="rect">
-            <a:avLst/>
-          </a:prstGeom>
-        </p:spPr>
-        <p:txBody>
-          <a:bodyPr vert="horz" lIns="91440" tIns="45720" rIns="91440" bIns="45720" rtlCol="0"/>
-          <a:lstStyle>
-            <a:lvl1pPr algn="r">
-              <a:defRPr sz="1200"/>
-            </a:lvl1pPr>
-          </a:lstStyle>
-          <a:p>
-            <a:fld id="{5282F153-3F37-0F45-9E97-73ACFA13230C}" type="datetimeFigureOut">
-              <a:rPr lang="en-US"/>
-              <a:t>7/23/19</a:t>
-            </a:fld>
-            <a:endParaRPr lang="en-US"/>
-          </a:p>
-        </p:txBody>
-      </p:sp>
-      <p:sp>
-        <p:nvSpPr>
-          <p:cNvPr id="4" name="Slide Image Placeholder 3"/>
-          <p:cNvSpPr>
-            <a:spLocks noGrp="1" noRot="1" noChangeAspect="1"/>
-          </p:cNvSpPr>
-          <p:nvPr>
-            <p:ph type="sldImg" idx="2"/>
-          </p:nvPr>
-        </p:nvSpPr>
-        <p:spPr>
-          <a:xfrm>
-            <a:off x="685800" y="1143000"/>
-            <a:ext cx="5486400" cy="3086100"/>
-          </a:xfrm>
-          <a:prstGeom prst="rect">
-            <a:avLst/>
-          </a:prstGeom>
-          <a:noFill/>
-          <a:ln w="12700">
-            <a:solidFill>
-              <a:prstClr val="black"/>
-            </a:solidFill>
-          </a:ln>
-        </p:spPr>
-        <p:txBody>
-          <a:bodyPr vert="horz" lIns="91440" tIns="45720" rIns="91440" bIns="45720" rtlCol="0" anchor="ctr"/>
-          <a:lstStyle/>
-          <a:p>
-            <a:endParaRPr lang="en-US"/>
-          </a:p>
-        </p:txBody>
-      </p:sp>
-      <p:sp>
-        <p:nvSpPr>
-          <p:cNvPr id="5" name="Notes Placeholder 4"/>
-          <p:cNvSpPr>
-            <a:spLocks noGrp="1"/>
-          </p:cNvSpPr>
-          <p:nvPr>
-            <p:ph type="body" sz="quarter" idx="3"/>
-          </p:nvPr>
-        </p:nvSpPr>
-        <p:spPr>
-          <a:xfrm>
-            <a:off x="685800" y="4400550"/>
-            <a:ext cx="5486400" cy="3600450"/>
-          </a:xfrm>
-          <a:prstGeom prst="rect">
-            <a:avLst/>
-          </a:prstGeom>
-        </p:spPr>
-        <p:txBody>
-          <a:bodyPr vert="horz" lIns="91440" tIns="45720" rIns="91440" bIns="45720" rtlCol="0"/>
-          <a:lstStyle/>
-          <a:p>
-            <a:pPr lvl="0"/>
-            <a:r>
-              <a:rPr lang="en-US"/>
-              <a:t>Click to edit Master text styles</a:t>
-            </a:r>
-          </a:p>
-          <a:p>
-            <a:pPr lvl="1"/>
-            <a:r>
-              <a:rPr lang="en-US"/>
-              <a:t>Second level</a:t>
-            </a:r>
-          </a:p>
-          <a:p>
-            <a:pPr lvl="2"/>
-            <a:r>
-              <a:rPr lang="en-US"/>
-              <a:t>Third level</a:t>
-            </a:r>
-          </a:p>
-          <a:p>
-            <a:pPr lvl="3"/>
-            <a:r>
-              <a:rPr lang="en-US"/>
-              <a:t>Fourth level</a:t>
-            </a:r>
-          </a:p>
-          <a:p>
-            <a:pPr lvl="4"/>
-            <a:r>
-              <a:rPr lang="en-US"/>
-              <a:t>Fifth level</a:t>
-            </a:r>
-          </a:p>
-        </p:txBody>
-      </p:sp>
-      <p:sp>
-        <p:nvSpPr>
-          <p:cNvPr id="6" name="Footer Placeholder 5"/>
-          <p:cNvSpPr>
-            <a:spLocks noGrp="1"/>
-          </p:cNvSpPr>
-          <p:nvPr>
-            <p:ph type="ftr" sz="quarter" idx="4"/>
-          </p:nvPr>
-        </p:nvSpPr>
-        <p:spPr>
-          <a:xfrm>
-            <a:off x="0" y="8685213"/>
-            <a:ext cx="2971800" cy="458787"/>
-          </a:xfrm>
-          <a:prstGeom prst="rect">
-            <a:avLst/>
-          </a:prstGeom>
-        </p:spPr>
-        <p:txBody>
-          <a:bodyPr vert="horz" lIns="91440" tIns="45720" rIns="91440" bIns="45720" rtlCol="0" anchor="b"/>
-          <a:lstStyle>
-            <a:lvl1pPr algn="l">
-              <a:defRPr sz="1200"/>
-            </a:lvl1pPr>
-          </a:lstStyle>
-          <a:p>
-            <a:endParaRPr lang="en-US"/>
-          </a:p>
-        </p:txBody>
-      </p:sp>
-      <p:sp>
-        <p:nvSpPr>
-          <p:cNvPr id="7" name="Slide Number Placeholder 6"/>
-          <p:cNvSpPr>
-            <a:spLocks noGrp="1"/>
-          </p:cNvSpPr>
-          <p:nvPr>
-            <p:ph type="sldNum" sz="quarter" idx="5"/>
-          </p:nvPr>
-        </p:nvSpPr>
-        <p:spPr>
-          <a:xfrm>
-            <a:off x="3884613" y="8685213"/>
-            <a:ext cx="2971800" cy="458787"/>
-          </a:xfrm>
-          <a:prstGeom prst="rect">
-            <a:avLst/>
-          </a:prstGeom>
-        </p:spPr>
-        <p:txBody>
-          <a:bodyPr vert="horz" lIns="91440" tIns="45720" rIns="91440" bIns="45720" rtlCol="0" anchor="b"/>
-          <a:lstStyle>
-            <a:lvl1pPr algn="r">
-              <a:defRPr sz="1200"/>
-            </a:lvl1pPr>
-          </a:lstStyle>
-          <a:p>
-            <a:fld id="{CE5E9CC1-C706-0F49-92D6-E571CC5EEA8F}" type="slidenum">
-              <a:rPr lang="en-US"/>
-              <a:t>‹#›</a:t>
-            </a:fld>
-            <a:endParaRPr lang="en-US"/>
-          </a:p>
-        </p:txBody>
-      </p:sp>
     </p:spTree>
     <p:extLst>
       <p:ext uri="{BB962C8B-B14F-4D97-AF65-F5344CB8AC3E}">
-        <p14:creationId xmlns:p14="http://schemas.microsoft.com/office/powerpoint/2010/main" val="1024086991"/>
+        <p14:creationId xmlns:p14="http://schemas.microsoft.com/office/powerpoint/2010/main" val="1622716679"/>
       </p:ext>
     </p:extLst>
   </p:cSld>
@@ -1710,10 +1570,6 @@
           <a:bodyPr/>
           <a:lstStyle/>
           <a:p>
-            <a:r>
-              <a:rPr lang="en-US" dirty="0"/>
-              <a:t/>
-            </a:r>
             <a:endParaRPr lang="en-US" dirty="0"/>
           </a:p>
         </p:txBody>
@@ -1798,10 +1654,6 @@
           <a:bodyPr/>
           <a:lstStyle/>
           <a:p>
-            <a:r>
-              <a:rPr lang="en-US" dirty="0"/>
-              <a:t/>
-            </a:r>
             <a:endParaRPr lang="en-US" dirty="0"/>
           </a:p>
         </p:txBody>
@@ -1886,10 +1738,6 @@
           <a:bodyPr/>
           <a:lstStyle/>
           <a:p>
-            <a:r>
-              <a:rPr lang="en-US" dirty="0"/>
-              <a:t/>
-            </a:r>
             <a:endParaRPr lang="en-US" dirty="0"/>
           </a:p>
         </p:txBody>
@@ -1974,10 +1822,6 @@
           <a:bodyPr/>
           <a:lstStyle/>
           <a:p>
-            <a:r>
-              <a:rPr lang="en-US" dirty="0"/>
-              <a:t/>
-            </a:r>
             <a:endParaRPr lang="en-US" dirty="0"/>
           </a:p>
         </p:txBody>
@@ -2062,10 +1906,6 @@
           <a:bodyPr/>
           <a:lstStyle/>
           <a:p>
-            <a:r>
-              <a:rPr lang="en-US" dirty="0"/>
-              <a:t/>
-            </a:r>
             <a:endParaRPr lang="en-US" dirty="0"/>
           </a:p>
         </p:txBody>
@@ -2150,10 +1990,6 @@
           <a:bodyPr/>
           <a:lstStyle/>
           <a:p>
-            <a:r>
-              <a:rPr lang="en-US" dirty="0"/>
-              <a:t/>
-            </a:r>
             <a:endParaRPr lang="en-US" dirty="0"/>
           </a:p>
         </p:txBody>
@@ -2238,10 +2074,6 @@
           <a:bodyPr/>
           <a:lstStyle/>
           <a:p>
-            <a:r>
-              <a:rPr lang="en-US" dirty="0"/>
-              <a:t/>
-            </a:r>
             <a:endParaRPr lang="en-US" dirty="0"/>
           </a:p>
         </p:txBody>
@@ -2326,10 +2158,6 @@
           <a:bodyPr/>
           <a:lstStyle/>
           <a:p>
-            <a:r>
-              <a:rPr lang="en-US" dirty="0"/>
-              <a:t/>
-            </a:r>
             <a:endParaRPr lang="en-US" dirty="0"/>
           </a:p>
         </p:txBody>
@@ -2414,10 +2242,6 @@
           <a:bodyPr/>
           <a:lstStyle/>
           <a:p>
-            <a:r>
-              <a:rPr lang="en-US" dirty="0"/>
-              <a:t/>
-            </a:r>
             <a:endParaRPr lang="en-US" dirty="0"/>
           </a:p>
         </p:txBody>
@@ -2502,10 +2326,6 @@
           <a:bodyPr/>
           <a:lstStyle/>
           <a:p>
-            <a:r>
-              <a:rPr lang="en-US" dirty="0"/>
-              <a:t/>
-            </a:r>
             <a:endParaRPr lang="en-US" dirty="0"/>
           </a:p>
         </p:txBody>
@@ -2590,10 +2410,6 @@
           <a:bodyPr/>
           <a:lstStyle/>
           <a:p>
-            <a:r>
-              <a:rPr lang="en-US" dirty="0"/>
-              <a:t/>
-            </a:r>
             <a:endParaRPr lang="en-US" dirty="0"/>
           </a:p>
         </p:txBody>
@@ -2678,10 +2494,6 @@
           <a:bodyPr/>
           <a:lstStyle/>
           <a:p>
-            <a:r>
-              <a:rPr lang="en-US" dirty="0"/>
-              <a:t/>
-            </a:r>
             <a:endParaRPr lang="en-US" dirty="0"/>
           </a:p>
         </p:txBody>
@@ -2766,10 +2578,6 @@
           <a:bodyPr/>
           <a:lstStyle/>
           <a:p>
-            <a:r>
-              <a:rPr lang="en-US" dirty="0"/>
-              <a:t/>
-            </a:r>
             <a:endParaRPr lang="en-US" dirty="0"/>
           </a:p>
         </p:txBody>
@@ -2854,10 +2662,6 @@
           <a:bodyPr/>
           <a:lstStyle/>
           <a:p>
-            <a:r>
-              <a:rPr lang="en-US" dirty="0"/>
-              <a:t/>
-            </a:r>
             <a:endParaRPr lang="en-US" dirty="0"/>
           </a:p>
         </p:txBody>
@@ -2942,10 +2746,6 @@
           <a:bodyPr/>
           <a:lstStyle/>
           <a:p>
-            <a:r>
-              <a:rPr lang="en-US" dirty="0"/>
-              <a:t/>
-            </a:r>
             <a:endParaRPr lang="en-US" dirty="0"/>
           </a:p>
         </p:txBody>
@@ -3030,10 +2830,6 @@
           <a:bodyPr/>
           <a:lstStyle/>
           <a:p>
-            <a:r>
-              <a:rPr lang="en-US" dirty="0"/>
-              <a:t/>
-            </a:r>
             <a:endParaRPr lang="en-US" dirty="0"/>
           </a:p>
         </p:txBody>
@@ -3118,10 +2914,6 @@
           <a:bodyPr/>
           <a:lstStyle/>
           <a:p>
-            <a:r>
-              <a:rPr lang="en-US" dirty="0"/>
-              <a:t/>
-            </a:r>
             <a:endParaRPr lang="en-US" dirty="0"/>
           </a:p>
         </p:txBody>
@@ -3206,10 +2998,6 @@
           <a:bodyPr/>
           <a:lstStyle/>
           <a:p>
-            <a:r>
-              <a:rPr lang="en-US" dirty="0"/>
-              <a:t/>
-            </a:r>
             <a:endParaRPr lang="en-US" dirty="0"/>
           </a:p>
         </p:txBody>
@@ -3294,10 +3082,6 @@
           <a:bodyPr/>
           <a:lstStyle/>
           <a:p>
-            <a:r>
-              <a:rPr lang="en-US" dirty="0"/>
-              <a:t/>
-            </a:r>
             <a:endParaRPr lang="en-US" dirty="0"/>
           </a:p>
         </p:txBody>
@@ -3382,10 +3166,6 @@
           <a:bodyPr/>
           <a:lstStyle/>
           <a:p>
-            <a:r>
-              <a:rPr lang="en-US" dirty="0"/>
-              <a:t/>
-            </a:r>
             <a:endParaRPr lang="en-US" dirty="0"/>
           </a:p>
         </p:txBody>
@@ -3470,10 +3250,6 @@
           <a:bodyPr/>
           <a:lstStyle/>
           <a:p>
-            <a:r>
-              <a:rPr lang="en-US" dirty="0"/>
-              <a:t/>
-            </a:r>
             <a:endParaRPr lang="en-US" dirty="0"/>
           </a:p>
         </p:txBody>
@@ -3558,10 +3334,6 @@
           <a:bodyPr/>
           <a:lstStyle/>
           <a:p>
-            <a:r>
-              <a:rPr lang="en-US" dirty="0"/>
-              <a:t/>
-            </a:r>
             <a:endParaRPr lang="en-US" dirty="0"/>
           </a:p>
         </p:txBody>
@@ -3646,10 +3418,6 @@
           <a:bodyPr/>
           <a:lstStyle/>
           <a:p>
-            <a:r>
-              <a:rPr lang="en-US" dirty="0"/>
-              <a:t/>
-            </a:r>
             <a:endParaRPr lang="en-US" dirty="0"/>
           </a:p>
         </p:txBody>
@@ -3734,10 +3502,6 @@
           <a:bodyPr/>
           <a:lstStyle/>
           <a:p>
-            <a:r>
-              <a:rPr lang="en-US" dirty="0"/>
-              <a:t/>
-            </a:r>
             <a:endParaRPr lang="en-US" dirty="0"/>
           </a:p>
         </p:txBody>
@@ -3822,10 +3586,6 @@
           <a:bodyPr/>
           <a:lstStyle/>
           <a:p>
-            <a:r>
-              <a:rPr lang="en-US" dirty="0"/>
-              <a:t/>
-            </a:r>
             <a:endParaRPr lang="en-US" dirty="0"/>
           </a:p>
         </p:txBody>
@@ -3910,10 +3670,6 @@
           <a:bodyPr/>
           <a:lstStyle/>
           <a:p>
-            <a:r>
-              <a:rPr lang="en-US" dirty="0"/>
-              <a:t/>
-            </a:r>
             <a:endParaRPr lang="en-US" dirty="0"/>
           </a:p>
         </p:txBody>
@@ -3998,10 +3754,6 @@
           <a:bodyPr/>
           <a:lstStyle/>
           <a:p>
-            <a:r>
-              <a:rPr lang="en-US" dirty="0"/>
-              <a:t/>
-            </a:r>
             <a:endParaRPr lang="en-US" dirty="0"/>
           </a:p>
         </p:txBody>
@@ -4086,10 +3838,6 @@
           <a:bodyPr/>
           <a:lstStyle/>
           <a:p>
-            <a:r>
-              <a:rPr lang="en-US" dirty="0"/>
-              <a:t/>
-            </a:r>
             <a:endParaRPr lang="en-US" dirty="0"/>
           </a:p>
         </p:txBody>
@@ -4174,10 +3922,6 @@
           <a:bodyPr/>
           <a:lstStyle/>
           <a:p>
-            <a:r>
-              <a:rPr lang="en-US" dirty="0"/>
-              <a:t/>
-            </a:r>
             <a:endParaRPr lang="en-US" dirty="0"/>
           </a:p>
         </p:txBody>
@@ -4262,10 +4006,6 @@
           <a:bodyPr/>
           <a:lstStyle/>
           <a:p>
-            <a:r>
-              <a:rPr lang="en-US" dirty="0"/>
-              <a:t/>
-            </a:r>
             <a:endParaRPr lang="en-US" dirty="0"/>
           </a:p>
         </p:txBody>
@@ -4350,10 +4090,6 @@
           <a:bodyPr/>
           <a:lstStyle/>
           <a:p>
-            <a:r>
-              <a:rPr lang="en-US" dirty="0"/>
-              <a:t/>
-            </a:r>
             <a:endParaRPr lang="en-US" dirty="0"/>
           </a:p>
         </p:txBody>
@@ -4438,10 +4174,6 @@
           <a:bodyPr/>
           <a:lstStyle/>
           <a:p>
-            <a:r>
-              <a:rPr lang="en-US" dirty="0"/>
-              <a:t/>
-            </a:r>
             <a:endParaRPr lang="en-US" dirty="0"/>
           </a:p>
         </p:txBody>
@@ -4526,10 +4258,6 @@
           <a:bodyPr/>
           <a:lstStyle/>
           <a:p>
-            <a:r>
-              <a:rPr lang="en-US" dirty="0"/>
-              <a:t/>
-            </a:r>
             <a:endParaRPr lang="en-US" dirty="0"/>
           </a:p>
         </p:txBody>
@@ -4603,6 +4331,11 @@
 <file path=ppt/slideMasters/slideMaster1.xml><?xml version="1.0" encoding="utf-8"?>
 <p:sldMaster xmlns:a="http://schemas.openxmlformats.org/drawingml/2006/main" xmlns:r="http://schemas.openxmlformats.org/officeDocument/2006/relationships" xmlns:p="http://schemas.openxmlformats.org/presentationml/2006/main">
   <p:cSld>
+    <p:bg>
+      <p:bgRef idx="1001">
+        <a:schemeClr val="bg1"/>
+      </p:bgRef>
+    </p:bg>
     <p:spTree>
       <p:nvGrpSpPr>
         <p:cNvPr id="1" name=""/>
@@ -4885,6 +4618,7 @@
         <a:solidFill>
           <a:srgbClr val="1A1A2E"/>
         </a:solidFill>
+        <a:effectLst/>
       </p:bgPr>
     </p:bg>
     <p:spTree>
@@ -4922,7 +4656,10 @@
         </p:spPr>
         <p:txBody>
           <a:bodyPr/>
-          <a:p/>
+          <a:lstStyle/>
+          <a:p>
+            <a:endParaRPr/>
+          </a:p>
         </p:txBody>
       </p:sp>
       <p:sp>
@@ -4946,7 +4683,7 @@
           <a:bodyPr wrap="square" rtlCol="0" anchor="ctr"/>
           <a:lstStyle/>
           <a:p>
-            <a:pPr indent="0" marL="0">
+            <a:pPr marL="0" indent="0">
               <a:lnSpc>
                 <a:spcPct val="115000"/>
               </a:lnSpc>
@@ -4966,7 +4703,7 @@
             <a:endParaRPr lang="en-US" sz="3600" dirty="0"/>
           </a:p>
           <a:p>
-            <a:pPr indent="0" marL="0">
+            <a:pPr marL="0" indent="0">
               <a:lnSpc>
                 <a:spcPct val="115000"/>
               </a:lnSpc>
@@ -4986,7 +4723,7 @@
             <a:endParaRPr lang="en-US" sz="3600" dirty="0"/>
           </a:p>
           <a:p>
-            <a:pPr indent="0" marL="0">
+            <a:pPr marL="0" indent="0">
               <a:lnSpc>
                 <a:spcPct val="115000"/>
               </a:lnSpc>
@@ -5028,7 +4765,7 @@
           <a:bodyPr wrap="square" rtlCol="0" anchor="ctr"/>
           <a:lstStyle/>
           <a:p>
-            <a:pPr indent="0" marL="0">
+            <a:pPr marL="0" indent="0">
               <a:buNone/>
             </a:pPr>
             <a:r>
@@ -5064,7 +4801,10 @@
         </p:spPr>
         <p:txBody>
           <a:bodyPr/>
-          <a:p/>
+          <a:lstStyle/>
+          <a:p>
+            <a:endParaRPr/>
+          </a:p>
         </p:txBody>
       </p:sp>
       <p:sp>
@@ -5088,7 +4828,7 @@
           <a:bodyPr wrap="square" rtlCol="0" anchor="ctr"/>
           <a:lstStyle/>
           <a:p>
-            <a:pPr indent="0" marL="0">
+            <a:pPr marL="0" indent="0">
               <a:buNone/>
             </a:pPr>
             <a:r>
@@ -5124,7 +4864,7 @@
           <a:bodyPr wrap="square" rtlCol="0" anchor="ctr"/>
           <a:lstStyle/>
           <a:p>
-            <a:pPr indent="0" marL="0">
+            <a:pPr marL="0" indent="0">
               <a:buNone/>
             </a:pPr>
             <a:r>
@@ -5160,7 +4900,7 @@
           <a:bodyPr wrap="square" rtlCol="0" anchor="ctr"/>
           <a:lstStyle/>
           <a:p>
-            <a:pPr algn="r" indent="0" marL="0">
+            <a:pPr marL="0" indent="0" algn="r">
               <a:buNone/>
             </a:pPr>
             <a:r>
@@ -5191,6 +4931,7 @@
         <a:solidFill>
           <a:srgbClr val="F8FAFC"/>
         </a:solidFill>
+        <a:effectLst/>
       </p:bgPr>
     </p:bg>
     <p:spTree>
@@ -5228,7 +4969,7 @@
           <a:bodyPr wrap="square" rtlCol="0" anchor="ctr"/>
           <a:lstStyle/>
           <a:p>
-            <a:pPr indent="0" marL="0">
+            <a:pPr marL="0" indent="0">
               <a:buNone/>
             </a:pPr>
             <a:r>
@@ -5267,7 +5008,10 @@
         </p:spPr>
         <p:txBody>
           <a:bodyPr/>
-          <a:p/>
+          <a:lstStyle/>
+          <a:p>
+            <a:endParaRPr/>
+          </a:p>
         </p:txBody>
       </p:sp>
       <p:sp>
@@ -5291,7 +5035,7 @@
           <a:bodyPr wrap="square" rtlCol="0" anchor="ctr"/>
           <a:lstStyle/>
           <a:p>
-            <a:pPr algn="r" indent="0" marL="0">
+            <a:pPr marL="0" indent="0" algn="r">
               <a:buNone/>
             </a:pPr>
             <a:r>
@@ -5308,15 +5052,15 @@
       </p:sp>
       <p:pic>
         <p:nvPicPr>
-          <p:cNvPr id="5" name="Image 0" descr="images/er_diagram.png">    </p:cNvPr>
+          <p:cNvPr id="5" name="Image 0" descr="images/er_diagram.png"/>
           <p:cNvPicPr>
             <a:picLocks noChangeAspect="1"/>
           </p:cNvPicPr>
           <p:nvPr/>
         </p:nvPicPr>
         <p:blipFill>
-          <a:blip r:embed="rId1"/>
-          <a:srcRect l="0" r="0" t="0" b="0"/>
+          <a:blip r:embed="rId3"/>
+          <a:srcRect/>
           <a:stretch/>
         </p:blipFill>
         <p:spPr>
@@ -5345,6 +5089,7 @@
         <a:solidFill>
           <a:srgbClr val="F8FAFC"/>
         </a:solidFill>
+        <a:effectLst/>
       </p:bgPr>
     </p:bg>
     <p:spTree>
@@ -5382,7 +5127,7 @@
           <a:bodyPr wrap="square" rtlCol="0" anchor="ctr"/>
           <a:lstStyle/>
           <a:p>
-            <a:pPr indent="0" marL="0">
+            <a:pPr marL="0" indent="0">
               <a:buNone/>
             </a:pPr>
             <a:r>
@@ -5421,7 +5166,10 @@
         </p:spPr>
         <p:txBody>
           <a:bodyPr/>
-          <a:p/>
+          <a:lstStyle/>
+          <a:p>
+            <a:endParaRPr/>
+          </a:p>
         </p:txBody>
       </p:sp>
       <p:sp>
@@ -5445,7 +5193,7 @@
           <a:bodyPr wrap="square" rtlCol="0" anchor="ctr"/>
           <a:lstStyle/>
           <a:p>
-            <a:pPr algn="r" indent="0" marL="0">
+            <a:pPr marL="0" indent="0" algn="r">
               <a:buNone/>
             </a:pPr>
             <a:r>
@@ -5479,7 +5227,7 @@
           </a:solidFill>
           <a:ln/>
           <a:effectLst>
-            <a:outerShdw sx="100000" sy="100000" kx="0" ky="0" algn="bl" rotWithShape="0" blurRad="38100" dist="12700" dir="8100000">
+            <a:outerShdw blurRad="38100" dist="12700" dir="8100000" algn="bl" rotWithShape="0">
               <a:srgbClr val="000000">
                 <a:alpha val="6000"/>
               </a:srgbClr>
@@ -5488,7 +5236,10 @@
         </p:spPr>
         <p:txBody>
           <a:bodyPr/>
-          <a:p/>
+          <a:lstStyle/>
+          <a:p>
+            <a:endParaRPr/>
+          </a:p>
         </p:txBody>
       </p:sp>
       <p:sp>
@@ -5512,7 +5263,7 @@
           <a:bodyPr wrap="square" rtlCol="0" anchor="ctr"/>
           <a:lstStyle/>
           <a:p>
-            <a:pPr indent="0" marL="0">
+            <a:pPr marL="0" indent="0">
               <a:buNone/>
             </a:pPr>
             <a:r>
@@ -5551,7 +5302,7 @@
           <a:bodyPr wrap="square" rtlCol="0" anchor="ctr"/>
           <a:lstStyle/>
           <a:p>
-            <a:pPr indent="0" marL="0">
+            <a:pPr marL="0" indent="0">
               <a:buNone/>
             </a:pPr>
             <a:r>
@@ -5587,7 +5338,7 @@
           <a:bodyPr wrap="square" rtlCol="0" anchor="ctr"/>
           <a:lstStyle/>
           <a:p>
-            <a:pPr indent="0" marL="0">
+            <a:pPr marL="0" indent="0">
               <a:buNone/>
             </a:pPr>
             <a:r>
@@ -5623,7 +5374,7 @@
           <a:bodyPr wrap="square" rtlCol="0" anchor="ctr"/>
           <a:lstStyle/>
           <a:p>
-            <a:pPr algn="r" indent="0" marL="0">
+            <a:pPr marL="0" indent="0" algn="r">
               <a:buNone/>
             </a:pPr>
             <a:r>
@@ -5660,7 +5411,7 @@
           </a:solidFill>
           <a:ln/>
           <a:effectLst>
-            <a:outerShdw sx="100000" sy="100000" kx="0" ky="0" algn="bl" rotWithShape="0" blurRad="38100" dist="12700" dir="8100000">
+            <a:outerShdw blurRad="38100" dist="12700" dir="8100000" algn="bl" rotWithShape="0">
               <a:srgbClr val="000000">
                 <a:alpha val="6000"/>
               </a:srgbClr>
@@ -5669,7 +5420,10 @@
         </p:spPr>
         <p:txBody>
           <a:bodyPr/>
-          <a:p/>
+          <a:lstStyle/>
+          <a:p>
+            <a:endParaRPr/>
+          </a:p>
         </p:txBody>
       </p:sp>
       <p:sp>
@@ -5693,7 +5447,7 @@
           <a:bodyPr wrap="square" rtlCol="0" anchor="ctr"/>
           <a:lstStyle/>
           <a:p>
-            <a:pPr indent="0" marL="0">
+            <a:pPr marL="0" indent="0">
               <a:buNone/>
             </a:pPr>
             <a:r>
@@ -5732,7 +5486,7 @@
           <a:bodyPr wrap="square" rtlCol="0" anchor="ctr"/>
           <a:lstStyle/>
           <a:p>
-            <a:pPr indent="0" marL="0">
+            <a:pPr marL="0" indent="0">
               <a:buNone/>
             </a:pPr>
             <a:r>
@@ -5768,7 +5522,7 @@
           <a:bodyPr wrap="square" rtlCol="0" anchor="ctr"/>
           <a:lstStyle/>
           <a:p>
-            <a:pPr indent="0" marL="0">
+            <a:pPr marL="0" indent="0">
               <a:buNone/>
             </a:pPr>
             <a:r>
@@ -5804,7 +5558,7 @@
           <a:bodyPr wrap="square" rtlCol="0" anchor="ctr"/>
           <a:lstStyle/>
           <a:p>
-            <a:pPr algn="r" indent="0" marL="0">
+            <a:pPr marL="0" indent="0" algn="r">
               <a:buNone/>
             </a:pPr>
             <a:r>
@@ -5841,7 +5595,7 @@
           </a:solidFill>
           <a:ln/>
           <a:effectLst>
-            <a:outerShdw sx="100000" sy="100000" kx="0" ky="0" algn="bl" rotWithShape="0" blurRad="38100" dist="12700" dir="8100000">
+            <a:outerShdw blurRad="38100" dist="12700" dir="8100000" algn="bl" rotWithShape="0">
               <a:srgbClr val="000000">
                 <a:alpha val="6000"/>
               </a:srgbClr>
@@ -5850,7 +5604,10 @@
         </p:spPr>
         <p:txBody>
           <a:bodyPr/>
-          <a:p/>
+          <a:lstStyle/>
+          <a:p>
+            <a:endParaRPr/>
+          </a:p>
         </p:txBody>
       </p:sp>
       <p:sp>
@@ -5874,7 +5631,7 @@
           <a:bodyPr wrap="square" rtlCol="0" anchor="ctr"/>
           <a:lstStyle/>
           <a:p>
-            <a:pPr indent="0" marL="0">
+            <a:pPr marL="0" indent="0">
               <a:buNone/>
             </a:pPr>
             <a:r>
@@ -5913,7 +5670,7 @@
           <a:bodyPr wrap="square" rtlCol="0" anchor="ctr"/>
           <a:lstStyle/>
           <a:p>
-            <a:pPr indent="0" marL="0">
+            <a:pPr marL="0" indent="0">
               <a:buNone/>
             </a:pPr>
             <a:r>
@@ -5949,7 +5706,7 @@
           <a:bodyPr wrap="square" rtlCol="0" anchor="ctr"/>
           <a:lstStyle/>
           <a:p>
-            <a:pPr indent="0" marL="0">
+            <a:pPr marL="0" indent="0">
               <a:buNone/>
             </a:pPr>
             <a:r>
@@ -5985,7 +5742,7 @@
           <a:bodyPr wrap="square" rtlCol="0" anchor="ctr"/>
           <a:lstStyle/>
           <a:p>
-            <a:pPr algn="r" indent="0" marL="0">
+            <a:pPr marL="0" indent="0" algn="r">
               <a:buNone/>
             </a:pPr>
             <a:r>
@@ -6022,7 +5779,7 @@
           </a:solidFill>
           <a:ln/>
           <a:effectLst>
-            <a:outerShdw sx="100000" sy="100000" kx="0" ky="0" algn="bl" rotWithShape="0" blurRad="38100" dist="12700" dir="8100000">
+            <a:outerShdw blurRad="38100" dist="12700" dir="8100000" algn="bl" rotWithShape="0">
               <a:srgbClr val="000000">
                 <a:alpha val="6000"/>
               </a:srgbClr>
@@ -6031,7 +5788,10 @@
         </p:spPr>
         <p:txBody>
           <a:bodyPr/>
-          <a:p/>
+          <a:lstStyle/>
+          <a:p>
+            <a:endParaRPr/>
+          </a:p>
         </p:txBody>
       </p:sp>
       <p:sp>
@@ -6055,7 +5815,7 @@
           <a:bodyPr wrap="square" rtlCol="0" anchor="ctr"/>
           <a:lstStyle/>
           <a:p>
-            <a:pPr indent="0" marL="0">
+            <a:pPr marL="0" indent="0">
               <a:buNone/>
             </a:pPr>
             <a:r>
@@ -6094,7 +5854,7 @@
           <a:bodyPr wrap="square" rtlCol="0" anchor="ctr"/>
           <a:lstStyle/>
           <a:p>
-            <a:pPr indent="0" marL="0">
+            <a:pPr marL="0" indent="0">
               <a:buNone/>
             </a:pPr>
             <a:r>
@@ -6130,7 +5890,7 @@
           <a:bodyPr wrap="square" rtlCol="0" anchor="ctr"/>
           <a:lstStyle/>
           <a:p>
-            <a:pPr indent="0" marL="0">
+            <a:pPr marL="0" indent="0">
               <a:buNone/>
             </a:pPr>
             <a:r>
@@ -6166,7 +5926,7 @@
           <a:bodyPr wrap="square" rtlCol="0" anchor="ctr"/>
           <a:lstStyle/>
           <a:p>
-            <a:pPr algn="r" indent="0" marL="0">
+            <a:pPr marL="0" indent="0" algn="r">
               <a:buNone/>
             </a:pPr>
             <a:r>
@@ -6203,7 +5963,7 @@
           </a:solidFill>
           <a:ln/>
           <a:effectLst>
-            <a:outerShdw sx="100000" sy="100000" kx="0" ky="0" algn="bl" rotWithShape="0" blurRad="38100" dist="12700" dir="8100000">
+            <a:outerShdw blurRad="38100" dist="12700" dir="8100000" algn="bl" rotWithShape="0">
               <a:srgbClr val="000000">
                 <a:alpha val="6000"/>
               </a:srgbClr>
@@ -6212,7 +5972,10 @@
         </p:spPr>
         <p:txBody>
           <a:bodyPr/>
-          <a:p/>
+          <a:lstStyle/>
+          <a:p>
+            <a:endParaRPr/>
+          </a:p>
         </p:txBody>
       </p:sp>
       <p:sp>
@@ -6236,7 +5999,7 @@
           <a:bodyPr wrap="square" rtlCol="0" anchor="ctr"/>
           <a:lstStyle/>
           <a:p>
-            <a:pPr indent="0" marL="0">
+            <a:pPr marL="0" indent="0">
               <a:buNone/>
             </a:pPr>
             <a:r>
@@ -6275,7 +6038,7 @@
           <a:bodyPr wrap="square" rtlCol="0" anchor="ctr"/>
           <a:lstStyle/>
           <a:p>
-            <a:pPr indent="0" marL="0">
+            <a:pPr marL="0" indent="0">
               <a:buNone/>
             </a:pPr>
             <a:r>
@@ -6311,7 +6074,7 @@
           <a:bodyPr wrap="square" rtlCol="0" anchor="ctr"/>
           <a:lstStyle/>
           <a:p>
-            <a:pPr indent="0" marL="0">
+            <a:pPr marL="0" indent="0">
               <a:buNone/>
             </a:pPr>
             <a:r>
@@ -6347,7 +6110,7 @@
           <a:bodyPr wrap="square" rtlCol="0" anchor="ctr"/>
           <a:lstStyle/>
           <a:p>
-            <a:pPr algn="r" indent="0" marL="0">
+            <a:pPr marL="0" indent="0" algn="r">
               <a:buNone/>
             </a:pPr>
             <a:r>
@@ -6384,7 +6147,7 @@
           </a:solidFill>
           <a:ln/>
           <a:effectLst>
-            <a:outerShdw sx="100000" sy="100000" kx="0" ky="0" algn="bl" rotWithShape="0" blurRad="38100" dist="12700" dir="8100000">
+            <a:outerShdw blurRad="38100" dist="12700" dir="8100000" algn="bl" rotWithShape="0">
               <a:srgbClr val="000000">
                 <a:alpha val="6000"/>
               </a:srgbClr>
@@ -6393,7 +6156,10 @@
         </p:spPr>
         <p:txBody>
           <a:bodyPr/>
-          <a:p/>
+          <a:lstStyle/>
+          <a:p>
+            <a:endParaRPr/>
+          </a:p>
         </p:txBody>
       </p:sp>
       <p:sp>
@@ -6417,7 +6183,7 @@
           <a:bodyPr wrap="square" rtlCol="0" anchor="ctr"/>
           <a:lstStyle/>
           <a:p>
-            <a:pPr indent="0" marL="0">
+            <a:pPr marL="0" indent="0">
               <a:buNone/>
             </a:pPr>
             <a:r>
@@ -6456,7 +6222,7 @@
           <a:bodyPr wrap="square" rtlCol="0" anchor="ctr"/>
           <a:lstStyle/>
           <a:p>
-            <a:pPr indent="0" marL="0">
+            <a:pPr marL="0" indent="0">
               <a:buNone/>
             </a:pPr>
             <a:r>
@@ -6492,7 +6258,7 @@
           <a:bodyPr wrap="square" rtlCol="0" anchor="ctr"/>
           <a:lstStyle/>
           <a:p>
-            <a:pPr indent="0" marL="0">
+            <a:pPr marL="0" indent="0">
               <a:buNone/>
             </a:pPr>
             <a:r>
@@ -6528,7 +6294,7 @@
           <a:bodyPr wrap="square" rtlCol="0" anchor="ctr"/>
           <a:lstStyle/>
           <a:p>
-            <a:pPr algn="r" indent="0" marL="0">
+            <a:pPr marL="0" indent="0" algn="r">
               <a:buNone/>
             </a:pPr>
             <a:r>
@@ -6565,7 +6331,7 @@
           </a:solidFill>
           <a:ln/>
           <a:effectLst>
-            <a:outerShdw sx="100000" sy="100000" kx="0" ky="0" algn="bl" rotWithShape="0" blurRad="38100" dist="12700" dir="8100000">
+            <a:outerShdw blurRad="38100" dist="12700" dir="8100000" algn="bl" rotWithShape="0">
               <a:srgbClr val="000000">
                 <a:alpha val="6000"/>
               </a:srgbClr>
@@ -6574,7 +6340,10 @@
         </p:spPr>
         <p:txBody>
           <a:bodyPr/>
-          <a:p/>
+          <a:lstStyle/>
+          <a:p>
+            <a:endParaRPr/>
+          </a:p>
         </p:txBody>
       </p:sp>
       <p:sp>
@@ -6598,7 +6367,7 @@
           <a:bodyPr wrap="square" rtlCol="0" anchor="ctr"/>
           <a:lstStyle/>
           <a:p>
-            <a:pPr indent="0" marL="0">
+            <a:pPr marL="0" indent="0">
               <a:buNone/>
             </a:pPr>
             <a:r>
@@ -6637,7 +6406,7 @@
           <a:bodyPr wrap="square" rtlCol="0" anchor="ctr"/>
           <a:lstStyle/>
           <a:p>
-            <a:pPr indent="0" marL="0">
+            <a:pPr marL="0" indent="0">
               <a:buNone/>
             </a:pPr>
             <a:r>
@@ -6673,7 +6442,7 @@
           <a:bodyPr wrap="square" rtlCol="0" anchor="ctr"/>
           <a:lstStyle/>
           <a:p>
-            <a:pPr indent="0" marL="0">
+            <a:pPr marL="0" indent="0">
               <a:buNone/>
             </a:pPr>
             <a:r>
@@ -6709,7 +6478,7 @@
           <a:bodyPr wrap="square" rtlCol="0" anchor="ctr"/>
           <a:lstStyle/>
           <a:p>
-            <a:pPr algn="r" indent="0" marL="0">
+            <a:pPr marL="0" indent="0" algn="r">
               <a:buNone/>
             </a:pPr>
             <a:r>
@@ -6743,6 +6512,7 @@
         <a:solidFill>
           <a:srgbClr val="1A1A2E"/>
         </a:solidFill>
+        <a:effectLst/>
       </p:bgPr>
     </p:bg>
     <p:spTree>
@@ -6780,7 +6550,10 @@
         </p:spPr>
         <p:txBody>
           <a:bodyPr/>
-          <a:p/>
+          <a:lstStyle/>
+          <a:p>
+            <a:endParaRPr/>
+          </a:p>
         </p:txBody>
       </p:sp>
       <p:sp>
@@ -6804,7 +6577,7 @@
           <a:bodyPr wrap="square" rtlCol="0" anchor="ctr"/>
           <a:lstStyle/>
           <a:p>
-            <a:pPr indent="0" marL="0">
+            <a:pPr marL="0" indent="0">
               <a:buNone/>
             </a:pPr>
             <a:r>
@@ -6843,7 +6616,7 @@
           <a:bodyPr wrap="square" rtlCol="0" anchor="ctr"/>
           <a:lstStyle/>
           <a:p>
-            <a:pPr indent="0" marL="0">
+            <a:pPr marL="0" indent="0">
               <a:buNone/>
             </a:pPr>
             <a:r>
@@ -6879,7 +6652,7 @@
           <a:bodyPr wrap="square" rtlCol="0" anchor="ctr"/>
           <a:lstStyle/>
           <a:p>
-            <a:pPr algn="r" indent="0" marL="0">
+            <a:pPr marL="0" indent="0" algn="r">
               <a:buNone/>
             </a:pPr>
             <a:r>
@@ -6910,6 +6683,7 @@
         <a:solidFill>
           <a:srgbClr val="F8FAFC"/>
         </a:solidFill>
+        <a:effectLst/>
       </p:bgPr>
     </p:bg>
     <p:spTree>
@@ -6947,7 +6721,7 @@
           <a:bodyPr wrap="square" rtlCol="0" anchor="ctr"/>
           <a:lstStyle/>
           <a:p>
-            <a:pPr indent="0" marL="0">
+            <a:pPr marL="0" indent="0">
               <a:buNone/>
             </a:pPr>
             <a:r>
@@ -6986,7 +6760,10 @@
         </p:spPr>
         <p:txBody>
           <a:bodyPr/>
-          <a:p/>
+          <a:lstStyle/>
+          <a:p>
+            <a:endParaRPr/>
+          </a:p>
         </p:txBody>
       </p:sp>
       <p:sp>
@@ -7010,7 +6787,7 @@
           <a:bodyPr wrap="square" rtlCol="0" anchor="ctr"/>
           <a:lstStyle/>
           <a:p>
-            <a:pPr algn="r" indent="0" marL="0">
+            <a:pPr marL="0" indent="0" algn="r">
               <a:buNone/>
             </a:pPr>
             <a:r>
@@ -7044,7 +6821,7 @@
           </a:solidFill>
           <a:ln/>
           <a:effectLst>
-            <a:outerShdw sx="100000" sy="100000" kx="0" ky="0" algn="bl" rotWithShape="0" blurRad="38100" dist="12700" dir="8100000">
+            <a:outerShdw blurRad="38100" dist="12700" dir="8100000" algn="bl" rotWithShape="0">
               <a:srgbClr val="000000">
                 <a:alpha val="6000"/>
               </a:srgbClr>
@@ -7053,7 +6830,10 @@
         </p:spPr>
         <p:txBody>
           <a:bodyPr/>
-          <a:p/>
+          <a:lstStyle/>
+          <a:p>
+            <a:endParaRPr/>
+          </a:p>
         </p:txBody>
       </p:sp>
       <p:sp>
@@ -7077,7 +6857,7 @@
           <a:bodyPr wrap="square" rtlCol="0" anchor="ctr"/>
           <a:lstStyle/>
           <a:p>
-            <a:pPr algn="ctr" indent="0" marL="0">
+            <a:pPr marL="0" indent="0" algn="ctr">
               <a:buNone/>
             </a:pPr>
             <a:r>
@@ -7094,7 +6874,7 @@
             <a:endParaRPr lang="en-US" sz="1200" dirty="0"/>
           </a:p>
           <a:p>
-            <a:pPr algn="ctr" indent="0" marL="0">
+            <a:pPr marL="0" indent="0" algn="ctr">
               <a:buNone/>
             </a:pPr>
             <a:r>
@@ -7133,7 +6913,7 @@
           <a:bodyPr wrap="square" rtlCol="0" anchor="ctr"/>
           <a:lstStyle/>
           <a:p>
-            <a:pPr algn="ctr" indent="0" marL="0">
+            <a:pPr marL="0" indent="0" algn="ctr">
               <a:buNone/>
             </a:pPr>
             <a:r>
@@ -7170,7 +6950,7 @@
           </a:solidFill>
           <a:ln/>
           <a:effectLst>
-            <a:outerShdw sx="100000" sy="100000" kx="0" ky="0" algn="bl" rotWithShape="0" blurRad="38100" dist="12700" dir="8100000">
+            <a:outerShdw blurRad="38100" dist="12700" dir="8100000" algn="bl" rotWithShape="0">
               <a:srgbClr val="000000">
                 <a:alpha val="6000"/>
               </a:srgbClr>
@@ -7179,7 +6959,10 @@
         </p:spPr>
         <p:txBody>
           <a:bodyPr/>
-          <a:p/>
+          <a:lstStyle/>
+          <a:p>
+            <a:endParaRPr/>
+          </a:p>
         </p:txBody>
       </p:sp>
       <p:sp>
@@ -7203,7 +6986,7 @@
           <a:bodyPr wrap="square" rtlCol="0" anchor="ctr"/>
           <a:lstStyle/>
           <a:p>
-            <a:pPr algn="ctr" indent="0" marL="0">
+            <a:pPr marL="0" indent="0" algn="ctr">
               <a:buNone/>
             </a:pPr>
             <a:r>
@@ -7220,7 +7003,7 @@
             <a:endParaRPr lang="en-US" sz="1200" dirty="0"/>
           </a:p>
           <a:p>
-            <a:pPr algn="ctr" indent="0" marL="0">
+            <a:pPr marL="0" indent="0" algn="ctr">
               <a:buNone/>
             </a:pPr>
             <a:r>
@@ -7259,7 +7042,7 @@
           <a:bodyPr wrap="square" rtlCol="0" anchor="ctr"/>
           <a:lstStyle/>
           <a:p>
-            <a:pPr algn="ctr" indent="0" marL="0">
+            <a:pPr marL="0" indent="0" algn="ctr">
               <a:buNone/>
             </a:pPr>
             <a:r>
@@ -7296,7 +7079,7 @@
           </a:solidFill>
           <a:ln/>
           <a:effectLst>
-            <a:outerShdw sx="100000" sy="100000" kx="0" ky="0" algn="bl" rotWithShape="0" blurRad="38100" dist="12700" dir="8100000">
+            <a:outerShdw blurRad="38100" dist="12700" dir="8100000" algn="bl" rotWithShape="0">
               <a:srgbClr val="000000">
                 <a:alpha val="6000"/>
               </a:srgbClr>
@@ -7305,7 +7088,10 @@
         </p:spPr>
         <p:txBody>
           <a:bodyPr/>
-          <a:p/>
+          <a:lstStyle/>
+          <a:p>
+            <a:endParaRPr/>
+          </a:p>
         </p:txBody>
       </p:sp>
       <p:sp>
@@ -7329,7 +7115,7 @@
           <a:bodyPr wrap="square" rtlCol="0" anchor="ctr"/>
           <a:lstStyle/>
           <a:p>
-            <a:pPr algn="ctr" indent="0" marL="0">
+            <a:pPr marL="0" indent="0" algn="ctr">
               <a:buNone/>
             </a:pPr>
             <a:r>
@@ -7346,7 +7132,7 @@
             <a:endParaRPr lang="en-US" sz="1200" dirty="0"/>
           </a:p>
           <a:p>
-            <a:pPr algn="ctr" indent="0" marL="0">
+            <a:pPr marL="0" indent="0" algn="ctr">
               <a:buNone/>
             </a:pPr>
             <a:r>
@@ -7385,7 +7171,7 @@
           <a:bodyPr wrap="square" rtlCol="0" anchor="ctr"/>
           <a:lstStyle/>
           <a:p>
-            <a:pPr algn="ctr" indent="0" marL="0">
+            <a:pPr marL="0" indent="0" algn="ctr">
               <a:buNone/>
             </a:pPr>
             <a:r>
@@ -7422,7 +7208,7 @@
           </a:solidFill>
           <a:ln/>
           <a:effectLst>
-            <a:outerShdw sx="100000" sy="100000" kx="0" ky="0" algn="bl" rotWithShape="0" blurRad="38100" dist="12700" dir="8100000">
+            <a:outerShdw blurRad="38100" dist="12700" dir="8100000" algn="bl" rotWithShape="0">
               <a:srgbClr val="000000">
                 <a:alpha val="6000"/>
               </a:srgbClr>
@@ -7431,7 +7217,10 @@
         </p:spPr>
         <p:txBody>
           <a:bodyPr/>
-          <a:p/>
+          <a:lstStyle/>
+          <a:p>
+            <a:endParaRPr/>
+          </a:p>
         </p:txBody>
       </p:sp>
       <p:sp>
@@ -7455,7 +7244,7 @@
           <a:bodyPr wrap="square" rtlCol="0" anchor="ctr"/>
           <a:lstStyle/>
           <a:p>
-            <a:pPr algn="ctr" indent="0" marL="0">
+            <a:pPr marL="0" indent="0" algn="ctr">
               <a:buNone/>
             </a:pPr>
             <a:r>
@@ -7472,7 +7261,7 @@
             <a:endParaRPr lang="en-US" sz="1200" dirty="0"/>
           </a:p>
           <a:p>
-            <a:pPr algn="ctr" indent="0" marL="0">
+            <a:pPr marL="0" indent="0" algn="ctr">
               <a:buNone/>
             </a:pPr>
             <a:r>
@@ -7511,7 +7300,7 @@
           <a:bodyPr wrap="square" rtlCol="0" anchor="ctr"/>
           <a:lstStyle/>
           <a:p>
-            <a:pPr algn="ctr" indent="0" marL="0">
+            <a:pPr marL="0" indent="0" algn="ctr">
               <a:buNone/>
             </a:pPr>
             <a:r>
@@ -7548,7 +7337,7 @@
           </a:solidFill>
           <a:ln/>
           <a:effectLst>
-            <a:outerShdw sx="100000" sy="100000" kx="0" ky="0" algn="bl" rotWithShape="0" blurRad="38100" dist="12700" dir="8100000">
+            <a:outerShdw blurRad="38100" dist="12700" dir="8100000" algn="bl" rotWithShape="0">
               <a:srgbClr val="000000">
                 <a:alpha val="6000"/>
               </a:srgbClr>
@@ -7557,7 +7346,10 @@
         </p:spPr>
         <p:txBody>
           <a:bodyPr/>
-          <a:p/>
+          <a:lstStyle/>
+          <a:p>
+            <a:endParaRPr/>
+          </a:p>
         </p:txBody>
       </p:sp>
       <p:sp>
@@ -7581,7 +7373,7 @@
           <a:bodyPr wrap="square" rtlCol="0" anchor="ctr"/>
           <a:lstStyle/>
           <a:p>
-            <a:pPr algn="ctr" indent="0" marL="0">
+            <a:pPr marL="0" indent="0" algn="ctr">
               <a:buNone/>
             </a:pPr>
             <a:r>
@@ -7598,7 +7390,7 @@
             <a:endParaRPr lang="en-US" sz="1200" dirty="0"/>
           </a:p>
           <a:p>
-            <a:pPr algn="ctr" indent="0" marL="0">
+            <a:pPr marL="0" indent="0" algn="ctr">
               <a:buNone/>
             </a:pPr>
             <a:r>
@@ -7637,7 +7429,7 @@
           <a:bodyPr wrap="square" rtlCol="0" anchor="ctr"/>
           <a:lstStyle/>
           <a:p>
-            <a:pPr algn="ctr" indent="0" marL="0">
+            <a:pPr marL="0" indent="0" algn="ctr">
               <a:buNone/>
             </a:pPr>
             <a:r>
@@ -7674,7 +7466,7 @@
           </a:solidFill>
           <a:ln/>
           <a:effectLst>
-            <a:outerShdw sx="100000" sy="100000" kx="0" ky="0" algn="bl" rotWithShape="0" blurRad="38100" dist="12700" dir="8100000">
+            <a:outerShdw blurRad="38100" dist="12700" dir="8100000" algn="bl" rotWithShape="0">
               <a:srgbClr val="000000">
                 <a:alpha val="6000"/>
               </a:srgbClr>
@@ -7683,7 +7475,10 @@
         </p:spPr>
         <p:txBody>
           <a:bodyPr/>
-          <a:p/>
+          <a:lstStyle/>
+          <a:p>
+            <a:endParaRPr/>
+          </a:p>
         </p:txBody>
       </p:sp>
       <p:sp>
@@ -7707,7 +7502,7 @@
           <a:bodyPr wrap="square" rtlCol="0" anchor="ctr"/>
           <a:lstStyle/>
           <a:p>
-            <a:pPr algn="ctr" indent="0" marL="0">
+            <a:pPr marL="0" indent="0" algn="ctr">
               <a:buNone/>
             </a:pPr>
             <a:r>
@@ -7724,7 +7519,7 @@
             <a:endParaRPr lang="en-US" sz="1200" dirty="0"/>
           </a:p>
           <a:p>
-            <a:pPr algn="ctr" indent="0" marL="0">
+            <a:pPr marL="0" indent="0" algn="ctr">
               <a:buNone/>
             </a:pPr>
             <a:r>
@@ -7765,7 +7560,10 @@
         </p:spPr>
         <p:txBody>
           <a:bodyPr/>
-          <a:p/>
+          <a:lstStyle/>
+          <a:p>
+            <a:endParaRPr/>
+          </a:p>
         </p:txBody>
       </p:sp>
       <p:sp>
@@ -7789,7 +7587,7 @@
           <a:bodyPr wrap="square" rtlCol="0" anchor="ctr"/>
           <a:lstStyle/>
           <a:p>
-            <a:pPr algn="ctr" indent="0" marL="0">
+            <a:pPr marL="0" indent="0" algn="ctr">
               <a:buNone/>
             </a:pPr>
             <a:r>
@@ -7830,7 +7628,10 @@
         </p:spPr>
         <p:txBody>
           <a:bodyPr/>
-          <a:p/>
+          <a:lstStyle/>
+          <a:p>
+            <a:endParaRPr/>
+          </a:p>
         </p:txBody>
       </p:sp>
       <p:sp>
@@ -7854,7 +7655,7 @@
           <a:bodyPr wrap="square" rtlCol="0" anchor="ctr"/>
           <a:lstStyle/>
           <a:p>
-            <a:pPr algn="ctr" indent="0" marL="0">
+            <a:pPr marL="0" indent="0" algn="ctr">
               <a:buNone/>
             </a:pPr>
             <a:r>
@@ -7893,7 +7694,7 @@
           <a:bodyPr wrap="square" rtlCol="0" anchor="ctr"/>
           <a:lstStyle/>
           <a:p>
-            <a:pPr indent="0" marL="0">
+            <a:pPr marL="0" indent="0">
               <a:buNone/>
             </a:pPr>
             <a:r>
@@ -7929,7 +7730,7 @@
           <a:bodyPr wrap="square" rtlCol="0" anchor="ctr"/>
           <a:lstStyle/>
           <a:p>
-            <a:pPr indent="0" marL="0">
+            <a:pPr marL="0" indent="0">
               <a:buNone/>
             </a:pPr>
             <a:r>
@@ -7965,7 +7766,7 @@
           <a:bodyPr wrap="square" rtlCol="0" anchor="ctr"/>
           <a:lstStyle/>
           <a:p>
-            <a:pPr indent="0" marL="0">
+            <a:pPr marL="0" indent="0">
               <a:buNone/>
             </a:pPr>
             <a:r>
@@ -8001,7 +7802,7 @@
           <a:bodyPr wrap="square" rtlCol="0" anchor="ctr"/>
           <a:lstStyle/>
           <a:p>
-            <a:pPr indent="0" marL="0">
+            <a:pPr marL="0" indent="0">
               <a:buNone/>
             </a:pPr>
             <a:r>
@@ -8037,7 +7838,7 @@
           <a:bodyPr wrap="square" rtlCol="0" anchor="ctr"/>
           <a:lstStyle/>
           <a:p>
-            <a:pPr indent="0" marL="0">
+            <a:pPr marL="0" indent="0">
               <a:buNone/>
             </a:pPr>
             <a:r>
@@ -8073,7 +7874,7 @@
           <a:bodyPr wrap="square" rtlCol="0" anchor="ctr"/>
           <a:lstStyle/>
           <a:p>
-            <a:pPr indent="0" marL="0">
+            <a:pPr marL="0" indent="0">
               <a:buNone/>
             </a:pPr>
             <a:r>
@@ -8104,6 +7905,7 @@
         <a:solidFill>
           <a:srgbClr val="F8FAFC"/>
         </a:solidFill>
+        <a:effectLst/>
       </p:bgPr>
     </p:bg>
     <p:spTree>
@@ -8141,7 +7943,7 @@
           <a:bodyPr wrap="square" rtlCol="0" anchor="ctr"/>
           <a:lstStyle/>
           <a:p>
-            <a:pPr indent="0" marL="0">
+            <a:pPr marL="0" indent="0">
               <a:buNone/>
             </a:pPr>
             <a:r>
@@ -8180,7 +7982,10 @@
         </p:spPr>
         <p:txBody>
           <a:bodyPr/>
-          <a:p/>
+          <a:lstStyle/>
+          <a:p>
+            <a:endParaRPr/>
+          </a:p>
         </p:txBody>
       </p:sp>
       <p:sp>
@@ -8204,7 +8009,7 @@
           <a:bodyPr wrap="square" rtlCol="0" anchor="ctr"/>
           <a:lstStyle/>
           <a:p>
-            <a:pPr algn="r" indent="0" marL="0">
+            <a:pPr marL="0" indent="0" algn="r">
               <a:buNone/>
             </a:pPr>
             <a:r>
@@ -8238,7 +8043,7 @@
           </a:solidFill>
           <a:ln/>
           <a:effectLst>
-            <a:outerShdw sx="100000" sy="100000" kx="0" ky="0" algn="bl" rotWithShape="0" blurRad="38100" dist="12700" dir="8100000">
+            <a:outerShdw blurRad="38100" dist="12700" dir="8100000" algn="bl" rotWithShape="0">
               <a:srgbClr val="000000">
                 <a:alpha val="6000"/>
               </a:srgbClr>
@@ -8247,7 +8052,10 @@
         </p:spPr>
         <p:txBody>
           <a:bodyPr/>
-          <a:p/>
+          <a:lstStyle/>
+          <a:p>
+            <a:endParaRPr/>
+          </a:p>
         </p:txBody>
       </p:sp>
       <p:sp>
@@ -8271,7 +8079,7 @@
           <a:bodyPr wrap="square" rtlCol="0" anchor="ctr"/>
           <a:lstStyle/>
           <a:p>
-            <a:pPr indent="0" marL="0">
+            <a:pPr marL="0" indent="0">
               <a:buNone/>
             </a:pPr>
             <a:r>
@@ -8310,7 +8118,7 @@
           <a:bodyPr wrap="square" rtlCol="0" anchor="ctr"/>
           <a:lstStyle/>
           <a:p>
-            <a:pPr indent="0" marL="0">
+            <a:pPr marL="0" indent="0">
               <a:buNone/>
             </a:pPr>
             <a:r>
@@ -8346,7 +8154,7 @@
           <a:bodyPr wrap="square" rtlCol="0" anchor="ctr"/>
           <a:lstStyle/>
           <a:p>
-            <a:pPr indent="0" marL="0">
+            <a:pPr marL="0" indent="0">
               <a:buNone/>
             </a:pPr>
             <a:r>
@@ -8382,7 +8190,7 @@
           <a:bodyPr wrap="square" rtlCol="0" anchor="ctr"/>
           <a:lstStyle/>
           <a:p>
-            <a:pPr indent="0" marL="0">
+            <a:pPr marL="0" indent="0">
               <a:buNone/>
             </a:pPr>
             <a:r>
@@ -8418,7 +8226,7 @@
           <a:bodyPr wrap="square" rtlCol="0" anchor="ctr"/>
           <a:lstStyle/>
           <a:p>
-            <a:pPr indent="0" marL="0">
+            <a:pPr marL="0" indent="0">
               <a:buNone/>
             </a:pPr>
             <a:r>
@@ -8452,7 +8260,7 @@
           </a:solidFill>
           <a:ln/>
           <a:effectLst>
-            <a:outerShdw sx="100000" sy="100000" kx="0" ky="0" algn="bl" rotWithShape="0" blurRad="38100" dist="12700" dir="8100000">
+            <a:outerShdw blurRad="38100" dist="12700" dir="8100000" algn="bl" rotWithShape="0">
               <a:srgbClr val="000000">
                 <a:alpha val="6000"/>
               </a:srgbClr>
@@ -8461,7 +8269,10 @@
         </p:spPr>
         <p:txBody>
           <a:bodyPr/>
-          <a:p/>
+          <a:lstStyle/>
+          <a:p>
+            <a:endParaRPr/>
+          </a:p>
         </p:txBody>
       </p:sp>
       <p:sp>
@@ -8485,7 +8296,7 @@
           <a:bodyPr wrap="square" rtlCol="0" anchor="ctr"/>
           <a:lstStyle/>
           <a:p>
-            <a:pPr indent="0" marL="0">
+            <a:pPr marL="0" indent="0">
               <a:buNone/>
             </a:pPr>
             <a:r>
@@ -8524,7 +8335,7 @@
           <a:bodyPr wrap="square" rtlCol="0" anchor="ctr"/>
           <a:lstStyle/>
           <a:p>
-            <a:pPr indent="0" marL="0">
+            <a:pPr marL="0" indent="0">
               <a:buNone/>
             </a:pPr>
             <a:r>
@@ -8560,7 +8371,7 @@
           <a:bodyPr wrap="square" rtlCol="0" anchor="ctr"/>
           <a:lstStyle/>
           <a:p>
-            <a:pPr indent="0" marL="0">
+            <a:pPr marL="0" indent="0">
               <a:buNone/>
             </a:pPr>
             <a:r>
@@ -8596,7 +8407,7 @@
           <a:bodyPr wrap="square" rtlCol="0" anchor="ctr"/>
           <a:lstStyle/>
           <a:p>
-            <a:pPr indent="0" marL="0">
+            <a:pPr marL="0" indent="0">
               <a:buNone/>
             </a:pPr>
             <a:r>
@@ -8632,7 +8443,7 @@
           <a:bodyPr wrap="square" rtlCol="0" anchor="ctr"/>
           <a:lstStyle/>
           <a:p>
-            <a:pPr indent="0" marL="0">
+            <a:pPr marL="0" indent="0">
               <a:buNone/>
             </a:pPr>
             <a:r>
@@ -8668,7 +8479,7 @@
           <a:bodyPr wrap="square" rtlCol="0" anchor="ctr"/>
           <a:lstStyle/>
           <a:p>
-            <a:pPr indent="0" marL="0">
+            <a:pPr marL="0" indent="0">
               <a:buNone/>
             </a:pPr>
             <a:r>
@@ -8699,6 +8510,7 @@
         <a:solidFill>
           <a:srgbClr val="F8FAFC"/>
         </a:solidFill>
+        <a:effectLst/>
       </p:bgPr>
     </p:bg>
     <p:spTree>
@@ -8736,7 +8548,7 @@
           <a:bodyPr wrap="square" rtlCol="0" anchor="ctr"/>
           <a:lstStyle/>
           <a:p>
-            <a:pPr indent="0" marL="0">
+            <a:pPr marL="0" indent="0">
               <a:buNone/>
             </a:pPr>
             <a:r>
@@ -8775,7 +8587,10 @@
         </p:spPr>
         <p:txBody>
           <a:bodyPr/>
-          <a:p/>
+          <a:lstStyle/>
+          <a:p>
+            <a:endParaRPr/>
+          </a:p>
         </p:txBody>
       </p:sp>
       <p:sp>
@@ -8799,7 +8614,7 @@
           <a:bodyPr wrap="square" rtlCol="0" anchor="ctr"/>
           <a:lstStyle/>
           <a:p>
-            <a:pPr algn="r" indent="0" marL="0">
+            <a:pPr marL="0" indent="0" algn="r">
               <a:buNone/>
             </a:pPr>
             <a:r>
@@ -8833,7 +8648,7 @@
           </a:solidFill>
           <a:ln/>
           <a:effectLst>
-            <a:outerShdw sx="100000" sy="100000" kx="0" ky="0" algn="bl" rotWithShape="0" blurRad="38100" dist="12700" dir="8100000">
+            <a:outerShdw blurRad="38100" dist="12700" dir="8100000" algn="bl" rotWithShape="0">
               <a:srgbClr val="000000">
                 <a:alpha val="6000"/>
               </a:srgbClr>
@@ -8842,7 +8657,10 @@
         </p:spPr>
         <p:txBody>
           <a:bodyPr/>
-          <a:p/>
+          <a:lstStyle/>
+          <a:p>
+            <a:endParaRPr/>
+          </a:p>
         </p:txBody>
       </p:sp>
       <p:sp>
@@ -8866,7 +8684,7 @@
           <a:bodyPr wrap="square" rtlCol="0" anchor="ctr"/>
           <a:lstStyle/>
           <a:p>
-            <a:pPr indent="0" marL="0">
+            <a:pPr marL="0" indent="0">
               <a:buNone/>
             </a:pPr>
             <a:r>
@@ -8905,7 +8723,7 @@
           <a:bodyPr wrap="square" rtlCol="0" anchor="ctr"/>
           <a:lstStyle/>
           <a:p>
-            <a:pPr indent="0" marL="0">
+            <a:pPr marL="0" indent="0">
               <a:buNone/>
             </a:pPr>
             <a:r>
@@ -8941,7 +8759,7 @@
           <a:bodyPr wrap="square" rtlCol="0" anchor="ctr"/>
           <a:lstStyle/>
           <a:p>
-            <a:pPr indent="0" marL="0">
+            <a:pPr marL="0" indent="0">
               <a:buNone/>
             </a:pPr>
             <a:r>
@@ -8977,7 +8795,7 @@
           <a:bodyPr wrap="square" rtlCol="0" anchor="ctr"/>
           <a:lstStyle/>
           <a:p>
-            <a:pPr indent="0" marL="0">
+            <a:pPr marL="0" indent="0">
               <a:buNone/>
             </a:pPr>
             <a:r>
@@ -9013,7 +8831,7 @@
           <a:bodyPr wrap="square" rtlCol="0" anchor="ctr"/>
           <a:lstStyle/>
           <a:p>
-            <a:pPr indent="0" marL="0">
+            <a:pPr marL="0" indent="0">
               <a:buNone/>
             </a:pPr>
             <a:r>
@@ -9047,7 +8865,7 @@
           </a:solidFill>
           <a:ln/>
           <a:effectLst>
-            <a:outerShdw sx="100000" sy="100000" kx="0" ky="0" algn="bl" rotWithShape="0" blurRad="38100" dist="12700" dir="8100000">
+            <a:outerShdw blurRad="38100" dist="12700" dir="8100000" algn="bl" rotWithShape="0">
               <a:srgbClr val="000000">
                 <a:alpha val="6000"/>
               </a:srgbClr>
@@ -9056,7 +8874,10 @@
         </p:spPr>
         <p:txBody>
           <a:bodyPr/>
-          <a:p/>
+          <a:lstStyle/>
+          <a:p>
+            <a:endParaRPr/>
+          </a:p>
         </p:txBody>
       </p:sp>
       <p:sp>
@@ -9080,7 +8901,7 @@
           <a:bodyPr wrap="square" rtlCol="0" anchor="ctr"/>
           <a:lstStyle/>
           <a:p>
-            <a:pPr indent="0" marL="0">
+            <a:pPr marL="0" indent="0">
               <a:buNone/>
             </a:pPr>
             <a:r>
@@ -9119,7 +8940,7 @@
           <a:bodyPr wrap="square" rtlCol="0" anchor="ctr"/>
           <a:lstStyle/>
           <a:p>
-            <a:pPr indent="0" marL="0">
+            <a:pPr marL="0" indent="0">
               <a:buNone/>
             </a:pPr>
             <a:r>
@@ -9155,7 +8976,7 @@
           <a:bodyPr wrap="square" rtlCol="0" anchor="ctr"/>
           <a:lstStyle/>
           <a:p>
-            <a:pPr indent="0" marL="0">
+            <a:pPr marL="0" indent="0">
               <a:buNone/>
             </a:pPr>
             <a:r>
@@ -9191,7 +9012,7 @@
           <a:bodyPr wrap="square" rtlCol="0" anchor="ctr"/>
           <a:lstStyle/>
           <a:p>
-            <a:pPr indent="0" marL="0">
+            <a:pPr marL="0" indent="0">
               <a:buNone/>
             </a:pPr>
             <a:r>
@@ -9227,7 +9048,7 @@
           <a:bodyPr wrap="square" rtlCol="0" anchor="ctr"/>
           <a:lstStyle/>
           <a:p>
-            <a:pPr indent="0" marL="0">
+            <a:pPr marL="0" indent="0">
               <a:buNone/>
             </a:pPr>
             <a:r>
@@ -9263,7 +9084,7 @@
           <a:bodyPr wrap="square" rtlCol="0" anchor="ctr"/>
           <a:lstStyle/>
           <a:p>
-            <a:pPr indent="0" marL="0">
+            <a:pPr marL="0" indent="0">
               <a:buNone/>
             </a:pPr>
             <a:r>
@@ -9294,6 +9115,7 @@
         <a:solidFill>
           <a:srgbClr val="1A1A2E"/>
         </a:solidFill>
+        <a:effectLst/>
       </p:bgPr>
     </p:bg>
     <p:spTree>
@@ -9331,7 +9153,10 @@
         </p:spPr>
         <p:txBody>
           <a:bodyPr/>
-          <a:p/>
+          <a:lstStyle/>
+          <a:p>
+            <a:endParaRPr/>
+          </a:p>
         </p:txBody>
       </p:sp>
       <p:sp>
@@ -9355,7 +9180,7 @@
           <a:bodyPr wrap="square" rtlCol="0" anchor="ctr"/>
           <a:lstStyle/>
           <a:p>
-            <a:pPr indent="0" marL="0">
+            <a:pPr marL="0" indent="0">
               <a:buNone/>
             </a:pPr>
             <a:r>
@@ -9394,7 +9219,7 @@
           <a:bodyPr wrap="square" rtlCol="0" anchor="ctr"/>
           <a:lstStyle/>
           <a:p>
-            <a:pPr indent="0" marL="0">
+            <a:pPr marL="0" indent="0">
               <a:buNone/>
             </a:pPr>
             <a:r>
@@ -9430,7 +9255,7 @@
           <a:bodyPr wrap="square" rtlCol="0" anchor="ctr"/>
           <a:lstStyle/>
           <a:p>
-            <a:pPr algn="r" indent="0" marL="0">
+            <a:pPr marL="0" indent="0" algn="r">
               <a:buNone/>
             </a:pPr>
             <a:r>
@@ -9461,6 +9286,7 @@
         <a:solidFill>
           <a:srgbClr val="F8FAFC"/>
         </a:solidFill>
+        <a:effectLst/>
       </p:bgPr>
     </p:bg>
     <p:spTree>
@@ -9498,7 +9324,7 @@
           <a:bodyPr wrap="square" rtlCol="0" anchor="ctr"/>
           <a:lstStyle/>
           <a:p>
-            <a:pPr indent="0" marL="0">
+            <a:pPr marL="0" indent="0">
               <a:buNone/>
             </a:pPr>
             <a:r>
@@ -9537,7 +9363,10 @@
         </p:spPr>
         <p:txBody>
           <a:bodyPr/>
-          <a:p/>
+          <a:lstStyle/>
+          <a:p>
+            <a:endParaRPr/>
+          </a:p>
         </p:txBody>
       </p:sp>
       <p:sp>
@@ -9561,7 +9390,7 @@
           <a:bodyPr wrap="square" rtlCol="0" anchor="ctr"/>
           <a:lstStyle/>
           <a:p>
-            <a:pPr algn="r" indent="0" marL="0">
+            <a:pPr marL="0" indent="0" algn="r">
               <a:buNone/>
             </a:pPr>
             <a:r>
@@ -9595,7 +9424,7 @@
           </a:solidFill>
           <a:ln/>
           <a:effectLst>
-            <a:outerShdw sx="100000" sy="100000" kx="0" ky="0" algn="bl" rotWithShape="0" blurRad="38100" dist="12700" dir="8100000">
+            <a:outerShdw blurRad="38100" dist="12700" dir="8100000" algn="bl" rotWithShape="0">
               <a:srgbClr val="000000">
                 <a:alpha val="6000"/>
               </a:srgbClr>
@@ -9604,7 +9433,10 @@
         </p:spPr>
         <p:txBody>
           <a:bodyPr/>
-          <a:p/>
+          <a:lstStyle/>
+          <a:p>
+            <a:endParaRPr/>
+          </a:p>
         </p:txBody>
       </p:sp>
       <p:sp>
@@ -9628,7 +9460,7 @@
           <a:bodyPr wrap="square" rtlCol="0" anchor="ctr"/>
           <a:lstStyle/>
           <a:p>
-            <a:pPr indent="0" marL="0">
+            <a:pPr marL="0" indent="0">
               <a:buNone/>
             </a:pPr>
             <a:r>
@@ -9667,7 +9499,7 @@
           <a:bodyPr wrap="square" rtlCol="0" anchor="ctr"/>
           <a:lstStyle/>
           <a:p>
-            <a:pPr indent="0" marL="0">
+            <a:pPr marL="0" indent="0">
               <a:buNone/>
             </a:pPr>
             <a:r>
@@ -9681,7 +9513,7 @@
             <a:endParaRPr lang="en-US" sz="1100" dirty="0"/>
           </a:p>
           <a:p>
-            <a:pPr indent="0" marL="0">
+            <a:pPr marL="0" indent="0">
               <a:buNone/>
             </a:pPr>
             <a:r>
@@ -9695,7 +9527,7 @@
             <a:endParaRPr lang="en-US" sz="1100" dirty="0"/>
           </a:p>
           <a:p>
-            <a:pPr indent="0" marL="0">
+            <a:pPr marL="0" indent="0">
               <a:buNone/>
             </a:pPr>
             <a:r>
@@ -9709,7 +9541,7 @@
             <a:endParaRPr lang="en-US" sz="1100" dirty="0"/>
           </a:p>
           <a:p>
-            <a:pPr indent="0" marL="0">
+            <a:pPr marL="0" indent="0">
               <a:buNone/>
             </a:pPr>
             <a:r>
@@ -9743,7 +9575,7 @@
           </a:solidFill>
           <a:ln/>
           <a:effectLst>
-            <a:outerShdw sx="100000" sy="100000" kx="0" ky="0" algn="bl" rotWithShape="0" blurRad="38100" dist="12700" dir="8100000">
+            <a:outerShdw blurRad="38100" dist="12700" dir="8100000" algn="bl" rotWithShape="0">
               <a:srgbClr val="000000">
                 <a:alpha val="6000"/>
               </a:srgbClr>
@@ -9752,7 +9584,10 @@
         </p:spPr>
         <p:txBody>
           <a:bodyPr/>
-          <a:p/>
+          <a:lstStyle/>
+          <a:p>
+            <a:endParaRPr/>
+          </a:p>
         </p:txBody>
       </p:sp>
       <p:sp>
@@ -9776,7 +9611,7 @@
           <a:bodyPr wrap="square" rtlCol="0" anchor="ctr"/>
           <a:lstStyle/>
           <a:p>
-            <a:pPr indent="0" marL="0">
+            <a:pPr marL="0" indent="0">
               <a:buNone/>
             </a:pPr>
             <a:r>
@@ -9815,7 +9650,7 @@
           <a:bodyPr wrap="square" rtlCol="0" anchor="ctr"/>
           <a:lstStyle/>
           <a:p>
-            <a:pPr indent="0" marL="0">
+            <a:pPr marL="0" indent="0">
               <a:buNone/>
             </a:pPr>
             <a:r>
@@ -9829,7 +9664,7 @@
             <a:endParaRPr lang="en-US" sz="1100" dirty="0"/>
           </a:p>
           <a:p>
-            <a:pPr indent="0" marL="0">
+            <a:pPr marL="0" indent="0">
               <a:buNone/>
             </a:pPr>
             <a:r>
@@ -9843,7 +9678,7 @@
             <a:endParaRPr lang="en-US" sz="1100" dirty="0"/>
           </a:p>
           <a:p>
-            <a:pPr indent="0" marL="0">
+            <a:pPr marL="0" indent="0">
               <a:buNone/>
             </a:pPr>
             <a:r>
@@ -9857,7 +9692,7 @@
             <a:endParaRPr lang="en-US" sz="1100" dirty="0"/>
           </a:p>
           <a:p>
-            <a:pPr indent="0" marL="0">
+            <a:pPr marL="0" indent="0">
               <a:buNone/>
             </a:pPr>
             <a:r>
@@ -9891,7 +9726,7 @@
           </a:solidFill>
           <a:ln/>
           <a:effectLst>
-            <a:outerShdw sx="100000" sy="100000" kx="0" ky="0" algn="bl" rotWithShape="0" blurRad="38100" dist="12700" dir="8100000">
+            <a:outerShdw blurRad="38100" dist="12700" dir="8100000" algn="bl" rotWithShape="0">
               <a:srgbClr val="000000">
                 <a:alpha val="6000"/>
               </a:srgbClr>
@@ -9900,7 +9735,10 @@
         </p:spPr>
         <p:txBody>
           <a:bodyPr/>
-          <a:p/>
+          <a:lstStyle/>
+          <a:p>
+            <a:endParaRPr/>
+          </a:p>
         </p:txBody>
       </p:sp>
       <p:sp>
@@ -9924,7 +9762,7 @@
           <a:bodyPr wrap="square" rtlCol="0" anchor="ctr"/>
           <a:lstStyle/>
           <a:p>
-            <a:pPr indent="0" marL="0">
+            <a:pPr marL="0" indent="0">
               <a:buNone/>
             </a:pPr>
             <a:r>
@@ -9963,7 +9801,7 @@
           <a:bodyPr wrap="square" rtlCol="0" anchor="ctr"/>
           <a:lstStyle/>
           <a:p>
-            <a:pPr indent="0" marL="0">
+            <a:pPr marL="0" indent="0">
               <a:buNone/>
             </a:pPr>
             <a:r>
@@ -9974,9 +9812,6 @@
               </a:rPr>
               <a:t>Session A  </a:t>
             </a:r>
-            <a:pPr indent="0" marL="0">
-              <a:buNone/>
-            </a:pPr>
             <a:r>
               <a:rPr lang="en-US" sz="1100" dirty="0">
                 <a:solidFill>
@@ -9986,9 +9821,6 @@
               <a:t>BEGIN→FOR UPDATE→读到5→扣为4→COMMIT
 </a:t>
             </a:r>
-            <a:pPr indent="0" marL="0">
-              <a:buNone/>
-            </a:pPr>
             <a:r>
               <a:rPr lang="en-US" sz="1100" b="1" dirty="0">
                 <a:solidFill>
@@ -9997,9 +9829,6 @@
               </a:rPr>
               <a:t>Session B  </a:t>
             </a:r>
-            <a:pPr indent="0" marL="0">
-              <a:buNone/>
-            </a:pPr>
             <a:r>
               <a:rPr lang="en-US" sz="1100" dirty="0">
                 <a:solidFill>
@@ -10009,9 +9838,6 @@
               <a:t>BEGIN→FOR UPDATE→阻塞等待→A提交后读到4→COMMIT
 </a:t>
             </a:r>
-            <a:pPr indent="0" marL="0">
-              <a:buNone/>
-            </a:pPr>
             <a:r>
               <a:rPr lang="en-US" sz="1100" b="1" dirty="0">
                 <a:solidFill>
@@ -10020,9 +9846,6 @@
               </a:rPr>
               <a:t>✓ 结论：</a:t>
             </a:r>
-            <a:pPr indent="0" marL="0">
-              <a:buNone/>
-            </a:pPr>
             <a:r>
               <a:rPr lang="en-US" sz="1100" dirty="0">
                 <a:solidFill>
@@ -10051,6 +9874,7 @@
         <a:solidFill>
           <a:srgbClr val="F8FAFC"/>
         </a:solidFill>
+        <a:effectLst/>
       </p:bgPr>
     </p:bg>
     <p:spTree>
@@ -10088,7 +9912,7 @@
           <a:bodyPr wrap="square" rtlCol="0" anchor="ctr"/>
           <a:lstStyle/>
           <a:p>
-            <a:pPr indent="0" marL="0">
+            <a:pPr marL="0" indent="0">
               <a:buNone/>
             </a:pPr>
             <a:r>
@@ -10127,7 +9951,10 @@
         </p:spPr>
         <p:txBody>
           <a:bodyPr/>
-          <a:p/>
+          <a:lstStyle/>
+          <a:p>
+            <a:endParaRPr/>
+          </a:p>
         </p:txBody>
       </p:sp>
       <p:sp>
@@ -10151,7 +9978,7 @@
           <a:bodyPr wrap="square" rtlCol="0" anchor="ctr"/>
           <a:lstStyle/>
           <a:p>
-            <a:pPr algn="r" indent="0" marL="0">
+            <a:pPr marL="0" indent="0" algn="r">
               <a:buNone/>
             </a:pPr>
             <a:r>
@@ -10185,7 +10012,7 @@
           </a:solidFill>
           <a:ln/>
           <a:effectLst>
-            <a:outerShdw sx="100000" sy="100000" kx="0" ky="0" algn="bl" rotWithShape="0" blurRad="38100" dist="12700" dir="8100000">
+            <a:outerShdw blurRad="38100" dist="12700" dir="8100000" algn="bl" rotWithShape="0">
               <a:srgbClr val="000000">
                 <a:alpha val="6000"/>
               </a:srgbClr>
@@ -10194,7 +10021,10 @@
         </p:spPr>
         <p:txBody>
           <a:bodyPr/>
-          <a:p/>
+          <a:lstStyle/>
+          <a:p>
+            <a:endParaRPr/>
+          </a:p>
         </p:txBody>
       </p:sp>
       <p:sp>
@@ -10218,7 +10048,10 @@
         </p:spPr>
         <p:txBody>
           <a:bodyPr/>
-          <a:p/>
+          <a:lstStyle/>
+          <a:p>
+            <a:endParaRPr/>
+          </a:p>
         </p:txBody>
       </p:sp>
       <p:sp>
@@ -10242,7 +10075,7 @@
           <a:bodyPr wrap="square" rtlCol="0" anchor="ctr"/>
           <a:lstStyle/>
           <a:p>
-            <a:pPr indent="0" marL="0">
+            <a:pPr marL="0" indent="0">
               <a:buNone/>
             </a:pPr>
             <a:r>
@@ -10281,7 +10114,7 @@
           <a:bodyPr wrap="square" rtlCol="0" anchor="ctr"/>
           <a:lstStyle/>
           <a:p>
-            <a:pPr indent="0" marL="0">
+            <a:pPr marL="0" indent="0">
               <a:buNone/>
             </a:pPr>
             <a:r>
@@ -10320,7 +10153,7 @@
           <a:bodyPr wrap="square" rtlCol="0" anchor="ctr"/>
           <a:lstStyle/>
           <a:p>
-            <a:pPr indent="0" marL="0">
+            <a:pPr marL="0" indent="0">
               <a:buNone/>
             </a:pPr>
             <a:r>
@@ -10354,7 +10187,7 @@
           </a:solidFill>
           <a:ln/>
           <a:effectLst>
-            <a:outerShdw sx="100000" sy="100000" kx="0" ky="0" algn="bl" rotWithShape="0" blurRad="38100" dist="12700" dir="8100000">
+            <a:outerShdw blurRad="38100" dist="12700" dir="8100000" algn="bl" rotWithShape="0">
               <a:srgbClr val="000000">
                 <a:alpha val="6000"/>
               </a:srgbClr>
@@ -10363,7 +10196,10 @@
         </p:spPr>
         <p:txBody>
           <a:bodyPr/>
-          <a:p/>
+          <a:lstStyle/>
+          <a:p>
+            <a:endParaRPr/>
+          </a:p>
         </p:txBody>
       </p:sp>
       <p:sp>
@@ -10387,7 +10223,10 @@
         </p:spPr>
         <p:txBody>
           <a:bodyPr/>
-          <a:p/>
+          <a:lstStyle/>
+          <a:p>
+            <a:endParaRPr/>
+          </a:p>
         </p:txBody>
       </p:sp>
       <p:sp>
@@ -10411,7 +10250,7 @@
           <a:bodyPr wrap="square" rtlCol="0" anchor="ctr"/>
           <a:lstStyle/>
           <a:p>
-            <a:pPr indent="0" marL="0">
+            <a:pPr marL="0" indent="0">
               <a:buNone/>
             </a:pPr>
             <a:r>
@@ -10450,7 +10289,7 @@
           <a:bodyPr wrap="square" rtlCol="0" anchor="ctr"/>
           <a:lstStyle/>
           <a:p>
-            <a:pPr indent="0" marL="0">
+            <a:pPr marL="0" indent="0">
               <a:buNone/>
             </a:pPr>
             <a:r>
@@ -10489,7 +10328,7 @@
           <a:bodyPr wrap="square" rtlCol="0" anchor="ctr"/>
           <a:lstStyle/>
           <a:p>
-            <a:pPr indent="0" marL="0">
+            <a:pPr marL="0" indent="0">
               <a:buNone/>
             </a:pPr>
             <a:r>
@@ -10523,7 +10362,7 @@
           </a:solidFill>
           <a:ln/>
           <a:effectLst>
-            <a:outerShdw sx="100000" sy="100000" kx="0" ky="0" algn="bl" rotWithShape="0" blurRad="38100" dist="12700" dir="8100000">
+            <a:outerShdw blurRad="38100" dist="12700" dir="8100000" algn="bl" rotWithShape="0">
               <a:srgbClr val="000000">
                 <a:alpha val="6000"/>
               </a:srgbClr>
@@ -10532,7 +10371,10 @@
         </p:spPr>
         <p:txBody>
           <a:bodyPr/>
-          <a:p/>
+          <a:lstStyle/>
+          <a:p>
+            <a:endParaRPr/>
+          </a:p>
         </p:txBody>
       </p:sp>
       <p:sp>
@@ -10556,7 +10398,10 @@
         </p:spPr>
         <p:txBody>
           <a:bodyPr/>
-          <a:p/>
+          <a:lstStyle/>
+          <a:p>
+            <a:endParaRPr/>
+          </a:p>
         </p:txBody>
       </p:sp>
       <p:sp>
@@ -10580,7 +10425,7 @@
           <a:bodyPr wrap="square" rtlCol="0" anchor="ctr"/>
           <a:lstStyle/>
           <a:p>
-            <a:pPr indent="0" marL="0">
+            <a:pPr marL="0" indent="0">
               <a:buNone/>
             </a:pPr>
             <a:r>
@@ -10619,7 +10464,7 @@
           <a:bodyPr wrap="square" rtlCol="0" anchor="ctr"/>
           <a:lstStyle/>
           <a:p>
-            <a:pPr indent="0" marL="0">
+            <a:pPr marL="0" indent="0">
               <a:buNone/>
             </a:pPr>
             <a:r>
@@ -10658,7 +10503,7 @@
           <a:bodyPr wrap="square" rtlCol="0" anchor="ctr"/>
           <a:lstStyle/>
           <a:p>
-            <a:pPr indent="0" marL="0">
+            <a:pPr marL="0" indent="0">
               <a:buNone/>
             </a:pPr>
             <a:r>
@@ -10681,7 +10526,7 @@
         </p:nvSpPr>
         <p:spPr>
           <a:xfrm>
-            <a:off x="4663440" y="2926080"/>
+            <a:off x="4663440" y="2834640"/>
             <a:ext cx="4114800" cy="1600200"/>
           </a:xfrm>
           <a:prstGeom prst="rect">
@@ -10692,7 +10537,7 @@
           </a:solidFill>
           <a:ln/>
           <a:effectLst>
-            <a:outerShdw sx="100000" sy="100000" kx="0" ky="0" algn="bl" rotWithShape="0" blurRad="38100" dist="12700" dir="8100000">
+            <a:outerShdw blurRad="38100" dist="12700" dir="8100000" algn="bl" rotWithShape="0">
               <a:srgbClr val="000000">
                 <a:alpha val="6000"/>
               </a:srgbClr>
@@ -10701,7 +10546,10 @@
         </p:spPr>
         <p:txBody>
           <a:bodyPr/>
-          <a:p/>
+          <a:lstStyle/>
+          <a:p>
+            <a:endParaRPr/>
+          </a:p>
         </p:txBody>
       </p:sp>
       <p:sp>
@@ -10725,7 +10573,10 @@
         </p:spPr>
         <p:txBody>
           <a:bodyPr/>
-          <a:p/>
+          <a:lstStyle/>
+          <a:p>
+            <a:endParaRPr/>
+          </a:p>
         </p:txBody>
       </p:sp>
       <p:sp>
@@ -10749,7 +10600,7 @@
           <a:bodyPr wrap="square" rtlCol="0" anchor="ctr"/>
           <a:lstStyle/>
           <a:p>
-            <a:pPr indent="0" marL="0">
+            <a:pPr marL="0" indent="0">
               <a:buNone/>
             </a:pPr>
             <a:r>
@@ -10788,7 +10639,7 @@
           <a:bodyPr wrap="square" rtlCol="0" anchor="ctr"/>
           <a:lstStyle/>
           <a:p>
-            <a:pPr indent="0" marL="0">
+            <a:pPr marL="0" indent="0">
               <a:buNone/>
             </a:pPr>
             <a:r>
@@ -10827,7 +10678,7 @@
           <a:bodyPr wrap="square" rtlCol="0" anchor="ctr"/>
           <a:lstStyle/>
           <a:p>
-            <a:pPr indent="0" marL="0">
+            <a:pPr marL="0" indent="0">
               <a:buNone/>
             </a:pPr>
             <a:r>
@@ -10863,7 +10714,7 @@
           <a:bodyPr wrap="square" rtlCol="0" anchor="ctr"/>
           <a:lstStyle/>
           <a:p>
-            <a:pPr indent="0" marL="0">
+            <a:pPr marL="0" indent="0">
               <a:buNone/>
             </a:pPr>
             <a:r>
@@ -10898,6 +10749,7 @@
         <a:solidFill>
           <a:srgbClr val="F8FAFC"/>
         </a:solidFill>
+        <a:effectLst/>
       </p:bgPr>
     </p:bg>
     <p:spTree>
@@ -10935,7 +10787,7 @@
           <a:bodyPr wrap="square" rtlCol="0" anchor="ctr"/>
           <a:lstStyle/>
           <a:p>
-            <a:pPr indent="0" marL="0">
+            <a:pPr marL="0" indent="0">
               <a:buNone/>
             </a:pPr>
             <a:r>
@@ -10974,7 +10826,10 @@
         </p:spPr>
         <p:txBody>
           <a:bodyPr/>
-          <a:p/>
+          <a:lstStyle/>
+          <a:p>
+            <a:endParaRPr/>
+          </a:p>
         </p:txBody>
       </p:sp>
       <p:sp>
@@ -10998,7 +10853,7 @@
           <a:bodyPr wrap="square" rtlCol="0" anchor="ctr"/>
           <a:lstStyle/>
           <a:p>
-            <a:pPr algn="r" indent="0" marL="0">
+            <a:pPr marL="0" indent="0" algn="r">
               <a:buNone/>
             </a:pPr>
             <a:r>
@@ -11032,7 +10887,7 @@
           </a:solidFill>
           <a:ln/>
           <a:effectLst>
-            <a:outerShdw sx="100000" sy="100000" kx="0" ky="0" algn="bl" rotWithShape="0" blurRad="38100" dist="12700" dir="8100000">
+            <a:outerShdw blurRad="38100" dist="12700" dir="8100000" algn="bl" rotWithShape="0">
               <a:srgbClr val="000000">
                 <a:alpha val="6000"/>
               </a:srgbClr>
@@ -11041,7 +10896,10 @@
         </p:spPr>
         <p:txBody>
           <a:bodyPr/>
-          <a:p/>
+          <a:lstStyle/>
+          <a:p>
+            <a:endParaRPr/>
+          </a:p>
         </p:txBody>
       </p:sp>
       <p:sp>
@@ -11065,7 +10923,7 @@
           <a:bodyPr wrap="square" rtlCol="0" anchor="ctr"/>
           <a:lstStyle/>
           <a:p>
-            <a:pPr indent="0" marL="0">
+            <a:pPr marL="0" indent="0">
               <a:buNone/>
             </a:pPr>
             <a:r>
@@ -11104,7 +10962,7 @@
           <a:bodyPr wrap="square" rtlCol="0" anchor="ctr"/>
           <a:lstStyle/>
           <a:p>
-            <a:pPr indent="0" marL="0">
+            <a:pPr marL="0" indent="0">
               <a:buNone/>
             </a:pPr>
             <a:r>
@@ -11121,7 +10979,7 @@
             <a:endParaRPr lang="en-US" sz="1000" dirty="0"/>
           </a:p>
           <a:p>
-            <a:pPr indent="0" marL="0">
+            <a:pPr marL="0" indent="0">
               <a:buNone/>
             </a:pPr>
             <a:r>
@@ -11138,7 +10996,7 @@
             <a:endParaRPr lang="en-US" sz="1000" dirty="0"/>
           </a:p>
           <a:p>
-            <a:pPr indent="0" marL="0">
+            <a:pPr marL="0" indent="0">
               <a:buNone/>
             </a:pPr>
             <a:r>
@@ -11155,7 +11013,7 @@
             <a:endParaRPr lang="en-US" sz="1000" dirty="0"/>
           </a:p>
           <a:p>
-            <a:pPr indent="0" marL="0">
+            <a:pPr marL="0" indent="0">
               <a:buNone/>
             </a:pPr>
             <a:r>
@@ -11172,7 +11030,7 @@
             <a:endParaRPr lang="en-US" sz="1000" dirty="0"/>
           </a:p>
           <a:p>
-            <a:pPr indent="0" marL="0">
+            <a:pPr marL="0" indent="0">
               <a:buNone/>
             </a:pPr>
             <a:r>
@@ -11209,7 +11067,7 @@
           </a:solidFill>
           <a:ln/>
           <a:effectLst>
-            <a:outerShdw sx="100000" sy="100000" kx="0" ky="0" algn="bl" rotWithShape="0" blurRad="38100" dist="12700" dir="8100000">
+            <a:outerShdw blurRad="38100" dist="12700" dir="8100000" algn="bl" rotWithShape="0">
               <a:srgbClr val="000000">
                 <a:alpha val="6000"/>
               </a:srgbClr>
@@ -11218,7 +11076,10 @@
         </p:spPr>
         <p:txBody>
           <a:bodyPr/>
-          <a:p/>
+          <a:lstStyle/>
+          <a:p>
+            <a:endParaRPr/>
+          </a:p>
         </p:txBody>
       </p:sp>
       <p:sp>
@@ -11242,7 +11103,7 @@
           <a:bodyPr wrap="square" rtlCol="0" anchor="ctr"/>
           <a:lstStyle/>
           <a:p>
-            <a:pPr algn="ctr" indent="0" marL="0">
+            <a:pPr marL="0" indent="0" algn="ctr">
               <a:buNone/>
             </a:pPr>
             <a:r>
@@ -11281,7 +11142,7 @@
           <a:bodyPr wrap="square" rtlCol="0" anchor="ctr"/>
           <a:lstStyle/>
           <a:p>
-            <a:pPr indent="0" marL="0">
+            <a:pPr marL="0" indent="0">
               <a:buNone/>
             </a:pPr>
             <a:r>
@@ -11295,7 +11156,7 @@
             <a:endParaRPr lang="en-US" sz="1100" dirty="0"/>
           </a:p>
           <a:p>
-            <a:pPr indent="0" marL="0">
+            <a:pPr marL="0" indent="0">
               <a:buNone/>
             </a:pPr>
             <a:r>
@@ -11309,7 +11170,7 @@
             <a:endParaRPr lang="en-US" sz="1100" dirty="0"/>
           </a:p>
           <a:p>
-            <a:pPr indent="0" marL="0">
+            <a:pPr marL="0" indent="0">
               <a:buNone/>
             </a:pPr>
             <a:r>
@@ -11323,7 +11184,7 @@
             <a:endParaRPr lang="en-US" sz="1100" dirty="0"/>
           </a:p>
           <a:p>
-            <a:pPr indent="0" marL="0">
+            <a:pPr marL="0" indent="0">
               <a:buNone/>
             </a:pPr>
             <a:r>
@@ -11337,7 +11198,7 @@
             <a:endParaRPr lang="en-US" sz="1100" dirty="0"/>
           </a:p>
           <a:p>
-            <a:pPr indent="0" marL="0">
+            <a:pPr marL="0" indent="0">
               <a:buNone/>
             </a:pPr>
             <a:r>
@@ -11354,7 +11215,7 @@
       </p:sp>
       <p:graphicFrame>
         <p:nvGraphicFramePr>
-          <p:cNvPr id="11" name="Chart 0" descr=""/>
+          <p:cNvPr id="11" name="Chart 0"/>
           <p:cNvGraphicFramePr/>
           <p:nvPr/>
         </p:nvGraphicFramePr>
@@ -11362,9 +11223,9 @@
           <a:off x="274320" y="3154680"/>
           <a:ext cx="3931920" cy="1280160"/>
         </p:xfrm>
-        <a:graphic xmlns:a="http://schemas.openxmlformats.org/drawingml/2006/main">
+        <a:graphic>
           <a:graphicData uri="http://schemas.openxmlformats.org/drawingml/2006/chart">
-            <c:chart xmlns:c="http://schemas.openxmlformats.org/drawingml/2006/chart" r:id="rId1"/>
+            <c:chart xmlns:c="http://schemas.openxmlformats.org/drawingml/2006/chart" xmlns:r="http://schemas.openxmlformats.org/officeDocument/2006/relationships" r:id="rId3"/>
           </a:graphicData>
         </a:graphic>
       </p:graphicFrame>
@@ -11387,7 +11248,7 @@
           </a:solidFill>
           <a:ln/>
           <a:effectLst>
-            <a:outerShdw sx="100000" sy="100000" kx="0" ky="0" algn="bl" rotWithShape="0" blurRad="38100" dist="12700" dir="8100000">
+            <a:outerShdw blurRad="38100" dist="12700" dir="8100000" algn="bl" rotWithShape="0">
               <a:srgbClr val="000000">
                 <a:alpha val="6000"/>
               </a:srgbClr>
@@ -11396,7 +11257,10 @@
         </p:spPr>
         <p:txBody>
           <a:bodyPr/>
-          <a:p/>
+          <a:lstStyle/>
+          <a:p>
+            <a:endParaRPr/>
+          </a:p>
         </p:txBody>
       </p:sp>
       <p:sp>
@@ -11420,7 +11284,7 @@
           <a:bodyPr wrap="square" rtlCol="0" anchor="ctr"/>
           <a:lstStyle/>
           <a:p>
-            <a:pPr indent="0" marL="0">
+            <a:pPr marL="0" indent="0">
               <a:buNone/>
             </a:pPr>
             <a:r>
@@ -11459,7 +11323,7 @@
           <a:bodyPr wrap="square" rtlCol="0" anchor="ctr"/>
           <a:lstStyle/>
           <a:p>
-            <a:pPr indent="0" marL="0">
+            <a:pPr marL="0" indent="0">
               <a:buNone/>
             </a:pPr>
             <a:r>
@@ -11470,9 +11334,6 @@
               </a:rPr>
               <a:t>传统：</a:t>
             </a:r>
-            <a:pPr indent="0" marL="0">
-              <a:buNone/>
-            </a:pPr>
             <a:r>
               <a:rPr lang="en-US" sz="1000" dirty="0">
                 <a:solidFill>
@@ -11482,9 +11343,6 @@
               <a:t>SELECT→应用排序→编号 O(nlogn)
 </a:t>
             </a:r>
-            <a:pPr indent="0" marL="0">
-              <a:buNone/>
-            </a:pPr>
             <a:r>
               <a:rPr lang="en-US" sz="1000" b="1" dirty="0">
                 <a:solidFill>
@@ -11493,9 +11351,6 @@
               </a:rPr>
               <a:t>窗口函数：</a:t>
             </a:r>
-            <a:pPr indent="0" marL="0">
-              <a:buNone/>
-            </a:pPr>
             <a:r>
               <a:rPr lang="en-US" sz="1000" dirty="0">
                 <a:solidFill>
@@ -11524,6 +11379,7 @@
         <a:solidFill>
           <a:srgbClr val="F0F4F8"/>
         </a:solidFill>
+        <a:effectLst/>
       </p:bgPr>
     </p:bg>
     <p:spTree>
@@ -11561,7 +11417,7 @@
           <a:bodyPr wrap="square" rtlCol="0" anchor="ctr"/>
           <a:lstStyle/>
           <a:p>
-            <a:pPr indent="0" marL="0">
+            <a:pPr marL="0" indent="0">
               <a:buNone/>
             </a:pPr>
             <a:r>
@@ -11600,7 +11456,10 @@
         </p:spPr>
         <p:txBody>
           <a:bodyPr/>
-          <a:p/>
+          <a:lstStyle/>
+          <a:p>
+            <a:endParaRPr/>
+          </a:p>
         </p:txBody>
       </p:sp>
       <p:sp>
@@ -11622,7 +11481,7 @@
           </a:solidFill>
           <a:ln/>
           <a:effectLst>
-            <a:outerShdw sx="100000" sy="100000" kx="0" ky="0" algn="bl" rotWithShape="0" blurRad="38100" dist="12700" dir="8100000">
+            <a:outerShdw blurRad="38100" dist="12700" dir="8100000" algn="bl" rotWithShape="0">
               <a:srgbClr val="000000">
                 <a:alpha val="6000"/>
               </a:srgbClr>
@@ -11631,7 +11490,10 @@
         </p:spPr>
         <p:txBody>
           <a:bodyPr/>
-          <a:p/>
+          <a:lstStyle/>
+          <a:p>
+            <a:endParaRPr/>
+          </a:p>
         </p:txBody>
       </p:sp>
       <p:sp>
@@ -11655,7 +11517,7 @@
           <a:bodyPr wrap="square" rtlCol="0" anchor="ctr"/>
           <a:lstStyle/>
           <a:p>
-            <a:pPr algn="ctr" indent="0" marL="0">
+            <a:pPr marL="0" indent="0" algn="ctr">
               <a:buNone/>
             </a:pPr>
             <a:r>
@@ -11694,7 +11556,7 @@
           <a:bodyPr wrap="square" rtlCol="0" anchor="ctr"/>
           <a:lstStyle/>
           <a:p>
-            <a:pPr indent="0" marL="0">
+            <a:pPr marL="0" indent="0">
               <a:buNone/>
             </a:pPr>
             <a:r>
@@ -11733,7 +11595,7 @@
           <a:bodyPr wrap="square" rtlCol="0" anchor="ctr"/>
           <a:lstStyle/>
           <a:p>
-            <a:pPr indent="0" marL="0">
+            <a:pPr marL="0" indent="0">
               <a:buNone/>
             </a:pPr>
             <a:r>
@@ -11767,7 +11629,7 @@
           </a:solidFill>
           <a:ln/>
           <a:effectLst>
-            <a:outerShdw sx="100000" sy="100000" kx="0" ky="0" algn="bl" rotWithShape="0" blurRad="38100" dist="12700" dir="8100000">
+            <a:outerShdw blurRad="38100" dist="12700" dir="8100000" algn="bl" rotWithShape="0">
               <a:srgbClr val="000000">
                 <a:alpha val="6000"/>
               </a:srgbClr>
@@ -11776,7 +11638,10 @@
         </p:spPr>
         <p:txBody>
           <a:bodyPr/>
-          <a:p/>
+          <a:lstStyle/>
+          <a:p>
+            <a:endParaRPr/>
+          </a:p>
         </p:txBody>
       </p:sp>
       <p:sp>
@@ -11800,7 +11665,7 @@
           <a:bodyPr wrap="square" rtlCol="0" anchor="ctr"/>
           <a:lstStyle/>
           <a:p>
-            <a:pPr algn="ctr" indent="0" marL="0">
+            <a:pPr marL="0" indent="0" algn="ctr">
               <a:buNone/>
             </a:pPr>
             <a:r>
@@ -11839,7 +11704,7 @@
           <a:bodyPr wrap="square" rtlCol="0" anchor="ctr"/>
           <a:lstStyle/>
           <a:p>
-            <a:pPr indent="0" marL="0">
+            <a:pPr marL="0" indent="0">
               <a:buNone/>
             </a:pPr>
             <a:r>
@@ -11878,7 +11743,7 @@
           <a:bodyPr wrap="square" rtlCol="0" anchor="ctr"/>
           <a:lstStyle/>
           <a:p>
-            <a:pPr indent="0" marL="0">
+            <a:pPr marL="0" indent="0">
               <a:buNone/>
             </a:pPr>
             <a:r>
@@ -11912,7 +11777,7 @@
           </a:solidFill>
           <a:ln/>
           <a:effectLst>
-            <a:outerShdw sx="100000" sy="100000" kx="0" ky="0" algn="bl" rotWithShape="0" blurRad="38100" dist="12700" dir="8100000">
+            <a:outerShdw blurRad="38100" dist="12700" dir="8100000" algn="bl" rotWithShape="0">
               <a:srgbClr val="000000">
                 <a:alpha val="6000"/>
               </a:srgbClr>
@@ -11921,7 +11786,10 @@
         </p:spPr>
         <p:txBody>
           <a:bodyPr/>
-          <a:p/>
+          <a:lstStyle/>
+          <a:p>
+            <a:endParaRPr/>
+          </a:p>
         </p:txBody>
       </p:sp>
       <p:sp>
@@ -11945,7 +11813,7 @@
           <a:bodyPr wrap="square" rtlCol="0" anchor="ctr"/>
           <a:lstStyle/>
           <a:p>
-            <a:pPr algn="ctr" indent="0" marL="0">
+            <a:pPr marL="0" indent="0" algn="ctr">
               <a:buNone/>
             </a:pPr>
             <a:r>
@@ -11984,7 +11852,7 @@
           <a:bodyPr wrap="square" rtlCol="0" anchor="ctr"/>
           <a:lstStyle/>
           <a:p>
-            <a:pPr indent="0" marL="0">
+            <a:pPr marL="0" indent="0">
               <a:buNone/>
             </a:pPr>
             <a:r>
@@ -12023,7 +11891,7 @@
           <a:bodyPr wrap="square" rtlCol="0" anchor="ctr"/>
           <a:lstStyle/>
           <a:p>
-            <a:pPr indent="0" marL="0">
+            <a:pPr marL="0" indent="0">
               <a:buNone/>
             </a:pPr>
             <a:r>
@@ -12057,7 +11925,7 @@
           </a:solidFill>
           <a:ln/>
           <a:effectLst>
-            <a:outerShdw sx="100000" sy="100000" kx="0" ky="0" algn="bl" rotWithShape="0" blurRad="38100" dist="12700" dir="8100000">
+            <a:outerShdw blurRad="38100" dist="12700" dir="8100000" algn="bl" rotWithShape="0">
               <a:srgbClr val="000000">
                 <a:alpha val="6000"/>
               </a:srgbClr>
@@ -12066,7 +11934,10 @@
         </p:spPr>
         <p:txBody>
           <a:bodyPr/>
-          <a:p/>
+          <a:lstStyle/>
+          <a:p>
+            <a:endParaRPr/>
+          </a:p>
         </p:txBody>
       </p:sp>
       <p:sp>
@@ -12090,7 +11961,7 @@
           <a:bodyPr wrap="square" rtlCol="0" anchor="ctr"/>
           <a:lstStyle/>
           <a:p>
-            <a:pPr algn="ctr" indent="0" marL="0">
+            <a:pPr marL="0" indent="0" algn="ctr">
               <a:buNone/>
             </a:pPr>
             <a:r>
@@ -12129,7 +12000,7 @@
           <a:bodyPr wrap="square" rtlCol="0" anchor="ctr"/>
           <a:lstStyle/>
           <a:p>
-            <a:pPr indent="0" marL="0">
+            <a:pPr marL="0" indent="0">
               <a:buNone/>
             </a:pPr>
             <a:r>
@@ -12168,7 +12039,7 @@
           <a:bodyPr wrap="square" rtlCol="0" anchor="ctr"/>
           <a:lstStyle/>
           <a:p>
-            <a:pPr indent="0" marL="0">
+            <a:pPr marL="0" indent="0">
               <a:buNone/>
             </a:pPr>
             <a:r>
@@ -12202,7 +12073,7 @@
           </a:solidFill>
           <a:ln/>
           <a:effectLst>
-            <a:outerShdw sx="100000" sy="100000" kx="0" ky="0" algn="bl" rotWithShape="0" blurRad="38100" dist="12700" dir="8100000">
+            <a:outerShdw blurRad="38100" dist="12700" dir="8100000" algn="bl" rotWithShape="0">
               <a:srgbClr val="000000">
                 <a:alpha val="6000"/>
               </a:srgbClr>
@@ -12211,7 +12082,10 @@
         </p:spPr>
         <p:txBody>
           <a:bodyPr/>
-          <a:p/>
+          <a:lstStyle/>
+          <a:p>
+            <a:endParaRPr/>
+          </a:p>
         </p:txBody>
       </p:sp>
       <p:sp>
@@ -12235,7 +12109,7 @@
           <a:bodyPr wrap="square" rtlCol="0" anchor="ctr"/>
           <a:lstStyle/>
           <a:p>
-            <a:pPr algn="ctr" indent="0" marL="0">
+            <a:pPr marL="0" indent="0" algn="ctr">
               <a:buNone/>
             </a:pPr>
             <a:r>
@@ -12274,7 +12148,7 @@
           <a:bodyPr wrap="square" rtlCol="0" anchor="ctr"/>
           <a:lstStyle/>
           <a:p>
-            <a:pPr indent="0" marL="0">
+            <a:pPr marL="0" indent="0">
               <a:buNone/>
             </a:pPr>
             <a:r>
@@ -12313,7 +12187,7 @@
           <a:bodyPr wrap="square" rtlCol="0" anchor="ctr"/>
           <a:lstStyle/>
           <a:p>
-            <a:pPr indent="0" marL="0">
+            <a:pPr marL="0" indent="0">
               <a:buNone/>
             </a:pPr>
             <a:r>
@@ -12347,7 +12221,7 @@
           </a:solidFill>
           <a:ln/>
           <a:effectLst>
-            <a:outerShdw sx="100000" sy="100000" kx="0" ky="0" algn="bl" rotWithShape="0" blurRad="38100" dist="12700" dir="8100000">
+            <a:outerShdw blurRad="38100" dist="12700" dir="8100000" algn="bl" rotWithShape="0">
               <a:srgbClr val="000000">
                 <a:alpha val="6000"/>
               </a:srgbClr>
@@ -12356,7 +12230,10 @@
         </p:spPr>
         <p:txBody>
           <a:bodyPr/>
-          <a:p/>
+          <a:lstStyle/>
+          <a:p>
+            <a:endParaRPr/>
+          </a:p>
         </p:txBody>
       </p:sp>
       <p:sp>
@@ -12380,7 +12257,7 @@
           <a:bodyPr wrap="square" rtlCol="0" anchor="ctr"/>
           <a:lstStyle/>
           <a:p>
-            <a:pPr algn="ctr" indent="0" marL="0">
+            <a:pPr marL="0" indent="0" algn="ctr">
               <a:buNone/>
             </a:pPr>
             <a:r>
@@ -12419,7 +12296,7 @@
           <a:bodyPr wrap="square" rtlCol="0" anchor="ctr"/>
           <a:lstStyle/>
           <a:p>
-            <a:pPr indent="0" marL="0">
+            <a:pPr marL="0" indent="0">
               <a:buNone/>
             </a:pPr>
             <a:r>
@@ -12458,7 +12335,7 @@
           <a:bodyPr wrap="square" rtlCol="0" anchor="ctr"/>
           <a:lstStyle/>
           <a:p>
-            <a:pPr indent="0" marL="0">
+            <a:pPr marL="0" indent="0">
               <a:buNone/>
             </a:pPr>
             <a:r>
@@ -12492,7 +12369,7 @@
           </a:solidFill>
           <a:ln/>
           <a:effectLst>
-            <a:outerShdw sx="100000" sy="100000" kx="0" ky="0" algn="bl" rotWithShape="0" blurRad="38100" dist="12700" dir="8100000">
+            <a:outerShdw blurRad="38100" dist="12700" dir="8100000" algn="bl" rotWithShape="0">
               <a:srgbClr val="000000">
                 <a:alpha val="6000"/>
               </a:srgbClr>
@@ -12501,7 +12378,10 @@
         </p:spPr>
         <p:txBody>
           <a:bodyPr/>
-          <a:p/>
+          <a:lstStyle/>
+          <a:p>
+            <a:endParaRPr/>
+          </a:p>
         </p:txBody>
       </p:sp>
       <p:sp>
@@ -12525,7 +12405,7 @@
           <a:bodyPr wrap="square" rtlCol="0" anchor="ctr"/>
           <a:lstStyle/>
           <a:p>
-            <a:pPr algn="ctr" indent="0" marL="0">
+            <a:pPr marL="0" indent="0" algn="ctr">
               <a:buNone/>
             </a:pPr>
             <a:r>
@@ -12564,7 +12444,7 @@
           <a:bodyPr wrap="square" rtlCol="0" anchor="ctr"/>
           <a:lstStyle/>
           <a:p>
-            <a:pPr indent="0" marL="0">
+            <a:pPr marL="0" indent="0">
               <a:buNone/>
             </a:pPr>
             <a:r>
@@ -12603,7 +12483,7 @@
           <a:bodyPr wrap="square" rtlCol="0" anchor="ctr"/>
           <a:lstStyle/>
           <a:p>
-            <a:pPr indent="0" marL="0">
+            <a:pPr marL="0" indent="0">
               <a:buNone/>
             </a:pPr>
             <a:r>
@@ -12637,7 +12517,7 @@
           </a:solidFill>
           <a:ln/>
           <a:effectLst>
-            <a:outerShdw sx="100000" sy="100000" kx="0" ky="0" algn="bl" rotWithShape="0" blurRad="38100" dist="12700" dir="8100000">
+            <a:outerShdw blurRad="38100" dist="12700" dir="8100000" algn="bl" rotWithShape="0">
               <a:srgbClr val="000000">
                 <a:alpha val="6000"/>
               </a:srgbClr>
@@ -12646,7 +12526,10 @@
         </p:spPr>
         <p:txBody>
           <a:bodyPr/>
-          <a:p/>
+          <a:lstStyle/>
+          <a:p>
+            <a:endParaRPr/>
+          </a:p>
         </p:txBody>
       </p:sp>
       <p:sp>
@@ -12670,7 +12553,7 @@
           <a:bodyPr wrap="square" rtlCol="0" anchor="ctr"/>
           <a:lstStyle/>
           <a:p>
-            <a:pPr algn="ctr" indent="0" marL="0">
+            <a:pPr marL="0" indent="0" algn="ctr">
               <a:buNone/>
             </a:pPr>
             <a:r>
@@ -12709,7 +12592,7 @@
           <a:bodyPr wrap="square" rtlCol="0" anchor="ctr"/>
           <a:lstStyle/>
           <a:p>
-            <a:pPr indent="0" marL="0">
+            <a:pPr marL="0" indent="0">
               <a:buNone/>
             </a:pPr>
             <a:r>
@@ -12748,7 +12631,7 @@
           <a:bodyPr wrap="square" rtlCol="0" anchor="ctr"/>
           <a:lstStyle/>
           <a:p>
-            <a:pPr indent="0" marL="0">
+            <a:pPr marL="0" indent="0">
               <a:buNone/>
             </a:pPr>
             <a:r>
@@ -12784,7 +12667,7 @@
           <a:bodyPr wrap="square" rtlCol="0" anchor="ctr"/>
           <a:lstStyle/>
           <a:p>
-            <a:pPr algn="r" indent="0" marL="0">
+            <a:pPr marL="0" indent="0" algn="r">
               <a:buNone/>
             </a:pPr>
             <a:r>
@@ -12815,6 +12698,7 @@
         <a:solidFill>
           <a:srgbClr val="F8FAFC"/>
         </a:solidFill>
+        <a:effectLst/>
       </p:bgPr>
     </p:bg>
     <p:spTree>
@@ -12852,7 +12736,7 @@
           <a:bodyPr wrap="square" rtlCol="0" anchor="ctr"/>
           <a:lstStyle/>
           <a:p>
-            <a:pPr indent="0" marL="0">
+            <a:pPr marL="0" indent="0">
               <a:buNone/>
             </a:pPr>
             <a:r>
@@ -12891,7 +12775,10 @@
         </p:spPr>
         <p:txBody>
           <a:bodyPr/>
-          <a:p/>
+          <a:lstStyle/>
+          <a:p>
+            <a:endParaRPr/>
+          </a:p>
         </p:txBody>
       </p:sp>
       <p:sp>
@@ -12915,7 +12802,7 @@
           <a:bodyPr wrap="square" rtlCol="0" anchor="ctr"/>
           <a:lstStyle/>
           <a:p>
-            <a:pPr algn="r" indent="0" marL="0">
+            <a:pPr marL="0" indent="0" algn="r">
               <a:buNone/>
             </a:pPr>
             <a:r>
@@ -12949,7 +12836,7 @@
           </a:solidFill>
           <a:ln/>
           <a:effectLst>
-            <a:outerShdw sx="100000" sy="100000" kx="0" ky="0" algn="bl" rotWithShape="0" blurRad="38100" dist="12700" dir="8100000">
+            <a:outerShdw blurRad="38100" dist="12700" dir="8100000" algn="bl" rotWithShape="0">
               <a:srgbClr val="000000">
                 <a:alpha val="6000"/>
               </a:srgbClr>
@@ -12958,7 +12845,10 @@
         </p:spPr>
         <p:txBody>
           <a:bodyPr/>
-          <a:p/>
+          <a:lstStyle/>
+          <a:p>
+            <a:endParaRPr/>
+          </a:p>
         </p:txBody>
       </p:sp>
       <p:sp>
@@ -12982,7 +12872,7 @@
           <a:bodyPr wrap="square" rtlCol="0" anchor="ctr"/>
           <a:lstStyle/>
           <a:p>
-            <a:pPr algn="ctr" indent="0" marL="0">
+            <a:pPr marL="0" indent="0" algn="ctr">
               <a:buNone/>
             </a:pPr>
             <a:r>
@@ -12999,7 +12889,7 @@
             <a:endParaRPr lang="en-US" sz="1100" dirty="0"/>
           </a:p>
           <a:p>
-            <a:pPr algn="ctr" indent="0" marL="0">
+            <a:pPr marL="0" indent="0" algn="ctr">
               <a:buNone/>
             </a:pPr>
             <a:r>
@@ -13038,7 +12928,7 @@
           <a:bodyPr wrap="square" rtlCol="0" anchor="ctr"/>
           <a:lstStyle/>
           <a:p>
-            <a:pPr algn="ctr" indent="0" marL="0">
+            <a:pPr marL="0" indent="0" algn="ctr">
               <a:buNone/>
             </a:pPr>
             <a:r>
@@ -13074,7 +12964,7 @@
           <a:bodyPr wrap="square" rtlCol="0" anchor="ctr"/>
           <a:lstStyle/>
           <a:p>
-            <a:pPr algn="ctr" indent="0" marL="0">
+            <a:pPr marL="0" indent="0" algn="ctr">
               <a:buNone/>
             </a:pPr>
             <a:r>
@@ -13091,7 +12981,7 @@
             <a:endParaRPr lang="en-US" sz="1100" dirty="0"/>
           </a:p>
           <a:p>
-            <a:pPr algn="ctr" indent="0" marL="0">
+            <a:pPr marL="0" indent="0" algn="ctr">
               <a:buNone/>
             </a:pPr>
             <a:r>
@@ -13130,7 +13020,7 @@
           <a:bodyPr wrap="square" rtlCol="0" anchor="ctr"/>
           <a:lstStyle/>
           <a:p>
-            <a:pPr algn="ctr" indent="0" marL="0">
+            <a:pPr marL="0" indent="0" algn="ctr">
               <a:buNone/>
             </a:pPr>
             <a:r>
@@ -13166,7 +13056,7 @@
           <a:bodyPr wrap="square" rtlCol="0" anchor="ctr"/>
           <a:lstStyle/>
           <a:p>
-            <a:pPr algn="ctr" indent="0" marL="0">
+            <a:pPr marL="0" indent="0" algn="ctr">
               <a:buNone/>
             </a:pPr>
             <a:r>
@@ -13183,7 +13073,7 @@
             <a:endParaRPr lang="en-US" sz="1100" dirty="0"/>
           </a:p>
           <a:p>
-            <a:pPr algn="ctr" indent="0" marL="0">
+            <a:pPr marL="0" indent="0" algn="ctr">
               <a:buNone/>
             </a:pPr>
             <a:r>
@@ -13222,7 +13112,7 @@
           <a:bodyPr wrap="square" rtlCol="0" anchor="ctr"/>
           <a:lstStyle/>
           <a:p>
-            <a:pPr algn="ctr" indent="0" marL="0">
+            <a:pPr marL="0" indent="0" algn="ctr">
               <a:buNone/>
             </a:pPr>
             <a:r>
@@ -13258,7 +13148,7 @@
           <a:bodyPr wrap="square" rtlCol="0" anchor="ctr"/>
           <a:lstStyle/>
           <a:p>
-            <a:pPr algn="ctr" indent="0" marL="0">
+            <a:pPr marL="0" indent="0" algn="ctr">
               <a:buNone/>
             </a:pPr>
             <a:r>
@@ -13275,7 +13165,7 @@
             <a:endParaRPr lang="en-US" sz="1100" dirty="0"/>
           </a:p>
           <a:p>
-            <a:pPr algn="ctr" indent="0" marL="0">
+            <a:pPr marL="0" indent="0" algn="ctr">
               <a:buNone/>
             </a:pPr>
             <a:r>
@@ -13314,7 +13204,7 @@
           <a:bodyPr wrap="square" rtlCol="0" anchor="ctr"/>
           <a:lstStyle/>
           <a:p>
-            <a:pPr algn="ctr" indent="0" marL="0">
+            <a:pPr marL="0" indent="0" algn="ctr">
               <a:buNone/>
             </a:pPr>
             <a:r>
@@ -13350,7 +13240,7 @@
           <a:bodyPr wrap="square" rtlCol="0" anchor="ctr"/>
           <a:lstStyle/>
           <a:p>
-            <a:pPr algn="ctr" indent="0" marL="0">
+            <a:pPr marL="0" indent="0" algn="ctr">
               <a:buNone/>
             </a:pPr>
             <a:r>
@@ -13367,7 +13257,7 @@
             <a:endParaRPr lang="en-US" sz="1100" dirty="0"/>
           </a:p>
           <a:p>
-            <a:pPr algn="ctr" indent="0" marL="0">
+            <a:pPr marL="0" indent="0" algn="ctr">
               <a:buNone/>
             </a:pPr>
             <a:r>
@@ -13404,7 +13294,7 @@
           </a:solidFill>
           <a:ln/>
           <a:effectLst>
-            <a:outerShdw sx="100000" sy="100000" kx="0" ky="0" algn="bl" rotWithShape="0" blurRad="38100" dist="12700" dir="8100000">
+            <a:outerShdw blurRad="38100" dist="12700" dir="8100000" algn="bl" rotWithShape="0">
               <a:srgbClr val="000000">
                 <a:alpha val="6000"/>
               </a:srgbClr>
@@ -13413,7 +13303,10 @@
         </p:spPr>
         <p:txBody>
           <a:bodyPr/>
-          <a:p/>
+          <a:lstStyle/>
+          <a:p>
+            <a:endParaRPr/>
+          </a:p>
         </p:txBody>
       </p:sp>
       <p:sp>
@@ -13437,7 +13330,10 @@
         </p:spPr>
         <p:txBody>
           <a:bodyPr/>
-          <a:p/>
+          <a:lstStyle/>
+          <a:p>
+            <a:endParaRPr/>
+          </a:p>
         </p:txBody>
       </p:sp>
       <p:sp>
@@ -13461,7 +13357,7 @@
           <a:bodyPr wrap="square" rtlCol="0" anchor="ctr"/>
           <a:lstStyle/>
           <a:p>
-            <a:pPr indent="0" marL="0">
+            <a:pPr marL="0" indent="0">
               <a:buNone/>
             </a:pPr>
             <a:r>
@@ -13500,7 +13396,7 @@
           <a:bodyPr wrap="square" rtlCol="0" anchor="ctr"/>
           <a:lstStyle/>
           <a:p>
-            <a:pPr indent="0" marL="0">
+            <a:pPr marL="0" indent="0">
               <a:buNone/>
             </a:pPr>
             <a:r>
@@ -13514,7 +13410,7 @@
             <a:endParaRPr lang="en-US" sz="1000" dirty="0"/>
           </a:p>
           <a:p>
-            <a:pPr indent="0" marL="0">
+            <a:pPr marL="0" indent="0">
               <a:buNone/>
             </a:pPr>
             <a:r>
@@ -13548,7 +13444,7 @@
           </a:solidFill>
           <a:ln/>
           <a:effectLst>
-            <a:outerShdw sx="100000" sy="100000" kx="0" ky="0" algn="bl" rotWithShape="0" blurRad="38100" dist="12700" dir="8100000">
+            <a:outerShdw blurRad="38100" dist="12700" dir="8100000" algn="bl" rotWithShape="0">
               <a:srgbClr val="000000">
                 <a:alpha val="6000"/>
               </a:srgbClr>
@@ -13557,7 +13453,10 @@
         </p:spPr>
         <p:txBody>
           <a:bodyPr/>
-          <a:p/>
+          <a:lstStyle/>
+          <a:p>
+            <a:endParaRPr/>
+          </a:p>
         </p:txBody>
       </p:sp>
       <p:sp>
@@ -13581,7 +13480,10 @@
         </p:spPr>
         <p:txBody>
           <a:bodyPr/>
-          <a:p/>
+          <a:lstStyle/>
+          <a:p>
+            <a:endParaRPr/>
+          </a:p>
         </p:txBody>
       </p:sp>
       <p:sp>
@@ -13605,7 +13507,7 @@
           <a:bodyPr wrap="square" rtlCol="0" anchor="ctr"/>
           <a:lstStyle/>
           <a:p>
-            <a:pPr indent="0" marL="0">
+            <a:pPr marL="0" indent="0">
               <a:buNone/>
             </a:pPr>
             <a:r>
@@ -13644,7 +13546,7 @@
           <a:bodyPr wrap="square" rtlCol="0" anchor="ctr"/>
           <a:lstStyle/>
           <a:p>
-            <a:pPr indent="0" marL="0">
+            <a:pPr marL="0" indent="0">
               <a:buNone/>
             </a:pPr>
             <a:r>
@@ -13658,7 +13560,7 @@
             <a:endParaRPr lang="en-US" sz="1000" dirty="0"/>
           </a:p>
           <a:p>
-            <a:pPr indent="0" marL="0">
+            <a:pPr marL="0" indent="0">
               <a:buNone/>
             </a:pPr>
             <a:r>
@@ -13692,7 +13594,7 @@
           </a:solidFill>
           <a:ln/>
           <a:effectLst>
-            <a:outerShdw sx="100000" sy="100000" kx="0" ky="0" algn="bl" rotWithShape="0" blurRad="38100" dist="12700" dir="8100000">
+            <a:outerShdw blurRad="38100" dist="12700" dir="8100000" algn="bl" rotWithShape="0">
               <a:srgbClr val="000000">
                 <a:alpha val="6000"/>
               </a:srgbClr>
@@ -13701,7 +13603,10 @@
         </p:spPr>
         <p:txBody>
           <a:bodyPr/>
-          <a:p/>
+          <a:lstStyle/>
+          <a:p>
+            <a:endParaRPr/>
+          </a:p>
         </p:txBody>
       </p:sp>
       <p:sp>
@@ -13725,7 +13630,10 @@
         </p:spPr>
         <p:txBody>
           <a:bodyPr/>
-          <a:p/>
+          <a:lstStyle/>
+          <a:p>
+            <a:endParaRPr/>
+          </a:p>
         </p:txBody>
       </p:sp>
       <p:sp>
@@ -13749,7 +13657,7 @@
           <a:bodyPr wrap="square" rtlCol="0" anchor="ctr"/>
           <a:lstStyle/>
           <a:p>
-            <a:pPr indent="0" marL="0">
+            <a:pPr marL="0" indent="0">
               <a:buNone/>
             </a:pPr>
             <a:r>
@@ -13788,7 +13696,7 @@
           <a:bodyPr wrap="square" rtlCol="0" anchor="ctr"/>
           <a:lstStyle/>
           <a:p>
-            <a:pPr indent="0" marL="0">
+            <a:pPr marL="0" indent="0">
               <a:buNone/>
             </a:pPr>
             <a:r>
@@ -13802,7 +13710,7 @@
             <a:endParaRPr lang="en-US" sz="1000" dirty="0"/>
           </a:p>
           <a:p>
-            <a:pPr indent="0" marL="0">
+            <a:pPr marL="0" indent="0">
               <a:buNone/>
             </a:pPr>
             <a:r>
@@ -13836,7 +13744,7 @@
           </a:solidFill>
           <a:ln/>
           <a:effectLst>
-            <a:outerShdw sx="100000" sy="100000" kx="0" ky="0" algn="bl" rotWithShape="0" blurRad="38100" dist="12700" dir="8100000">
+            <a:outerShdw blurRad="38100" dist="12700" dir="8100000" algn="bl" rotWithShape="0">
               <a:srgbClr val="000000">
                 <a:alpha val="6000"/>
               </a:srgbClr>
@@ -13845,7 +13753,10 @@
         </p:spPr>
         <p:txBody>
           <a:bodyPr/>
-          <a:p/>
+          <a:lstStyle/>
+          <a:p>
+            <a:endParaRPr/>
+          </a:p>
         </p:txBody>
       </p:sp>
       <p:sp>
@@ -13869,7 +13780,7 @@
           <a:bodyPr wrap="square" rtlCol="0" anchor="ctr"/>
           <a:lstStyle/>
           <a:p>
-            <a:pPr indent="0" marL="0">
+            <a:pPr marL="0" indent="0">
               <a:buNone/>
             </a:pPr>
             <a:r>
@@ -13903,6 +13814,7 @@
         <a:solidFill>
           <a:srgbClr val="1A1A2E"/>
         </a:solidFill>
+        <a:effectLst/>
       </p:bgPr>
     </p:bg>
     <p:spTree>
@@ -13940,7 +13852,10 @@
         </p:spPr>
         <p:txBody>
           <a:bodyPr/>
-          <a:p/>
+          <a:lstStyle/>
+          <a:p>
+            <a:endParaRPr/>
+          </a:p>
         </p:txBody>
       </p:sp>
       <p:sp>
@@ -13964,7 +13879,7 @@
           <a:bodyPr wrap="square" rtlCol="0" anchor="ctr"/>
           <a:lstStyle/>
           <a:p>
-            <a:pPr indent="0" marL="0">
+            <a:pPr marL="0" indent="0">
               <a:buNone/>
             </a:pPr>
             <a:r>
@@ -14003,7 +13918,7 @@
           <a:bodyPr wrap="square" rtlCol="0" anchor="ctr"/>
           <a:lstStyle/>
           <a:p>
-            <a:pPr indent="0" marL="0">
+            <a:pPr marL="0" indent="0">
               <a:buNone/>
             </a:pPr>
             <a:r>
@@ -14039,7 +13954,7 @@
           <a:bodyPr wrap="square" rtlCol="0" anchor="ctr"/>
           <a:lstStyle/>
           <a:p>
-            <a:pPr algn="r" indent="0" marL="0">
+            <a:pPr marL="0" indent="0" algn="r">
               <a:buNone/>
             </a:pPr>
             <a:r>
@@ -14070,6 +13985,7 @@
         <a:solidFill>
           <a:srgbClr val="F8FAFC"/>
         </a:solidFill>
+        <a:effectLst/>
       </p:bgPr>
     </p:bg>
     <p:spTree>
@@ -14107,7 +14023,7 @@
           <a:bodyPr wrap="square" rtlCol="0" anchor="ctr"/>
           <a:lstStyle/>
           <a:p>
-            <a:pPr indent="0" marL="0">
+            <a:pPr marL="0" indent="0">
               <a:buNone/>
             </a:pPr>
             <a:r>
@@ -14146,7 +14062,10 @@
         </p:spPr>
         <p:txBody>
           <a:bodyPr/>
-          <a:p/>
+          <a:lstStyle/>
+          <a:p>
+            <a:endParaRPr/>
+          </a:p>
         </p:txBody>
       </p:sp>
       <p:sp>
@@ -14170,7 +14089,7 @@
           <a:bodyPr wrap="square" rtlCol="0" anchor="ctr"/>
           <a:lstStyle/>
           <a:p>
-            <a:pPr algn="r" indent="0" marL="0">
+            <a:pPr marL="0" indent="0" algn="r">
               <a:buNone/>
             </a:pPr>
             <a:r>
@@ -14204,7 +14123,7 @@
           </a:solidFill>
           <a:ln/>
           <a:effectLst>
-            <a:outerShdw sx="100000" sy="100000" kx="0" ky="0" algn="bl" rotWithShape="0" blurRad="38100" dist="12700" dir="8100000">
+            <a:outerShdw blurRad="38100" dist="12700" dir="8100000" algn="bl" rotWithShape="0">
               <a:srgbClr val="000000">
                 <a:alpha val="6000"/>
               </a:srgbClr>
@@ -14213,7 +14132,10 @@
         </p:spPr>
         <p:txBody>
           <a:bodyPr/>
-          <a:p/>
+          <a:lstStyle/>
+          <a:p>
+            <a:endParaRPr/>
+          </a:p>
         </p:txBody>
       </p:sp>
       <p:sp>
@@ -14237,7 +14159,7 @@
           <a:bodyPr wrap="square" rtlCol="0" anchor="ctr"/>
           <a:lstStyle/>
           <a:p>
-            <a:pPr algn="ctr" indent="0" marL="0">
+            <a:pPr marL="0" indent="0" algn="ctr">
               <a:buNone/>
             </a:pPr>
             <a:r>
@@ -14276,7 +14198,7 @@
           <a:bodyPr wrap="square" rtlCol="0" anchor="ctr"/>
           <a:lstStyle/>
           <a:p>
-            <a:pPr algn="ctr" indent="0" marL="0">
+            <a:pPr marL="0" indent="0" algn="ctr">
               <a:buNone/>
             </a:pPr>
             <a:r>
@@ -14310,7 +14232,7 @@
           </a:solidFill>
           <a:ln/>
           <a:effectLst>
-            <a:outerShdw sx="100000" sy="100000" kx="0" ky="0" algn="bl" rotWithShape="0" blurRad="38100" dist="12700" dir="8100000">
+            <a:outerShdw blurRad="38100" dist="12700" dir="8100000" algn="bl" rotWithShape="0">
               <a:srgbClr val="000000">
                 <a:alpha val="6000"/>
               </a:srgbClr>
@@ -14319,7 +14241,10 @@
         </p:spPr>
         <p:txBody>
           <a:bodyPr/>
-          <a:p/>
+          <a:lstStyle/>
+          <a:p>
+            <a:endParaRPr/>
+          </a:p>
         </p:txBody>
       </p:sp>
       <p:sp>
@@ -14343,7 +14268,7 @@
           <a:bodyPr wrap="square" rtlCol="0" anchor="ctr"/>
           <a:lstStyle/>
           <a:p>
-            <a:pPr algn="ctr" indent="0" marL="0">
+            <a:pPr marL="0" indent="0" algn="ctr">
               <a:buNone/>
             </a:pPr>
             <a:r>
@@ -14382,7 +14307,7 @@
           <a:bodyPr wrap="square" rtlCol="0" anchor="ctr"/>
           <a:lstStyle/>
           <a:p>
-            <a:pPr algn="ctr" indent="0" marL="0">
+            <a:pPr marL="0" indent="0" algn="ctr">
               <a:buNone/>
             </a:pPr>
             <a:r>
@@ -14416,7 +14341,7 @@
           </a:solidFill>
           <a:ln/>
           <a:effectLst>
-            <a:outerShdw sx="100000" sy="100000" kx="0" ky="0" algn="bl" rotWithShape="0" blurRad="38100" dist="12700" dir="8100000">
+            <a:outerShdw blurRad="38100" dist="12700" dir="8100000" algn="bl" rotWithShape="0">
               <a:srgbClr val="000000">
                 <a:alpha val="6000"/>
               </a:srgbClr>
@@ -14425,7 +14350,10 @@
         </p:spPr>
         <p:txBody>
           <a:bodyPr/>
-          <a:p/>
+          <a:lstStyle/>
+          <a:p>
+            <a:endParaRPr/>
+          </a:p>
         </p:txBody>
       </p:sp>
       <p:sp>
@@ -14449,7 +14377,7 @@
           <a:bodyPr wrap="square" rtlCol="0" anchor="ctr"/>
           <a:lstStyle/>
           <a:p>
-            <a:pPr algn="ctr" indent="0" marL="0">
+            <a:pPr marL="0" indent="0" algn="ctr">
               <a:buNone/>
             </a:pPr>
             <a:r>
@@ -14488,7 +14416,7 @@
           <a:bodyPr wrap="square" rtlCol="0" anchor="ctr"/>
           <a:lstStyle/>
           <a:p>
-            <a:pPr algn="ctr" indent="0" marL="0">
+            <a:pPr marL="0" indent="0" algn="ctr">
               <a:buNone/>
             </a:pPr>
             <a:r>
@@ -14522,7 +14450,7 @@
           </a:solidFill>
           <a:ln/>
           <a:effectLst>
-            <a:outerShdw sx="100000" sy="100000" kx="0" ky="0" algn="bl" rotWithShape="0" blurRad="38100" dist="12700" dir="8100000">
+            <a:outerShdw blurRad="38100" dist="12700" dir="8100000" algn="bl" rotWithShape="0">
               <a:srgbClr val="000000">
                 <a:alpha val="6000"/>
               </a:srgbClr>
@@ -14531,7 +14459,10 @@
         </p:spPr>
         <p:txBody>
           <a:bodyPr/>
-          <a:p/>
+          <a:lstStyle/>
+          <a:p>
+            <a:endParaRPr/>
+          </a:p>
         </p:txBody>
       </p:sp>
       <p:sp>
@@ -14555,7 +14486,7 @@
           <a:bodyPr wrap="square" rtlCol="0" anchor="ctr"/>
           <a:lstStyle/>
           <a:p>
-            <a:pPr algn="ctr" indent="0" marL="0">
+            <a:pPr marL="0" indent="0" algn="ctr">
               <a:buNone/>
             </a:pPr>
             <a:r>
@@ -14594,7 +14525,7 @@
           <a:bodyPr wrap="square" rtlCol="0" anchor="ctr"/>
           <a:lstStyle/>
           <a:p>
-            <a:pPr algn="ctr" indent="0" marL="0">
+            <a:pPr marL="0" indent="0" algn="ctr">
               <a:buNone/>
             </a:pPr>
             <a:r>
@@ -14617,7 +14548,7 @@
         </p:nvSpPr>
         <p:spPr>
           <a:xfrm>
-            <a:off x="3246120" y="2788920"/>
+            <a:off x="3268980" y="2788920"/>
             <a:ext cx="2651760" cy="1325880"/>
           </a:xfrm>
           <a:prstGeom prst="rect">
@@ -14628,7 +14559,7 @@
           </a:solidFill>
           <a:ln/>
           <a:effectLst>
-            <a:outerShdw sx="100000" sy="100000" kx="0" ky="0" algn="bl" rotWithShape="0" blurRad="38100" dist="12700" dir="8100000">
+            <a:outerShdw blurRad="38100" dist="12700" dir="8100000" algn="bl" rotWithShape="0">
               <a:srgbClr val="000000">
                 <a:alpha val="6000"/>
               </a:srgbClr>
@@ -14637,7 +14568,10 @@
         </p:spPr>
         <p:txBody>
           <a:bodyPr/>
-          <a:p/>
+          <a:lstStyle/>
+          <a:p>
+            <a:endParaRPr/>
+          </a:p>
         </p:txBody>
       </p:sp>
       <p:sp>
@@ -14661,7 +14595,7 @@
           <a:bodyPr wrap="square" rtlCol="0" anchor="ctr"/>
           <a:lstStyle/>
           <a:p>
-            <a:pPr algn="ctr" indent="0" marL="0">
+            <a:pPr marL="0" indent="0" algn="ctr">
               <a:buNone/>
             </a:pPr>
             <a:r>
@@ -14700,7 +14634,7 @@
           <a:bodyPr wrap="square" rtlCol="0" anchor="ctr"/>
           <a:lstStyle/>
           <a:p>
-            <a:pPr algn="ctr" indent="0" marL="0">
+            <a:pPr marL="0" indent="0" algn="ctr">
               <a:buNone/>
             </a:pPr>
             <a:r>
@@ -14723,7 +14657,7 @@
         </p:nvSpPr>
         <p:spPr>
           <a:xfrm>
-            <a:off x="6126480" y="2788920"/>
+            <a:off x="6172200" y="2788920"/>
             <a:ext cx="2651760" cy="1325880"/>
           </a:xfrm>
           <a:prstGeom prst="rect">
@@ -14734,7 +14668,7 @@
           </a:solidFill>
           <a:ln/>
           <a:effectLst>
-            <a:outerShdw sx="100000" sy="100000" kx="0" ky="0" algn="bl" rotWithShape="0" blurRad="38100" dist="12700" dir="8100000">
+            <a:outerShdw blurRad="38100" dist="12700" dir="8100000" algn="bl" rotWithShape="0">
               <a:srgbClr val="000000">
                 <a:alpha val="6000"/>
               </a:srgbClr>
@@ -14743,7 +14677,10 @@
         </p:spPr>
         <p:txBody>
           <a:bodyPr/>
-          <a:p/>
+          <a:lstStyle/>
+          <a:p>
+            <a:endParaRPr/>
+          </a:p>
         </p:txBody>
       </p:sp>
       <p:sp>
@@ -14767,7 +14704,7 @@
           <a:bodyPr wrap="square" rtlCol="0" anchor="ctr"/>
           <a:lstStyle/>
           <a:p>
-            <a:pPr algn="ctr" indent="0" marL="0">
+            <a:pPr marL="0" indent="0" algn="ctr">
               <a:buNone/>
             </a:pPr>
             <a:r>
@@ -14806,7 +14743,7 @@
           <a:bodyPr wrap="square" rtlCol="0" anchor="ctr"/>
           <a:lstStyle/>
           <a:p>
-            <a:pPr algn="ctr" indent="0" marL="0">
+            <a:pPr marL="0" indent="0" algn="ctr">
               <a:buNone/>
             </a:pPr>
             <a:r>
@@ -14829,7 +14766,7 @@
         </p:nvSpPr>
         <p:spPr>
           <a:xfrm>
-            <a:off x="365760" y="3520440"/>
+            <a:off x="438912" y="4389120"/>
             <a:ext cx="8412480" cy="548640"/>
           </a:xfrm>
           <a:prstGeom prst="rect">
@@ -14840,7 +14777,7 @@
           </a:solidFill>
           <a:ln/>
           <a:effectLst>
-            <a:outerShdw sx="100000" sy="100000" kx="0" ky="0" algn="bl" rotWithShape="0" blurRad="38100" dist="12700" dir="8100000">
+            <a:outerShdw blurRad="38100" dist="12700" dir="8100000" algn="bl" rotWithShape="0">
               <a:srgbClr val="000000">
                 <a:alpha val="6000"/>
               </a:srgbClr>
@@ -14849,7 +14786,10 @@
         </p:spPr>
         <p:txBody>
           <a:bodyPr/>
-          <a:p/>
+          <a:lstStyle/>
+          <a:p>
+            <a:endParaRPr/>
+          </a:p>
         </p:txBody>
       </p:sp>
       <p:sp>
@@ -14860,7 +14800,7 @@
         </p:nvSpPr>
         <p:spPr>
           <a:xfrm>
-            <a:off x="548640" y="3611880"/>
+            <a:off x="521208" y="4507992"/>
             <a:ext cx="8046720" cy="365760"/>
           </a:xfrm>
           <a:prstGeom prst="rect">
@@ -14873,7 +14813,7 @@
           <a:bodyPr wrap="square" rtlCol="0" anchor="ctr"/>
           <a:lstStyle/>
           <a:p>
-            <a:pPr indent="0" marL="0">
+            <a:pPr marL="0" indent="0">
               <a:buNone/>
             </a:pPr>
             <a:r>
@@ -14904,6 +14844,7 @@
         <a:solidFill>
           <a:srgbClr val="F8FAFC"/>
         </a:solidFill>
+        <a:effectLst/>
       </p:bgPr>
     </p:bg>
     <p:spTree>
@@ -14941,7 +14882,7 @@
           <a:bodyPr wrap="square" rtlCol="0" anchor="ctr"/>
           <a:lstStyle/>
           <a:p>
-            <a:pPr indent="0" marL="0">
+            <a:pPr marL="0" indent="0">
               <a:buNone/>
             </a:pPr>
             <a:r>
@@ -14980,7 +14921,10 @@
         </p:spPr>
         <p:txBody>
           <a:bodyPr/>
-          <a:p/>
+          <a:lstStyle/>
+          <a:p>
+            <a:endParaRPr/>
+          </a:p>
         </p:txBody>
       </p:sp>
       <p:sp>
@@ -15004,7 +14948,7 @@
           <a:bodyPr wrap="square" rtlCol="0" anchor="ctr"/>
           <a:lstStyle/>
           <a:p>
-            <a:pPr algn="r" indent="0" marL="0">
+            <a:pPr marL="0" indent="0" algn="r">
               <a:buNone/>
             </a:pPr>
             <a:r>
@@ -15021,7 +14965,7 @@
       </p:sp>
       <p:graphicFrame>
         <p:nvGraphicFramePr>
-          <p:cNvPr id="5" name="Chart 0" descr=""/>
+          <p:cNvPr id="5" name="Chart 0"/>
           <p:cNvGraphicFramePr/>
           <p:nvPr/>
         </p:nvGraphicFramePr>
@@ -15029,9 +14973,9 @@
           <a:off x="182880" y="1051560"/>
           <a:ext cx="4389120" cy="2743200"/>
         </p:xfrm>
-        <a:graphic xmlns:a="http://schemas.openxmlformats.org/drawingml/2006/main">
+        <a:graphic>
           <a:graphicData uri="http://schemas.openxmlformats.org/drawingml/2006/chart">
-            <c:chart xmlns:c="http://schemas.openxmlformats.org/drawingml/2006/chart" r:id="rId1"/>
+            <c:chart xmlns:c="http://schemas.openxmlformats.org/drawingml/2006/chart" xmlns:r="http://schemas.openxmlformats.org/officeDocument/2006/relationships" r:id="rId3"/>
           </a:graphicData>
         </a:graphic>
       </p:graphicFrame>
@@ -15054,7 +14998,7 @@
           </a:solidFill>
           <a:ln/>
           <a:effectLst>
-            <a:outerShdw sx="100000" sy="100000" kx="0" ky="0" algn="bl" rotWithShape="0" blurRad="38100" dist="12700" dir="8100000">
+            <a:outerShdw blurRad="38100" dist="12700" dir="8100000" algn="bl" rotWithShape="0">
               <a:srgbClr val="000000">
                 <a:alpha val="6000"/>
               </a:srgbClr>
@@ -15063,7 +15007,10 @@
         </p:spPr>
         <p:txBody>
           <a:bodyPr/>
-          <a:p/>
+          <a:lstStyle/>
+          <a:p>
+            <a:endParaRPr/>
+          </a:p>
         </p:txBody>
       </p:sp>
       <p:sp>
@@ -15087,7 +15034,7 @@
           <a:bodyPr wrap="square" rtlCol="0" anchor="ctr"/>
           <a:lstStyle/>
           <a:p>
-            <a:pPr indent="0" marL="0">
+            <a:pPr marL="0" indent="0">
               <a:buNone/>
             </a:pPr>
             <a:r>
@@ -15126,7 +15073,7 @@
           <a:bodyPr wrap="square" rtlCol="0" anchor="ctr"/>
           <a:lstStyle/>
           <a:p>
-            <a:pPr indent="0" marL="0">
+            <a:pPr marL="0" indent="0">
               <a:buNone/>
             </a:pPr>
             <a:r>
@@ -15162,7 +15109,7 @@
           <a:bodyPr wrap="square" rtlCol="0" anchor="ctr"/>
           <a:lstStyle/>
           <a:p>
-            <a:pPr indent="0" marL="0">
+            <a:pPr marL="0" indent="0">
               <a:buNone/>
             </a:pPr>
             <a:r>
@@ -15198,7 +15145,7 @@
           <a:bodyPr wrap="square" rtlCol="0" anchor="ctr"/>
           <a:lstStyle/>
           <a:p>
-            <a:pPr indent="0" marL="0">
+            <a:pPr marL="0" indent="0">
               <a:buNone/>
             </a:pPr>
             <a:r>
@@ -15234,7 +15181,7 @@
           <a:bodyPr wrap="square" rtlCol="0" anchor="ctr"/>
           <a:lstStyle/>
           <a:p>
-            <a:pPr indent="0" marL="0">
+            <a:pPr marL="0" indent="0">
               <a:buNone/>
             </a:pPr>
             <a:r>
@@ -15270,7 +15217,7 @@
           <a:bodyPr wrap="square" rtlCol="0" anchor="ctr"/>
           <a:lstStyle/>
           <a:p>
-            <a:pPr indent="0" marL="0">
+            <a:pPr marL="0" indent="0">
               <a:buNone/>
             </a:pPr>
             <a:r>
@@ -15306,7 +15253,7 @@
           <a:bodyPr wrap="square" rtlCol="0" anchor="ctr"/>
           <a:lstStyle/>
           <a:p>
-            <a:pPr indent="0" marL="0">
+            <a:pPr marL="0" indent="0">
               <a:buNone/>
             </a:pPr>
             <a:r>
@@ -15323,7 +15270,7 @@
       </p:sp>
       <p:graphicFrame>
         <p:nvGraphicFramePr>
-          <p:cNvPr id="14" name="Chart 1" descr=""/>
+          <p:cNvPr id="14" name="Chart 1"/>
           <p:cNvGraphicFramePr/>
           <p:nvPr/>
         </p:nvGraphicFramePr>
@@ -15331,9 +15278,9 @@
           <a:off x="274320" y="4023360"/>
           <a:ext cx="8595360" cy="731520"/>
         </p:xfrm>
-        <a:graphic xmlns:a="http://schemas.openxmlformats.org/drawingml/2006/main">
+        <a:graphic>
           <a:graphicData uri="http://schemas.openxmlformats.org/drawingml/2006/chart">
-            <c:chart xmlns:c="http://schemas.openxmlformats.org/drawingml/2006/chart" r:id="rId2"/>
+            <c:chart xmlns:c="http://schemas.openxmlformats.org/drawingml/2006/chart" xmlns:r="http://schemas.openxmlformats.org/officeDocument/2006/relationships" r:id="rId4"/>
           </a:graphicData>
         </a:graphic>
       </p:graphicFrame>
@@ -15353,6 +15300,7 @@
         <a:solidFill>
           <a:srgbClr val="F8FAFC"/>
         </a:solidFill>
+        <a:effectLst/>
       </p:bgPr>
     </p:bg>
     <p:spTree>
@@ -15390,7 +15338,7 @@
           <a:bodyPr wrap="square" rtlCol="0" anchor="ctr"/>
           <a:lstStyle/>
           <a:p>
-            <a:pPr indent="0" marL="0">
+            <a:pPr marL="0" indent="0">
               <a:buNone/>
             </a:pPr>
             <a:r>
@@ -15429,7 +15377,10 @@
         </p:spPr>
         <p:txBody>
           <a:bodyPr/>
-          <a:p/>
+          <a:lstStyle/>
+          <a:p>
+            <a:endParaRPr/>
+          </a:p>
         </p:txBody>
       </p:sp>
       <p:sp>
@@ -15453,7 +15404,7 @@
           <a:bodyPr wrap="square" rtlCol="0" anchor="ctr"/>
           <a:lstStyle/>
           <a:p>
-            <a:pPr algn="r" indent="0" marL="0">
+            <a:pPr marL="0" indent="0" algn="r">
               <a:buNone/>
             </a:pPr>
             <a:r>
@@ -15487,7 +15438,7 @@
           </a:solidFill>
           <a:ln/>
           <a:effectLst>
-            <a:outerShdw sx="100000" sy="100000" kx="0" ky="0" algn="bl" rotWithShape="0" blurRad="38100" dist="12700" dir="8100000">
+            <a:outerShdw blurRad="38100" dist="12700" dir="8100000" algn="bl" rotWithShape="0">
               <a:srgbClr val="000000">
                 <a:alpha val="6000"/>
               </a:srgbClr>
@@ -15496,7 +15447,10 @@
         </p:spPr>
         <p:txBody>
           <a:bodyPr/>
-          <a:p/>
+          <a:lstStyle/>
+          <a:p>
+            <a:endParaRPr/>
+          </a:p>
         </p:txBody>
       </p:sp>
       <p:sp>
@@ -15522,7 +15476,10 @@
         </p:spPr>
         <p:txBody>
           <a:bodyPr/>
-          <a:p/>
+          <a:lstStyle/>
+          <a:p>
+            <a:endParaRPr/>
+          </a:p>
         </p:txBody>
       </p:sp>
       <p:sp>
@@ -15546,7 +15503,7 @@
           <a:bodyPr wrap="square" rtlCol="0" anchor="ctr"/>
           <a:lstStyle/>
           <a:p>
-            <a:pPr indent="0" marL="0">
+            <a:pPr marL="0" indent="0">
               <a:buNone/>
             </a:pPr>
             <a:r>
@@ -15585,7 +15542,7 @@
           <a:bodyPr wrap="square" rtlCol="0" anchor="ctr"/>
           <a:lstStyle/>
           <a:p>
-            <a:pPr indent="0" marL="0">
+            <a:pPr marL="0" indent="0">
               <a:buNone/>
             </a:pPr>
             <a:r>
@@ -15619,7 +15576,7 @@
           </a:solidFill>
           <a:ln/>
           <a:effectLst>
-            <a:outerShdw sx="100000" sy="100000" kx="0" ky="0" algn="bl" rotWithShape="0" blurRad="38100" dist="12700" dir="8100000">
+            <a:outerShdw blurRad="38100" dist="12700" dir="8100000" algn="bl" rotWithShape="0">
               <a:srgbClr val="000000">
                 <a:alpha val="6000"/>
               </a:srgbClr>
@@ -15628,7 +15585,10 @@
         </p:spPr>
         <p:txBody>
           <a:bodyPr/>
-          <a:p/>
+          <a:lstStyle/>
+          <a:p>
+            <a:endParaRPr/>
+          </a:p>
         </p:txBody>
       </p:sp>
       <p:sp>
@@ -15654,7 +15614,10 @@
         </p:spPr>
         <p:txBody>
           <a:bodyPr/>
-          <a:p/>
+          <a:lstStyle/>
+          <a:p>
+            <a:endParaRPr/>
+          </a:p>
         </p:txBody>
       </p:sp>
       <p:sp>
@@ -15678,7 +15641,7 @@
           <a:bodyPr wrap="square" rtlCol="0" anchor="ctr"/>
           <a:lstStyle/>
           <a:p>
-            <a:pPr indent="0" marL="0">
+            <a:pPr marL="0" indent="0">
               <a:buNone/>
             </a:pPr>
             <a:r>
@@ -15717,7 +15680,7 @@
           <a:bodyPr wrap="square" rtlCol="0" anchor="ctr"/>
           <a:lstStyle/>
           <a:p>
-            <a:pPr indent="0" marL="0">
+            <a:pPr marL="0" indent="0">
               <a:buNone/>
             </a:pPr>
             <a:r>
@@ -15751,7 +15714,7 @@
           </a:solidFill>
           <a:ln/>
           <a:effectLst>
-            <a:outerShdw sx="100000" sy="100000" kx="0" ky="0" algn="bl" rotWithShape="0" blurRad="38100" dist="12700" dir="8100000">
+            <a:outerShdw blurRad="38100" dist="12700" dir="8100000" algn="bl" rotWithShape="0">
               <a:srgbClr val="000000">
                 <a:alpha val="6000"/>
               </a:srgbClr>
@@ -15760,7 +15723,10 @@
         </p:spPr>
         <p:txBody>
           <a:bodyPr/>
-          <a:p/>
+          <a:lstStyle/>
+          <a:p>
+            <a:endParaRPr/>
+          </a:p>
         </p:txBody>
       </p:sp>
       <p:sp>
@@ -15786,7 +15752,10 @@
         </p:spPr>
         <p:txBody>
           <a:bodyPr/>
-          <a:p/>
+          <a:lstStyle/>
+          <a:p>
+            <a:endParaRPr/>
+          </a:p>
         </p:txBody>
       </p:sp>
       <p:sp>
@@ -15810,7 +15779,7 @@
           <a:bodyPr wrap="square" rtlCol="0" anchor="ctr"/>
           <a:lstStyle/>
           <a:p>
-            <a:pPr indent="0" marL="0">
+            <a:pPr marL="0" indent="0">
               <a:buNone/>
             </a:pPr>
             <a:r>
@@ -15849,7 +15818,7 @@
           <a:bodyPr wrap="square" rtlCol="0" anchor="ctr"/>
           <a:lstStyle/>
           <a:p>
-            <a:pPr indent="0" marL="0">
+            <a:pPr marL="0" indent="0">
               <a:buNone/>
             </a:pPr>
             <a:r>
@@ -15883,7 +15852,7 @@
           </a:solidFill>
           <a:ln/>
           <a:effectLst>
-            <a:outerShdw sx="100000" sy="100000" kx="0" ky="0" algn="bl" rotWithShape="0" blurRad="38100" dist="12700" dir="8100000">
+            <a:outerShdw blurRad="38100" dist="12700" dir="8100000" algn="bl" rotWithShape="0">
               <a:srgbClr val="000000">
                 <a:alpha val="6000"/>
               </a:srgbClr>
@@ -15892,7 +15861,10 @@
         </p:spPr>
         <p:txBody>
           <a:bodyPr/>
-          <a:p/>
+          <a:lstStyle/>
+          <a:p>
+            <a:endParaRPr/>
+          </a:p>
         </p:txBody>
       </p:sp>
       <p:sp>
@@ -15916,7 +15888,7 @@
           <a:bodyPr wrap="square" rtlCol="0" anchor="ctr"/>
           <a:lstStyle/>
           <a:p>
-            <a:pPr indent="0" marL="0">
+            <a:pPr marL="0" indent="0">
               <a:buNone/>
             </a:pPr>
             <a:r>
@@ -15950,7 +15922,7 @@
           </a:solidFill>
           <a:ln/>
           <a:effectLst>
-            <a:outerShdw sx="100000" sy="100000" kx="0" ky="0" algn="bl" rotWithShape="0" blurRad="38100" dist="12700" dir="8100000">
+            <a:outerShdw blurRad="38100" dist="12700" dir="8100000" algn="bl" rotWithShape="0">
               <a:srgbClr val="000000">
                 <a:alpha val="6000"/>
               </a:srgbClr>
@@ -15959,7 +15931,10 @@
         </p:spPr>
         <p:txBody>
           <a:bodyPr/>
-          <a:p/>
+          <a:lstStyle/>
+          <a:p>
+            <a:endParaRPr/>
+          </a:p>
         </p:txBody>
       </p:sp>
       <p:sp>
@@ -15983,7 +15958,10 @@
         </p:spPr>
         <p:txBody>
           <a:bodyPr/>
-          <a:p/>
+          <a:lstStyle/>
+          <a:p>
+            <a:endParaRPr/>
+          </a:p>
         </p:txBody>
       </p:sp>
       <p:sp>
@@ -16007,7 +15985,7 @@
           <a:bodyPr wrap="square" rtlCol="0" anchor="ctr"/>
           <a:lstStyle/>
           <a:p>
-            <a:pPr indent="0" marL="0">
+            <a:pPr marL="0" indent="0">
               <a:buNone/>
             </a:pPr>
             <a:r>
@@ -16046,7 +16024,7 @@
           <a:bodyPr wrap="square" rtlCol="0" anchor="ctr"/>
           <a:lstStyle/>
           <a:p>
-            <a:pPr indent="0" marL="0">
+            <a:pPr marL="0" indent="0">
               <a:buNone/>
             </a:pPr>
             <a:r>
@@ -16060,7 +16038,7 @@
             <a:endParaRPr lang="en-US" sz="1000" dirty="0"/>
           </a:p>
           <a:p>
-            <a:pPr indent="0" marL="0">
+            <a:pPr marL="0" indent="0">
               <a:buNone/>
             </a:pPr>
             <a:r>
@@ -16094,7 +16072,7 @@
           </a:solidFill>
           <a:ln/>
           <a:effectLst>
-            <a:outerShdw sx="100000" sy="100000" kx="0" ky="0" algn="bl" rotWithShape="0" blurRad="38100" dist="12700" dir="8100000">
+            <a:outerShdw blurRad="38100" dist="12700" dir="8100000" algn="bl" rotWithShape="0">
               <a:srgbClr val="000000">
                 <a:alpha val="6000"/>
               </a:srgbClr>
@@ -16103,7 +16081,10 @@
         </p:spPr>
         <p:txBody>
           <a:bodyPr/>
-          <a:p/>
+          <a:lstStyle/>
+          <a:p>
+            <a:endParaRPr/>
+          </a:p>
         </p:txBody>
       </p:sp>
       <p:sp>
@@ -16127,7 +16108,10 @@
         </p:spPr>
         <p:txBody>
           <a:bodyPr/>
-          <a:p/>
+          <a:lstStyle/>
+          <a:p>
+            <a:endParaRPr/>
+          </a:p>
         </p:txBody>
       </p:sp>
       <p:sp>
@@ -16151,7 +16135,7 @@
           <a:bodyPr wrap="square" rtlCol="0" anchor="ctr"/>
           <a:lstStyle/>
           <a:p>
-            <a:pPr indent="0" marL="0">
+            <a:pPr marL="0" indent="0">
               <a:buNone/>
             </a:pPr>
             <a:r>
@@ -16190,7 +16174,7 @@
           <a:bodyPr wrap="square" rtlCol="0" anchor="ctr"/>
           <a:lstStyle/>
           <a:p>
-            <a:pPr indent="0" marL="0">
+            <a:pPr marL="0" indent="0">
               <a:buNone/>
             </a:pPr>
             <a:r>
@@ -16204,7 +16188,7 @@
             <a:endParaRPr lang="en-US" sz="1000" dirty="0"/>
           </a:p>
           <a:p>
-            <a:pPr indent="0" marL="0">
+            <a:pPr marL="0" indent="0">
               <a:buNone/>
             </a:pPr>
             <a:r>
@@ -16238,7 +16222,7 @@
           </a:solidFill>
           <a:ln/>
           <a:effectLst>
-            <a:outerShdw sx="100000" sy="100000" kx="0" ky="0" algn="bl" rotWithShape="0" blurRad="38100" dist="12700" dir="8100000">
+            <a:outerShdw blurRad="38100" dist="12700" dir="8100000" algn="bl" rotWithShape="0">
               <a:srgbClr val="000000">
                 <a:alpha val="6000"/>
               </a:srgbClr>
@@ -16247,7 +16231,10 @@
         </p:spPr>
         <p:txBody>
           <a:bodyPr/>
-          <a:p/>
+          <a:lstStyle/>
+          <a:p>
+            <a:endParaRPr/>
+          </a:p>
         </p:txBody>
       </p:sp>
       <p:sp>
@@ -16271,7 +16258,10 @@
         </p:spPr>
         <p:txBody>
           <a:bodyPr/>
-          <a:p/>
+          <a:lstStyle/>
+          <a:p>
+            <a:endParaRPr/>
+          </a:p>
         </p:txBody>
       </p:sp>
       <p:sp>
@@ -16295,7 +16285,7 @@
           <a:bodyPr wrap="square" rtlCol="0" anchor="ctr"/>
           <a:lstStyle/>
           <a:p>
-            <a:pPr indent="0" marL="0">
+            <a:pPr marL="0" indent="0">
               <a:buNone/>
             </a:pPr>
             <a:r>
@@ -16334,7 +16324,7 @@
           <a:bodyPr wrap="square" rtlCol="0" anchor="ctr"/>
           <a:lstStyle/>
           <a:p>
-            <a:pPr indent="0" marL="0">
+            <a:pPr marL="0" indent="0">
               <a:buNone/>
             </a:pPr>
             <a:r>
@@ -16348,7 +16338,7 @@
             <a:endParaRPr lang="en-US" sz="1000" dirty="0"/>
           </a:p>
           <a:p>
-            <a:pPr indent="0" marL="0">
+            <a:pPr marL="0" indent="0">
               <a:buNone/>
             </a:pPr>
             <a:r>
@@ -16382,7 +16372,7 @@
           </a:solidFill>
           <a:ln/>
           <a:effectLst>
-            <a:outerShdw sx="100000" sy="100000" kx="0" ky="0" algn="bl" rotWithShape="0" blurRad="38100" dist="12700" dir="8100000">
+            <a:outerShdw blurRad="38100" dist="12700" dir="8100000" algn="bl" rotWithShape="0">
               <a:srgbClr val="000000">
                 <a:alpha val="6000"/>
               </a:srgbClr>
@@ -16391,7 +16381,10 @@
         </p:spPr>
         <p:txBody>
           <a:bodyPr/>
-          <a:p/>
+          <a:lstStyle/>
+          <a:p>
+            <a:endParaRPr/>
+          </a:p>
         </p:txBody>
       </p:sp>
       <p:sp>
@@ -16415,7 +16408,10 @@
         </p:spPr>
         <p:txBody>
           <a:bodyPr/>
-          <a:p/>
+          <a:lstStyle/>
+          <a:p>
+            <a:endParaRPr/>
+          </a:p>
         </p:txBody>
       </p:sp>
       <p:sp>
@@ -16439,7 +16435,7 @@
           <a:bodyPr wrap="square" rtlCol="0" anchor="ctr"/>
           <a:lstStyle/>
           <a:p>
-            <a:pPr indent="0" marL="0">
+            <a:pPr marL="0" indent="0">
               <a:buNone/>
             </a:pPr>
             <a:r>
@@ -16478,7 +16474,7 @@
           <a:bodyPr wrap="square" rtlCol="0" anchor="ctr"/>
           <a:lstStyle/>
           <a:p>
-            <a:pPr indent="0" marL="0">
+            <a:pPr marL="0" indent="0">
               <a:buNone/>
             </a:pPr>
             <a:r>
@@ -16492,7 +16488,7 @@
             <a:endParaRPr lang="en-US" sz="1000" dirty="0"/>
           </a:p>
           <a:p>
-            <a:pPr indent="0" marL="0">
+            <a:pPr marL="0" indent="0">
               <a:buNone/>
             </a:pPr>
             <a:r>
@@ -16523,6 +16519,7 @@
         <a:solidFill>
           <a:srgbClr val="F8FAFC"/>
         </a:solidFill>
+        <a:effectLst/>
       </p:bgPr>
     </p:bg>
     <p:spTree>
@@ -16560,7 +16557,7 @@
           <a:bodyPr wrap="square" rtlCol="0" anchor="ctr"/>
           <a:lstStyle/>
           <a:p>
-            <a:pPr indent="0" marL="0">
+            <a:pPr marL="0" indent="0">
               <a:buNone/>
             </a:pPr>
             <a:r>
@@ -16599,7 +16596,10 @@
         </p:spPr>
         <p:txBody>
           <a:bodyPr/>
-          <a:p/>
+          <a:lstStyle/>
+          <a:p>
+            <a:endParaRPr/>
+          </a:p>
         </p:txBody>
       </p:sp>
       <p:sp>
@@ -16623,7 +16623,7 @@
           <a:bodyPr wrap="square" rtlCol="0" anchor="ctr"/>
           <a:lstStyle/>
           <a:p>
-            <a:pPr algn="r" indent="0" marL="0">
+            <a:pPr marL="0" indent="0" algn="r">
               <a:buNone/>
             </a:pPr>
             <a:r>
@@ -16640,22 +16640,22 @@
       </p:sp>
       <p:pic>
         <p:nvPicPr>
-          <p:cNvPr id="5" name="Image 0" descr="images/screenshots/01_dashboard_overview.png">    </p:cNvPr>
+          <p:cNvPr id="5" name="Image 0" descr="images/screenshots/01_dashboard_overview.png"/>
           <p:cNvPicPr>
             <a:picLocks noChangeAspect="1"/>
           </p:cNvPicPr>
           <p:nvPr/>
         </p:nvPicPr>
         <p:blipFill>
-          <a:blip r:embed="rId1"/>
+          <a:blip r:embed="rId3"/>
           <a:stretch>
             <a:fillRect/>
           </a:stretch>
         </p:blipFill>
         <p:spPr>
           <a:xfrm>
-            <a:off x="0" y="914400"/>
-            <a:ext cx="9144000" cy="4206240"/>
+            <a:off x="580644" y="1160556"/>
+            <a:ext cx="7296912" cy="3356580"/>
           </a:xfrm>
           <a:prstGeom prst="rect">
             <a:avLst/>
@@ -16678,6 +16678,7 @@
         <a:solidFill>
           <a:srgbClr val="F8FAFC"/>
         </a:solidFill>
+        <a:effectLst/>
       </p:bgPr>
     </p:bg>
     <p:spTree>
@@ -16715,7 +16716,7 @@
           <a:bodyPr wrap="square" rtlCol="0" anchor="ctr"/>
           <a:lstStyle/>
           <a:p>
-            <a:pPr indent="0" marL="0">
+            <a:pPr marL="0" indent="0">
               <a:buNone/>
             </a:pPr>
             <a:r>
@@ -16754,7 +16755,10 @@
         </p:spPr>
         <p:txBody>
           <a:bodyPr/>
-          <a:p/>
+          <a:lstStyle/>
+          <a:p>
+            <a:endParaRPr/>
+          </a:p>
         </p:txBody>
       </p:sp>
       <p:sp>
@@ -16778,7 +16782,7 @@
           <a:bodyPr wrap="square" rtlCol="0" anchor="ctr"/>
           <a:lstStyle/>
           <a:p>
-            <a:pPr algn="r" indent="0" marL="0">
+            <a:pPr marL="0" indent="0" algn="r">
               <a:buNone/>
             </a:pPr>
             <a:r>
@@ -16795,14 +16799,14 @@
       </p:sp>
       <p:pic>
         <p:nvPicPr>
-          <p:cNvPr id="5" name="Image 0" descr="images/screenshots/02_order_list.png">    </p:cNvPr>
+          <p:cNvPr id="5" name="Image 0" descr="images/screenshots/02_order_list.png"/>
           <p:cNvPicPr>
             <a:picLocks noChangeAspect="1"/>
           </p:cNvPicPr>
           <p:nvPr/>
         </p:nvPicPr>
         <p:blipFill>
-          <a:blip r:embed="rId1"/>
+          <a:blip r:embed="rId3"/>
           <a:stretch>
             <a:fillRect/>
           </a:stretch>
@@ -16819,14 +16823,14 @@
       </p:pic>
       <p:pic>
         <p:nvPicPr>
-          <p:cNvPr id="6" name="Image 1" descr="images/screenshots/03_pickup_points.png">    </p:cNvPr>
+          <p:cNvPr id="6" name="Image 1" descr="images/screenshots/03_pickup_points.png"/>
           <p:cNvPicPr>
             <a:picLocks noChangeAspect="1"/>
           </p:cNvPicPr>
           <p:nvPr/>
         </p:nvPicPr>
         <p:blipFill>
-          <a:blip r:embed="rId2"/>
+          <a:blip r:embed="rId4"/>
           <a:stretch>
             <a:fillRect/>
           </a:stretch>
@@ -16857,6 +16861,7 @@
         <a:solidFill>
           <a:srgbClr val="F8FAFC"/>
         </a:solidFill>
+        <a:effectLst/>
       </p:bgPr>
     </p:bg>
     <p:spTree>
@@ -16894,7 +16899,7 @@
           <a:bodyPr wrap="square" rtlCol="0" anchor="ctr"/>
           <a:lstStyle/>
           <a:p>
-            <a:pPr indent="0" marL="0">
+            <a:pPr marL="0" indent="0">
               <a:buNone/>
             </a:pPr>
             <a:r>
@@ -16933,7 +16938,10 @@
         </p:spPr>
         <p:txBody>
           <a:bodyPr/>
-          <a:p/>
+          <a:lstStyle/>
+          <a:p>
+            <a:endParaRPr/>
+          </a:p>
         </p:txBody>
       </p:sp>
       <p:sp>
@@ -16957,7 +16965,7 @@
           <a:bodyPr wrap="square" rtlCol="0" anchor="ctr"/>
           <a:lstStyle/>
           <a:p>
-            <a:pPr algn="r" indent="0" marL="0">
+            <a:pPr marL="0" indent="0" algn="r">
               <a:buNone/>
             </a:pPr>
             <a:r>
@@ -16974,15 +16982,15 @@
       </p:sp>
       <p:pic>
         <p:nvPicPr>
-          <p:cNvPr id="5" name="Image 0" descr="images/screenshots/06_kpi_cards.png">    </p:cNvPr>
+          <p:cNvPr id="5" name="Image 0" descr="images/screenshots/06_kpi_cards.png"/>
           <p:cNvPicPr>
             <a:picLocks noChangeAspect="1"/>
           </p:cNvPicPr>
           <p:nvPr/>
         </p:nvPicPr>
         <p:blipFill>
-          <a:blip r:embed="rId1"/>
-          <a:srcRect l="0" r="0" t="0" b="0"/>
+          <a:blip r:embed="rId3"/>
+          <a:srcRect/>
           <a:stretch/>
         </p:blipFill>
         <p:spPr>
@@ -17016,7 +17024,7 @@
           <a:bodyPr wrap="square" rtlCol="0" anchor="ctr"/>
           <a:lstStyle/>
           <a:p>
-            <a:pPr algn="ctr" indent="0" marL="0">
+            <a:pPr marL="0" indent="0" algn="ctr">
               <a:buNone/>
             </a:pPr>
             <a:r>
@@ -17050,7 +17058,7 @@
           </a:solidFill>
           <a:ln/>
           <a:effectLst>
-            <a:outerShdw sx="100000" sy="100000" kx="0" ky="0" algn="bl" rotWithShape="0" blurRad="38100" dist="12700" dir="8100000">
+            <a:outerShdw blurRad="38100" dist="12700" dir="8100000" algn="bl" rotWithShape="0">
               <a:srgbClr val="000000">
                 <a:alpha val="6000"/>
               </a:srgbClr>
@@ -17059,7 +17067,10 @@
         </p:spPr>
         <p:txBody>
           <a:bodyPr/>
-          <a:p/>
+          <a:lstStyle/>
+          <a:p>
+            <a:endParaRPr/>
+          </a:p>
         </p:txBody>
       </p:sp>
       <p:sp>
@@ -17083,7 +17094,7 @@
           <a:bodyPr wrap="square" rtlCol="0" anchor="ctr"/>
           <a:lstStyle/>
           <a:p>
-            <a:pPr indent="0" marL="0">
+            <a:pPr marL="0" indent="0">
               <a:buNone/>
             </a:pPr>
             <a:r>
@@ -17122,7 +17133,7 @@
           <a:bodyPr wrap="square" rtlCol="0" anchor="ctr"/>
           <a:lstStyle/>
           <a:p>
-            <a:pPr indent="0" marL="0">
+            <a:pPr marL="0" indent="0">
               <a:buNone/>
             </a:pPr>
             <a:r>
@@ -17153,6 +17164,7 @@
         <a:solidFill>
           <a:srgbClr val="1A1A2E"/>
         </a:solidFill>
+        <a:effectLst/>
       </p:bgPr>
     </p:bg>
     <p:spTree>
@@ -17190,7 +17202,10 @@
         </p:spPr>
         <p:txBody>
           <a:bodyPr/>
-          <a:p/>
+          <a:lstStyle/>
+          <a:p>
+            <a:endParaRPr/>
+          </a:p>
         </p:txBody>
       </p:sp>
       <p:sp>
@@ -17214,7 +17229,7 @@
           <a:bodyPr wrap="square" rtlCol="0" anchor="ctr"/>
           <a:lstStyle/>
           <a:p>
-            <a:pPr indent="0" marL="0">
+            <a:pPr marL="0" indent="0">
               <a:buNone/>
             </a:pPr>
             <a:r>
@@ -17253,7 +17268,7 @@
           <a:bodyPr wrap="square" rtlCol="0" anchor="ctr"/>
           <a:lstStyle/>
           <a:p>
-            <a:pPr indent="0" marL="0">
+            <a:pPr marL="0" indent="0">
               <a:buNone/>
             </a:pPr>
             <a:r>
@@ -17289,7 +17304,7 @@
           <a:bodyPr wrap="square" rtlCol="0" anchor="ctr"/>
           <a:lstStyle/>
           <a:p>
-            <a:pPr algn="r" indent="0" marL="0">
+            <a:pPr marL="0" indent="0" algn="r">
               <a:buNone/>
             </a:pPr>
             <a:r>
@@ -17320,6 +17335,7 @@
         <a:solidFill>
           <a:srgbClr val="F8FAFC"/>
         </a:solidFill>
+        <a:effectLst/>
       </p:bgPr>
     </p:bg>
     <p:spTree>
@@ -17357,7 +17373,7 @@
           <a:bodyPr wrap="square" rtlCol="0" anchor="ctr"/>
           <a:lstStyle/>
           <a:p>
-            <a:pPr indent="0" marL="0">
+            <a:pPr marL="0" indent="0">
               <a:buNone/>
             </a:pPr>
             <a:r>
@@ -17396,7 +17412,10 @@
         </p:spPr>
         <p:txBody>
           <a:bodyPr/>
-          <a:p/>
+          <a:lstStyle/>
+          <a:p>
+            <a:endParaRPr/>
+          </a:p>
         </p:txBody>
       </p:sp>
       <p:sp>
@@ -17420,7 +17439,7 @@
           <a:bodyPr wrap="square" rtlCol="0" anchor="ctr"/>
           <a:lstStyle/>
           <a:p>
-            <a:pPr algn="r" indent="0" marL="0">
+            <a:pPr marL="0" indent="0" algn="r">
               <a:buNone/>
             </a:pPr>
             <a:r>
@@ -17454,7 +17473,7 @@
           </a:solidFill>
           <a:ln/>
           <a:effectLst>
-            <a:outerShdw sx="100000" sy="100000" kx="0" ky="0" algn="bl" rotWithShape="0" blurRad="38100" dist="12700" dir="8100000">
+            <a:outerShdw blurRad="38100" dist="12700" dir="8100000" algn="bl" rotWithShape="0">
               <a:srgbClr val="000000">
                 <a:alpha val="6000"/>
               </a:srgbClr>
@@ -17463,7 +17482,10 @@
         </p:spPr>
         <p:txBody>
           <a:bodyPr/>
-          <a:p/>
+          <a:lstStyle/>
+          <a:p>
+            <a:endParaRPr/>
+          </a:p>
         </p:txBody>
       </p:sp>
       <p:sp>
@@ -17487,7 +17509,7 @@
           <a:bodyPr wrap="square" rtlCol="0" anchor="ctr"/>
           <a:lstStyle/>
           <a:p>
-            <a:pPr indent="0" marL="0">
+            <a:pPr marL="0" indent="0">
               <a:buNone/>
             </a:pPr>
             <a:r>
@@ -17526,7 +17548,7 @@
           <a:bodyPr wrap="square" rtlCol="0" anchor="ctr"/>
           <a:lstStyle/>
           <a:p>
-            <a:pPr indent="0" marL="0">
+            <a:pPr marL="0" indent="0">
               <a:buNone/>
             </a:pPr>
             <a:r>
@@ -17560,7 +17582,7 @@
           </a:solidFill>
           <a:ln/>
           <a:effectLst>
-            <a:outerShdw sx="100000" sy="100000" kx="0" ky="0" algn="bl" rotWithShape="0" blurRad="38100" dist="12700" dir="8100000">
+            <a:outerShdw blurRad="38100" dist="12700" dir="8100000" algn="bl" rotWithShape="0">
               <a:srgbClr val="000000">
                 <a:alpha val="6000"/>
               </a:srgbClr>
@@ -17569,7 +17591,10 @@
         </p:spPr>
         <p:txBody>
           <a:bodyPr/>
-          <a:p/>
+          <a:lstStyle/>
+          <a:p>
+            <a:endParaRPr/>
+          </a:p>
         </p:txBody>
       </p:sp>
       <p:sp>
@@ -17593,7 +17618,7 @@
           <a:bodyPr wrap="square" rtlCol="0" anchor="ctr"/>
           <a:lstStyle/>
           <a:p>
-            <a:pPr indent="0" marL="0">
+            <a:pPr marL="0" indent="0">
               <a:buNone/>
             </a:pPr>
             <a:r>
@@ -17632,7 +17657,7 @@
           <a:bodyPr wrap="square" rtlCol="0" anchor="ctr"/>
           <a:lstStyle/>
           <a:p>
-            <a:pPr indent="0" marL="0">
+            <a:pPr marL="0" indent="0">
               <a:buNone/>
             </a:pPr>
             <a:r>
@@ -17666,7 +17691,7 @@
           </a:solidFill>
           <a:ln/>
           <a:effectLst>
-            <a:outerShdw sx="100000" sy="100000" kx="0" ky="0" algn="bl" rotWithShape="0" blurRad="38100" dist="12700" dir="8100000">
+            <a:outerShdw blurRad="38100" dist="12700" dir="8100000" algn="bl" rotWithShape="0">
               <a:srgbClr val="000000">
                 <a:alpha val="6000"/>
               </a:srgbClr>
@@ -17675,7 +17700,10 @@
         </p:spPr>
         <p:txBody>
           <a:bodyPr/>
-          <a:p/>
+          <a:lstStyle/>
+          <a:p>
+            <a:endParaRPr/>
+          </a:p>
         </p:txBody>
       </p:sp>
       <p:sp>
@@ -17699,7 +17727,7 @@
           <a:bodyPr wrap="square" rtlCol="0" anchor="ctr"/>
           <a:lstStyle/>
           <a:p>
-            <a:pPr indent="0" marL="0">
+            <a:pPr marL="0" indent="0">
               <a:buNone/>
             </a:pPr>
             <a:r>
@@ -17738,7 +17766,7 @@
           <a:bodyPr wrap="square" rtlCol="0" anchor="ctr"/>
           <a:lstStyle/>
           <a:p>
-            <a:pPr indent="0" marL="0">
+            <a:pPr marL="0" indent="0">
               <a:buNone/>
             </a:pPr>
             <a:r>
@@ -17772,7 +17800,7 @@
           </a:solidFill>
           <a:ln/>
           <a:effectLst>
-            <a:outerShdw sx="100000" sy="100000" kx="0" ky="0" algn="bl" rotWithShape="0" blurRad="38100" dist="12700" dir="8100000">
+            <a:outerShdw blurRad="38100" dist="12700" dir="8100000" algn="bl" rotWithShape="0">
               <a:srgbClr val="000000">
                 <a:alpha val="6000"/>
               </a:srgbClr>
@@ -17781,7 +17809,10 @@
         </p:spPr>
         <p:txBody>
           <a:bodyPr/>
-          <a:p/>
+          <a:lstStyle/>
+          <a:p>
+            <a:endParaRPr/>
+          </a:p>
         </p:txBody>
       </p:sp>
       <p:sp>
@@ -17805,7 +17836,7 @@
           <a:bodyPr wrap="square" rtlCol="0" anchor="ctr"/>
           <a:lstStyle/>
           <a:p>
-            <a:pPr indent="0" marL="0">
+            <a:pPr marL="0" indent="0">
               <a:buNone/>
             </a:pPr>
             <a:r>
@@ -17844,7 +17875,7 @@
           <a:bodyPr wrap="square" rtlCol="0" anchor="ctr"/>
           <a:lstStyle/>
           <a:p>
-            <a:pPr indent="0" marL="0">
+            <a:pPr marL="0" indent="0">
               <a:buNone/>
             </a:pPr>
             <a:r>
@@ -17878,7 +17909,7 @@
           </a:solidFill>
           <a:ln/>
           <a:effectLst>
-            <a:outerShdw sx="100000" sy="100000" kx="0" ky="0" algn="bl" rotWithShape="0" blurRad="38100" dist="12700" dir="8100000">
+            <a:outerShdw blurRad="38100" dist="12700" dir="8100000" algn="bl" rotWithShape="0">
               <a:srgbClr val="000000">
                 <a:alpha val="6000"/>
               </a:srgbClr>
@@ -17887,7 +17918,10 @@
         </p:spPr>
         <p:txBody>
           <a:bodyPr/>
-          <a:p/>
+          <a:lstStyle/>
+          <a:p>
+            <a:endParaRPr/>
+          </a:p>
         </p:txBody>
       </p:sp>
       <p:sp>
@@ -17911,7 +17945,7 @@
           <a:bodyPr wrap="square" rtlCol="0" anchor="ctr"/>
           <a:lstStyle/>
           <a:p>
-            <a:pPr indent="0" marL="0">
+            <a:pPr marL="0" indent="0">
               <a:buNone/>
             </a:pPr>
             <a:r>
@@ -17950,7 +17984,7 @@
           <a:bodyPr wrap="square" rtlCol="0" anchor="ctr"/>
           <a:lstStyle/>
           <a:p>
-            <a:pPr indent="0" marL="0">
+            <a:pPr marL="0" indent="0">
               <a:buNone/>
             </a:pPr>
             <a:r>
@@ -17984,7 +18018,7 @@
           </a:solidFill>
           <a:ln/>
           <a:effectLst>
-            <a:outerShdw sx="100000" sy="100000" kx="0" ky="0" algn="bl" rotWithShape="0" blurRad="38100" dist="12700" dir="8100000">
+            <a:outerShdw blurRad="38100" dist="12700" dir="8100000" algn="bl" rotWithShape="0">
               <a:srgbClr val="000000">
                 <a:alpha val="6000"/>
               </a:srgbClr>
@@ -17993,7 +18027,10 @@
         </p:spPr>
         <p:txBody>
           <a:bodyPr/>
-          <a:p/>
+          <a:lstStyle/>
+          <a:p>
+            <a:endParaRPr/>
+          </a:p>
         </p:txBody>
       </p:sp>
       <p:sp>
@@ -18017,7 +18054,7 @@
           <a:bodyPr wrap="square" rtlCol="0" anchor="ctr"/>
           <a:lstStyle/>
           <a:p>
-            <a:pPr indent="0" marL="0">
+            <a:pPr marL="0" indent="0">
               <a:buNone/>
             </a:pPr>
             <a:r>
@@ -18056,7 +18093,7 @@
           <a:bodyPr wrap="square" rtlCol="0" anchor="ctr"/>
           <a:lstStyle/>
           <a:p>
-            <a:pPr indent="0" marL="0">
+            <a:pPr marL="0" indent="0">
               <a:buNone/>
             </a:pPr>
             <a:r>
@@ -18090,7 +18127,7 @@
           </a:solidFill>
           <a:ln/>
           <a:effectLst>
-            <a:outerShdw sx="100000" sy="100000" kx="0" ky="0" algn="bl" rotWithShape="0" blurRad="38100" dist="12700" dir="8100000">
+            <a:outerShdw blurRad="38100" dist="12700" dir="8100000" algn="bl" rotWithShape="0">
               <a:srgbClr val="000000">
                 <a:alpha val="6000"/>
               </a:srgbClr>
@@ -18099,7 +18136,10 @@
         </p:spPr>
         <p:txBody>
           <a:bodyPr/>
-          <a:p/>
+          <a:lstStyle/>
+          <a:p>
+            <a:endParaRPr/>
+          </a:p>
         </p:txBody>
       </p:sp>
       <p:sp>
@@ -18123,7 +18163,7 @@
           <a:bodyPr wrap="square" rtlCol="0" anchor="ctr"/>
           <a:lstStyle/>
           <a:p>
-            <a:pPr indent="0" marL="0">
+            <a:pPr marL="0" indent="0">
               <a:buNone/>
             </a:pPr>
             <a:r>
@@ -18162,7 +18202,7 @@
           <a:bodyPr wrap="square" rtlCol="0" anchor="ctr"/>
           <a:lstStyle/>
           <a:p>
-            <a:pPr indent="0" marL="0">
+            <a:pPr marL="0" indent="0">
               <a:buNone/>
             </a:pPr>
             <a:r>
@@ -18193,6 +18233,7 @@
         <a:solidFill>
           <a:srgbClr val="1A1A2E"/>
         </a:solidFill>
+        <a:effectLst/>
       </p:bgPr>
     </p:bg>
     <p:spTree>
@@ -18230,7 +18271,10 @@
         </p:spPr>
         <p:txBody>
           <a:bodyPr/>
-          <a:p/>
+          <a:lstStyle/>
+          <a:p>
+            <a:endParaRPr/>
+          </a:p>
         </p:txBody>
       </p:sp>
       <p:sp>
@@ -18254,7 +18298,7 @@
           <a:bodyPr wrap="square" rtlCol="0" anchor="ctr"/>
           <a:lstStyle/>
           <a:p>
-            <a:pPr indent="0" marL="0">
+            <a:pPr marL="0" indent="0">
               <a:buNone/>
             </a:pPr>
             <a:r>
@@ -18293,7 +18337,7 @@
           <a:bodyPr wrap="square" rtlCol="0" anchor="ctr"/>
           <a:lstStyle/>
           <a:p>
-            <a:pPr indent="0" marL="0">
+            <a:pPr marL="0" indent="0">
               <a:buNone/>
             </a:pPr>
             <a:r>
@@ -18329,7 +18373,7 @@
           <a:bodyPr wrap="square" rtlCol="0" anchor="ctr"/>
           <a:lstStyle/>
           <a:p>
-            <a:pPr algn="r" indent="0" marL="0">
+            <a:pPr marL="0" indent="0" algn="r">
               <a:buNone/>
             </a:pPr>
             <a:r>
@@ -18360,6 +18404,7 @@
         <a:solidFill>
           <a:srgbClr val="F8FAFC"/>
         </a:solidFill>
+        <a:effectLst/>
       </p:bgPr>
     </p:bg>
     <p:spTree>
@@ -18397,7 +18442,7 @@
           <a:bodyPr wrap="square" rtlCol="0" anchor="ctr"/>
           <a:lstStyle/>
           <a:p>
-            <a:pPr indent="0" marL="0">
+            <a:pPr marL="0" indent="0">
               <a:buNone/>
             </a:pPr>
             <a:r>
@@ -18436,7 +18481,10 @@
         </p:spPr>
         <p:txBody>
           <a:bodyPr/>
-          <a:p/>
+          <a:lstStyle/>
+          <a:p>
+            <a:endParaRPr/>
+          </a:p>
         </p:txBody>
       </p:sp>
       <p:sp>
@@ -18460,7 +18508,7 @@
           <a:bodyPr wrap="square" rtlCol="0" anchor="ctr"/>
           <a:lstStyle/>
           <a:p>
-            <a:pPr algn="r" indent="0" marL="0">
+            <a:pPr marL="0" indent="0" algn="r">
               <a:buNone/>
             </a:pPr>
             <a:r>
@@ -18494,7 +18542,7 @@
           </a:solidFill>
           <a:ln/>
           <a:effectLst>
-            <a:outerShdw sx="100000" sy="100000" kx="0" ky="0" algn="bl" rotWithShape="0" blurRad="38100" dist="12700" dir="8100000">
+            <a:outerShdw blurRad="38100" dist="12700" dir="8100000" algn="bl" rotWithShape="0">
               <a:srgbClr val="000000">
                 <a:alpha val="6000"/>
               </a:srgbClr>
@@ -18503,7 +18551,10 @@
         </p:spPr>
         <p:txBody>
           <a:bodyPr/>
-          <a:p/>
+          <a:lstStyle/>
+          <a:p>
+            <a:endParaRPr/>
+          </a:p>
         </p:txBody>
       </p:sp>
       <p:sp>
@@ -18527,7 +18578,10 @@
         </p:spPr>
         <p:txBody>
           <a:bodyPr/>
-          <a:p/>
+          <a:lstStyle/>
+          <a:p>
+            <a:endParaRPr/>
+          </a:p>
         </p:txBody>
       </p:sp>
       <p:sp>
@@ -18551,7 +18605,7 @@
           <a:bodyPr wrap="square" rtlCol="0" anchor="ctr"/>
           <a:lstStyle/>
           <a:p>
-            <a:pPr indent="0" marL="0">
+            <a:pPr marL="0" indent="0">
               <a:buNone/>
             </a:pPr>
             <a:r>
@@ -18590,7 +18644,7 @@
           <a:bodyPr wrap="square" rtlCol="0" anchor="ctr"/>
           <a:lstStyle/>
           <a:p>
-            <a:pPr indent="0" marL="0">
+            <a:pPr marL="0" indent="0">
               <a:buNone/>
             </a:pPr>
             <a:r>
@@ -18624,7 +18678,7 @@
           </a:solidFill>
           <a:ln/>
           <a:effectLst>
-            <a:outerShdw sx="100000" sy="100000" kx="0" ky="0" algn="bl" rotWithShape="0" blurRad="38100" dist="12700" dir="8100000">
+            <a:outerShdw blurRad="38100" dist="12700" dir="8100000" algn="bl" rotWithShape="0">
               <a:srgbClr val="000000">
                 <a:alpha val="6000"/>
               </a:srgbClr>
@@ -18633,7 +18687,10 @@
         </p:spPr>
         <p:txBody>
           <a:bodyPr/>
-          <a:p/>
+          <a:lstStyle/>
+          <a:p>
+            <a:endParaRPr/>
+          </a:p>
         </p:txBody>
       </p:sp>
       <p:sp>
@@ -18657,7 +18714,10 @@
         </p:spPr>
         <p:txBody>
           <a:bodyPr/>
-          <a:p/>
+          <a:lstStyle/>
+          <a:p>
+            <a:endParaRPr/>
+          </a:p>
         </p:txBody>
       </p:sp>
       <p:sp>
@@ -18681,7 +18741,7 @@
           <a:bodyPr wrap="square" rtlCol="0" anchor="ctr"/>
           <a:lstStyle/>
           <a:p>
-            <a:pPr indent="0" marL="0">
+            <a:pPr marL="0" indent="0">
               <a:buNone/>
             </a:pPr>
             <a:r>
@@ -18720,7 +18780,7 @@
           <a:bodyPr wrap="square" rtlCol="0" anchor="ctr"/>
           <a:lstStyle/>
           <a:p>
-            <a:pPr indent="0" marL="0">
+            <a:pPr marL="0" indent="0">
               <a:buNone/>
             </a:pPr>
             <a:r>
@@ -18754,7 +18814,7 @@
           </a:solidFill>
           <a:ln/>
           <a:effectLst>
-            <a:outerShdw sx="100000" sy="100000" kx="0" ky="0" algn="bl" rotWithShape="0" blurRad="38100" dist="12700" dir="8100000">
+            <a:outerShdw blurRad="38100" dist="12700" dir="8100000" algn="bl" rotWithShape="0">
               <a:srgbClr val="000000">
                 <a:alpha val="6000"/>
               </a:srgbClr>
@@ -18763,7 +18823,10 @@
         </p:spPr>
         <p:txBody>
           <a:bodyPr/>
-          <a:p/>
+          <a:lstStyle/>
+          <a:p>
+            <a:endParaRPr/>
+          </a:p>
         </p:txBody>
       </p:sp>
       <p:sp>
@@ -18787,7 +18850,10 @@
         </p:spPr>
         <p:txBody>
           <a:bodyPr/>
-          <a:p/>
+          <a:lstStyle/>
+          <a:p>
+            <a:endParaRPr/>
+          </a:p>
         </p:txBody>
       </p:sp>
       <p:sp>
@@ -18811,7 +18877,7 @@
           <a:bodyPr wrap="square" rtlCol="0" anchor="ctr"/>
           <a:lstStyle/>
           <a:p>
-            <a:pPr indent="0" marL="0">
+            <a:pPr marL="0" indent="0">
               <a:buNone/>
             </a:pPr>
             <a:r>
@@ -18850,7 +18916,7 @@
           <a:bodyPr wrap="square" rtlCol="0" anchor="ctr"/>
           <a:lstStyle/>
           <a:p>
-            <a:pPr indent="0" marL="0">
+            <a:pPr marL="0" indent="0">
               <a:buNone/>
             </a:pPr>
             <a:r>
@@ -18884,7 +18950,7 @@
           </a:solidFill>
           <a:ln/>
           <a:effectLst>
-            <a:outerShdw sx="100000" sy="100000" kx="0" ky="0" algn="bl" rotWithShape="0" blurRad="38100" dist="12700" dir="8100000">
+            <a:outerShdw blurRad="38100" dist="12700" dir="8100000" algn="bl" rotWithShape="0">
               <a:srgbClr val="000000">
                 <a:alpha val="6000"/>
               </a:srgbClr>
@@ -18893,7 +18959,10 @@
         </p:spPr>
         <p:txBody>
           <a:bodyPr/>
-          <a:p/>
+          <a:lstStyle/>
+          <a:p>
+            <a:endParaRPr/>
+          </a:p>
         </p:txBody>
       </p:sp>
       <p:sp>
@@ -18917,7 +18986,10 @@
         </p:spPr>
         <p:txBody>
           <a:bodyPr/>
-          <a:p/>
+          <a:lstStyle/>
+          <a:p>
+            <a:endParaRPr/>
+          </a:p>
         </p:txBody>
       </p:sp>
       <p:sp>
@@ -18941,7 +19013,7 @@
           <a:bodyPr wrap="square" rtlCol="0" anchor="ctr"/>
           <a:lstStyle/>
           <a:p>
-            <a:pPr indent="0" marL="0">
+            <a:pPr marL="0" indent="0">
               <a:buNone/>
             </a:pPr>
             <a:r>
@@ -18980,7 +19052,7 @@
           <a:bodyPr wrap="square" rtlCol="0" anchor="ctr"/>
           <a:lstStyle/>
           <a:p>
-            <a:pPr indent="0" marL="0">
+            <a:pPr marL="0" indent="0">
               <a:buNone/>
             </a:pPr>
             <a:r>
@@ -19014,7 +19086,7 @@
           </a:solidFill>
           <a:ln/>
           <a:effectLst>
-            <a:outerShdw sx="100000" sy="100000" kx="0" ky="0" algn="bl" rotWithShape="0" blurRad="38100" dist="12700" dir="8100000">
+            <a:outerShdw blurRad="38100" dist="12700" dir="8100000" algn="bl" rotWithShape="0">
               <a:srgbClr val="000000">
                 <a:alpha val="6000"/>
               </a:srgbClr>
@@ -19023,7 +19095,10 @@
         </p:spPr>
         <p:txBody>
           <a:bodyPr/>
-          <a:p/>
+          <a:lstStyle/>
+          <a:p>
+            <a:endParaRPr/>
+          </a:p>
         </p:txBody>
       </p:sp>
       <p:sp>
@@ -19047,7 +19122,10 @@
         </p:spPr>
         <p:txBody>
           <a:bodyPr/>
-          <a:p/>
+          <a:lstStyle/>
+          <a:p>
+            <a:endParaRPr/>
+          </a:p>
         </p:txBody>
       </p:sp>
       <p:sp>
@@ -19071,7 +19149,7 @@
           <a:bodyPr wrap="square" rtlCol="0" anchor="ctr"/>
           <a:lstStyle/>
           <a:p>
-            <a:pPr indent="0" marL="0">
+            <a:pPr marL="0" indent="0">
               <a:buNone/>
             </a:pPr>
             <a:r>
@@ -19110,7 +19188,7 @@
           <a:bodyPr wrap="square" rtlCol="0" anchor="ctr"/>
           <a:lstStyle/>
           <a:p>
-            <a:pPr indent="0" marL="0">
+            <a:pPr marL="0" indent="0">
               <a:buNone/>
             </a:pPr>
             <a:r>
@@ -19144,7 +19222,7 @@
           </a:solidFill>
           <a:ln/>
           <a:effectLst>
-            <a:outerShdw sx="100000" sy="100000" kx="0" ky="0" algn="bl" rotWithShape="0" blurRad="38100" dist="12700" dir="8100000">
+            <a:outerShdw blurRad="38100" dist="12700" dir="8100000" algn="bl" rotWithShape="0">
               <a:srgbClr val="000000">
                 <a:alpha val="6000"/>
               </a:srgbClr>
@@ -19153,7 +19231,10 @@
         </p:spPr>
         <p:txBody>
           <a:bodyPr/>
-          <a:p/>
+          <a:lstStyle/>
+          <a:p>
+            <a:endParaRPr/>
+          </a:p>
         </p:txBody>
       </p:sp>
       <p:sp>
@@ -19177,7 +19258,10 @@
         </p:spPr>
         <p:txBody>
           <a:bodyPr/>
-          <a:p/>
+          <a:lstStyle/>
+          <a:p>
+            <a:endParaRPr/>
+          </a:p>
         </p:txBody>
       </p:sp>
       <p:sp>
@@ -19201,7 +19285,7 @@
           <a:bodyPr wrap="square" rtlCol="0" anchor="ctr"/>
           <a:lstStyle/>
           <a:p>
-            <a:pPr indent="0" marL="0">
+            <a:pPr marL="0" indent="0">
               <a:buNone/>
             </a:pPr>
             <a:r>
@@ -19240,7 +19324,7 @@
           <a:bodyPr wrap="square" rtlCol="0" anchor="ctr"/>
           <a:lstStyle/>
           <a:p>
-            <a:pPr indent="0" marL="0">
+            <a:pPr marL="0" indent="0">
               <a:buNone/>
             </a:pPr>
             <a:r>
@@ -19271,6 +19355,7 @@
         <a:solidFill>
           <a:srgbClr val="F8FAFC"/>
         </a:solidFill>
+        <a:effectLst/>
       </p:bgPr>
     </p:bg>
     <p:spTree>
@@ -19308,7 +19393,7 @@
           <a:bodyPr wrap="square" rtlCol="0" anchor="ctr"/>
           <a:lstStyle/>
           <a:p>
-            <a:pPr indent="0" marL="0">
+            <a:pPr marL="0" indent="0">
               <a:buNone/>
             </a:pPr>
             <a:r>
@@ -19347,7 +19432,10 @@
         </p:spPr>
         <p:txBody>
           <a:bodyPr/>
-          <a:p/>
+          <a:lstStyle/>
+          <a:p>
+            <a:endParaRPr/>
+          </a:p>
         </p:txBody>
       </p:sp>
       <p:sp>
@@ -19371,7 +19459,7 @@
           <a:bodyPr wrap="square" rtlCol="0" anchor="ctr"/>
           <a:lstStyle/>
           <a:p>
-            <a:pPr algn="r" indent="0" marL="0">
+            <a:pPr marL="0" indent="0" algn="r">
               <a:buNone/>
             </a:pPr>
             <a:r>
@@ -19405,7 +19493,7 @@
           </a:solidFill>
           <a:ln/>
           <a:effectLst>
-            <a:outerShdw sx="100000" sy="100000" kx="0" ky="0" algn="bl" rotWithShape="0" blurRad="38100" dist="12700" dir="8100000">
+            <a:outerShdw blurRad="38100" dist="12700" dir="8100000" algn="bl" rotWithShape="0">
               <a:srgbClr val="000000">
                 <a:alpha val="6000"/>
               </a:srgbClr>
@@ -19414,7 +19502,10 @@
         </p:spPr>
         <p:txBody>
           <a:bodyPr/>
-          <a:p/>
+          <a:lstStyle/>
+          <a:p>
+            <a:endParaRPr/>
+          </a:p>
         </p:txBody>
       </p:sp>
       <p:sp>
@@ -19438,7 +19529,10 @@
         </p:spPr>
         <p:txBody>
           <a:bodyPr/>
-          <a:p/>
+          <a:lstStyle/>
+          <a:p>
+            <a:endParaRPr/>
+          </a:p>
         </p:txBody>
       </p:sp>
       <p:sp>
@@ -19462,7 +19556,7 @@
           <a:bodyPr wrap="square" rtlCol="0" anchor="ctr"/>
           <a:lstStyle/>
           <a:p>
-            <a:pPr indent="0" marL="0">
+            <a:pPr marL="0" indent="0">
               <a:buNone/>
             </a:pPr>
             <a:r>
@@ -19501,7 +19595,7 @@
           <a:bodyPr wrap="square" rtlCol="0" anchor="ctr"/>
           <a:lstStyle/>
           <a:p>
-            <a:pPr indent="0" marL="0">
+            <a:pPr marL="0" indent="0">
               <a:buNone/>
             </a:pPr>
             <a:r>
@@ -19515,7 +19609,7 @@
             <a:endParaRPr lang="en-US" sz="1000" dirty="0"/>
           </a:p>
           <a:p>
-            <a:pPr indent="0" marL="0">
+            <a:pPr marL="0" indent="0">
               <a:buNone/>
             </a:pPr>
             <a:r>
@@ -19551,7 +19645,7 @@
           <a:bodyPr wrap="square" rtlCol="0" anchor="ctr"/>
           <a:lstStyle/>
           <a:p>
-            <a:pPr algn="ctr" indent="0" marL="0">
+            <a:pPr marL="0" indent="0" algn="ctr">
               <a:buNone/>
             </a:pPr>
             <a:r>
@@ -19585,7 +19679,7 @@
           </a:solidFill>
           <a:ln/>
           <a:effectLst>
-            <a:outerShdw sx="100000" sy="100000" kx="0" ky="0" algn="bl" rotWithShape="0" blurRad="38100" dist="12700" dir="8100000">
+            <a:outerShdw blurRad="38100" dist="12700" dir="8100000" algn="bl" rotWithShape="0">
               <a:srgbClr val="000000">
                 <a:alpha val="6000"/>
               </a:srgbClr>
@@ -19594,7 +19688,10 @@
         </p:spPr>
         <p:txBody>
           <a:bodyPr/>
-          <a:p/>
+          <a:lstStyle/>
+          <a:p>
+            <a:endParaRPr/>
+          </a:p>
         </p:txBody>
       </p:sp>
       <p:sp>
@@ -19618,7 +19715,10 @@
         </p:spPr>
         <p:txBody>
           <a:bodyPr/>
-          <a:p/>
+          <a:lstStyle/>
+          <a:p>
+            <a:endParaRPr/>
+          </a:p>
         </p:txBody>
       </p:sp>
       <p:sp>
@@ -19642,7 +19742,7 @@
           <a:bodyPr wrap="square" rtlCol="0" anchor="ctr"/>
           <a:lstStyle/>
           <a:p>
-            <a:pPr indent="0" marL="0">
+            <a:pPr marL="0" indent="0">
               <a:buNone/>
             </a:pPr>
             <a:r>
@@ -19656,7 +19756,7 @@
             <a:endParaRPr lang="en-US" sz="1100" dirty="0"/>
           </a:p>
           <a:p>
-            <a:pPr indent="0" marL="0">
+            <a:pPr marL="0" indent="0">
               <a:buNone/>
             </a:pPr>
             <a:r>
@@ -19690,7 +19790,7 @@
           </a:solidFill>
           <a:ln/>
           <a:effectLst>
-            <a:outerShdw sx="100000" sy="100000" kx="0" ky="0" algn="bl" rotWithShape="0" blurRad="38100" dist="12700" dir="8100000">
+            <a:outerShdw blurRad="38100" dist="12700" dir="8100000" algn="bl" rotWithShape="0">
               <a:srgbClr val="000000">
                 <a:alpha val="6000"/>
               </a:srgbClr>
@@ -19699,7 +19799,10 @@
         </p:spPr>
         <p:txBody>
           <a:bodyPr/>
-          <a:p/>
+          <a:lstStyle/>
+          <a:p>
+            <a:endParaRPr/>
+          </a:p>
         </p:txBody>
       </p:sp>
       <p:sp>
@@ -19723,7 +19826,10 @@
         </p:spPr>
         <p:txBody>
           <a:bodyPr/>
-          <a:p/>
+          <a:lstStyle/>
+          <a:p>
+            <a:endParaRPr/>
+          </a:p>
         </p:txBody>
       </p:sp>
       <p:sp>
@@ -19747,7 +19853,7 @@
           <a:bodyPr wrap="square" rtlCol="0" anchor="ctr"/>
           <a:lstStyle/>
           <a:p>
-            <a:pPr indent="0" marL="0">
+            <a:pPr marL="0" indent="0">
               <a:buNone/>
             </a:pPr>
             <a:r>
@@ -19786,7 +19892,7 @@
           <a:bodyPr wrap="square" rtlCol="0" anchor="ctr"/>
           <a:lstStyle/>
           <a:p>
-            <a:pPr indent="0" marL="0">
+            <a:pPr marL="0" indent="0">
               <a:buNone/>
             </a:pPr>
             <a:r>
@@ -19800,7 +19906,7 @@
             <a:endParaRPr lang="en-US" sz="1000" dirty="0"/>
           </a:p>
           <a:p>
-            <a:pPr indent="0" marL="0">
+            <a:pPr marL="0" indent="0">
               <a:buNone/>
             </a:pPr>
             <a:r>
@@ -19836,7 +19942,7 @@
           <a:bodyPr wrap="square" rtlCol="0" anchor="ctr"/>
           <a:lstStyle/>
           <a:p>
-            <a:pPr algn="ctr" indent="0" marL="0">
+            <a:pPr marL="0" indent="0" algn="ctr">
               <a:buNone/>
             </a:pPr>
             <a:r>
@@ -19870,7 +19976,7 @@
           </a:solidFill>
           <a:ln/>
           <a:effectLst>
-            <a:outerShdw sx="100000" sy="100000" kx="0" ky="0" algn="bl" rotWithShape="0" blurRad="38100" dist="12700" dir="8100000">
+            <a:outerShdw blurRad="38100" dist="12700" dir="8100000" algn="bl" rotWithShape="0">
               <a:srgbClr val="000000">
                 <a:alpha val="6000"/>
               </a:srgbClr>
@@ -19879,7 +19985,10 @@
         </p:spPr>
         <p:txBody>
           <a:bodyPr/>
-          <a:p/>
+          <a:lstStyle/>
+          <a:p>
+            <a:endParaRPr/>
+          </a:p>
         </p:txBody>
       </p:sp>
       <p:sp>
@@ -19903,7 +20012,10 @@
         </p:spPr>
         <p:txBody>
           <a:bodyPr/>
-          <a:p/>
+          <a:lstStyle/>
+          <a:p>
+            <a:endParaRPr/>
+          </a:p>
         </p:txBody>
       </p:sp>
       <p:sp>
@@ -19927,7 +20039,7 @@
           <a:bodyPr wrap="square" rtlCol="0" anchor="ctr"/>
           <a:lstStyle/>
           <a:p>
-            <a:pPr indent="0" marL="0">
+            <a:pPr marL="0" indent="0">
               <a:buNone/>
             </a:pPr>
             <a:r>
@@ -19941,7 +20053,7 @@
             <a:endParaRPr lang="en-US" sz="1100" dirty="0"/>
           </a:p>
           <a:p>
-            <a:pPr indent="0" marL="0">
+            <a:pPr marL="0" indent="0">
               <a:buNone/>
             </a:pPr>
             <a:r>
@@ -19975,7 +20087,7 @@
           </a:solidFill>
           <a:ln/>
           <a:effectLst>
-            <a:outerShdw sx="100000" sy="100000" kx="0" ky="0" algn="bl" rotWithShape="0" blurRad="38100" dist="12700" dir="8100000">
+            <a:outerShdw blurRad="38100" dist="12700" dir="8100000" algn="bl" rotWithShape="0">
               <a:srgbClr val="000000">
                 <a:alpha val="6000"/>
               </a:srgbClr>
@@ -19984,7 +20096,10 @@
         </p:spPr>
         <p:txBody>
           <a:bodyPr/>
-          <a:p/>
+          <a:lstStyle/>
+          <a:p>
+            <a:endParaRPr/>
+          </a:p>
         </p:txBody>
       </p:sp>
       <p:sp>
@@ -20008,7 +20123,10 @@
         </p:spPr>
         <p:txBody>
           <a:bodyPr/>
-          <a:p/>
+          <a:lstStyle/>
+          <a:p>
+            <a:endParaRPr/>
+          </a:p>
         </p:txBody>
       </p:sp>
       <p:sp>
@@ -20032,7 +20150,7 @@
           <a:bodyPr wrap="square" rtlCol="0" anchor="ctr"/>
           <a:lstStyle/>
           <a:p>
-            <a:pPr indent="0" marL="0">
+            <a:pPr marL="0" indent="0">
               <a:buNone/>
             </a:pPr>
             <a:r>
@@ -20071,7 +20189,7 @@
           <a:bodyPr wrap="square" rtlCol="0" anchor="ctr"/>
           <a:lstStyle/>
           <a:p>
-            <a:pPr indent="0" marL="0">
+            <a:pPr marL="0" indent="0">
               <a:buNone/>
             </a:pPr>
             <a:r>
@@ -20085,7 +20203,7 @@
             <a:endParaRPr lang="en-US" sz="1000" dirty="0"/>
           </a:p>
           <a:p>
-            <a:pPr indent="0" marL="0">
+            <a:pPr marL="0" indent="0">
               <a:buNone/>
             </a:pPr>
             <a:r>
@@ -20121,7 +20239,7 @@
           <a:bodyPr wrap="square" rtlCol="0" anchor="ctr"/>
           <a:lstStyle/>
           <a:p>
-            <a:pPr algn="ctr" indent="0" marL="0">
+            <a:pPr marL="0" indent="0" algn="ctr">
               <a:buNone/>
             </a:pPr>
             <a:r>
@@ -20155,7 +20273,7 @@
           </a:solidFill>
           <a:ln/>
           <a:effectLst>
-            <a:outerShdw sx="100000" sy="100000" kx="0" ky="0" algn="bl" rotWithShape="0" blurRad="38100" dist="12700" dir="8100000">
+            <a:outerShdw blurRad="38100" dist="12700" dir="8100000" algn="bl" rotWithShape="0">
               <a:srgbClr val="000000">
                 <a:alpha val="6000"/>
               </a:srgbClr>
@@ -20164,7 +20282,10 @@
         </p:spPr>
         <p:txBody>
           <a:bodyPr/>
-          <a:p/>
+          <a:lstStyle/>
+          <a:p>
+            <a:endParaRPr/>
+          </a:p>
         </p:txBody>
       </p:sp>
       <p:sp>
@@ -20188,7 +20309,10 @@
         </p:spPr>
         <p:txBody>
           <a:bodyPr/>
-          <a:p/>
+          <a:lstStyle/>
+          <a:p>
+            <a:endParaRPr/>
+          </a:p>
         </p:txBody>
       </p:sp>
       <p:sp>
@@ -20212,7 +20336,7 @@
           <a:bodyPr wrap="square" rtlCol="0" anchor="ctr"/>
           <a:lstStyle/>
           <a:p>
-            <a:pPr indent="0" marL="0">
+            <a:pPr marL="0" indent="0">
               <a:buNone/>
             </a:pPr>
             <a:r>
@@ -20226,7 +20350,7 @@
             <a:endParaRPr lang="en-US" sz="1100" dirty="0"/>
           </a:p>
           <a:p>
-            <a:pPr indent="0" marL="0">
+            <a:pPr marL="0" indent="0">
               <a:buNone/>
             </a:pPr>
             <a:r>
@@ -20260,7 +20384,7 @@
           </a:solidFill>
           <a:ln/>
           <a:effectLst>
-            <a:outerShdw sx="100000" sy="100000" kx="0" ky="0" algn="bl" rotWithShape="0" blurRad="38100" dist="12700" dir="8100000">
+            <a:outerShdw blurRad="38100" dist="12700" dir="8100000" algn="bl" rotWithShape="0">
               <a:srgbClr val="000000">
                 <a:alpha val="6000"/>
               </a:srgbClr>
@@ -20269,7 +20393,10 @@
         </p:spPr>
         <p:txBody>
           <a:bodyPr/>
-          <a:p/>
+          <a:lstStyle/>
+          <a:p>
+            <a:endParaRPr/>
+          </a:p>
         </p:txBody>
       </p:sp>
       <p:sp>
@@ -20293,7 +20420,10 @@
         </p:spPr>
         <p:txBody>
           <a:bodyPr/>
-          <a:p/>
+          <a:lstStyle/>
+          <a:p>
+            <a:endParaRPr/>
+          </a:p>
         </p:txBody>
       </p:sp>
       <p:sp>
@@ -20317,7 +20447,7 @@
           <a:bodyPr wrap="square" rtlCol="0" anchor="ctr"/>
           <a:lstStyle/>
           <a:p>
-            <a:pPr indent="0" marL="0">
+            <a:pPr marL="0" indent="0">
               <a:buNone/>
             </a:pPr>
             <a:r>
@@ -20356,7 +20486,7 @@
           <a:bodyPr wrap="square" rtlCol="0" anchor="ctr"/>
           <a:lstStyle/>
           <a:p>
-            <a:pPr indent="0" marL="0">
+            <a:pPr marL="0" indent="0">
               <a:buNone/>
             </a:pPr>
             <a:r>
@@ -20370,7 +20500,7 @@
             <a:endParaRPr lang="en-US" sz="1000" dirty="0"/>
           </a:p>
           <a:p>
-            <a:pPr indent="0" marL="0">
+            <a:pPr marL="0" indent="0">
               <a:buNone/>
             </a:pPr>
             <a:r>
@@ -20406,7 +20536,7 @@
           <a:bodyPr wrap="square" rtlCol="0" anchor="ctr"/>
           <a:lstStyle/>
           <a:p>
-            <a:pPr algn="ctr" indent="0" marL="0">
+            <a:pPr marL="0" indent="0" algn="ctr">
               <a:buNone/>
             </a:pPr>
             <a:r>
@@ -20440,7 +20570,7 @@
           </a:solidFill>
           <a:ln/>
           <a:effectLst>
-            <a:outerShdw sx="100000" sy="100000" kx="0" ky="0" algn="bl" rotWithShape="0" blurRad="38100" dist="12700" dir="8100000">
+            <a:outerShdw blurRad="38100" dist="12700" dir="8100000" algn="bl" rotWithShape="0">
               <a:srgbClr val="000000">
                 <a:alpha val="6000"/>
               </a:srgbClr>
@@ -20449,7 +20579,10 @@
         </p:spPr>
         <p:txBody>
           <a:bodyPr/>
-          <a:p/>
+          <a:lstStyle/>
+          <a:p>
+            <a:endParaRPr/>
+          </a:p>
         </p:txBody>
       </p:sp>
       <p:sp>
@@ -20473,7 +20606,10 @@
         </p:spPr>
         <p:txBody>
           <a:bodyPr/>
-          <a:p/>
+          <a:lstStyle/>
+          <a:p>
+            <a:endParaRPr/>
+          </a:p>
         </p:txBody>
       </p:sp>
       <p:sp>
@@ -20497,7 +20633,7 @@
           <a:bodyPr wrap="square" rtlCol="0" anchor="ctr"/>
           <a:lstStyle/>
           <a:p>
-            <a:pPr indent="0" marL="0">
+            <a:pPr marL="0" indent="0">
               <a:buNone/>
             </a:pPr>
             <a:r>
@@ -20511,7 +20647,7 @@
             <a:endParaRPr lang="en-US" sz="1100" dirty="0"/>
           </a:p>
           <a:p>
-            <a:pPr indent="0" marL="0">
+            <a:pPr marL="0" indent="0">
               <a:buNone/>
             </a:pPr>
             <a:r>
@@ -20542,6 +20678,7 @@
         <a:solidFill>
           <a:srgbClr val="F8FAFC"/>
         </a:solidFill>
+        <a:effectLst/>
       </p:bgPr>
     </p:bg>
     <p:spTree>
@@ -20579,7 +20716,7 @@
           <a:bodyPr wrap="square" rtlCol="0" anchor="ctr"/>
           <a:lstStyle/>
           <a:p>
-            <a:pPr indent="0" marL="0">
+            <a:pPr marL="0" indent="0">
               <a:buNone/>
             </a:pPr>
             <a:r>
@@ -20618,7 +20755,10 @@
         </p:spPr>
         <p:txBody>
           <a:bodyPr/>
-          <a:p/>
+          <a:lstStyle/>
+          <a:p>
+            <a:endParaRPr/>
+          </a:p>
         </p:txBody>
       </p:sp>
       <p:sp>
@@ -20642,7 +20782,7 @@
           <a:bodyPr wrap="square" rtlCol="0" anchor="ctr"/>
           <a:lstStyle/>
           <a:p>
-            <a:pPr algn="r" indent="0" marL="0">
+            <a:pPr marL="0" indent="0" algn="r">
               <a:buNone/>
             </a:pPr>
             <a:r>
@@ -20676,7 +20816,7 @@
           </a:solidFill>
           <a:ln/>
           <a:effectLst>
-            <a:outerShdw sx="100000" sy="100000" kx="0" ky="0" algn="bl" rotWithShape="0" blurRad="38100" dist="12700" dir="8100000">
+            <a:outerShdw blurRad="38100" dist="12700" dir="8100000" algn="bl" rotWithShape="0">
               <a:srgbClr val="000000">
                 <a:alpha val="6000"/>
               </a:srgbClr>
@@ -20685,7 +20825,10 @@
         </p:spPr>
         <p:txBody>
           <a:bodyPr/>
-          <a:p/>
+          <a:lstStyle/>
+          <a:p>
+            <a:endParaRPr/>
+          </a:p>
         </p:txBody>
       </p:sp>
       <p:sp>
@@ -20709,7 +20852,10 @@
         </p:spPr>
         <p:txBody>
           <a:bodyPr/>
-          <a:p/>
+          <a:lstStyle/>
+          <a:p>
+            <a:endParaRPr/>
+          </a:p>
         </p:txBody>
       </p:sp>
       <p:sp>
@@ -20733,7 +20879,7 @@
           <a:bodyPr wrap="square" rtlCol="0" anchor="ctr"/>
           <a:lstStyle/>
           <a:p>
-            <a:pPr indent="0" marL="0">
+            <a:pPr marL="0" indent="0">
               <a:buNone/>
             </a:pPr>
             <a:r>
@@ -20772,7 +20918,7 @@
           <a:bodyPr wrap="square" rtlCol="0" anchor="ctr"/>
           <a:lstStyle/>
           <a:p>
-            <a:pPr indent="0" marL="0">
+            <a:pPr marL="0" indent="0">
               <a:buNone/>
             </a:pPr>
             <a:r>
@@ -20786,7 +20932,7 @@
             <a:endParaRPr lang="en-US" sz="1000" dirty="0"/>
           </a:p>
           <a:p>
-            <a:pPr indent="0" marL="0">
+            <a:pPr marL="0" indent="0">
               <a:buNone/>
             </a:pPr>
             <a:r>
@@ -20820,7 +20966,7 @@
           </a:solidFill>
           <a:ln/>
           <a:effectLst>
-            <a:outerShdw sx="100000" sy="100000" kx="0" ky="0" algn="bl" rotWithShape="0" blurRad="38100" dist="12700" dir="8100000">
+            <a:outerShdw blurRad="38100" dist="12700" dir="8100000" algn="bl" rotWithShape="0">
               <a:srgbClr val="000000">
                 <a:alpha val="6000"/>
               </a:srgbClr>
@@ -20829,7 +20975,10 @@
         </p:spPr>
         <p:txBody>
           <a:bodyPr/>
-          <a:p/>
+          <a:lstStyle/>
+          <a:p>
+            <a:endParaRPr/>
+          </a:p>
         </p:txBody>
       </p:sp>
       <p:sp>
@@ -20853,7 +21002,10 @@
         </p:spPr>
         <p:txBody>
           <a:bodyPr/>
-          <a:p/>
+          <a:lstStyle/>
+          <a:p>
+            <a:endParaRPr/>
+          </a:p>
         </p:txBody>
       </p:sp>
       <p:sp>
@@ -20877,7 +21029,7 @@
           <a:bodyPr wrap="square" rtlCol="0" anchor="ctr"/>
           <a:lstStyle/>
           <a:p>
-            <a:pPr indent="0" marL="0">
+            <a:pPr marL="0" indent="0">
               <a:buNone/>
             </a:pPr>
             <a:r>
@@ -20916,7 +21068,7 @@
           <a:bodyPr wrap="square" rtlCol="0" anchor="ctr"/>
           <a:lstStyle/>
           <a:p>
-            <a:pPr indent="0" marL="0">
+            <a:pPr marL="0" indent="0">
               <a:buNone/>
             </a:pPr>
             <a:r>
@@ -20930,7 +21082,7 @@
             <a:endParaRPr lang="en-US" sz="1000" dirty="0"/>
           </a:p>
           <a:p>
-            <a:pPr indent="0" marL="0">
+            <a:pPr marL="0" indent="0">
               <a:buNone/>
             </a:pPr>
             <a:r>
@@ -20964,7 +21116,7 @@
           </a:solidFill>
           <a:ln/>
           <a:effectLst>
-            <a:outerShdw sx="100000" sy="100000" kx="0" ky="0" algn="bl" rotWithShape="0" blurRad="38100" dist="12700" dir="8100000">
+            <a:outerShdw blurRad="38100" dist="12700" dir="8100000" algn="bl" rotWithShape="0">
               <a:srgbClr val="000000">
                 <a:alpha val="6000"/>
               </a:srgbClr>
@@ -20973,7 +21125,10 @@
         </p:spPr>
         <p:txBody>
           <a:bodyPr/>
-          <a:p/>
+          <a:lstStyle/>
+          <a:p>
+            <a:endParaRPr/>
+          </a:p>
         </p:txBody>
       </p:sp>
       <p:sp>
@@ -20997,7 +21152,10 @@
         </p:spPr>
         <p:txBody>
           <a:bodyPr/>
-          <a:p/>
+          <a:lstStyle/>
+          <a:p>
+            <a:endParaRPr/>
+          </a:p>
         </p:txBody>
       </p:sp>
       <p:sp>
@@ -21021,7 +21179,7 @@
           <a:bodyPr wrap="square" rtlCol="0" anchor="ctr"/>
           <a:lstStyle/>
           <a:p>
-            <a:pPr indent="0" marL="0">
+            <a:pPr marL="0" indent="0">
               <a:buNone/>
             </a:pPr>
             <a:r>
@@ -21060,7 +21218,7 @@
           <a:bodyPr wrap="square" rtlCol="0" anchor="ctr"/>
           <a:lstStyle/>
           <a:p>
-            <a:pPr indent="0" marL="0">
+            <a:pPr marL="0" indent="0">
               <a:buNone/>
             </a:pPr>
             <a:r>
@@ -21074,7 +21232,7 @@
             <a:endParaRPr lang="en-US" sz="1000" dirty="0"/>
           </a:p>
           <a:p>
-            <a:pPr indent="0" marL="0">
+            <a:pPr marL="0" indent="0">
               <a:buNone/>
             </a:pPr>
             <a:r>
@@ -21108,7 +21266,7 @@
           </a:solidFill>
           <a:ln/>
           <a:effectLst>
-            <a:outerShdw sx="100000" sy="100000" kx="0" ky="0" algn="bl" rotWithShape="0" blurRad="38100" dist="12700" dir="8100000">
+            <a:outerShdw blurRad="38100" dist="12700" dir="8100000" algn="bl" rotWithShape="0">
               <a:srgbClr val="000000">
                 <a:alpha val="6000"/>
               </a:srgbClr>
@@ -21117,7 +21275,10 @@
         </p:spPr>
         <p:txBody>
           <a:bodyPr/>
-          <a:p/>
+          <a:lstStyle/>
+          <a:p>
+            <a:endParaRPr/>
+          </a:p>
         </p:txBody>
       </p:sp>
       <p:sp>
@@ -21141,7 +21302,10 @@
         </p:spPr>
         <p:txBody>
           <a:bodyPr/>
-          <a:p/>
+          <a:lstStyle/>
+          <a:p>
+            <a:endParaRPr/>
+          </a:p>
         </p:txBody>
       </p:sp>
       <p:sp>
@@ -21165,7 +21329,7 @@
           <a:bodyPr wrap="square" rtlCol="0" anchor="ctr"/>
           <a:lstStyle/>
           <a:p>
-            <a:pPr indent="0" marL="0">
+            <a:pPr marL="0" indent="0">
               <a:buNone/>
             </a:pPr>
             <a:r>
@@ -21204,7 +21368,7 @@
           <a:bodyPr wrap="square" rtlCol="0" anchor="ctr"/>
           <a:lstStyle/>
           <a:p>
-            <a:pPr indent="0" marL="0">
+            <a:pPr marL="0" indent="0">
               <a:buNone/>
             </a:pPr>
             <a:r>
@@ -21218,7 +21382,7 @@
             <a:endParaRPr lang="en-US" sz="1000" dirty="0"/>
           </a:p>
           <a:p>
-            <a:pPr indent="0" marL="0">
+            <a:pPr marL="0" indent="0">
               <a:buNone/>
             </a:pPr>
             <a:r>
@@ -21257,7 +21421,10 @@
         </p:spPr>
         <p:txBody>
           <a:bodyPr/>
-          <a:p/>
+          <a:lstStyle/>
+          <a:p>
+            <a:endParaRPr/>
+          </a:p>
         </p:txBody>
       </p:sp>
       <p:sp>
@@ -21281,7 +21448,10 @@
         </p:spPr>
         <p:txBody>
           <a:bodyPr/>
-          <a:p/>
+          <a:lstStyle/>
+          <a:p>
+            <a:endParaRPr/>
+          </a:p>
         </p:txBody>
       </p:sp>
       <p:sp>
@@ -21305,7 +21475,7 @@
           <a:bodyPr wrap="square" rtlCol="0" anchor="ctr"/>
           <a:lstStyle/>
           <a:p>
-            <a:pPr algn="ctr" indent="0" marL="0">
+            <a:pPr marL="0" indent="0" algn="ctr">
               <a:buNone/>
             </a:pPr>
             <a:r>
@@ -21319,7 +21489,7 @@
             <a:endParaRPr lang="en-US" sz="900" dirty="0"/>
           </a:p>
           <a:p>
-            <a:pPr algn="ctr" indent="0" marL="0">
+            <a:pPr marL="0" indent="0" algn="ctr">
               <a:buNone/>
             </a:pPr>
             <a:r>
@@ -21355,7 +21525,10 @@
         </p:spPr>
         <p:txBody>
           <a:bodyPr/>
-          <a:p/>
+          <a:lstStyle/>
+          <a:p>
+            <a:endParaRPr/>
+          </a:p>
         </p:txBody>
       </p:sp>
       <p:sp>
@@ -21379,7 +21552,7 @@
           <a:bodyPr wrap="square" rtlCol="0" anchor="ctr"/>
           <a:lstStyle/>
           <a:p>
-            <a:pPr algn="ctr" indent="0" marL="0">
+            <a:pPr marL="0" indent="0" algn="ctr">
               <a:buNone/>
             </a:pPr>
             <a:r>
@@ -21393,7 +21566,7 @@
             <a:endParaRPr lang="en-US" sz="900" dirty="0"/>
           </a:p>
           <a:p>
-            <a:pPr algn="ctr" indent="0" marL="0">
+            <a:pPr marL="0" indent="0" algn="ctr">
               <a:buNone/>
             </a:pPr>
             <a:r>
@@ -21429,7 +21602,10 @@
         </p:spPr>
         <p:txBody>
           <a:bodyPr/>
-          <a:p/>
+          <a:lstStyle/>
+          <a:p>
+            <a:endParaRPr/>
+          </a:p>
         </p:txBody>
       </p:sp>
       <p:sp>
@@ -21453,7 +21629,7 @@
           <a:bodyPr wrap="square" rtlCol="0" anchor="ctr"/>
           <a:lstStyle/>
           <a:p>
-            <a:pPr algn="ctr" indent="0" marL="0">
+            <a:pPr marL="0" indent="0" algn="ctr">
               <a:buNone/>
             </a:pPr>
             <a:r>
@@ -21467,7 +21643,7 @@
             <a:endParaRPr lang="en-US" sz="900" dirty="0"/>
           </a:p>
           <a:p>
-            <a:pPr algn="ctr" indent="0" marL="0">
+            <a:pPr marL="0" indent="0" algn="ctr">
               <a:buNone/>
             </a:pPr>
             <a:r>
@@ -21503,7 +21679,10 @@
         </p:spPr>
         <p:txBody>
           <a:bodyPr/>
-          <a:p/>
+          <a:lstStyle/>
+          <a:p>
+            <a:endParaRPr/>
+          </a:p>
         </p:txBody>
       </p:sp>
       <p:sp>
@@ -21527,7 +21706,7 @@
           <a:bodyPr wrap="square" rtlCol="0" anchor="ctr"/>
           <a:lstStyle/>
           <a:p>
-            <a:pPr algn="ctr" indent="0" marL="0">
+            <a:pPr marL="0" indent="0" algn="ctr">
               <a:buNone/>
             </a:pPr>
             <a:r>
@@ -21541,7 +21720,7 @@
             <a:endParaRPr lang="en-US" sz="900" dirty="0"/>
           </a:p>
           <a:p>
-            <a:pPr algn="ctr" indent="0" marL="0">
+            <a:pPr marL="0" indent="0" algn="ctr">
               <a:buNone/>
             </a:pPr>
             <a:r>
@@ -21572,6 +21751,7 @@
         <a:solidFill>
           <a:srgbClr val="1A1A2E"/>
         </a:solidFill>
+        <a:effectLst/>
       </p:bgPr>
     </p:bg>
     <p:spTree>
@@ -21609,7 +21789,10 @@
         </p:spPr>
         <p:txBody>
           <a:bodyPr/>
-          <a:p/>
+          <a:lstStyle/>
+          <a:p>
+            <a:endParaRPr/>
+          </a:p>
         </p:txBody>
       </p:sp>
       <p:sp>
@@ -21633,7 +21816,7 @@
           <a:bodyPr wrap="square" rtlCol="0" anchor="ctr"/>
           <a:lstStyle/>
           <a:p>
-            <a:pPr algn="ctr" indent="0" marL="0">
+            <a:pPr marL="0" indent="0" algn="ctr">
               <a:buNone/>
             </a:pPr>
             <a:r>
@@ -21672,7 +21855,7 @@
           <a:bodyPr wrap="square" rtlCol="0" anchor="ctr"/>
           <a:lstStyle/>
           <a:p>
-            <a:pPr algn="ctr" indent="0" marL="0">
+            <a:pPr marL="0" indent="0" algn="ctr">
               <a:buNone/>
             </a:pPr>
             <a:r>
@@ -21708,7 +21891,10 @@
         </p:spPr>
         <p:txBody>
           <a:bodyPr/>
-          <a:p/>
+          <a:lstStyle/>
+          <a:p>
+            <a:endParaRPr/>
+          </a:p>
         </p:txBody>
       </p:sp>
       <p:sp>
@@ -21732,7 +21918,7 @@
           <a:bodyPr wrap="square" rtlCol="0" anchor="ctr"/>
           <a:lstStyle/>
           <a:p>
-            <a:pPr algn="ctr" indent="0" marL="0">
+            <a:pPr marL="0" indent="0" algn="ctr">
               <a:buNone/>
             </a:pPr>
             <a:r>
@@ -21768,7 +21954,7 @@
           <a:bodyPr wrap="square" rtlCol="0" anchor="ctr"/>
           <a:lstStyle/>
           <a:p>
-            <a:pPr algn="r" indent="0" marL="0">
+            <a:pPr marL="0" indent="0" algn="r">
               <a:buNone/>
             </a:pPr>
             <a:r>
@@ -21799,6 +21985,7 @@
         <a:solidFill>
           <a:srgbClr val="F8FAFC"/>
         </a:solidFill>
+        <a:effectLst/>
       </p:bgPr>
     </p:bg>
     <p:spTree>
@@ -21836,7 +22023,7 @@
           <a:bodyPr wrap="square" rtlCol="0" anchor="ctr"/>
           <a:lstStyle/>
           <a:p>
-            <a:pPr indent="0" marL="0">
+            <a:pPr marL="0" indent="0">
               <a:buNone/>
             </a:pPr>
             <a:r>
@@ -21875,7 +22062,10 @@
         </p:spPr>
         <p:txBody>
           <a:bodyPr/>
-          <a:p/>
+          <a:lstStyle/>
+          <a:p>
+            <a:endParaRPr/>
+          </a:p>
         </p:txBody>
       </p:sp>
       <p:sp>
@@ -21899,7 +22089,7 @@
           <a:bodyPr wrap="square" rtlCol="0" anchor="ctr"/>
           <a:lstStyle/>
           <a:p>
-            <a:pPr algn="r" indent="0" marL="0">
+            <a:pPr marL="0" indent="0" algn="r">
               <a:buNone/>
             </a:pPr>
             <a:r>
@@ -21933,7 +22123,7 @@
           </a:solidFill>
           <a:ln/>
           <a:effectLst>
-            <a:outerShdw sx="100000" sy="100000" kx="0" ky="0" algn="bl" rotWithShape="0" blurRad="38100" dist="12700" dir="8100000">
+            <a:outerShdw blurRad="38100" dist="12700" dir="8100000" algn="bl" rotWithShape="0">
               <a:srgbClr val="000000">
                 <a:alpha val="6000"/>
               </a:srgbClr>
@@ -21942,7 +22132,10 @@
         </p:spPr>
         <p:txBody>
           <a:bodyPr/>
-          <a:p/>
+          <a:lstStyle/>
+          <a:p>
+            <a:endParaRPr/>
+          </a:p>
         </p:txBody>
       </p:sp>
       <p:sp>
@@ -21966,7 +22159,7 @@
           <a:bodyPr wrap="square" rtlCol="0" anchor="ctr"/>
           <a:lstStyle/>
           <a:p>
-            <a:pPr algn="ctr" indent="0" marL="0">
+            <a:pPr marL="0" indent="0" algn="ctr">
               <a:buNone/>
             </a:pPr>
             <a:r>
@@ -22005,7 +22198,7 @@
           <a:bodyPr wrap="square" rtlCol="0" anchor="ctr"/>
           <a:lstStyle/>
           <a:p>
-            <a:pPr algn="ctr" indent="0" marL="0">
+            <a:pPr marL="0" indent="0" algn="ctr">
               <a:buNone/>
             </a:pPr>
             <a:r>
@@ -22041,7 +22234,7 @@
           <a:bodyPr wrap="square" rtlCol="0" anchor="ctr"/>
           <a:lstStyle/>
           <a:p>
-            <a:pPr algn="ctr" indent="0" marL="0">
+            <a:pPr marL="0" indent="0" algn="ctr">
               <a:buNone/>
             </a:pPr>
             <a:r>
@@ -22075,7 +22268,7 @@
           </a:solidFill>
           <a:ln/>
           <a:effectLst>
-            <a:outerShdw sx="100000" sy="100000" kx="0" ky="0" algn="bl" rotWithShape="0" blurRad="38100" dist="12700" dir="8100000">
+            <a:outerShdw blurRad="38100" dist="12700" dir="8100000" algn="bl" rotWithShape="0">
               <a:srgbClr val="000000">
                 <a:alpha val="6000"/>
               </a:srgbClr>
@@ -22084,7 +22277,10 @@
         </p:spPr>
         <p:txBody>
           <a:bodyPr/>
-          <a:p/>
+          <a:lstStyle/>
+          <a:p>
+            <a:endParaRPr/>
+          </a:p>
         </p:txBody>
       </p:sp>
       <p:sp>
@@ -22108,7 +22304,7 @@
           <a:bodyPr wrap="square" rtlCol="0" anchor="ctr"/>
           <a:lstStyle/>
           <a:p>
-            <a:pPr algn="ctr" indent="0" marL="0">
+            <a:pPr marL="0" indent="0" algn="ctr">
               <a:buNone/>
             </a:pPr>
             <a:r>
@@ -22147,7 +22343,7 @@
           <a:bodyPr wrap="square" rtlCol="0" anchor="ctr"/>
           <a:lstStyle/>
           <a:p>
-            <a:pPr algn="ctr" indent="0" marL="0">
+            <a:pPr marL="0" indent="0" algn="ctr">
               <a:buNone/>
             </a:pPr>
             <a:r>
@@ -22183,7 +22379,7 @@
           <a:bodyPr wrap="square" rtlCol="0" anchor="ctr"/>
           <a:lstStyle/>
           <a:p>
-            <a:pPr algn="ctr" indent="0" marL="0">
+            <a:pPr marL="0" indent="0" algn="ctr">
               <a:buNone/>
             </a:pPr>
             <a:r>
@@ -22217,7 +22413,7 @@
           </a:solidFill>
           <a:ln/>
           <a:effectLst>
-            <a:outerShdw sx="100000" sy="100000" kx="0" ky="0" algn="bl" rotWithShape="0" blurRad="38100" dist="12700" dir="8100000">
+            <a:outerShdw blurRad="38100" dist="12700" dir="8100000" algn="bl" rotWithShape="0">
               <a:srgbClr val="000000">
                 <a:alpha val="6000"/>
               </a:srgbClr>
@@ -22226,7 +22422,10 @@
         </p:spPr>
         <p:txBody>
           <a:bodyPr/>
-          <a:p/>
+          <a:lstStyle/>
+          <a:p>
+            <a:endParaRPr/>
+          </a:p>
         </p:txBody>
       </p:sp>
       <p:sp>
@@ -22250,7 +22449,7 @@
           <a:bodyPr wrap="square" rtlCol="0" anchor="ctr"/>
           <a:lstStyle/>
           <a:p>
-            <a:pPr algn="ctr" indent="0" marL="0">
+            <a:pPr marL="0" indent="0" algn="ctr">
               <a:buNone/>
             </a:pPr>
             <a:r>
@@ -22289,7 +22488,7 @@
           <a:bodyPr wrap="square" rtlCol="0" anchor="ctr"/>
           <a:lstStyle/>
           <a:p>
-            <a:pPr algn="ctr" indent="0" marL="0">
+            <a:pPr marL="0" indent="0" algn="ctr">
               <a:buNone/>
             </a:pPr>
             <a:r>
@@ -22325,7 +22524,7 @@
           <a:bodyPr wrap="square" rtlCol="0" anchor="ctr"/>
           <a:lstStyle/>
           <a:p>
-            <a:pPr algn="ctr" indent="0" marL="0">
+            <a:pPr marL="0" indent="0" algn="ctr">
               <a:buNone/>
             </a:pPr>
             <a:r>
@@ -22359,7 +22558,7 @@
           </a:solidFill>
           <a:ln/>
           <a:effectLst>
-            <a:outerShdw sx="100000" sy="100000" kx="0" ky="0" algn="bl" rotWithShape="0" blurRad="38100" dist="12700" dir="8100000">
+            <a:outerShdw blurRad="38100" dist="12700" dir="8100000" algn="bl" rotWithShape="0">
               <a:srgbClr val="000000">
                 <a:alpha val="6000"/>
               </a:srgbClr>
@@ -22368,7 +22567,10 @@
         </p:spPr>
         <p:txBody>
           <a:bodyPr/>
-          <a:p/>
+          <a:lstStyle/>
+          <a:p>
+            <a:endParaRPr/>
+          </a:p>
         </p:txBody>
       </p:sp>
       <p:sp>
@@ -22392,7 +22594,7 @@
           <a:bodyPr wrap="square" rtlCol="0" anchor="ctr"/>
           <a:lstStyle/>
           <a:p>
-            <a:pPr algn="ctr" indent="0" marL="0">
+            <a:pPr marL="0" indent="0" algn="ctr">
               <a:buNone/>
             </a:pPr>
             <a:r>
@@ -22431,7 +22633,7 @@
           <a:bodyPr wrap="square" rtlCol="0" anchor="ctr"/>
           <a:lstStyle/>
           <a:p>
-            <a:pPr algn="ctr" indent="0" marL="0">
+            <a:pPr marL="0" indent="0" algn="ctr">
               <a:buNone/>
             </a:pPr>
             <a:r>
@@ -22467,7 +22669,7 @@
           <a:bodyPr wrap="square" rtlCol="0" anchor="ctr"/>
           <a:lstStyle/>
           <a:p>
-            <a:pPr algn="ctr" indent="0" marL="0">
+            <a:pPr marL="0" indent="0" algn="ctr">
               <a:buNone/>
             </a:pPr>
             <a:r>
@@ -22484,7 +22686,7 @@
       </p:sp>
       <p:graphicFrame>
         <p:nvGraphicFramePr>
-          <p:cNvPr id="21" name="Chart 0" descr=""/>
+          <p:cNvPr id="21" name="Chart 0"/>
           <p:cNvGraphicFramePr/>
           <p:nvPr/>
         </p:nvGraphicFramePr>
@@ -22492,9 +22694,9 @@
           <a:off x="365760" y="2468880"/>
           <a:ext cx="4114800" cy="1920240"/>
         </p:xfrm>
-        <a:graphic xmlns:a="http://schemas.openxmlformats.org/drawingml/2006/main">
+        <a:graphic>
           <a:graphicData uri="http://schemas.openxmlformats.org/drawingml/2006/chart">
-            <c:chart xmlns:c="http://schemas.openxmlformats.org/drawingml/2006/chart" r:id="rId1"/>
+            <c:chart xmlns:c="http://schemas.openxmlformats.org/drawingml/2006/chart" xmlns:r="http://schemas.openxmlformats.org/officeDocument/2006/relationships" r:id="rId3"/>
           </a:graphicData>
         </a:graphic>
       </p:graphicFrame>
@@ -22517,7 +22719,7 @@
           </a:solidFill>
           <a:ln/>
           <a:effectLst>
-            <a:outerShdw sx="100000" sy="100000" kx="0" ky="0" algn="bl" rotWithShape="0" blurRad="38100" dist="12700" dir="8100000">
+            <a:outerShdw blurRad="38100" dist="12700" dir="8100000" algn="bl" rotWithShape="0">
               <a:srgbClr val="000000">
                 <a:alpha val="6000"/>
               </a:srgbClr>
@@ -22526,7 +22728,10 @@
         </p:spPr>
         <p:txBody>
           <a:bodyPr/>
-          <a:p/>
+          <a:lstStyle/>
+          <a:p>
+            <a:endParaRPr/>
+          </a:p>
         </p:txBody>
       </p:sp>
       <p:sp>
@@ -22550,7 +22755,7 @@
           <a:bodyPr wrap="square" rtlCol="0" anchor="ctr"/>
           <a:lstStyle/>
           <a:p>
-            <a:pPr indent="0" marL="0">
+            <a:pPr marL="0" indent="0">
               <a:buNone/>
             </a:pPr>
             <a:r>
@@ -22589,7 +22794,7 @@
           <a:bodyPr wrap="square" rtlCol="0" anchor="ctr"/>
           <a:lstStyle/>
           <a:p>
-            <a:pPr indent="0" marL="0">
+            <a:pPr marL="0" indent="0">
               <a:buNone/>
             </a:pPr>
             <a:r>
@@ -22600,9 +22805,6 @@
               </a:rPr>
               <a:t>校外骑手 </a:t>
             </a:r>
-            <a:pPr indent="0" marL="0">
-              <a:buNone/>
-            </a:pPr>
             <a:r>
               <a:rPr lang="en-US" sz="1200" dirty="0">
                 <a:solidFill>
@@ -22612,9 +22814,6 @@
               <a:t>被宿舍门禁阻挡
 </a:t>
             </a:r>
-            <a:pPr indent="0" marL="0">
-              <a:buNone/>
-            </a:pPr>
             <a:r>
               <a:rPr lang="en-US" sz="1200" b="1" dirty="0">
                 <a:solidFill>
@@ -22623,9 +22822,6 @@
               </a:rPr>
               <a:t>寄存点 </a:t>
             </a:r>
-            <a:pPr indent="0" marL="0">
-              <a:buNone/>
-            </a:pPr>
             <a:r>
               <a:rPr lang="en-US" sz="1200" dirty="0">
                 <a:solidFill>
@@ -22635,9 +22831,6 @@
               <a:t>高峰爆仓风险高
 </a:t>
             </a:r>
-            <a:pPr indent="0" marL="0">
-              <a:buNone/>
-            </a:pPr>
             <a:r>
               <a:rPr lang="en-US" sz="1200" b="1" dirty="0">
                 <a:solidFill>
@@ -22646,9 +22839,6 @@
               </a:rPr>
               <a:t>运营数据 </a:t>
             </a:r>
-            <a:pPr indent="0" marL="0">
-              <a:buNone/>
-            </a:pPr>
             <a:r>
               <a:rPr lang="en-US" sz="1200" dirty="0">
                 <a:solidFill>
@@ -22677,6 +22867,7 @@
         <a:solidFill>
           <a:srgbClr val="F8FAFC"/>
         </a:solidFill>
+        <a:effectLst/>
       </p:bgPr>
     </p:bg>
     <p:spTree>
@@ -22714,7 +22905,7 @@
           <a:bodyPr wrap="square" rtlCol="0" anchor="ctr"/>
           <a:lstStyle/>
           <a:p>
-            <a:pPr indent="0" marL="0">
+            <a:pPr marL="0" indent="0">
               <a:buNone/>
             </a:pPr>
             <a:r>
@@ -22753,7 +22944,10 @@
         </p:spPr>
         <p:txBody>
           <a:bodyPr/>
-          <a:p/>
+          <a:lstStyle/>
+          <a:p>
+            <a:endParaRPr/>
+          </a:p>
         </p:txBody>
       </p:sp>
       <p:sp>
@@ -22777,7 +22971,7 @@
           <a:bodyPr wrap="square" rtlCol="0" anchor="ctr"/>
           <a:lstStyle/>
           <a:p>
-            <a:pPr algn="r" indent="0" marL="0">
+            <a:pPr marL="0" indent="0" algn="r">
               <a:buNone/>
             </a:pPr>
             <a:r>
@@ -22811,7 +23005,7 @@
           </a:solidFill>
           <a:ln/>
           <a:effectLst>
-            <a:outerShdw sx="100000" sy="100000" kx="0" ky="0" algn="bl" rotWithShape="0" blurRad="38100" dist="12700" dir="8100000">
+            <a:outerShdw blurRad="38100" dist="12700" dir="8100000" algn="bl" rotWithShape="0">
               <a:srgbClr val="000000">
                 <a:alpha val="6000"/>
               </a:srgbClr>
@@ -22820,7 +23014,10 @@
         </p:spPr>
         <p:txBody>
           <a:bodyPr/>
-          <a:p/>
+          <a:lstStyle/>
+          <a:p>
+            <a:endParaRPr/>
+          </a:p>
         </p:txBody>
       </p:sp>
       <p:sp>
@@ -22846,7 +23043,10 @@
         </p:spPr>
         <p:txBody>
           <a:bodyPr/>
-          <a:p/>
+          <a:lstStyle/>
+          <a:p>
+            <a:endParaRPr/>
+          </a:p>
         </p:txBody>
       </p:sp>
       <p:sp>
@@ -22870,7 +23070,7 @@
           <a:bodyPr wrap="square" rtlCol="0" anchor="ctr"/>
           <a:lstStyle/>
           <a:p>
-            <a:pPr algn="ctr" indent="0" marL="0">
+            <a:pPr marL="0" indent="0" algn="ctr">
               <a:buNone/>
             </a:pPr>
             <a:r>
@@ -22909,7 +23109,7 @@
           <a:bodyPr wrap="square" rtlCol="0" anchor="ctr"/>
           <a:lstStyle/>
           <a:p>
-            <a:pPr algn="ctr" indent="0" marL="0">
+            <a:pPr marL="0" indent="0" algn="ctr">
               <a:buNone/>
             </a:pPr>
             <a:r>
@@ -22948,7 +23148,7 @@
           <a:bodyPr wrap="square" rtlCol="0" anchor="ctr"/>
           <a:lstStyle/>
           <a:p>
-            <a:pPr algn="ctr" indent="0" marL="0">
+            <a:pPr marL="0" indent="0" algn="ctr">
               <a:buNone/>
             </a:pPr>
             <a:r>
@@ -22962,7 +23162,7 @@
             <a:endParaRPr lang="en-US" sz="1100" dirty="0"/>
           </a:p>
           <a:p>
-            <a:pPr algn="ctr" indent="0" marL="0">
+            <a:pPr marL="0" indent="0" algn="ctr">
               <a:buNone/>
             </a:pPr>
             <a:r>
@@ -22976,7 +23176,7 @@
             <a:endParaRPr lang="en-US" sz="1100" dirty="0"/>
           </a:p>
           <a:p>
-            <a:pPr algn="ctr" indent="0" marL="0">
+            <a:pPr marL="0" indent="0" algn="ctr">
               <a:buNone/>
             </a:pPr>
             <a:r>
@@ -23010,7 +23210,7 @@
           </a:solidFill>
           <a:ln/>
           <a:effectLst>
-            <a:outerShdw sx="100000" sy="100000" kx="0" ky="0" algn="bl" rotWithShape="0" blurRad="38100" dist="12700" dir="8100000">
+            <a:outerShdw blurRad="38100" dist="12700" dir="8100000" algn="bl" rotWithShape="0">
               <a:srgbClr val="000000">
                 <a:alpha val="6000"/>
               </a:srgbClr>
@@ -23019,7 +23219,10 @@
         </p:spPr>
         <p:txBody>
           <a:bodyPr/>
-          <a:p/>
+          <a:lstStyle/>
+          <a:p>
+            <a:endParaRPr/>
+          </a:p>
         </p:txBody>
       </p:sp>
       <p:sp>
@@ -23045,7 +23248,10 @@
         </p:spPr>
         <p:txBody>
           <a:bodyPr/>
-          <a:p/>
+          <a:lstStyle/>
+          <a:p>
+            <a:endParaRPr/>
+          </a:p>
         </p:txBody>
       </p:sp>
       <p:sp>
@@ -23069,7 +23275,7 @@
           <a:bodyPr wrap="square" rtlCol="0" anchor="ctr"/>
           <a:lstStyle/>
           <a:p>
-            <a:pPr algn="ctr" indent="0" marL="0">
+            <a:pPr marL="0" indent="0" algn="ctr">
               <a:buNone/>
             </a:pPr>
             <a:r>
@@ -23108,7 +23314,7 @@
           <a:bodyPr wrap="square" rtlCol="0" anchor="ctr"/>
           <a:lstStyle/>
           <a:p>
-            <a:pPr algn="ctr" indent="0" marL="0">
+            <a:pPr marL="0" indent="0" algn="ctr">
               <a:buNone/>
             </a:pPr>
             <a:r>
@@ -23147,7 +23353,7 @@
           <a:bodyPr wrap="square" rtlCol="0" anchor="ctr"/>
           <a:lstStyle/>
           <a:p>
-            <a:pPr algn="ctr" indent="0" marL="0">
+            <a:pPr marL="0" indent="0" algn="ctr">
               <a:buNone/>
             </a:pPr>
             <a:r>
@@ -23161,7 +23367,7 @@
             <a:endParaRPr lang="en-US" sz="1100" dirty="0"/>
           </a:p>
           <a:p>
-            <a:pPr algn="ctr" indent="0" marL="0">
+            <a:pPr marL="0" indent="0" algn="ctr">
               <a:buNone/>
             </a:pPr>
             <a:r>
@@ -23175,7 +23381,7 @@
             <a:endParaRPr lang="en-US" sz="1100" dirty="0"/>
           </a:p>
           <a:p>
-            <a:pPr algn="ctr" indent="0" marL="0">
+            <a:pPr marL="0" indent="0" algn="ctr">
               <a:buNone/>
             </a:pPr>
             <a:r>
@@ -23209,7 +23415,7 @@
           </a:solidFill>
           <a:ln/>
           <a:effectLst>
-            <a:outerShdw sx="100000" sy="100000" kx="0" ky="0" algn="bl" rotWithShape="0" blurRad="38100" dist="12700" dir="8100000">
+            <a:outerShdw blurRad="38100" dist="12700" dir="8100000" algn="bl" rotWithShape="0">
               <a:srgbClr val="000000">
                 <a:alpha val="6000"/>
               </a:srgbClr>
@@ -23218,7 +23424,10 @@
         </p:spPr>
         <p:txBody>
           <a:bodyPr/>
-          <a:p/>
+          <a:lstStyle/>
+          <a:p>
+            <a:endParaRPr/>
+          </a:p>
         </p:txBody>
       </p:sp>
       <p:sp>
@@ -23244,7 +23453,10 @@
         </p:spPr>
         <p:txBody>
           <a:bodyPr/>
-          <a:p/>
+          <a:lstStyle/>
+          <a:p>
+            <a:endParaRPr/>
+          </a:p>
         </p:txBody>
       </p:sp>
       <p:sp>
@@ -23268,7 +23480,7 @@
           <a:bodyPr wrap="square" rtlCol="0" anchor="ctr"/>
           <a:lstStyle/>
           <a:p>
-            <a:pPr algn="ctr" indent="0" marL="0">
+            <a:pPr marL="0" indent="0" algn="ctr">
               <a:buNone/>
             </a:pPr>
             <a:r>
@@ -23307,7 +23519,7 @@
           <a:bodyPr wrap="square" rtlCol="0" anchor="ctr"/>
           <a:lstStyle/>
           <a:p>
-            <a:pPr algn="ctr" indent="0" marL="0">
+            <a:pPr marL="0" indent="0" algn="ctr">
               <a:buNone/>
             </a:pPr>
             <a:r>
@@ -23346,7 +23558,7 @@
           <a:bodyPr wrap="square" rtlCol="0" anchor="ctr"/>
           <a:lstStyle/>
           <a:p>
-            <a:pPr algn="ctr" indent="0" marL="0">
+            <a:pPr marL="0" indent="0" algn="ctr">
               <a:buNone/>
             </a:pPr>
             <a:r>
@@ -23360,7 +23572,7 @@
             <a:endParaRPr lang="en-US" sz="1100" dirty="0"/>
           </a:p>
           <a:p>
-            <a:pPr algn="ctr" indent="0" marL="0">
+            <a:pPr marL="0" indent="0" algn="ctr">
               <a:buNone/>
             </a:pPr>
             <a:r>
@@ -23374,7 +23586,7 @@
             <a:endParaRPr lang="en-US" sz="1100" dirty="0"/>
           </a:p>
           <a:p>
-            <a:pPr algn="ctr" indent="0" marL="0">
+            <a:pPr marL="0" indent="0" algn="ctr">
               <a:buNone/>
             </a:pPr>
             <a:r>
@@ -23405,6 +23617,7 @@
         <a:solidFill>
           <a:srgbClr val="F8FAFC"/>
         </a:solidFill>
+        <a:effectLst/>
       </p:bgPr>
     </p:bg>
     <p:spTree>
@@ -23442,7 +23655,7 @@
           <a:bodyPr wrap="square" rtlCol="0" anchor="ctr"/>
           <a:lstStyle/>
           <a:p>
-            <a:pPr indent="0" marL="0">
+            <a:pPr marL="0" indent="0">
               <a:buNone/>
             </a:pPr>
             <a:r>
@@ -23481,7 +23694,10 @@
         </p:spPr>
         <p:txBody>
           <a:bodyPr/>
-          <a:p/>
+          <a:lstStyle/>
+          <a:p>
+            <a:endParaRPr/>
+          </a:p>
         </p:txBody>
       </p:sp>
       <p:sp>
@@ -23505,7 +23721,7 @@
           <a:bodyPr wrap="square" rtlCol="0" anchor="ctr"/>
           <a:lstStyle/>
           <a:p>
-            <a:pPr algn="r" indent="0" marL="0">
+            <a:pPr marL="0" indent="0" algn="r">
               <a:buNone/>
             </a:pPr>
             <a:r>
@@ -23539,7 +23755,7 @@
           </a:solidFill>
           <a:ln/>
           <a:effectLst>
-            <a:outerShdw sx="100000" sy="100000" kx="0" ky="0" algn="bl" rotWithShape="0" blurRad="38100" dist="12700" dir="8100000">
+            <a:outerShdw blurRad="38100" dist="12700" dir="8100000" algn="bl" rotWithShape="0">
               <a:srgbClr val="000000">
                 <a:alpha val="6000"/>
               </a:srgbClr>
@@ -23548,7 +23764,10 @@
         </p:spPr>
         <p:txBody>
           <a:bodyPr/>
-          <a:p/>
+          <a:lstStyle/>
+          <a:p>
+            <a:endParaRPr/>
+          </a:p>
         </p:txBody>
       </p:sp>
       <p:sp>
@@ -23572,7 +23791,7 @@
           <a:bodyPr wrap="square" rtlCol="0" anchor="ctr"/>
           <a:lstStyle/>
           <a:p>
-            <a:pPr algn="ctr" indent="0" marL="0">
+            <a:pPr marL="0" indent="0" algn="ctr">
               <a:buNone/>
             </a:pPr>
             <a:r>
@@ -23589,7 +23808,7 @@
             <a:endParaRPr lang="en-US" sz="1200" dirty="0"/>
           </a:p>
           <a:p>
-            <a:pPr algn="ctr" indent="0" marL="0">
+            <a:pPr marL="0" indent="0" algn="ctr">
               <a:buNone/>
             </a:pPr>
             <a:r>
@@ -23628,7 +23847,7 @@
           <a:bodyPr wrap="square" rtlCol="0" anchor="ctr"/>
           <a:lstStyle/>
           <a:p>
-            <a:pPr algn="ctr" indent="0" marL="0">
+            <a:pPr marL="0" indent="0" algn="ctr">
               <a:buNone/>
             </a:pPr>
             <a:r>
@@ -23665,7 +23884,7 @@
           </a:solidFill>
           <a:ln/>
           <a:effectLst>
-            <a:outerShdw sx="100000" sy="100000" kx="0" ky="0" algn="bl" rotWithShape="0" blurRad="38100" dist="12700" dir="8100000">
+            <a:outerShdw blurRad="38100" dist="12700" dir="8100000" algn="bl" rotWithShape="0">
               <a:srgbClr val="000000">
                 <a:alpha val="6000"/>
               </a:srgbClr>
@@ -23674,7 +23893,10 @@
         </p:spPr>
         <p:txBody>
           <a:bodyPr/>
-          <a:p/>
+          <a:lstStyle/>
+          <a:p>
+            <a:endParaRPr/>
+          </a:p>
         </p:txBody>
       </p:sp>
       <p:sp>
@@ -23698,7 +23920,7 @@
           <a:bodyPr wrap="square" rtlCol="0" anchor="ctr"/>
           <a:lstStyle/>
           <a:p>
-            <a:pPr algn="ctr" indent="0" marL="0">
+            <a:pPr marL="0" indent="0" algn="ctr">
               <a:buNone/>
             </a:pPr>
             <a:r>
@@ -23715,7 +23937,7 @@
             <a:endParaRPr lang="en-US" sz="1200" dirty="0"/>
           </a:p>
           <a:p>
-            <a:pPr algn="ctr" indent="0" marL="0">
+            <a:pPr marL="0" indent="0" algn="ctr">
               <a:buNone/>
             </a:pPr>
             <a:r>
@@ -23754,7 +23976,7 @@
           <a:bodyPr wrap="square" rtlCol="0" anchor="ctr"/>
           <a:lstStyle/>
           <a:p>
-            <a:pPr algn="ctr" indent="0" marL="0">
+            <a:pPr marL="0" indent="0" algn="ctr">
               <a:buNone/>
             </a:pPr>
             <a:r>
@@ -23791,7 +24013,7 @@
           </a:solidFill>
           <a:ln/>
           <a:effectLst>
-            <a:outerShdw sx="100000" sy="100000" kx="0" ky="0" algn="bl" rotWithShape="0" blurRad="38100" dist="12700" dir="8100000">
+            <a:outerShdw blurRad="38100" dist="12700" dir="8100000" algn="bl" rotWithShape="0">
               <a:srgbClr val="000000">
                 <a:alpha val="6000"/>
               </a:srgbClr>
@@ -23800,7 +24022,10 @@
         </p:spPr>
         <p:txBody>
           <a:bodyPr/>
-          <a:p/>
+          <a:lstStyle/>
+          <a:p>
+            <a:endParaRPr/>
+          </a:p>
         </p:txBody>
       </p:sp>
       <p:sp>
@@ -23824,7 +24049,7 @@
           <a:bodyPr wrap="square" rtlCol="0" anchor="ctr"/>
           <a:lstStyle/>
           <a:p>
-            <a:pPr algn="ctr" indent="0" marL="0">
+            <a:pPr marL="0" indent="0" algn="ctr">
               <a:buNone/>
             </a:pPr>
             <a:r>
@@ -23841,7 +24066,7 @@
             <a:endParaRPr lang="en-US" sz="1200" dirty="0"/>
           </a:p>
           <a:p>
-            <a:pPr algn="ctr" indent="0" marL="0">
+            <a:pPr marL="0" indent="0" algn="ctr">
               <a:buNone/>
             </a:pPr>
             <a:r>
@@ -23880,7 +24105,7 @@
           <a:bodyPr wrap="square" rtlCol="0" anchor="ctr"/>
           <a:lstStyle/>
           <a:p>
-            <a:pPr algn="ctr" indent="0" marL="0">
+            <a:pPr marL="0" indent="0" algn="ctr">
               <a:buNone/>
             </a:pPr>
             <a:r>
@@ -23917,7 +24142,7 @@
           </a:solidFill>
           <a:ln/>
           <a:effectLst>
-            <a:outerShdw sx="100000" sy="100000" kx="0" ky="0" algn="bl" rotWithShape="0" blurRad="38100" dist="12700" dir="8100000">
+            <a:outerShdw blurRad="38100" dist="12700" dir="8100000" algn="bl" rotWithShape="0">
               <a:srgbClr val="000000">
                 <a:alpha val="6000"/>
               </a:srgbClr>
@@ -23926,7 +24151,10 @@
         </p:spPr>
         <p:txBody>
           <a:bodyPr/>
-          <a:p/>
+          <a:lstStyle/>
+          <a:p>
+            <a:endParaRPr/>
+          </a:p>
         </p:txBody>
       </p:sp>
       <p:sp>
@@ -23950,7 +24178,7 @@
           <a:bodyPr wrap="square" rtlCol="0" anchor="ctr"/>
           <a:lstStyle/>
           <a:p>
-            <a:pPr algn="ctr" indent="0" marL="0">
+            <a:pPr marL="0" indent="0" algn="ctr">
               <a:buNone/>
             </a:pPr>
             <a:r>
@@ -23967,7 +24195,7 @@
             <a:endParaRPr lang="en-US" sz="1200" dirty="0"/>
           </a:p>
           <a:p>
-            <a:pPr algn="ctr" indent="0" marL="0">
+            <a:pPr marL="0" indent="0" algn="ctr">
               <a:buNone/>
             </a:pPr>
             <a:r>
@@ -24006,7 +24234,7 @@
           <a:bodyPr wrap="square" rtlCol="0" anchor="ctr"/>
           <a:lstStyle/>
           <a:p>
-            <a:pPr algn="ctr" indent="0" marL="0">
+            <a:pPr marL="0" indent="0" algn="ctr">
               <a:buNone/>
             </a:pPr>
             <a:r>
@@ -24043,7 +24271,7 @@
           </a:solidFill>
           <a:ln/>
           <a:effectLst>
-            <a:outerShdw sx="100000" sy="100000" kx="0" ky="0" algn="bl" rotWithShape="0" blurRad="38100" dist="12700" dir="8100000">
+            <a:outerShdw blurRad="38100" dist="12700" dir="8100000" algn="bl" rotWithShape="0">
               <a:srgbClr val="000000">
                 <a:alpha val="6000"/>
               </a:srgbClr>
@@ -24052,7 +24280,10 @@
         </p:spPr>
         <p:txBody>
           <a:bodyPr/>
-          <a:p/>
+          <a:lstStyle/>
+          <a:p>
+            <a:endParaRPr/>
+          </a:p>
         </p:txBody>
       </p:sp>
       <p:sp>
@@ -24076,7 +24307,7 @@
           <a:bodyPr wrap="square" rtlCol="0" anchor="ctr"/>
           <a:lstStyle/>
           <a:p>
-            <a:pPr algn="ctr" indent="0" marL="0">
+            <a:pPr marL="0" indent="0" algn="ctr">
               <a:buNone/>
             </a:pPr>
             <a:r>
@@ -24093,7 +24324,7 @@
             <a:endParaRPr lang="en-US" sz="1200" dirty="0"/>
           </a:p>
           <a:p>
-            <a:pPr algn="ctr" indent="0" marL="0">
+            <a:pPr marL="0" indent="0" algn="ctr">
               <a:buNone/>
             </a:pPr>
             <a:r>
@@ -24134,7 +24365,10 @@
         </p:spPr>
         <p:txBody>
           <a:bodyPr/>
-          <a:p/>
+          <a:lstStyle/>
+          <a:p>
+            <a:endParaRPr/>
+          </a:p>
         </p:txBody>
       </p:sp>
       <p:sp>
@@ -24158,7 +24392,7 @@
           <a:bodyPr wrap="square" rtlCol="0" anchor="ctr"/>
           <a:lstStyle/>
           <a:p>
-            <a:pPr indent="0" marL="0">
+            <a:pPr marL="0" indent="0">
               <a:buNone/>
             </a:pPr>
             <a:r>
@@ -24199,7 +24433,10 @@
         </p:spPr>
         <p:txBody>
           <a:bodyPr/>
-          <a:p/>
+          <a:lstStyle/>
+          <a:p>
+            <a:endParaRPr/>
+          </a:p>
         </p:txBody>
       </p:sp>
       <p:sp>
@@ -24223,7 +24460,7 @@
           <a:bodyPr wrap="square" rtlCol="0" anchor="ctr"/>
           <a:lstStyle/>
           <a:p>
-            <a:pPr indent="0" marL="0">
+            <a:pPr marL="0" indent="0">
               <a:buNone/>
             </a:pPr>
             <a:r>
@@ -24262,7 +24499,7 @@
           <a:bodyPr wrap="square" rtlCol="0" anchor="ctr"/>
           <a:lstStyle/>
           <a:p>
-            <a:pPr indent="0" marL="0">
+            <a:pPr marL="0" indent="0">
               <a:buNone/>
             </a:pPr>
             <a:r>
@@ -24301,7 +24538,7 @@
           <a:bodyPr wrap="square" rtlCol="0" anchor="ctr"/>
           <a:lstStyle/>
           <a:p>
-            <a:pPr indent="0" marL="0">
+            <a:pPr marL="0" indent="0">
               <a:buNone/>
             </a:pPr>
             <a:r>
@@ -24337,7 +24574,7 @@
           <a:bodyPr wrap="square" rtlCol="0" anchor="ctr"/>
           <a:lstStyle/>
           <a:p>
-            <a:pPr indent="0" marL="0">
+            <a:pPr marL="0" indent="0">
               <a:buNone/>
             </a:pPr>
             <a:r>
@@ -24373,7 +24610,7 @@
           <a:bodyPr wrap="square" rtlCol="0" anchor="ctr"/>
           <a:lstStyle/>
           <a:p>
-            <a:pPr indent="0" marL="0">
+            <a:pPr marL="0" indent="0">
               <a:buNone/>
             </a:pPr>
             <a:r>
@@ -24405,6 +24642,7 @@
         <a:solidFill>
           <a:srgbClr val="1A1A2E"/>
         </a:solidFill>
+        <a:effectLst/>
       </p:bgPr>
     </p:bg>
     <p:spTree>
@@ -24442,7 +24680,10 @@
         </p:spPr>
         <p:txBody>
           <a:bodyPr/>
-          <a:p/>
+          <a:lstStyle/>
+          <a:p>
+            <a:endParaRPr/>
+          </a:p>
         </p:txBody>
       </p:sp>
       <p:sp>
@@ -24466,7 +24707,7 @@
           <a:bodyPr wrap="square" rtlCol="0" anchor="ctr"/>
           <a:lstStyle/>
           <a:p>
-            <a:pPr indent="0" marL="0">
+            <a:pPr marL="0" indent="0">
               <a:buNone/>
             </a:pPr>
             <a:r>
@@ -24505,7 +24746,7 @@
           <a:bodyPr wrap="square" rtlCol="0" anchor="ctr"/>
           <a:lstStyle/>
           <a:p>
-            <a:pPr indent="0" marL="0">
+            <a:pPr marL="0" indent="0">
               <a:buNone/>
             </a:pPr>
             <a:r>
@@ -24541,7 +24782,7 @@
           <a:bodyPr wrap="square" rtlCol="0" anchor="ctr"/>
           <a:lstStyle/>
           <a:p>
-            <a:pPr algn="r" indent="0" marL="0">
+            <a:pPr marL="0" indent="0" algn="r">
               <a:buNone/>
             </a:pPr>
             <a:r>
@@ -24572,6 +24813,7 @@
         <a:solidFill>
           <a:srgbClr val="F8FAFC"/>
         </a:solidFill>
+        <a:effectLst/>
       </p:bgPr>
     </p:bg>
     <p:spTree>
@@ -24609,7 +24851,7 @@
           <a:bodyPr wrap="square" rtlCol="0" anchor="ctr"/>
           <a:lstStyle/>
           <a:p>
-            <a:pPr indent="0" marL="0">
+            <a:pPr marL="0" indent="0">
               <a:buNone/>
             </a:pPr>
             <a:r>
@@ -24648,7 +24890,10 @@
         </p:spPr>
         <p:txBody>
           <a:bodyPr/>
-          <a:p/>
+          <a:lstStyle/>
+          <a:p>
+            <a:endParaRPr/>
+          </a:p>
         </p:txBody>
       </p:sp>
       <p:sp>
@@ -24672,7 +24917,7 @@
           <a:bodyPr wrap="square" rtlCol="0" anchor="ctr"/>
           <a:lstStyle/>
           <a:p>
-            <a:pPr algn="r" indent="0" marL="0">
+            <a:pPr marL="0" indent="0" algn="r">
               <a:buNone/>
             </a:pPr>
             <a:r>
@@ -24706,7 +24951,7 @@
           </a:solidFill>
           <a:ln/>
           <a:effectLst>
-            <a:outerShdw sx="100000" sy="100000" kx="0" ky="0" algn="bl" rotWithShape="0" blurRad="38100" dist="12700" dir="8100000">
+            <a:outerShdw blurRad="38100" dist="12700" dir="8100000" algn="bl" rotWithShape="0">
               <a:srgbClr val="000000">
                 <a:alpha val="6000"/>
               </a:srgbClr>
@@ -24715,7 +24960,10 @@
         </p:spPr>
         <p:txBody>
           <a:bodyPr/>
-          <a:p/>
+          <a:lstStyle/>
+          <a:p>
+            <a:endParaRPr/>
+          </a:p>
         </p:txBody>
       </p:sp>
       <p:sp>
@@ -24739,7 +24987,10 @@
         </p:spPr>
         <p:txBody>
           <a:bodyPr/>
-          <a:p/>
+          <a:lstStyle/>
+          <a:p>
+            <a:endParaRPr/>
+          </a:p>
         </p:txBody>
       </p:sp>
       <p:sp>
@@ -24763,7 +25014,7 @@
           <a:bodyPr wrap="square" rtlCol="0" anchor="ctr"/>
           <a:lstStyle/>
           <a:p>
-            <a:pPr indent="0" marL="0">
+            <a:pPr marL="0" indent="0">
               <a:buNone/>
             </a:pPr>
             <a:r>
@@ -24802,7 +25053,7 @@
           <a:bodyPr wrap="square" rtlCol="0" anchor="ctr"/>
           <a:lstStyle/>
           <a:p>
-            <a:pPr indent="0" marL="0">
+            <a:pPr marL="0" indent="0">
               <a:buNone/>
             </a:pPr>
             <a:r>
@@ -24838,7 +25089,7 @@
           <a:bodyPr wrap="square" rtlCol="0" anchor="ctr"/>
           <a:lstStyle/>
           <a:p>
-            <a:pPr algn="ctr" indent="0" marL="0">
+            <a:pPr marL="0" indent="0" algn="ctr">
               <a:buNone/>
             </a:pPr>
             <a:r>
@@ -24872,7 +25123,7 @@
           </a:solidFill>
           <a:ln/>
           <a:effectLst>
-            <a:outerShdw sx="100000" sy="100000" kx="0" ky="0" algn="bl" rotWithShape="0" blurRad="38100" dist="12700" dir="8100000">
+            <a:outerShdw blurRad="38100" dist="12700" dir="8100000" algn="bl" rotWithShape="0">
               <a:srgbClr val="000000">
                 <a:alpha val="6000"/>
               </a:srgbClr>
@@ -24881,7 +25132,10 @@
         </p:spPr>
         <p:txBody>
           <a:bodyPr/>
-          <a:p/>
+          <a:lstStyle/>
+          <a:p>
+            <a:endParaRPr/>
+          </a:p>
         </p:txBody>
       </p:sp>
       <p:sp>
@@ -24905,7 +25159,10 @@
         </p:spPr>
         <p:txBody>
           <a:bodyPr/>
-          <a:p/>
+          <a:lstStyle/>
+          <a:p>
+            <a:endParaRPr/>
+          </a:p>
         </p:txBody>
       </p:sp>
       <p:sp>
@@ -24929,7 +25186,7 @@
           <a:bodyPr wrap="square" rtlCol="0" anchor="ctr"/>
           <a:lstStyle/>
           <a:p>
-            <a:pPr indent="0" marL="0">
+            <a:pPr marL="0" indent="0">
               <a:buNone/>
             </a:pPr>
             <a:r>
@@ -24968,7 +25225,7 @@
           <a:bodyPr wrap="square" rtlCol="0" anchor="ctr"/>
           <a:lstStyle/>
           <a:p>
-            <a:pPr indent="0" marL="0">
+            <a:pPr marL="0" indent="0">
               <a:buNone/>
             </a:pPr>
             <a:r>
@@ -25004,7 +25261,7 @@
           <a:bodyPr wrap="square" rtlCol="0" anchor="ctr"/>
           <a:lstStyle/>
           <a:p>
-            <a:pPr algn="ctr" indent="0" marL="0">
+            <a:pPr marL="0" indent="0" algn="ctr">
               <a:buNone/>
             </a:pPr>
             <a:r>
@@ -25038,7 +25295,7 @@
           </a:solidFill>
           <a:ln/>
           <a:effectLst>
-            <a:outerShdw sx="100000" sy="100000" kx="0" ky="0" algn="bl" rotWithShape="0" blurRad="38100" dist="12700" dir="8100000">
+            <a:outerShdw blurRad="38100" dist="12700" dir="8100000" algn="bl" rotWithShape="0">
               <a:srgbClr val="000000">
                 <a:alpha val="6000"/>
               </a:srgbClr>
@@ -25047,7 +25304,10 @@
         </p:spPr>
         <p:txBody>
           <a:bodyPr/>
-          <a:p/>
+          <a:lstStyle/>
+          <a:p>
+            <a:endParaRPr/>
+          </a:p>
         </p:txBody>
       </p:sp>
       <p:sp>
@@ -25071,7 +25331,10 @@
         </p:spPr>
         <p:txBody>
           <a:bodyPr/>
-          <a:p/>
+          <a:lstStyle/>
+          <a:p>
+            <a:endParaRPr/>
+          </a:p>
         </p:txBody>
       </p:sp>
       <p:sp>
@@ -25095,7 +25358,7 @@
           <a:bodyPr wrap="square" rtlCol="0" anchor="ctr"/>
           <a:lstStyle/>
           <a:p>
-            <a:pPr indent="0" marL="0">
+            <a:pPr marL="0" indent="0">
               <a:buNone/>
             </a:pPr>
             <a:r>
@@ -25134,7 +25397,7 @@
           <a:bodyPr wrap="square" rtlCol="0" anchor="ctr"/>
           <a:lstStyle/>
           <a:p>
-            <a:pPr indent="0" marL="0">
+            <a:pPr marL="0" indent="0">
               <a:buNone/>
             </a:pPr>
             <a:r>
@@ -25165,6 +25428,7 @@
         <a:solidFill>
           <a:srgbClr val="F8FAFC"/>
         </a:solidFill>
+        <a:effectLst/>
       </p:bgPr>
     </p:bg>
     <p:spTree>
@@ -25202,7 +25466,7 @@
           <a:bodyPr wrap="square" rtlCol="0" anchor="ctr"/>
           <a:lstStyle/>
           <a:p>
-            <a:pPr indent="0" marL="0">
+            <a:pPr marL="0" indent="0">
               <a:buNone/>
             </a:pPr>
             <a:r>
@@ -25241,7 +25505,10 @@
         </p:spPr>
         <p:txBody>
           <a:bodyPr/>
-          <a:p/>
+          <a:lstStyle/>
+          <a:p>
+            <a:endParaRPr/>
+          </a:p>
         </p:txBody>
       </p:sp>
       <p:sp>
@@ -25265,7 +25532,7 @@
           <a:bodyPr wrap="square" rtlCol="0" anchor="ctr"/>
           <a:lstStyle/>
           <a:p>
-            <a:pPr algn="r" indent="0" marL="0">
+            <a:pPr marL="0" indent="0" algn="r">
               <a:buNone/>
             </a:pPr>
             <a:r>
@@ -25299,7 +25566,7 @@
           </a:solidFill>
           <a:ln/>
           <a:effectLst>
-            <a:outerShdw sx="100000" sy="100000" kx="0" ky="0" algn="bl" rotWithShape="0" blurRad="38100" dist="12700" dir="8100000">
+            <a:outerShdw blurRad="38100" dist="12700" dir="8100000" algn="bl" rotWithShape="0">
               <a:srgbClr val="000000">
                 <a:alpha val="6000"/>
               </a:srgbClr>
@@ -25308,7 +25575,10 @@
         </p:spPr>
         <p:txBody>
           <a:bodyPr/>
-          <a:p/>
+          <a:lstStyle/>
+          <a:p>
+            <a:endParaRPr/>
+          </a:p>
         </p:txBody>
       </p:sp>
       <p:sp>
@@ -25332,7 +25602,10 @@
         </p:spPr>
         <p:txBody>
           <a:bodyPr/>
-          <a:p/>
+          <a:lstStyle/>
+          <a:p>
+            <a:endParaRPr/>
+          </a:p>
         </p:txBody>
       </p:sp>
       <p:sp>
@@ -25356,7 +25629,7 @@
           <a:bodyPr wrap="square" rtlCol="0" anchor="ctr"/>
           <a:lstStyle/>
           <a:p>
-            <a:pPr indent="0" marL="0">
+            <a:pPr marL="0" indent="0">
               <a:buNone/>
             </a:pPr>
             <a:r>
@@ -25392,7 +25665,7 @@
           <a:bodyPr wrap="square" rtlCol="0" anchor="ctr"/>
           <a:lstStyle/>
           <a:p>
-            <a:pPr indent="0" marL="0">
+            <a:pPr marL="0" indent="0">
               <a:buNone/>
             </a:pPr>
             <a:r>
@@ -25431,7 +25704,7 @@
           <a:bodyPr wrap="square" rtlCol="0" anchor="ctr"/>
           <a:lstStyle/>
           <a:p>
-            <a:pPr indent="0" marL="0">
+            <a:pPr marL="0" indent="0">
               <a:buNone/>
             </a:pPr>
             <a:r>
@@ -25465,7 +25738,7 @@
           </a:solidFill>
           <a:ln/>
           <a:effectLst>
-            <a:outerShdw sx="100000" sy="100000" kx="0" ky="0" algn="bl" rotWithShape="0" blurRad="38100" dist="12700" dir="8100000">
+            <a:outerShdw blurRad="38100" dist="12700" dir="8100000" algn="bl" rotWithShape="0">
               <a:srgbClr val="000000">
                 <a:alpha val="6000"/>
               </a:srgbClr>
@@ -25474,7 +25747,10 @@
         </p:spPr>
         <p:txBody>
           <a:bodyPr/>
-          <a:p/>
+          <a:lstStyle/>
+          <a:p>
+            <a:endParaRPr/>
+          </a:p>
         </p:txBody>
       </p:sp>
       <p:sp>
@@ -25498,7 +25774,10 @@
         </p:spPr>
         <p:txBody>
           <a:bodyPr/>
-          <a:p/>
+          <a:lstStyle/>
+          <a:p>
+            <a:endParaRPr/>
+          </a:p>
         </p:txBody>
       </p:sp>
       <p:sp>
@@ -25522,7 +25801,7 @@
           <a:bodyPr wrap="square" rtlCol="0" anchor="ctr"/>
           <a:lstStyle/>
           <a:p>
-            <a:pPr indent="0" marL="0">
+            <a:pPr marL="0" indent="0">
               <a:buNone/>
             </a:pPr>
             <a:r>
@@ -25558,7 +25837,7 @@
           <a:bodyPr wrap="square" rtlCol="0" anchor="ctr"/>
           <a:lstStyle/>
           <a:p>
-            <a:pPr indent="0" marL="0">
+            <a:pPr marL="0" indent="0">
               <a:buNone/>
             </a:pPr>
             <a:r>
@@ -25597,7 +25876,7 @@
           <a:bodyPr wrap="square" rtlCol="0" anchor="ctr"/>
           <a:lstStyle/>
           <a:p>
-            <a:pPr indent="0" marL="0">
+            <a:pPr marL="0" indent="0">
               <a:buNone/>
             </a:pPr>
             <a:r>
@@ -25631,7 +25910,7 @@
           </a:solidFill>
           <a:ln/>
           <a:effectLst>
-            <a:outerShdw sx="100000" sy="100000" kx="0" ky="0" algn="bl" rotWithShape="0" blurRad="38100" dist="12700" dir="8100000">
+            <a:outerShdw blurRad="38100" dist="12700" dir="8100000" algn="bl" rotWithShape="0">
               <a:srgbClr val="000000">
                 <a:alpha val="6000"/>
               </a:srgbClr>
@@ -25640,7 +25919,10 @@
         </p:spPr>
         <p:txBody>
           <a:bodyPr/>
-          <a:p/>
+          <a:lstStyle/>
+          <a:p>
+            <a:endParaRPr/>
+          </a:p>
         </p:txBody>
       </p:sp>
       <p:sp>
@@ -25664,7 +25946,10 @@
         </p:spPr>
         <p:txBody>
           <a:bodyPr/>
-          <a:p/>
+          <a:lstStyle/>
+          <a:p>
+            <a:endParaRPr/>
+          </a:p>
         </p:txBody>
       </p:sp>
       <p:sp>
@@ -25688,7 +25973,7 @@
           <a:bodyPr wrap="square" rtlCol="0" anchor="ctr"/>
           <a:lstStyle/>
           <a:p>
-            <a:pPr indent="0" marL="0">
+            <a:pPr marL="0" indent="0">
               <a:buNone/>
             </a:pPr>
             <a:r>
@@ -25724,7 +26009,7 @@
           <a:bodyPr wrap="square" rtlCol="0" anchor="ctr"/>
           <a:lstStyle/>
           <a:p>
-            <a:pPr indent="0" marL="0">
+            <a:pPr marL="0" indent="0">
               <a:buNone/>
             </a:pPr>
             <a:r>
@@ -25763,7 +26048,7 @@
           <a:bodyPr wrap="square" rtlCol="0" anchor="ctr"/>
           <a:lstStyle/>
           <a:p>
-            <a:pPr indent="0" marL="0">
+            <a:pPr marL="0" indent="0">
               <a:buNone/>
             </a:pPr>
             <a:r>
@@ -25797,7 +26082,7 @@
           </a:solidFill>
           <a:ln/>
           <a:effectLst>
-            <a:outerShdw sx="100000" sy="100000" kx="0" ky="0" algn="bl" rotWithShape="0" blurRad="38100" dist="12700" dir="8100000">
+            <a:outerShdw blurRad="38100" dist="12700" dir="8100000" algn="bl" rotWithShape="0">
               <a:srgbClr val="000000">
                 <a:alpha val="6000"/>
               </a:srgbClr>
@@ -25806,7 +26091,10 @@
         </p:spPr>
         <p:txBody>
           <a:bodyPr/>
-          <a:p/>
+          <a:lstStyle/>
+          <a:p>
+            <a:endParaRPr/>
+          </a:p>
         </p:txBody>
       </p:sp>
       <p:sp>
@@ -25830,7 +26118,10 @@
         </p:spPr>
         <p:txBody>
           <a:bodyPr/>
-          <a:p/>
+          <a:lstStyle/>
+          <a:p>
+            <a:endParaRPr/>
+          </a:p>
         </p:txBody>
       </p:sp>
       <p:sp>
@@ -25854,7 +26145,7 @@
           <a:bodyPr wrap="square" rtlCol="0" anchor="ctr"/>
           <a:lstStyle/>
           <a:p>
-            <a:pPr indent="0" marL="0">
+            <a:pPr marL="0" indent="0">
               <a:buNone/>
             </a:pPr>
             <a:r>
@@ -25890,7 +26181,7 @@
           <a:bodyPr wrap="square" rtlCol="0" anchor="ctr"/>
           <a:lstStyle/>
           <a:p>
-            <a:pPr indent="0" marL="0">
+            <a:pPr marL="0" indent="0">
               <a:buNone/>
             </a:pPr>
             <a:r>
@@ -25929,7 +26220,7 @@
           <a:bodyPr wrap="square" rtlCol="0" anchor="ctr"/>
           <a:lstStyle/>
           <a:p>
-            <a:pPr indent="0" marL="0">
+            <a:pPr marL="0" indent="0">
               <a:buNone/>
             </a:pPr>
             <a:r>
@@ -25963,7 +26254,7 @@
           </a:solidFill>
           <a:ln/>
           <a:effectLst>
-            <a:outerShdw sx="100000" sy="100000" kx="0" ky="0" algn="bl" rotWithShape="0" blurRad="38100" dist="12700" dir="8100000">
+            <a:outerShdw blurRad="38100" dist="12700" dir="8100000" algn="bl" rotWithShape="0">
               <a:srgbClr val="000000">
                 <a:alpha val="6000"/>
               </a:srgbClr>
@@ -25972,7 +26263,10 @@
         </p:spPr>
         <p:txBody>
           <a:bodyPr/>
-          <a:p/>
+          <a:lstStyle/>
+          <a:p>
+            <a:endParaRPr/>
+          </a:p>
         </p:txBody>
       </p:sp>
       <p:sp>
@@ -25996,7 +26290,10 @@
         </p:spPr>
         <p:txBody>
           <a:bodyPr/>
-          <a:p/>
+          <a:lstStyle/>
+          <a:p>
+            <a:endParaRPr/>
+          </a:p>
         </p:txBody>
       </p:sp>
       <p:sp>
@@ -26020,7 +26317,7 @@
           <a:bodyPr wrap="square" rtlCol="0" anchor="ctr"/>
           <a:lstStyle/>
           <a:p>
-            <a:pPr indent="0" marL="0">
+            <a:pPr marL="0" indent="0">
               <a:buNone/>
             </a:pPr>
             <a:r>
@@ -26056,7 +26353,7 @@
           <a:bodyPr wrap="square" rtlCol="0" anchor="ctr"/>
           <a:lstStyle/>
           <a:p>
-            <a:pPr indent="0" marL="0">
+            <a:pPr marL="0" indent="0">
               <a:buNone/>
             </a:pPr>
             <a:r>
@@ -26095,7 +26392,7 @@
           <a:bodyPr wrap="square" rtlCol="0" anchor="ctr"/>
           <a:lstStyle/>
           <a:p>
-            <a:pPr indent="0" marL="0">
+            <a:pPr marL="0" indent="0">
               <a:buNone/>
             </a:pPr>
             <a:r>
@@ -26129,7 +26426,7 @@
           </a:solidFill>
           <a:ln/>
           <a:effectLst>
-            <a:outerShdw sx="100000" sy="100000" kx="0" ky="0" algn="bl" rotWithShape="0" blurRad="38100" dist="12700" dir="8100000">
+            <a:outerShdw blurRad="38100" dist="12700" dir="8100000" algn="bl" rotWithShape="0">
               <a:srgbClr val="000000">
                 <a:alpha val="6000"/>
               </a:srgbClr>
@@ -26138,7 +26435,10 @@
         </p:spPr>
         <p:txBody>
           <a:bodyPr/>
-          <a:p/>
+          <a:lstStyle/>
+          <a:p>
+            <a:endParaRPr/>
+          </a:p>
         </p:txBody>
       </p:sp>
       <p:sp>
@@ -26162,7 +26462,10 @@
         </p:spPr>
         <p:txBody>
           <a:bodyPr/>
-          <a:p/>
+          <a:lstStyle/>
+          <a:p>
+            <a:endParaRPr/>
+          </a:p>
         </p:txBody>
       </p:sp>
       <p:sp>
@@ -26186,7 +26489,7 @@
           <a:bodyPr wrap="square" rtlCol="0" anchor="ctr"/>
           <a:lstStyle/>
           <a:p>
-            <a:pPr indent="0" marL="0">
+            <a:pPr marL="0" indent="0">
               <a:buNone/>
             </a:pPr>
             <a:r>
@@ -26222,7 +26525,7 @@
           <a:bodyPr wrap="square" rtlCol="0" anchor="ctr"/>
           <a:lstStyle/>
           <a:p>
-            <a:pPr indent="0" marL="0">
+            <a:pPr marL="0" indent="0">
               <a:buNone/>
             </a:pPr>
             <a:r>
@@ -26261,7 +26564,7 @@
           <a:bodyPr wrap="square" rtlCol="0" anchor="ctr"/>
           <a:lstStyle/>
           <a:p>
-            <a:pPr indent="0" marL="0">
+            <a:pPr marL="0" indent="0">
               <a:buNone/>
             </a:pPr>
             <a:r>
@@ -26577,4 +26880,299 @@
     </a:ext>
   </a:extLst>
 </a:theme>
+</file>
+
+<file path=ppt/theme/theme2.xml><?xml version="1.0" encoding="utf-8"?>
+<a:theme xmlns:a="http://schemas.openxmlformats.org/drawingml/2006/main" name="Office 主题​​">
+  <a:themeElements>
+    <a:clrScheme name="Office">
+      <a:dk1>
+        <a:sysClr val="windowText" lastClr="000000"/>
+      </a:dk1>
+      <a:lt1>
+        <a:sysClr val="window" lastClr="FFFFFF"/>
+      </a:lt1>
+      <a:dk2>
+        <a:srgbClr val="44546A"/>
+      </a:dk2>
+      <a:lt2>
+        <a:srgbClr val="E7E6E6"/>
+      </a:lt2>
+      <a:accent1>
+        <a:srgbClr val="4472C4"/>
+      </a:accent1>
+      <a:accent2>
+        <a:srgbClr val="ED7D31"/>
+      </a:accent2>
+      <a:accent3>
+        <a:srgbClr val="A5A5A5"/>
+      </a:accent3>
+      <a:accent4>
+        <a:srgbClr val="FFC000"/>
+      </a:accent4>
+      <a:accent5>
+        <a:srgbClr val="5B9BD5"/>
+      </a:accent5>
+      <a:accent6>
+        <a:srgbClr val="70AD47"/>
+      </a:accent6>
+      <a:hlink>
+        <a:srgbClr val="0563C1"/>
+      </a:hlink>
+      <a:folHlink>
+        <a:srgbClr val="954F72"/>
+      </a:folHlink>
+    </a:clrScheme>
+    <a:fontScheme name="Office">
+      <a:majorFont>
+        <a:latin typeface="等线 Light" panose="020F0302020204030204"/>
+        <a:ea typeface=""/>
+        <a:cs typeface=""/>
+        <a:font script="Jpan" typeface="游ゴシック Light"/>
+        <a:font script="Hang" typeface="맑은 고딕"/>
+        <a:font script="Hans" typeface="等线 Light"/>
+        <a:font script="Hant" typeface="新細明體"/>
+        <a:font script="Arab" typeface="Times New Roman"/>
+        <a:font script="Hebr" typeface="Times New Roman"/>
+        <a:font script="Thai" typeface="Angsana New"/>
+        <a:font script="Ethi" typeface="Nyala"/>
+        <a:font script="Beng" typeface="Vrinda"/>
+        <a:font script="Gujr" typeface="Shruti"/>
+        <a:font script="Khmr" typeface="MoolBoran"/>
+        <a:font script="Knda" typeface="Tunga"/>
+        <a:font script="Guru" typeface="Raavi"/>
+        <a:font script="Cans" typeface="Euphemia"/>
+        <a:font script="Cher" typeface="Plantagenet Cherokee"/>
+        <a:font script="Yiii" typeface="Microsoft Yi Baiti"/>
+        <a:font script="Tibt" typeface="Microsoft Himalaya"/>
+        <a:font script="Thaa" typeface="MV Boli"/>
+        <a:font script="Deva" typeface="Mangal"/>
+        <a:font script="Telu" typeface="Gautami"/>
+        <a:font script="Taml" typeface="Latha"/>
+        <a:font script="Syrc" typeface="Estrangelo Edessa"/>
+        <a:font script="Orya" typeface="Kalinga"/>
+        <a:font script="Mlym" typeface="Kartika"/>
+        <a:font script="Laoo" typeface="DokChampa"/>
+        <a:font script="Sinh" typeface="Iskoola Pota"/>
+        <a:font script="Mong" typeface="Mongolian Baiti"/>
+        <a:font script="Viet" typeface="Times New Roman"/>
+        <a:font script="Uigh" typeface="Microsoft Uighur"/>
+        <a:font script="Geor" typeface="Sylfaen"/>
+        <a:font script="Armn" typeface="Arial"/>
+        <a:font script="Bugi" typeface="Leelawadee UI"/>
+        <a:font script="Bopo" typeface="Microsoft JhengHei"/>
+        <a:font script="Java" typeface="Javanese Text"/>
+        <a:font script="Lisu" typeface="Segoe UI"/>
+        <a:font script="Mymr" typeface="Myanmar Text"/>
+        <a:font script="Nkoo" typeface="Ebrima"/>
+        <a:font script="Olck" typeface="Nirmala UI"/>
+        <a:font script="Osma" typeface="Ebrima"/>
+        <a:font script="Phag" typeface="Phagspa"/>
+        <a:font script="Syrn" typeface="Estrangelo Edessa"/>
+        <a:font script="Syrj" typeface="Estrangelo Edessa"/>
+        <a:font script="Syre" typeface="Estrangelo Edessa"/>
+        <a:font script="Sora" typeface="Nirmala UI"/>
+        <a:font script="Tale" typeface="Microsoft Tai Le"/>
+        <a:font script="Talu" typeface="Microsoft New Tai Lue"/>
+        <a:font script="Tfng" typeface="Ebrima"/>
+      </a:majorFont>
+      <a:minorFont>
+        <a:latin typeface="等线" panose="020F0502020204030204"/>
+        <a:ea typeface=""/>
+        <a:cs typeface=""/>
+        <a:font script="Jpan" typeface="游ゴシック"/>
+        <a:font script="Hang" typeface="맑은 고딕"/>
+        <a:font script="Hans" typeface="等线"/>
+        <a:font script="Hant" typeface="新細明體"/>
+        <a:font script="Arab" typeface="Arial"/>
+        <a:font script="Hebr" typeface="Arial"/>
+        <a:font script="Thai" typeface="Cordia New"/>
+        <a:font script="Ethi" typeface="Nyala"/>
+        <a:font script="Beng" typeface="Vrinda"/>
+        <a:font script="Gujr" typeface="Shruti"/>
+        <a:font script="Khmr" typeface="DaunPenh"/>
+        <a:font script="Knda" typeface="Tunga"/>
+        <a:font script="Guru" typeface="Raavi"/>
+        <a:font script="Cans" typeface="Euphemia"/>
+        <a:font script="Cher" typeface="Plantagenet Cherokee"/>
+        <a:font script="Yiii" typeface="Microsoft Yi Baiti"/>
+        <a:font script="Tibt" typeface="Microsoft Himalaya"/>
+        <a:font script="Thaa" typeface="MV Boli"/>
+        <a:font script="Deva" typeface="Mangal"/>
+        <a:font script="Telu" typeface="Gautami"/>
+        <a:font script="Taml" typeface="Latha"/>
+        <a:font script="Syrc" typeface="Estrangelo Edessa"/>
+        <a:font script="Orya" typeface="Kalinga"/>
+        <a:font script="Mlym" typeface="Kartika"/>
+        <a:font script="Laoo" typeface="DokChampa"/>
+        <a:font script="Sinh" typeface="Iskoola Pota"/>
+        <a:font script="Mong" typeface="Mongolian Baiti"/>
+        <a:font script="Viet" typeface="Arial"/>
+        <a:font script="Uigh" typeface="Microsoft Uighur"/>
+        <a:font script="Geor" typeface="Sylfaen"/>
+        <a:font script="Armn" typeface="Arial"/>
+        <a:font script="Bugi" typeface="Leelawadee UI"/>
+        <a:font script="Bopo" typeface="Microsoft JhengHei"/>
+        <a:font script="Java" typeface="Javanese Text"/>
+        <a:font script="Lisu" typeface="Segoe UI"/>
+        <a:font script="Mymr" typeface="Myanmar Text"/>
+        <a:font script="Nkoo" typeface="Ebrima"/>
+        <a:font script="Olck" typeface="Nirmala UI"/>
+        <a:font script="Osma" typeface="Ebrima"/>
+        <a:font script="Phag" typeface="Phagspa"/>
+        <a:font script="Syrn" typeface="Estrangelo Edessa"/>
+        <a:font script="Syrj" typeface="Estrangelo Edessa"/>
+        <a:font script="Syre" typeface="Estrangelo Edessa"/>
+        <a:font script="Sora" typeface="Nirmala UI"/>
+        <a:font script="Tale" typeface="Microsoft Tai Le"/>
+        <a:font script="Talu" typeface="Microsoft New Tai Lue"/>
+        <a:font script="Tfng" typeface="Ebrima"/>
+      </a:minorFont>
+    </a:fontScheme>
+    <a:fmtScheme name="Office">
+      <a:fillStyleLst>
+        <a:solidFill>
+          <a:schemeClr val="phClr"/>
+        </a:solidFill>
+        <a:gradFill rotWithShape="1">
+          <a:gsLst>
+            <a:gs pos="0">
+              <a:schemeClr val="phClr">
+                <a:lumMod val="110000"/>
+                <a:satMod val="105000"/>
+                <a:tint val="67000"/>
+              </a:schemeClr>
+            </a:gs>
+            <a:gs pos="50000">
+              <a:schemeClr val="phClr">
+                <a:lumMod val="105000"/>
+                <a:satMod val="103000"/>
+                <a:tint val="73000"/>
+              </a:schemeClr>
+            </a:gs>
+            <a:gs pos="100000">
+              <a:schemeClr val="phClr">
+                <a:lumMod val="105000"/>
+                <a:satMod val="109000"/>
+                <a:tint val="81000"/>
+              </a:schemeClr>
+            </a:gs>
+          </a:gsLst>
+          <a:lin ang="5400000" scaled="0"/>
+        </a:gradFill>
+        <a:gradFill rotWithShape="1">
+          <a:gsLst>
+            <a:gs pos="0">
+              <a:schemeClr val="phClr">
+                <a:satMod val="103000"/>
+                <a:lumMod val="102000"/>
+                <a:tint val="94000"/>
+              </a:schemeClr>
+            </a:gs>
+            <a:gs pos="50000">
+              <a:schemeClr val="phClr">
+                <a:satMod val="110000"/>
+                <a:lumMod val="100000"/>
+                <a:shade val="100000"/>
+              </a:schemeClr>
+            </a:gs>
+            <a:gs pos="100000">
+              <a:schemeClr val="phClr">
+                <a:lumMod val="99000"/>
+                <a:satMod val="120000"/>
+                <a:shade val="78000"/>
+              </a:schemeClr>
+            </a:gs>
+          </a:gsLst>
+          <a:lin ang="5400000" scaled="0"/>
+        </a:gradFill>
+      </a:fillStyleLst>
+      <a:lnStyleLst>
+        <a:ln w="6350" cap="flat" cmpd="sng" algn="ctr">
+          <a:solidFill>
+            <a:schemeClr val="phClr"/>
+          </a:solidFill>
+          <a:prstDash val="solid"/>
+          <a:miter lim="800000"/>
+        </a:ln>
+        <a:ln w="12700" cap="flat" cmpd="sng" algn="ctr">
+          <a:solidFill>
+            <a:schemeClr val="phClr"/>
+          </a:solidFill>
+          <a:prstDash val="solid"/>
+          <a:miter lim="800000"/>
+        </a:ln>
+        <a:ln w="19050" cap="flat" cmpd="sng" algn="ctr">
+          <a:solidFill>
+            <a:schemeClr val="phClr"/>
+          </a:solidFill>
+          <a:prstDash val="solid"/>
+          <a:miter lim="800000"/>
+        </a:ln>
+      </a:lnStyleLst>
+      <a:effectStyleLst>
+        <a:effectStyle>
+          <a:effectLst/>
+        </a:effectStyle>
+        <a:effectStyle>
+          <a:effectLst/>
+        </a:effectStyle>
+        <a:effectStyle>
+          <a:effectLst>
+            <a:outerShdw blurRad="57150" dist="19050" dir="5400000" algn="ctr" rotWithShape="0">
+              <a:srgbClr val="000000">
+                <a:alpha val="63000"/>
+              </a:srgbClr>
+            </a:outerShdw>
+          </a:effectLst>
+        </a:effectStyle>
+      </a:effectStyleLst>
+      <a:bgFillStyleLst>
+        <a:solidFill>
+          <a:schemeClr val="phClr"/>
+        </a:solidFill>
+        <a:solidFill>
+          <a:schemeClr val="phClr">
+            <a:tint val="95000"/>
+            <a:satMod val="170000"/>
+          </a:schemeClr>
+        </a:solidFill>
+        <a:gradFill rotWithShape="1">
+          <a:gsLst>
+            <a:gs pos="0">
+              <a:schemeClr val="phClr">
+                <a:tint val="93000"/>
+                <a:satMod val="150000"/>
+                <a:shade val="98000"/>
+                <a:lumMod val="102000"/>
+              </a:schemeClr>
+            </a:gs>
+            <a:gs pos="50000">
+              <a:schemeClr val="phClr">
+                <a:tint val="98000"/>
+                <a:satMod val="130000"/>
+                <a:shade val="90000"/>
+                <a:lumMod val="103000"/>
+              </a:schemeClr>
+            </a:gs>
+            <a:gs pos="100000">
+              <a:schemeClr val="phClr">
+                <a:shade val="63000"/>
+                <a:satMod val="120000"/>
+              </a:schemeClr>
+            </a:gs>
+          </a:gsLst>
+          <a:lin ang="5400000" scaled="0"/>
+        </a:gradFill>
+      </a:bgFillStyleLst>
+    </a:fmtScheme>
+  </a:themeElements>
+  <a:objectDefaults/>
+  <a:extraClrSchemeLst/>
+  <a:extLst>
+    <a:ext uri="{05A4C25C-085E-4340-85A3-A5531E510DB2}">
+      <thm15:themeFamily xmlns:thm15="http://schemas.microsoft.com/office/thememl/2012/main" name="Office Theme" id="{62F939B6-93AF-4DB8-9C6B-D6C7DFDC589F}" vid="{4A3C46E8-61CC-4603-A589-7422A47A8E4A}"/>
+    </a:ext>
+  </a:extLst>
+</a:theme>
 </file>
--- a/校园外卖两段式配送系统_答辩汇报.pptx
+++ b/校园外卖两段式配送系统_答辩汇报.pptx
@@ -5,55 +5,55 @@
     <p:sldMasterId id="2147483648" r:id="rId1"/>
   </p:sldMasterIdLst>
   <p:sldIdLst>
-    <p:sldId id="256" r:id="rId7"/>
-    <p:sldId id="257" r:id="rId8"/>
-    <p:sldId id="258" r:id="rId9"/>
-    <p:sldId id="259" r:id="rId10"/>
-    <p:sldId id="260" r:id="rId11"/>
-    <p:sldId id="261" r:id="rId12"/>
-    <p:sldId id="262" r:id="rId13"/>
-    <p:sldId id="263" r:id="rId14"/>
-    <p:sldId id="264" r:id="rId15"/>
-    <p:sldId id="265" r:id="rId16"/>
-    <p:sldId id="266" r:id="rId17"/>
-    <p:sldId id="267" r:id="rId18"/>
-    <p:sldId id="268" r:id="rId19"/>
-    <p:sldId id="269" r:id="rId20"/>
-    <p:sldId id="270" r:id="rId21"/>
-    <p:sldId id="271" r:id="rId22"/>
-    <p:sldId id="272" r:id="rId23"/>
-    <p:sldId id="273" r:id="rId24"/>
-    <p:sldId id="274" r:id="rId25"/>
-    <p:sldId id="275" r:id="rId26"/>
-    <p:sldId id="276" r:id="rId27"/>
-    <p:sldId id="277" r:id="rId28"/>
-    <p:sldId id="278" r:id="rId29"/>
-    <p:sldId id="279" r:id="rId30"/>
-    <p:sldId id="280" r:id="rId31"/>
-    <p:sldId id="281" r:id="rId32"/>
-    <p:sldId id="282" r:id="rId33"/>
-    <p:sldId id="283" r:id="rId34"/>
-    <p:sldId id="284" r:id="rId35"/>
-    <p:sldId id="285" r:id="rId36"/>
-    <p:sldId id="286" r:id="rId37"/>
-    <p:sldId id="287" r:id="rId38"/>
-    <p:sldId id="288" r:id="rId39"/>
-    <p:sldId id="289" r:id="rId40"/>
-    <p:sldId id="290" r:id="rId41"/>
-    <p:sldId id="291" r:id="rId42"/>
-    <p:sldId id="292" r:id="rId43"/>
-    <p:sldId id="293" r:id="rId44"/>
-    <p:sldId id="294" r:id="rId45"/>
-    <p:sldId id="295" r:id="rId46"/>
-    <p:sldId id="296" r:id="rId47"/>
-    <p:sldId id="297" r:id="rId48"/>
-    <p:sldId id="298" r:id="rId49"/>
-    <p:sldId id="299" r:id="rId50"/>
-    <p:sldId id="300" r:id="rId51"/>
-    <p:sldId id="301" r:id="rId52"/>
-    <p:sldId id="302" r:id="rId53"/>
+    <p:sldId id="256" r:id="rId2"/>
+    <p:sldId id="257" r:id="rId3"/>
+    <p:sldId id="258" r:id="rId4"/>
+    <p:sldId id="259" r:id="rId5"/>
+    <p:sldId id="260" r:id="rId6"/>
+    <p:sldId id="261" r:id="rId7"/>
+    <p:sldId id="262" r:id="rId8"/>
+    <p:sldId id="263" r:id="rId9"/>
+    <p:sldId id="264" r:id="rId10"/>
+    <p:sldId id="265" r:id="rId11"/>
+    <p:sldId id="266" r:id="rId12"/>
+    <p:sldId id="267" r:id="rId13"/>
+    <p:sldId id="268" r:id="rId14"/>
+    <p:sldId id="269" r:id="rId15"/>
+    <p:sldId id="270" r:id="rId16"/>
+    <p:sldId id="271" r:id="rId17"/>
+    <p:sldId id="272" r:id="rId18"/>
+    <p:sldId id="273" r:id="rId19"/>
+    <p:sldId id="274" r:id="rId20"/>
+    <p:sldId id="275" r:id="rId21"/>
+    <p:sldId id="276" r:id="rId22"/>
+    <p:sldId id="277" r:id="rId23"/>
+    <p:sldId id="278" r:id="rId24"/>
+    <p:sldId id="279" r:id="rId25"/>
+    <p:sldId id="280" r:id="rId26"/>
+    <p:sldId id="281" r:id="rId27"/>
+    <p:sldId id="282" r:id="rId28"/>
+    <p:sldId id="283" r:id="rId29"/>
+    <p:sldId id="284" r:id="rId30"/>
+    <p:sldId id="285" r:id="rId31"/>
+    <p:sldId id="286" r:id="rId32"/>
+    <p:sldId id="287" r:id="rId33"/>
+    <p:sldId id="288" r:id="rId34"/>
+    <p:sldId id="289" r:id="rId35"/>
+    <p:sldId id="290" r:id="rId36"/>
+    <p:sldId id="291" r:id="rId37"/>
+    <p:sldId id="292" r:id="rId38"/>
+    <p:sldId id="293" r:id="rId39"/>
+    <p:sldId id="294" r:id="rId40"/>
+    <p:sldId id="295" r:id="rId41"/>
+    <p:sldId id="296" r:id="rId42"/>
+    <p:sldId id="297" r:id="rId43"/>
+    <p:sldId id="298" r:id="rId44"/>
+    <p:sldId id="299" r:id="rId45"/>
+    <p:sldId id="300" r:id="rId46"/>
+    <p:sldId id="301" r:id="rId47"/>
+    <p:sldId id="302" r:id="rId48"/>
   </p:sldIdLst>
-  <p:sldSz cx="12191695" cy="6858000" type="screen4x3"/>
+  <p:sldSz cx="12192000" cy="6858000"/>
   <p:notesSz cx="6858000" cy="9144000"/>
   <p:defaultTextStyle>
     <a:defPPr>
@@ -150,6 +150,22 @@
       </a:defRPr>
     </a:lvl9pPr>
   </p:defaultTextStyle>
+  <p:extLst>
+    <p:ext uri="{EFAFB233-063F-42B5-8137-9DF3F51BA10A}">
+      <p15:sldGuideLst xmlns:p15="http://schemas.microsoft.com/office/powerpoint/2012/main">
+        <p15:guide id="1" orient="horz" pos="2160">
+          <p15:clr>
+            <a:srgbClr val="A4A3A4"/>
+          </p15:clr>
+        </p15:guide>
+        <p15:guide id="2" pos="2880">
+          <p15:clr>
+            <a:srgbClr val="A4A3A4"/>
+          </p15:clr>
+        </p15:guide>
+      </p15:sldGuideLst>
+    </p:ext>
+  </p:extLst>
 </p:presentation>
 </file>
 
@@ -191,10 +207,9 @@
           <a:lstStyle/>
           <a:p>
             <a:r>
-              <a:rPr lang="en-US" smtClean="0"/>
+              <a:rPr lang="en-US"/>
               <a:t>Click to edit Master title style</a:t>
             </a:r>
-            <a:endParaRPr lang="en-US"/>
           </a:p>
         </p:txBody>
       </p:sp>
@@ -310,10 +325,9 @@
           </a:lstStyle>
           <a:p>
             <a:r>
-              <a:rPr lang="en-US" smtClean="0"/>
+              <a:rPr lang="en-US"/>
               <a:t>Click to edit Master subtitle style</a:t>
             </a:r>
-            <a:endParaRPr lang="en-US"/>
           </a:p>
         </p:txBody>
       </p:sp>
@@ -334,7 +348,7 @@
           <a:p>
             <a:fld id="{5BCAD085-E8A6-8845-BD4E-CB4CCA059FC4}" type="datetimeFigureOut">
               <a:rPr lang="en-US" smtClean="0"/>
-              <a:t>1/27/13</a:t>
+              <a:t>6/2/2026</a:t>
             </a:fld>
             <a:endParaRPr lang="en-US"/>
           </a:p>
@@ -428,10 +442,9 @@
           <a:lstStyle/>
           <a:p>
             <a:r>
-              <a:rPr lang="en-US" smtClean="0"/>
+              <a:rPr lang="en-US"/>
               <a:t>Click to edit Master title style</a:t>
             </a:r>
-            <a:endParaRPr lang="en-US"/>
           </a:p>
         </p:txBody>
       </p:sp>
@@ -452,38 +465,37 @@
           <a:p>
             <a:pPr lvl="0"/>
             <a:r>
-              <a:rPr lang="en-US" smtClean="0"/>
+              <a:rPr lang="en-US"/>
               <a:t>Click to edit Master text styles</a:t>
             </a:r>
           </a:p>
           <a:p>
             <a:pPr lvl="1"/>
             <a:r>
-              <a:rPr lang="en-US" smtClean="0"/>
+              <a:rPr lang="en-US"/>
               <a:t>Second level</a:t>
             </a:r>
           </a:p>
           <a:p>
             <a:pPr lvl="2"/>
             <a:r>
-              <a:rPr lang="en-US" smtClean="0"/>
+              <a:rPr lang="en-US"/>
               <a:t>Third level</a:t>
             </a:r>
           </a:p>
           <a:p>
             <a:pPr lvl="3"/>
             <a:r>
-              <a:rPr lang="en-US" smtClean="0"/>
+              <a:rPr lang="en-US"/>
               <a:t>Fourth level</a:t>
             </a:r>
           </a:p>
           <a:p>
             <a:pPr lvl="4"/>
             <a:r>
-              <a:rPr lang="en-US" smtClean="0"/>
+              <a:rPr lang="en-US"/>
               <a:t>Fifth level</a:t>
             </a:r>
-            <a:endParaRPr lang="en-US"/>
           </a:p>
         </p:txBody>
       </p:sp>
@@ -504,7 +516,7 @@
           <a:p>
             <a:fld id="{5BCAD085-E8A6-8845-BD4E-CB4CCA059FC4}" type="datetimeFigureOut">
               <a:rPr lang="en-US" smtClean="0"/>
-              <a:t>1/27/13</a:t>
+              <a:t>6/2/2026</a:t>
             </a:fld>
             <a:endParaRPr lang="en-US"/>
           </a:p>
@@ -603,10 +615,9 @@
           <a:lstStyle/>
           <a:p>
             <a:r>
-              <a:rPr lang="en-US" smtClean="0"/>
+              <a:rPr lang="en-US"/>
               <a:t>Click to edit Master title style</a:t>
             </a:r>
-            <a:endParaRPr lang="en-US"/>
           </a:p>
         </p:txBody>
       </p:sp>
@@ -632,38 +643,37 @@
           <a:p>
             <a:pPr lvl="0"/>
             <a:r>
-              <a:rPr lang="en-US" smtClean="0"/>
+              <a:rPr lang="en-US"/>
               <a:t>Click to edit Master text styles</a:t>
             </a:r>
           </a:p>
           <a:p>
             <a:pPr lvl="1"/>
             <a:r>
-              <a:rPr lang="en-US" smtClean="0"/>
+              <a:rPr lang="en-US"/>
               <a:t>Second level</a:t>
             </a:r>
           </a:p>
           <a:p>
             <a:pPr lvl="2"/>
             <a:r>
-              <a:rPr lang="en-US" smtClean="0"/>
+              <a:rPr lang="en-US"/>
               <a:t>Third level</a:t>
             </a:r>
           </a:p>
           <a:p>
             <a:pPr lvl="3"/>
             <a:r>
-              <a:rPr lang="en-US" smtClean="0"/>
+              <a:rPr lang="en-US"/>
               <a:t>Fourth level</a:t>
             </a:r>
           </a:p>
           <a:p>
             <a:pPr lvl="4"/>
             <a:r>
-              <a:rPr lang="en-US" smtClean="0"/>
+              <a:rPr lang="en-US"/>
               <a:t>Fifth level</a:t>
             </a:r>
-            <a:endParaRPr lang="en-US"/>
           </a:p>
         </p:txBody>
       </p:sp>
@@ -684,7 +694,7 @@
           <a:p>
             <a:fld id="{5BCAD085-E8A6-8845-BD4E-CB4CCA059FC4}" type="datetimeFigureOut">
               <a:rPr lang="en-US" smtClean="0"/>
-              <a:t>1/27/13</a:t>
+              <a:t>6/2/2026</a:t>
             </a:fld>
             <a:endParaRPr lang="en-US"/>
           </a:p>
@@ -778,10 +788,9 @@
           <a:lstStyle/>
           <a:p>
             <a:r>
-              <a:rPr lang="en-US" smtClean="0"/>
+              <a:rPr lang="en-US"/>
               <a:t>Click to edit Master title style</a:t>
             </a:r>
-            <a:endParaRPr lang="en-US"/>
           </a:p>
         </p:txBody>
       </p:sp>
@@ -802,38 +811,37 @@
           <a:p>
             <a:pPr lvl="0"/>
             <a:r>
-              <a:rPr lang="en-US" smtClean="0"/>
+              <a:rPr lang="en-US"/>
               <a:t>Click to edit Master text styles</a:t>
             </a:r>
           </a:p>
           <a:p>
             <a:pPr lvl="1"/>
             <a:r>
-              <a:rPr lang="en-US" smtClean="0"/>
+              <a:rPr lang="en-US"/>
               <a:t>Second level</a:t>
             </a:r>
           </a:p>
           <a:p>
             <a:pPr lvl="2"/>
             <a:r>
-              <a:rPr lang="en-US" smtClean="0"/>
+              <a:rPr lang="en-US"/>
               <a:t>Third level</a:t>
             </a:r>
           </a:p>
           <a:p>
             <a:pPr lvl="3"/>
             <a:r>
-              <a:rPr lang="en-US" smtClean="0"/>
+              <a:rPr lang="en-US"/>
               <a:t>Fourth level</a:t>
             </a:r>
           </a:p>
           <a:p>
             <a:pPr lvl="4"/>
             <a:r>
-              <a:rPr lang="en-US" smtClean="0"/>
+              <a:rPr lang="en-US"/>
               <a:t>Fifth level</a:t>
             </a:r>
-            <a:endParaRPr lang="en-US"/>
           </a:p>
         </p:txBody>
       </p:sp>
@@ -854,7 +862,7 @@
           <a:p>
             <a:fld id="{5BCAD085-E8A6-8845-BD4E-CB4CCA059FC4}" type="datetimeFigureOut">
               <a:rPr lang="en-US" smtClean="0"/>
-              <a:t>1/27/13</a:t>
+              <a:t>6/2/2026</a:t>
             </a:fld>
             <a:endParaRPr lang="en-US"/>
           </a:p>
@@ -957,10 +965,9 @@
           </a:lstStyle>
           <a:p>
             <a:r>
-              <a:rPr lang="en-US" smtClean="0"/>
+              <a:rPr lang="en-US"/>
               <a:t>Click to edit Master title style</a:t>
             </a:r>
-            <a:endParaRPr lang="en-US"/>
           </a:p>
         </p:txBody>
       </p:sp>
@@ -1077,7 +1084,7 @@
           <a:p>
             <a:pPr lvl="0"/>
             <a:r>
-              <a:rPr lang="en-US" smtClean="0"/>
+              <a:rPr lang="en-US"/>
               <a:t>Click to edit Master text styles</a:t>
             </a:r>
           </a:p>
@@ -1100,7 +1107,7 @@
           <a:p>
             <a:fld id="{5BCAD085-E8A6-8845-BD4E-CB4CCA059FC4}" type="datetimeFigureOut">
               <a:rPr lang="en-US" smtClean="0"/>
-              <a:t>1/27/13</a:t>
+              <a:t>6/2/2026</a:t>
             </a:fld>
             <a:endParaRPr lang="en-US"/>
           </a:p>
@@ -1194,10 +1201,9 @@
           <a:lstStyle/>
           <a:p>
             <a:r>
-              <a:rPr lang="en-US" smtClean="0"/>
+              <a:rPr lang="en-US"/>
               <a:t>Click to edit Master title style</a:t>
             </a:r>
-            <a:endParaRPr lang="en-US"/>
           </a:p>
         </p:txBody>
       </p:sp>
@@ -1251,38 +1257,37 @@
           <a:p>
             <a:pPr lvl="0"/>
             <a:r>
-              <a:rPr lang="en-US" smtClean="0"/>
+              <a:rPr lang="en-US"/>
               <a:t>Click to edit Master text styles</a:t>
             </a:r>
           </a:p>
           <a:p>
             <a:pPr lvl="1"/>
             <a:r>
-              <a:rPr lang="en-US" smtClean="0"/>
+              <a:rPr lang="en-US"/>
               <a:t>Second level</a:t>
             </a:r>
           </a:p>
           <a:p>
             <a:pPr lvl="2"/>
             <a:r>
-              <a:rPr lang="en-US" smtClean="0"/>
+              <a:rPr lang="en-US"/>
               <a:t>Third level</a:t>
             </a:r>
           </a:p>
           <a:p>
             <a:pPr lvl="3"/>
             <a:r>
-              <a:rPr lang="en-US" smtClean="0"/>
+              <a:rPr lang="en-US"/>
               <a:t>Fourth level</a:t>
             </a:r>
           </a:p>
           <a:p>
             <a:pPr lvl="4"/>
             <a:r>
-              <a:rPr lang="en-US" smtClean="0"/>
+              <a:rPr lang="en-US"/>
               <a:t>Fifth level</a:t>
             </a:r>
-            <a:endParaRPr lang="en-US"/>
           </a:p>
         </p:txBody>
       </p:sp>
@@ -1336,38 +1341,37 @@
           <a:p>
             <a:pPr lvl="0"/>
             <a:r>
-              <a:rPr lang="en-US" smtClean="0"/>
+              <a:rPr lang="en-US"/>
               <a:t>Click to edit Master text styles</a:t>
             </a:r>
           </a:p>
           <a:p>
             <a:pPr lvl="1"/>
             <a:r>
-              <a:rPr lang="en-US" smtClean="0"/>
+              <a:rPr lang="en-US"/>
               <a:t>Second level</a:t>
             </a:r>
           </a:p>
           <a:p>
             <a:pPr lvl="2"/>
             <a:r>
-              <a:rPr lang="en-US" smtClean="0"/>
+              <a:rPr lang="en-US"/>
               <a:t>Third level</a:t>
             </a:r>
           </a:p>
           <a:p>
             <a:pPr lvl="3"/>
             <a:r>
-              <a:rPr lang="en-US" smtClean="0"/>
+              <a:rPr lang="en-US"/>
               <a:t>Fourth level</a:t>
             </a:r>
           </a:p>
           <a:p>
             <a:pPr lvl="4"/>
             <a:r>
-              <a:rPr lang="en-US" smtClean="0"/>
+              <a:rPr lang="en-US"/>
               <a:t>Fifth level</a:t>
             </a:r>
-            <a:endParaRPr lang="en-US"/>
           </a:p>
         </p:txBody>
       </p:sp>
@@ -1388,7 +1392,7 @@
           <a:p>
             <a:fld id="{5BCAD085-E8A6-8845-BD4E-CB4CCA059FC4}" type="datetimeFigureOut">
               <a:rPr lang="en-US" smtClean="0"/>
-              <a:t>1/27/13</a:t>
+              <a:t>6/2/2026</a:t>
             </a:fld>
             <a:endParaRPr lang="en-US"/>
           </a:p>
@@ -1486,10 +1490,9 @@
           </a:lstStyle>
           <a:p>
             <a:r>
-              <a:rPr lang="en-US" smtClean="0"/>
+              <a:rPr lang="en-US"/>
               <a:t>Click to edit Master title style</a:t>
             </a:r>
-            <a:endParaRPr lang="en-US"/>
           </a:p>
         </p:txBody>
       </p:sp>
@@ -1552,7 +1555,7 @@
           <a:p>
             <a:pPr lvl="0"/>
             <a:r>
-              <a:rPr lang="en-US" smtClean="0"/>
+              <a:rPr lang="en-US"/>
               <a:t>Click to edit Master text styles</a:t>
             </a:r>
           </a:p>
@@ -1608,38 +1611,37 @@
           <a:p>
             <a:pPr lvl="0"/>
             <a:r>
-              <a:rPr lang="en-US" smtClean="0"/>
+              <a:rPr lang="en-US"/>
               <a:t>Click to edit Master text styles</a:t>
             </a:r>
           </a:p>
           <a:p>
             <a:pPr lvl="1"/>
             <a:r>
-              <a:rPr lang="en-US" smtClean="0"/>
+              <a:rPr lang="en-US"/>
               <a:t>Second level</a:t>
             </a:r>
           </a:p>
           <a:p>
             <a:pPr lvl="2"/>
             <a:r>
-              <a:rPr lang="en-US" smtClean="0"/>
+              <a:rPr lang="en-US"/>
               <a:t>Third level</a:t>
             </a:r>
           </a:p>
           <a:p>
             <a:pPr lvl="3"/>
             <a:r>
-              <a:rPr lang="en-US" smtClean="0"/>
+              <a:rPr lang="en-US"/>
               <a:t>Fourth level</a:t>
             </a:r>
           </a:p>
           <a:p>
             <a:pPr lvl="4"/>
             <a:r>
-              <a:rPr lang="en-US" smtClean="0"/>
+              <a:rPr lang="en-US"/>
               <a:t>Fifth level</a:t>
             </a:r>
-            <a:endParaRPr lang="en-US"/>
           </a:p>
         </p:txBody>
       </p:sp>
@@ -1702,7 +1704,7 @@
           <a:p>
             <a:pPr lvl="0"/>
             <a:r>
-              <a:rPr lang="en-US" smtClean="0"/>
+              <a:rPr lang="en-US"/>
               <a:t>Click to edit Master text styles</a:t>
             </a:r>
           </a:p>
@@ -1758,38 +1760,37 @@
           <a:p>
             <a:pPr lvl="0"/>
             <a:r>
-              <a:rPr lang="en-US" smtClean="0"/>
+              <a:rPr lang="en-US"/>
               <a:t>Click to edit Master text styles</a:t>
             </a:r>
           </a:p>
           <a:p>
             <a:pPr lvl="1"/>
             <a:r>
-              <a:rPr lang="en-US" smtClean="0"/>
+              <a:rPr lang="en-US"/>
               <a:t>Second level</a:t>
             </a:r>
           </a:p>
           <a:p>
             <a:pPr lvl="2"/>
             <a:r>
-              <a:rPr lang="en-US" smtClean="0"/>
+              <a:rPr lang="en-US"/>
               <a:t>Third level</a:t>
             </a:r>
           </a:p>
           <a:p>
             <a:pPr lvl="3"/>
             <a:r>
-              <a:rPr lang="en-US" smtClean="0"/>
+              <a:rPr lang="en-US"/>
               <a:t>Fourth level</a:t>
             </a:r>
           </a:p>
           <a:p>
             <a:pPr lvl="4"/>
             <a:r>
-              <a:rPr lang="en-US" smtClean="0"/>
+              <a:rPr lang="en-US"/>
               <a:t>Fifth level</a:t>
             </a:r>
-            <a:endParaRPr lang="en-US"/>
           </a:p>
         </p:txBody>
       </p:sp>
@@ -1810,7 +1811,7 @@
           <a:p>
             <a:fld id="{5BCAD085-E8A6-8845-BD4E-CB4CCA059FC4}" type="datetimeFigureOut">
               <a:rPr lang="en-US" smtClean="0"/>
-              <a:t>1/27/13</a:t>
+              <a:t>6/2/2026</a:t>
             </a:fld>
             <a:endParaRPr lang="en-US"/>
           </a:p>
@@ -1904,10 +1905,9 @@
           <a:lstStyle/>
           <a:p>
             <a:r>
-              <a:rPr lang="en-US" smtClean="0"/>
+              <a:rPr lang="en-US"/>
               <a:t>Click to edit Master title style</a:t>
             </a:r>
-            <a:endParaRPr lang="en-US"/>
           </a:p>
         </p:txBody>
       </p:sp>
@@ -1928,7 +1928,7 @@
           <a:p>
             <a:fld id="{5BCAD085-E8A6-8845-BD4E-CB4CCA059FC4}" type="datetimeFigureOut">
               <a:rPr lang="en-US" smtClean="0"/>
-              <a:t>1/27/13</a:t>
+              <a:t>6/2/2026</a:t>
             </a:fld>
             <a:endParaRPr lang="en-US"/>
           </a:p>
@@ -2023,7 +2023,7 @@
           <a:p>
             <a:fld id="{5BCAD085-E8A6-8845-BD4E-CB4CCA059FC4}" type="datetimeFigureOut">
               <a:rPr lang="en-US" smtClean="0"/>
-              <a:t>1/27/13</a:t>
+              <a:t>6/2/2026</a:t>
             </a:fld>
             <a:endParaRPr lang="en-US"/>
           </a:p>
@@ -2126,10 +2126,9 @@
           </a:lstStyle>
           <a:p>
             <a:r>
-              <a:rPr lang="en-US" smtClean="0"/>
+              <a:rPr lang="en-US"/>
               <a:t>Click to edit Master title style</a:t>
             </a:r>
-            <a:endParaRPr lang="en-US"/>
           </a:p>
         </p:txBody>
       </p:sp>
@@ -2183,38 +2182,37 @@
           <a:p>
             <a:pPr lvl="0"/>
             <a:r>
-              <a:rPr lang="en-US" smtClean="0"/>
+              <a:rPr lang="en-US"/>
               <a:t>Click to edit Master text styles</a:t>
             </a:r>
           </a:p>
           <a:p>
             <a:pPr lvl="1"/>
             <a:r>
-              <a:rPr lang="en-US" smtClean="0"/>
+              <a:rPr lang="en-US"/>
               <a:t>Second level</a:t>
             </a:r>
           </a:p>
           <a:p>
             <a:pPr lvl="2"/>
             <a:r>
-              <a:rPr lang="en-US" smtClean="0"/>
+              <a:rPr lang="en-US"/>
               <a:t>Third level</a:t>
             </a:r>
           </a:p>
           <a:p>
             <a:pPr lvl="3"/>
             <a:r>
-              <a:rPr lang="en-US" smtClean="0"/>
+              <a:rPr lang="en-US"/>
               <a:t>Fourth level</a:t>
             </a:r>
           </a:p>
           <a:p>
             <a:pPr lvl="4"/>
             <a:r>
-              <a:rPr lang="en-US" smtClean="0"/>
+              <a:rPr lang="en-US"/>
               <a:t>Fifth level</a:t>
             </a:r>
-            <a:endParaRPr lang="en-US"/>
           </a:p>
         </p:txBody>
       </p:sp>
@@ -2277,7 +2275,7 @@
           <a:p>
             <a:pPr lvl="0"/>
             <a:r>
-              <a:rPr lang="en-US" smtClean="0"/>
+              <a:rPr lang="en-US"/>
               <a:t>Click to edit Master text styles</a:t>
             </a:r>
           </a:p>
@@ -2300,7 +2298,7 @@
           <a:p>
             <a:fld id="{5BCAD085-E8A6-8845-BD4E-CB4CCA059FC4}" type="datetimeFigureOut">
               <a:rPr lang="en-US" smtClean="0"/>
-              <a:t>1/27/13</a:t>
+              <a:t>6/2/2026</a:t>
             </a:fld>
             <a:endParaRPr lang="en-US"/>
           </a:p>
@@ -2403,10 +2401,9 @@
           </a:lstStyle>
           <a:p>
             <a:r>
-              <a:rPr lang="en-US" smtClean="0"/>
+              <a:rPr lang="en-US"/>
               <a:t>Click to edit Master title style</a:t>
             </a:r>
-            <a:endParaRPr lang="en-US"/>
           </a:p>
         </p:txBody>
       </p:sp>
@@ -2530,7 +2527,7 @@
           <a:p>
             <a:pPr lvl="0"/>
             <a:r>
-              <a:rPr lang="en-US" smtClean="0"/>
+              <a:rPr lang="en-US"/>
               <a:t>Click to edit Master text styles</a:t>
             </a:r>
           </a:p>
@@ -2553,7 +2550,7 @@
           <a:p>
             <a:fld id="{5BCAD085-E8A6-8845-BD4E-CB4CCA059FC4}" type="datetimeFigureOut">
               <a:rPr lang="en-US" smtClean="0"/>
-              <a:t>1/27/13</a:t>
+              <a:t>6/2/2026</a:t>
             </a:fld>
             <a:endParaRPr lang="en-US"/>
           </a:p>
@@ -2662,10 +2659,9 @@
           <a:lstStyle/>
           <a:p>
             <a:r>
-              <a:rPr lang="en-US" smtClean="0"/>
+              <a:rPr lang="en-US"/>
               <a:t>Click to edit Master title style</a:t>
             </a:r>
-            <a:endParaRPr lang="en-US"/>
           </a:p>
         </p:txBody>
       </p:sp>
@@ -2696,38 +2692,37 @@
           <a:p>
             <a:pPr lvl="0"/>
             <a:r>
-              <a:rPr lang="en-US" smtClean="0"/>
+              <a:rPr lang="en-US"/>
               <a:t>Click to edit Master text styles</a:t>
             </a:r>
           </a:p>
           <a:p>
             <a:pPr lvl="1"/>
             <a:r>
-              <a:rPr lang="en-US" smtClean="0"/>
+              <a:rPr lang="en-US"/>
               <a:t>Second level</a:t>
             </a:r>
           </a:p>
           <a:p>
             <a:pPr lvl="2"/>
             <a:r>
-              <a:rPr lang="en-US" smtClean="0"/>
+              <a:rPr lang="en-US"/>
               <a:t>Third level</a:t>
             </a:r>
           </a:p>
           <a:p>
             <a:pPr lvl="3"/>
             <a:r>
-              <a:rPr lang="en-US" smtClean="0"/>
+              <a:rPr lang="en-US"/>
               <a:t>Fourth level</a:t>
             </a:r>
           </a:p>
           <a:p>
             <a:pPr lvl="4"/>
             <a:r>
-              <a:rPr lang="en-US" smtClean="0"/>
+              <a:rPr lang="en-US"/>
               <a:t>Fifth level</a:t>
             </a:r>
-            <a:endParaRPr lang="en-US"/>
           </a:p>
         </p:txBody>
       </p:sp>
@@ -2766,7 +2761,7 @@
           <a:p>
             <a:fld id="{5BCAD085-E8A6-8845-BD4E-CB4CCA059FC4}" type="datetimeFigureOut">
               <a:rPr lang="en-US" smtClean="0"/>
-              <a:t>1/27/13</a:t>
+              <a:t>6/2/2026</a:t>
             </a:fld>
             <a:endParaRPr lang="en-US"/>
           </a:p>
@@ -3125,7 +3120,7 @@
 </file>
 
 <file path=ppt/slides/slide1.xml><?xml version="1.0" encoding="utf-8"?>
-<p:sld xmlns:a="http://schemas.openxmlformats.org/drawingml/2006/main" xmlns:p="http://schemas.openxmlformats.org/presentationml/2006/main" xmlns:r="http://schemas.openxmlformats.org/officeDocument/2006/relationships">
+<p:sld xmlns:a="http://schemas.openxmlformats.org/drawingml/2006/main" xmlns:r="http://schemas.openxmlformats.org/officeDocument/2006/relationships" xmlns:p="http://schemas.openxmlformats.org/presentationml/2006/main">
   <p:cSld>
     <p:spTree>
       <p:nvGrpSpPr>
@@ -3133,7 +3128,14 @@
         <p:cNvGrpSpPr/>
         <p:nvPr/>
       </p:nvGrpSpPr>
-      <p:grpSpPr/>
+      <p:grpSpPr>
+        <a:xfrm>
+          <a:off x="0" y="0"/>
+          <a:ext cx="0" cy="0"/>
+          <a:chOff x="0" y="0"/>
+          <a:chExt cx="0" cy="0"/>
+        </a:xfrm>
+      </p:grpSpPr>
       <p:sp>
         <p:nvSpPr>
           <p:cNvPr id="2" name="Rectangle 1"/>
@@ -3174,6 +3176,7 @@
           <a:lstStyle/>
           <a:p>
             <a:pPr algn="ctr"/>
+            <a:endParaRPr/>
           </a:p>
         </p:txBody>
       </p:sp>
@@ -3492,7 +3495,7 @@
 </file>
 
 <file path=ppt/slides/slide10.xml><?xml version="1.0" encoding="utf-8"?>
-<p:sld xmlns:a="http://schemas.openxmlformats.org/drawingml/2006/main" xmlns:p="http://schemas.openxmlformats.org/presentationml/2006/main" xmlns:r="http://schemas.openxmlformats.org/officeDocument/2006/relationships">
+<p:sld xmlns:a="http://schemas.openxmlformats.org/drawingml/2006/main" xmlns:r="http://schemas.openxmlformats.org/officeDocument/2006/relationships" xmlns:p="http://schemas.openxmlformats.org/presentationml/2006/main">
   <p:cSld>
     <p:spTree>
       <p:nvGrpSpPr>
@@ -3500,7 +3503,14 @@
         <p:cNvGrpSpPr/>
         <p:nvPr/>
       </p:nvGrpSpPr>
-      <p:grpSpPr/>
+      <p:grpSpPr>
+        <a:xfrm>
+          <a:off x="0" y="0"/>
+          <a:ext cx="0" cy="0"/>
+          <a:chOff x="0" y="0"/>
+          <a:chExt cx="0" cy="0"/>
+        </a:xfrm>
+      </p:grpSpPr>
       <p:sp>
         <p:nvSpPr>
           <p:cNvPr id="2" name="Rectangle 1"/>
@@ -3541,6 +3551,7 @@
           <a:lstStyle/>
           <a:p>
             <a:pPr algn="ctr"/>
+            <a:endParaRPr/>
           </a:p>
         </p:txBody>
       </p:sp>
@@ -3552,7 +3563,7 @@
         </p:nvSpPr>
         <p:spPr>
           <a:xfrm>
-            <a:off x="731520" y="164592"/>
+            <a:off x="731520" y="137160"/>
             <a:ext cx="10515600" cy="640080"/>
           </a:xfrm>
           <a:prstGeom prst="rect">
@@ -3632,8 +3643,8 @@
         </p:blipFill>
         <p:spPr>
           <a:xfrm>
-            <a:off x="274320" y="1097280"/>
-            <a:ext cx="11612880" cy="9083245"/>
+            <a:off x="2790454" y="1177695"/>
+            <a:ext cx="5917825" cy="4628745"/>
           </a:xfrm>
           <a:prstGeom prst="rect">
             <a:avLst/>
@@ -3688,7 +3699,7 @@
 </file>
 
 <file path=ppt/slides/slide11.xml><?xml version="1.0" encoding="utf-8"?>
-<p:sld xmlns:a="http://schemas.openxmlformats.org/drawingml/2006/main" xmlns:p="http://schemas.openxmlformats.org/presentationml/2006/main" xmlns:r="http://schemas.openxmlformats.org/officeDocument/2006/relationships">
+<p:sld xmlns:a="http://schemas.openxmlformats.org/drawingml/2006/main" xmlns:r="http://schemas.openxmlformats.org/officeDocument/2006/relationships" xmlns:p="http://schemas.openxmlformats.org/presentationml/2006/main">
   <p:cSld>
     <p:spTree>
       <p:nvGrpSpPr>
@@ -3696,7 +3707,14 @@
         <p:cNvGrpSpPr/>
         <p:nvPr/>
       </p:nvGrpSpPr>
-      <p:grpSpPr/>
+      <p:grpSpPr>
+        <a:xfrm>
+          <a:off x="0" y="0"/>
+          <a:ext cx="0" cy="0"/>
+          <a:chOff x="0" y="0"/>
+          <a:chExt cx="0" cy="0"/>
+        </a:xfrm>
+      </p:grpSpPr>
       <p:sp>
         <p:nvSpPr>
           <p:cNvPr id="2" name="Rectangle 1"/>
@@ -3737,6 +3755,7 @@
           <a:lstStyle/>
           <a:p>
             <a:pPr algn="ctr"/>
+            <a:endParaRPr/>
           </a:p>
         </p:txBody>
       </p:sp>
@@ -3822,7 +3841,7 @@
         </p:nvGraphicFramePr>
         <p:xfrm>
           <a:off x="274320" y="1188720"/>
-          <a:ext cx="10972800" cy="2779776"/>
+          <a:ext cx="10972800" cy="3218688"/>
         </p:xfrm>
         <a:graphic>
           <a:graphicData uri="http://schemas.openxmlformats.org/drawingml/2006/table">
@@ -3831,10 +3850,34 @@
                 <a:tableStyleId>{5C22544A-7EE6-4342-B048-85BDC9FD1C3A}</a:tableStyleId>
               </a:tblPr>
               <a:tblGrid>
-                <a:gridCol w="1645920"/>
-                <a:gridCol w="1097280"/>
-                <a:gridCol w="1828800"/>
-                <a:gridCol w="6400800"/>
+                <a:gridCol w="1645920">
+                  <a:extLst>
+                    <a:ext uri="{9D8B030D-6E8A-4147-A177-3AD203B41FA5}">
+                      <a16:colId xmlns:a16="http://schemas.microsoft.com/office/drawing/2014/main" val="20000"/>
+                    </a:ext>
+                  </a:extLst>
+                </a:gridCol>
+                <a:gridCol w="1097280">
+                  <a:extLst>
+                    <a:ext uri="{9D8B030D-6E8A-4147-A177-3AD203B41FA5}">
+                      <a16:colId xmlns:a16="http://schemas.microsoft.com/office/drawing/2014/main" val="20001"/>
+                    </a:ext>
+                  </a:extLst>
+                </a:gridCol>
+                <a:gridCol w="1828800">
+                  <a:extLst>
+                    <a:ext uri="{9D8B030D-6E8A-4147-A177-3AD203B41FA5}">
+                      <a16:colId xmlns:a16="http://schemas.microsoft.com/office/drawing/2014/main" val="20002"/>
+                    </a:ext>
+                  </a:extLst>
+                </a:gridCol>
+                <a:gridCol w="6400800">
+                  <a:extLst>
+                    <a:ext uri="{9D8B030D-6E8A-4147-A177-3AD203B41FA5}">
+                      <a16:colId xmlns:a16="http://schemas.microsoft.com/office/drawing/2014/main" val="20003"/>
+                    </a:ext>
+                  </a:extLst>
+                </a:gridCol>
               </a:tblGrid>
               <a:tr h="347472">
                 <a:tc>
@@ -3933,6 +3976,11 @@
                     </a:solidFill>
                   </a:tcPr>
                 </a:tc>
+                <a:extLst>
+                  <a:ext uri="{0D108BD9-81ED-4DB2-BD59-A6C34878D82A}">
+                    <a16:rowId xmlns:a16="http://schemas.microsoft.com/office/drawing/2014/main" val="10000"/>
+                  </a:ext>
+                </a:extLst>
               </a:tr>
               <a:tr h="347472">
                 <a:tc>
@@ -4031,6 +4079,11 @@
                     </a:solidFill>
                   </a:tcPr>
                 </a:tc>
+                <a:extLst>
+                  <a:ext uri="{0D108BD9-81ED-4DB2-BD59-A6C34878D82A}">
+                    <a16:rowId xmlns:a16="http://schemas.microsoft.com/office/drawing/2014/main" val="10001"/>
+                  </a:ext>
+                </a:extLst>
               </a:tr>
               <a:tr h="347472">
                 <a:tc>
@@ -4113,6 +4166,11 @@
                   </a:txBody>
                   <a:tcPr/>
                 </a:tc>
+                <a:extLst>
+                  <a:ext uri="{0D108BD9-81ED-4DB2-BD59-A6C34878D82A}">
+                    <a16:rowId xmlns:a16="http://schemas.microsoft.com/office/drawing/2014/main" val="10002"/>
+                  </a:ext>
+                </a:extLst>
               </a:tr>
               <a:tr h="347472">
                 <a:tc>
@@ -4211,6 +4269,11 @@
                     </a:solidFill>
                   </a:tcPr>
                 </a:tc>
+                <a:extLst>
+                  <a:ext uri="{0D108BD9-81ED-4DB2-BD59-A6C34878D82A}">
+                    <a16:rowId xmlns:a16="http://schemas.microsoft.com/office/drawing/2014/main" val="10003"/>
+                  </a:ext>
+                </a:extLst>
               </a:tr>
               <a:tr h="347472">
                 <a:tc>
@@ -4293,6 +4356,11 @@
                   </a:txBody>
                   <a:tcPr/>
                 </a:tc>
+                <a:extLst>
+                  <a:ext uri="{0D108BD9-81ED-4DB2-BD59-A6C34878D82A}">
+                    <a16:rowId xmlns:a16="http://schemas.microsoft.com/office/drawing/2014/main" val="10004"/>
+                  </a:ext>
+                </a:extLst>
               </a:tr>
               <a:tr h="347472">
                 <a:tc>
@@ -4391,6 +4459,11 @@
                     </a:solidFill>
                   </a:tcPr>
                 </a:tc>
+                <a:extLst>
+                  <a:ext uri="{0D108BD9-81ED-4DB2-BD59-A6C34878D82A}">
+                    <a16:rowId xmlns:a16="http://schemas.microsoft.com/office/drawing/2014/main" val="10005"/>
+                  </a:ext>
+                </a:extLst>
               </a:tr>
               <a:tr h="347472">
                 <a:tc>
@@ -4473,6 +4546,11 @@
                   </a:txBody>
                   <a:tcPr/>
                 </a:tc>
+                <a:extLst>
+                  <a:ext uri="{0D108BD9-81ED-4DB2-BD59-A6C34878D82A}">
+                    <a16:rowId xmlns:a16="http://schemas.microsoft.com/office/drawing/2014/main" val="10006"/>
+                  </a:ext>
+                </a:extLst>
               </a:tr>
               <a:tr h="347472">
                 <a:tc>
@@ -4571,6 +4649,11 @@
                     </a:solidFill>
                   </a:tcPr>
                 </a:tc>
+                <a:extLst>
+                  <a:ext uri="{0D108BD9-81ED-4DB2-BD59-A6C34878D82A}">
+                    <a16:rowId xmlns:a16="http://schemas.microsoft.com/office/drawing/2014/main" val="10007"/>
+                  </a:ext>
+                </a:extLst>
               </a:tr>
             </a:tbl>
           </a:graphicData>
@@ -4624,7 +4707,7 @@
 </file>
 
 <file path=ppt/slides/slide12.xml><?xml version="1.0" encoding="utf-8"?>
-<p:sld xmlns:a="http://schemas.openxmlformats.org/drawingml/2006/main" xmlns:p="http://schemas.openxmlformats.org/presentationml/2006/main" xmlns:r="http://schemas.openxmlformats.org/officeDocument/2006/relationships">
+<p:sld xmlns:a="http://schemas.openxmlformats.org/drawingml/2006/main" xmlns:r="http://schemas.openxmlformats.org/officeDocument/2006/relationships" xmlns:p="http://schemas.openxmlformats.org/presentationml/2006/main">
   <p:cSld>
     <p:spTree>
       <p:nvGrpSpPr>
@@ -4632,7 +4715,14 @@
         <p:cNvGrpSpPr/>
         <p:nvPr/>
       </p:nvGrpSpPr>
-      <p:grpSpPr/>
+      <p:grpSpPr>
+        <a:xfrm>
+          <a:off x="0" y="0"/>
+          <a:ext cx="0" cy="0"/>
+          <a:chOff x="0" y="0"/>
+          <a:chExt cx="0" cy="0"/>
+        </a:xfrm>
+      </p:grpSpPr>
       <p:sp>
         <p:nvSpPr>
           <p:cNvPr id="2" name="Rectangle 1"/>
@@ -4673,6 +4763,7 @@
           <a:lstStyle/>
           <a:p>
             <a:pPr algn="ctr"/>
+            <a:endParaRPr/>
           </a:p>
         </p:txBody>
       </p:sp>
@@ -4757,7 +4848,7 @@
         <p:spPr>
           <a:xfrm>
             <a:off x="457200" y="1280160"/>
-            <a:ext cx="5303520" cy="3200400"/>
+            <a:ext cx="5638800" cy="5120640"/>
           </a:xfrm>
           <a:prstGeom prst="rect">
             <a:avLst/>
@@ -4790,6 +4881,7 @@
           <a:lstStyle/>
           <a:p>
             <a:pPr algn="ctr"/>
+            <a:endParaRPr/>
           </a:p>
         </p:txBody>
       </p:sp>
@@ -4827,7 +4919,16 @@
               </a:defRPr>
             </a:pPr>
             <a:r>
-              <a:t>CREATE TABLE pickup_points (</a:t>
+              <a:rPr dirty="0"/>
+              <a:t>CREATE TABLE </a:t>
+            </a:r>
+            <a:r>
+              <a:rPr dirty="0" err="1"/>
+              <a:t>pickup_points</a:t>
+            </a:r>
+            <a:r>
+              <a:rPr dirty="0"/>
+              <a:t> (</a:t>
             </a:r>
           </a:p>
           <a:p>
@@ -4842,6 +4943,7 @@
                 <a:latin typeface="Consolas"/>
               </a:defRPr>
             </a:pPr>
+            <a:endParaRPr dirty="0"/>
           </a:p>
           <a:p>
             <a:pPr>
@@ -4856,7 +4958,16 @@
               </a:defRPr>
             </a:pPr>
             <a:r>
-              <a:t>  point_id    INT PRIMARY KEY AUTO_INCREMENT,</a:t>
+              <a:rPr dirty="0"/>
+              <a:t>  </a:t>
+            </a:r>
+            <a:r>
+              <a:rPr dirty="0" err="1"/>
+              <a:t>point_id</a:t>
+            </a:r>
+            <a:r>
+              <a:rPr dirty="0"/>
+              <a:t>    INT PRIMARY KEY AUTO_INCREMENT,</a:t>
             </a:r>
           </a:p>
           <a:p>
@@ -4872,7 +4983,16 @@
               </a:defRPr>
             </a:pPr>
             <a:r>
-              <a:t>  point_name  VARCHAR(50) NOT NULL,</a:t>
+              <a:rPr dirty="0"/>
+              <a:t>  </a:t>
+            </a:r>
+            <a:r>
+              <a:rPr dirty="0" err="1"/>
+              <a:t>point_name</a:t>
+            </a:r>
+            <a:r>
+              <a:rPr dirty="0"/>
+              <a:t>  VARCHAR(50) NOT NULL,</a:t>
             </a:r>
           </a:p>
           <a:p>
@@ -4888,6 +5008,7 @@
               </a:defRPr>
             </a:pPr>
             <a:r>
+              <a:rPr dirty="0"/>
               <a:t>  location    VARCHAR(200) NOT NULL,</a:t>
             </a:r>
           </a:p>
@@ -4903,6 +5024,7 @@
                 <a:latin typeface="Consolas"/>
               </a:defRPr>
             </a:pPr>
+            <a:endParaRPr dirty="0"/>
           </a:p>
           <a:p>
             <a:pPr>
@@ -4917,6 +5039,7 @@
               </a:defRPr>
             </a:pPr>
             <a:r>
+              <a:rPr dirty="0"/>
               <a:t>  capacity         INT NOT NULL,</a:t>
             </a:r>
           </a:p>
@@ -4933,7 +5056,16 @@
               </a:defRPr>
             </a:pPr>
             <a:r>
-              <a:t>  current_packages INT DEFAULT 0</a:t>
+              <a:rPr dirty="0"/>
+              <a:t>  </a:t>
+            </a:r>
+            <a:r>
+              <a:rPr dirty="0" err="1"/>
+              <a:t>current_packages</a:t>
+            </a:r>
+            <a:r>
+              <a:rPr dirty="0"/>
+              <a:t> INT DEFAULT 0</a:t>
             </a:r>
           </a:p>
           <a:p>
@@ -4949,7 +5081,16 @@
               </a:defRPr>
             </a:pPr>
             <a:r>
-              <a:t>    CHECK (current_packages &gt;= 0),</a:t>
+              <a:rPr dirty="0"/>
+              <a:t>    CHECK (</a:t>
+            </a:r>
+            <a:r>
+              <a:rPr dirty="0" err="1"/>
+              <a:t>current_packages</a:t>
+            </a:r>
+            <a:r>
+              <a:rPr dirty="0"/>
+              <a:t> &gt;= 0),</a:t>
             </a:r>
           </a:p>
           <a:p>
@@ -4964,6 +5105,7 @@
                 <a:latin typeface="Consolas"/>
               </a:defRPr>
             </a:pPr>
+            <a:endParaRPr dirty="0"/>
           </a:p>
           <a:p>
             <a:pPr>
@@ -4976,11 +5118,16 @@
                 </a:solidFill>
                 <a:latin typeface="Consolas"/>
               </a:defRPr>
-              <a:shd fill="FFF7E6"/>
-            </a:pPr>
-            <a:r>
-              <a:t>  -- ★ 核心约束：物理容积绝不可超</a:t>
-            </a:r>
+            </a:pPr>
+            <a:r>
+              <a:rPr dirty="0"/>
+              <a:t>  -- ★ </a:t>
+            </a:r>
+            <a:r>
+              <a:rPr dirty="0" err="1"/>
+              <a:t>核心约束：物理容积绝不可超</a:t>
+            </a:r>
+            <a:endParaRPr dirty="0"/>
           </a:p>
           <a:p>
             <a:pPr>
@@ -4993,11 +5140,16 @@
                 </a:solidFill>
                 <a:latin typeface="Consolas"/>
               </a:defRPr>
-              <a:shd fill="FFF7E6"/>
-            </a:pPr>
-            <a:r>
-              <a:t>  CONSTRAINT chk_capacity</a:t>
-            </a:r>
+            </a:pPr>
+            <a:r>
+              <a:rPr dirty="0"/>
+              <a:t>  CONSTRAINT </a:t>
+            </a:r>
+            <a:r>
+              <a:rPr dirty="0" err="1"/>
+              <a:t>chk_capacity</a:t>
+            </a:r>
+            <a:endParaRPr dirty="0"/>
           </a:p>
           <a:p>
             <a:pPr>
@@ -5012,7 +5164,16 @@
               </a:defRPr>
             </a:pPr>
             <a:r>
-              <a:t>    CHECK (current_packages &lt;= capacity)</a:t>
+              <a:rPr dirty="0"/>
+              <a:t>    CHECK (</a:t>
+            </a:r>
+            <a:r>
+              <a:rPr dirty="0" err="1"/>
+              <a:t>current_packages</a:t>
+            </a:r>
+            <a:r>
+              <a:rPr dirty="0"/>
+              <a:t> &lt;= capacity)</a:t>
             </a:r>
           </a:p>
           <a:p>
@@ -5027,6 +5188,7 @@
                 <a:latin typeface="Consolas"/>
               </a:defRPr>
             </a:pPr>
+            <a:endParaRPr dirty="0"/>
           </a:p>
           <a:p>
             <a:pPr>
@@ -5041,6 +5203,7 @@
               </a:defRPr>
             </a:pPr>
             <a:r>
+              <a:rPr dirty="0"/>
               <a:t>);</a:t>
             </a:r>
           </a:p>
@@ -5119,8 +5282,18 @@
               </a:defRPr>
             </a:pPr>
             <a:r>
-              <a:t>物理柜子只有 80 个格子</a:t>
-            </a:r>
+              <a:rPr dirty="0" err="1"/>
+              <a:t>物理柜子只有</a:t>
+            </a:r>
+            <a:r>
+              <a:rPr dirty="0"/>
+              <a:t> 80 </a:t>
+            </a:r>
+            <a:r>
+              <a:rPr dirty="0" err="1"/>
+              <a:t>个格子</a:t>
+            </a:r>
+            <a:endParaRPr dirty="0"/>
           </a:p>
           <a:p>
             <a:pPr>
@@ -5135,8 +5308,14 @@
               </a:defRPr>
             </a:pPr>
             <a:r>
-              <a:t>→ 第 81 个包裹物理上塞不进去</a:t>
-            </a:r>
+              <a:rPr dirty="0"/>
+              <a:t>→ 第 81 </a:t>
+            </a:r>
+            <a:r>
+              <a:rPr dirty="0" err="1"/>
+              <a:t>个包裹物理上塞不进去</a:t>
+            </a:r>
+            <a:endParaRPr dirty="0"/>
           </a:p>
           <a:p>
             <a:pPr>
@@ -5151,8 +5330,14 @@
               </a:defRPr>
             </a:pPr>
             <a:r>
-              <a:t>→ 数据库必须阻止写入</a:t>
-            </a:r>
+              <a:rPr dirty="0"/>
+              <a:t>→ </a:t>
+            </a:r>
+            <a:r>
+              <a:rPr dirty="0" err="1"/>
+              <a:t>数据库必须阻止写入</a:t>
+            </a:r>
+            <a:endParaRPr dirty="0"/>
           </a:p>
           <a:p>
             <a:pPr>
@@ -5166,6 +5351,7 @@
                 <a:latin typeface="微软雅黑"/>
               </a:defRPr>
             </a:pPr>
+            <a:endParaRPr dirty="0"/>
           </a:p>
           <a:p>
             <a:pPr>
@@ -5180,8 +5366,22 @@
               </a:defRPr>
             </a:pPr>
             <a:r>
-              <a:t>CHECK 约束在 MySQL 引擎层执行</a:t>
-            </a:r>
+              <a:rPr dirty="0"/>
+              <a:t>CHECK </a:t>
+            </a:r>
+            <a:r>
+              <a:rPr dirty="0" err="1"/>
+              <a:t>约束在</a:t>
+            </a:r>
+            <a:r>
+              <a:rPr dirty="0"/>
+              <a:t> MySQL </a:t>
+            </a:r>
+            <a:r>
+              <a:rPr dirty="0" err="1"/>
+              <a:t>引擎层执行</a:t>
+            </a:r>
+            <a:endParaRPr dirty="0"/>
           </a:p>
           <a:p>
             <a:pPr>
@@ -5196,8 +5396,22 @@
               </a:defRPr>
             </a:pPr>
             <a:r>
-              <a:t>→ 任何 UPDATE current_packages</a:t>
-            </a:r>
+              <a:rPr dirty="0"/>
+              <a:t>→ </a:t>
+            </a:r>
+            <a:r>
+              <a:rPr dirty="0" err="1"/>
+              <a:t>任何</a:t>
+            </a:r>
+            <a:r>
+              <a:rPr dirty="0"/>
+              <a:t> UPDATE </a:t>
+            </a:r>
+            <a:r>
+              <a:rPr dirty="0" err="1"/>
+              <a:t>current_packages</a:t>
+            </a:r>
+            <a:endParaRPr dirty="0"/>
           </a:p>
           <a:p>
             <a:pPr>
@@ -5212,8 +5426,22 @@
               </a:defRPr>
             </a:pPr>
             <a:r>
-              <a:t>   如果超过 capacity 立即拒绝</a:t>
-            </a:r>
+              <a:rPr dirty="0"/>
+              <a:t>   </a:t>
+            </a:r>
+            <a:r>
+              <a:rPr dirty="0" err="1"/>
+              <a:t>如果超过</a:t>
+            </a:r>
+            <a:r>
+              <a:rPr dirty="0"/>
+              <a:t> capacity </a:t>
+            </a:r>
+            <a:r>
+              <a:rPr dirty="0" err="1"/>
+              <a:t>立即拒绝</a:t>
+            </a:r>
+            <a:endParaRPr dirty="0"/>
           </a:p>
           <a:p>
             <a:pPr>
@@ -5228,8 +5456,14 @@
               </a:defRPr>
             </a:pPr>
             <a:r>
-              <a:t>→ 应用层没有机会犯错</a:t>
-            </a:r>
+              <a:rPr dirty="0"/>
+              <a:t>→ </a:t>
+            </a:r>
+            <a:r>
+              <a:rPr dirty="0" err="1"/>
+              <a:t>应用层没有机会犯错</a:t>
+            </a:r>
+            <a:endParaRPr dirty="0"/>
           </a:p>
           <a:p>
             <a:pPr>
@@ -5243,6 +5477,7 @@
                 <a:latin typeface="微软雅黑"/>
               </a:defRPr>
             </a:pPr>
+            <a:endParaRPr dirty="0"/>
           </a:p>
           <a:p>
             <a:pPr>
@@ -5257,7 +5492,16 @@
               </a:defRPr>
             </a:pPr>
             <a:r>
-              <a:t>12 个寄存点，容量 50~120 格</a:t>
+              <a:rPr dirty="0"/>
+              <a:t>12 </a:t>
+            </a:r>
+            <a:r>
+              <a:rPr dirty="0" err="1"/>
+              <a:t>个寄存点，容量</a:t>
+            </a:r>
+            <a:r>
+              <a:rPr dirty="0"/>
+              <a:t> 50~120 格</a:t>
             </a:r>
           </a:p>
           <a:p>
@@ -5273,8 +5517,18 @@
               </a:defRPr>
             </a:pPr>
             <a:r>
-              <a:t>current_packages 由存储过程</a:t>
-            </a:r>
+              <a:rPr dirty="0" err="1"/>
+              <a:t>current_packages</a:t>
+            </a:r>
+            <a:r>
+              <a:rPr dirty="0"/>
+              <a:t> </a:t>
+            </a:r>
+            <a:r>
+              <a:rPr dirty="0" err="1"/>
+              <a:t>由存储过程</a:t>
+            </a:r>
+            <a:endParaRPr dirty="0"/>
           </a:p>
           <a:p>
             <a:pPr>
@@ -5289,7 +5543,12 @@
               </a:defRPr>
             </a:pPr>
             <a:r>
-              <a:t>维护 (+1入库/-1出库)</a:t>
+              <a:rPr dirty="0" err="1"/>
+              <a:t>维护</a:t>
+            </a:r>
+            <a:r>
+              <a:rPr dirty="0"/>
+              <a:t> (+1入库/-1出库)</a:t>
             </a:r>
           </a:p>
         </p:txBody>
@@ -5303,7 +5562,7 @@
 </file>
 
 <file path=ppt/slides/slide13.xml><?xml version="1.0" encoding="utf-8"?>
-<p:sld xmlns:a="http://schemas.openxmlformats.org/drawingml/2006/main" xmlns:p="http://schemas.openxmlformats.org/presentationml/2006/main" xmlns:r="http://schemas.openxmlformats.org/officeDocument/2006/relationships">
+<p:sld xmlns:a="http://schemas.openxmlformats.org/drawingml/2006/main" xmlns:r="http://schemas.openxmlformats.org/officeDocument/2006/relationships" xmlns:p="http://schemas.openxmlformats.org/presentationml/2006/main">
   <p:cSld>
     <p:spTree>
       <p:nvGrpSpPr>
@@ -5311,7 +5570,14 @@
         <p:cNvGrpSpPr/>
         <p:nvPr/>
       </p:nvGrpSpPr>
-      <p:grpSpPr/>
+      <p:grpSpPr>
+        <a:xfrm>
+          <a:off x="0" y="0"/>
+          <a:ext cx="0" cy="0"/>
+          <a:chOff x="0" y="0"/>
+          <a:chExt cx="0" cy="0"/>
+        </a:xfrm>
+      </p:grpSpPr>
       <p:sp>
         <p:nvSpPr>
           <p:cNvPr id="2" name="Rectangle 1"/>
@@ -5352,6 +5618,7 @@
           <a:lstStyle/>
           <a:p>
             <a:pPr algn="ctr"/>
+            <a:endParaRPr/>
           </a:p>
         </p:txBody>
       </p:sp>
@@ -5435,8 +5702,8 @@
         </p:nvSpPr>
         <p:spPr>
           <a:xfrm>
-            <a:off x="274320" y="1188720"/>
-            <a:ext cx="6400800" cy="4114800"/>
+            <a:off x="274320" y="1188719"/>
+            <a:ext cx="5610979" cy="5433009"/>
           </a:xfrm>
           <a:prstGeom prst="rect">
             <a:avLst/>
@@ -5469,6 +5736,7 @@
           <a:lstStyle/>
           <a:p>
             <a:pPr algn="ctr"/>
+            <a:endParaRPr/>
           </a:p>
         </p:txBody>
       </p:sp>
@@ -5537,6 +5805,7 @@
                 <a:latin typeface="Consolas"/>
               </a:defRPr>
             </a:pPr>
+            <a:endParaRPr/>
           </a:p>
           <a:p>
             <a:pPr>
@@ -5581,7 +5850,6 @@
                 </a:solidFill>
                 <a:latin typeface="Consolas"/>
               </a:defRPr>
-              <a:shd fill="FFF7E6"/>
             </a:pPr>
             <a:r>
               <a:t>    'Stage1_Assigned', 'Arrived_At_Point',</a:t>
@@ -5598,7 +5866,6 @@
                 </a:solidFill>
                 <a:latin typeface="Consolas"/>
               </a:defRPr>
-              <a:shd fill="FFF7E6"/>
             </a:pPr>
             <a:r>
               <a:t>    'Stage2_Assigned','Completed','Cancelled'),</a:t>
@@ -5615,8 +5882,8 @@
                 </a:solidFill>
                 <a:latin typeface="Consolas"/>
               </a:defRPr>
-              <a:shd fill="FFF7E6"/>
-            </a:pPr>
+            </a:pPr>
+            <a:endParaRPr/>
           </a:p>
           <a:p>
             <a:pPr>
@@ -5629,7 +5896,6 @@
                 </a:solidFill>
                 <a:latin typeface="Consolas"/>
               </a:defRPr>
-              <a:shd fill="FFF7E6"/>
             </a:pPr>
             <a:r>
               <a:t>  -- 双骑手独立绑定</a:t>
@@ -5646,7 +5912,6 @@
                 </a:solidFill>
                 <a:latin typeface="Consolas"/>
               </a:defRPr>
-              <a:shd fill="FFF7E6"/>
             </a:pPr>
             <a:r>
               <a:t>  stage1_rider_id INT,  -- FK → riders（干线）</a:t>
@@ -5663,7 +5928,6 @@
                 </a:solidFill>
                 <a:latin typeface="Consolas"/>
               </a:defRPr>
-              <a:shd fill="FFF7E6"/>
             </a:pPr>
             <a:r>
               <a:t>  stage2_rider_id INT,  -- FK → riders（楼栋）</a:t>
@@ -5680,8 +5944,8 @@
                 </a:solidFill>
                 <a:latin typeface="Consolas"/>
               </a:defRPr>
-              <a:shd fill="FFF7E6"/>
-            </a:pPr>
+            </a:pPr>
+            <a:endParaRPr/>
           </a:p>
           <a:p>
             <a:pPr>
@@ -5694,7 +5958,6 @@
                 </a:solidFill>
                 <a:latin typeface="Consolas"/>
               </a:defRPr>
-              <a:shd fill="FFF7E6"/>
             </a:pPr>
             <a:r>
               <a:t>  -- 全链路时间审计</a:t>
@@ -5711,7 +5974,6 @@
                 </a:solidFill>
                 <a:latin typeface="Consolas"/>
               </a:defRPr>
-              <a:shd fill="FFF7E6"/>
             </a:pPr>
             <a:r>
               <a:t>  created_at          TIMESTAMP,  -- 下单</a:t>
@@ -5728,7 +5990,6 @@
                 </a:solidFill>
                 <a:latin typeface="Consolas"/>
               </a:defRPr>
-              <a:shd fill="FFF7E6"/>
             </a:pPr>
             <a:r>
               <a:t>  stage1_completed_at TIMESTAMP,  -- 入柜</a:t>
@@ -5762,6 +6023,7 @@
                 <a:latin typeface="Consolas"/>
               </a:defRPr>
             </a:pPr>
+            <a:endParaRPr/>
           </a:p>
           <a:p>
             <a:pPr>
@@ -6013,6 +6275,7 @@
                 <a:latin typeface="微软雅黑"/>
               </a:defRPr>
             </a:pPr>
+            <a:endParaRPr/>
           </a:p>
           <a:p>
             <a:pPr>
@@ -6040,8 +6303,8 @@
         </p:nvSpPr>
         <p:spPr>
           <a:xfrm>
-            <a:off x="7132320" y="4389120"/>
-            <a:ext cx="4572000" cy="1828800"/>
+            <a:off x="7255058" y="5154305"/>
+            <a:ext cx="4085956" cy="1246495"/>
           </a:xfrm>
           <a:prstGeom prst="rect">
             <a:avLst/>
@@ -6066,24 +6329,62 @@
               </a:defRPr>
             </a:pPr>
             <a:r>
+              <a:rPr dirty="0" err="1"/>
               <a:t>设计亮点</a:t>
             </a:r>
-            <a:br/>
-            <a:r>
-              <a:t>✔ ENUM 限死 6 种合法状态</a:t>
-            </a:r>
-            <a:br/>
-            <a:r>
-              <a:t>✔ 双骑手独立追踪两段进度</a:t>
-            </a:r>
-            <a:br/>
-            <a:r>
-              <a:t>✔ 3 个 TIMESTAMP 精确审计</a:t>
-            </a:r>
-            <a:br/>
-            <a:r>
-              <a:t>✔ 5 个 FK 保证引用完整</a:t>
-            </a:r>
+            <a:br>
+              <a:rPr dirty="0"/>
+            </a:br>
+            <a:r>
+              <a:rPr dirty="0"/>
+              <a:t>✔ ENUM </a:t>
+            </a:r>
+            <a:r>
+              <a:rPr dirty="0" err="1"/>
+              <a:t>限死</a:t>
+            </a:r>
+            <a:r>
+              <a:rPr dirty="0"/>
+              <a:t> 6 </a:t>
+            </a:r>
+            <a:r>
+              <a:rPr dirty="0" err="1"/>
+              <a:t>种合法状态</a:t>
+            </a:r>
+            <a:br>
+              <a:rPr dirty="0"/>
+            </a:br>
+            <a:r>
+              <a:rPr dirty="0"/>
+              <a:t>✔ </a:t>
+            </a:r>
+            <a:r>
+              <a:rPr dirty="0" err="1"/>
+              <a:t>双骑手独立追踪两段进度</a:t>
+            </a:r>
+            <a:br>
+              <a:rPr dirty="0"/>
+            </a:br>
+            <a:r>
+              <a:rPr dirty="0"/>
+              <a:t>✔ 3 个 TIMESTAMP </a:t>
+            </a:r>
+            <a:r>
+              <a:rPr dirty="0" err="1"/>
+              <a:t>精确审计</a:t>
+            </a:r>
+            <a:br>
+              <a:rPr dirty="0"/>
+            </a:br>
+            <a:r>
+              <a:rPr dirty="0"/>
+              <a:t>✔ 5 个 FK </a:t>
+            </a:r>
+            <a:r>
+              <a:rPr dirty="0" err="1"/>
+              <a:t>保证引用完整</a:t>
+            </a:r>
+            <a:endParaRPr dirty="0"/>
           </a:p>
         </p:txBody>
       </p:sp>
@@ -6096,7 +6397,7 @@
 </file>
 
 <file path=ppt/slides/slide14.xml><?xml version="1.0" encoding="utf-8"?>
-<p:sld xmlns:a="http://schemas.openxmlformats.org/drawingml/2006/main" xmlns:p="http://schemas.openxmlformats.org/presentationml/2006/main" xmlns:r="http://schemas.openxmlformats.org/officeDocument/2006/relationships">
+<p:sld xmlns:a="http://schemas.openxmlformats.org/drawingml/2006/main" xmlns:r="http://schemas.openxmlformats.org/officeDocument/2006/relationships" xmlns:p="http://schemas.openxmlformats.org/presentationml/2006/main">
   <p:cSld>
     <p:spTree>
       <p:nvGrpSpPr>
@@ -6104,7 +6405,14 @@
         <p:cNvGrpSpPr/>
         <p:nvPr/>
       </p:nvGrpSpPr>
-      <p:grpSpPr/>
+      <p:grpSpPr>
+        <a:xfrm>
+          <a:off x="0" y="0"/>
+          <a:ext cx="0" cy="0"/>
+          <a:chOff x="0" y="0"/>
+          <a:chExt cx="0" cy="0"/>
+        </a:xfrm>
+      </p:grpSpPr>
       <p:sp>
         <p:nvSpPr>
           <p:cNvPr id="2" name="Rectangle 1"/>
@@ -6145,6 +6453,7 @@
           <a:lstStyle/>
           <a:p>
             <a:pPr algn="ctr"/>
+            <a:endParaRPr/>
           </a:p>
         </p:txBody>
       </p:sp>
@@ -6239,10 +6548,34 @@
                 <a:tableStyleId>{5C22544A-7EE6-4342-B048-85BDC9FD1C3A}</a:tableStyleId>
               </a:tblPr>
               <a:tblGrid>
-                <a:gridCol w="2011680"/>
-                <a:gridCol w="2743200"/>
-                <a:gridCol w="3200400"/>
-                <a:gridCol w="3657600"/>
+                <a:gridCol w="2011680">
+                  <a:extLst>
+                    <a:ext uri="{9D8B030D-6E8A-4147-A177-3AD203B41FA5}">
+                      <a16:colId xmlns:a16="http://schemas.microsoft.com/office/drawing/2014/main" val="20000"/>
+                    </a:ext>
+                  </a:extLst>
+                </a:gridCol>
+                <a:gridCol w="2743200">
+                  <a:extLst>
+                    <a:ext uri="{9D8B030D-6E8A-4147-A177-3AD203B41FA5}">
+                      <a16:colId xmlns:a16="http://schemas.microsoft.com/office/drawing/2014/main" val="20001"/>
+                    </a:ext>
+                  </a:extLst>
+                </a:gridCol>
+                <a:gridCol w="3200400">
+                  <a:extLst>
+                    <a:ext uri="{9D8B030D-6E8A-4147-A177-3AD203B41FA5}">
+                      <a16:colId xmlns:a16="http://schemas.microsoft.com/office/drawing/2014/main" val="20002"/>
+                    </a:ext>
+                  </a:extLst>
+                </a:gridCol>
+                <a:gridCol w="3657600">
+                  <a:extLst>
+                    <a:ext uri="{9D8B030D-6E8A-4147-A177-3AD203B41FA5}">
+                      <a16:colId xmlns:a16="http://schemas.microsoft.com/office/drawing/2014/main" val="20003"/>
+                    </a:ext>
+                  </a:extLst>
+                </a:gridCol>
               </a:tblGrid>
               <a:tr h="347472">
                 <a:tc>
@@ -6341,6 +6674,11 @@
                     </a:solidFill>
                   </a:tcPr>
                 </a:tc>
+                <a:extLst>
+                  <a:ext uri="{0D108BD9-81ED-4DB2-BD59-A6C34878D82A}">
+                    <a16:rowId xmlns:a16="http://schemas.microsoft.com/office/drawing/2014/main" val="10000"/>
+                  </a:ext>
+                </a:extLst>
               </a:tr>
               <a:tr h="347472">
                 <a:tc>
@@ -6439,6 +6777,11 @@
                     </a:solidFill>
                   </a:tcPr>
                 </a:tc>
+                <a:extLst>
+                  <a:ext uri="{0D108BD9-81ED-4DB2-BD59-A6C34878D82A}">
+                    <a16:rowId xmlns:a16="http://schemas.microsoft.com/office/drawing/2014/main" val="10001"/>
+                  </a:ext>
+                </a:extLst>
               </a:tr>
               <a:tr h="347472">
                 <a:tc>
@@ -6521,6 +6864,11 @@
                   </a:txBody>
                   <a:tcPr/>
                 </a:tc>
+                <a:extLst>
+                  <a:ext uri="{0D108BD9-81ED-4DB2-BD59-A6C34878D82A}">
+                    <a16:rowId xmlns:a16="http://schemas.microsoft.com/office/drawing/2014/main" val="10002"/>
+                  </a:ext>
+                </a:extLst>
               </a:tr>
               <a:tr h="347472">
                 <a:tc>
@@ -6619,6 +6967,11 @@
                     </a:solidFill>
                   </a:tcPr>
                 </a:tc>
+                <a:extLst>
+                  <a:ext uri="{0D108BD9-81ED-4DB2-BD59-A6C34878D82A}">
+                    <a16:rowId xmlns:a16="http://schemas.microsoft.com/office/drawing/2014/main" val="10003"/>
+                  </a:ext>
+                </a:extLst>
               </a:tr>
               <a:tr h="347472">
                 <a:tc>
@@ -6701,6 +7054,11 @@
                   </a:txBody>
                   <a:tcPr/>
                 </a:tc>
+                <a:extLst>
+                  <a:ext uri="{0D108BD9-81ED-4DB2-BD59-A6C34878D82A}">
+                    <a16:rowId xmlns:a16="http://schemas.microsoft.com/office/drawing/2014/main" val="10004"/>
+                  </a:ext>
+                </a:extLst>
               </a:tr>
               <a:tr h="347472">
                 <a:tc>
@@ -6799,6 +7157,11 @@
                     </a:solidFill>
                   </a:tcPr>
                 </a:tc>
+                <a:extLst>
+                  <a:ext uri="{0D108BD9-81ED-4DB2-BD59-A6C34878D82A}">
+                    <a16:rowId xmlns:a16="http://schemas.microsoft.com/office/drawing/2014/main" val="10005"/>
+                  </a:ext>
+                </a:extLst>
               </a:tr>
               <a:tr h="347472">
                 <a:tc>
@@ -6881,6 +7244,11 @@
                   </a:txBody>
                   <a:tcPr/>
                 </a:tc>
+                <a:extLst>
+                  <a:ext uri="{0D108BD9-81ED-4DB2-BD59-A6C34878D82A}">
+                    <a16:rowId xmlns:a16="http://schemas.microsoft.com/office/drawing/2014/main" val="10006"/>
+                  </a:ext>
+                </a:extLst>
               </a:tr>
             </a:tbl>
           </a:graphicData>
@@ -6934,7 +7302,7 @@
 </file>
 
 <file path=ppt/slides/slide15.xml><?xml version="1.0" encoding="utf-8"?>
-<p:sld xmlns:a="http://schemas.openxmlformats.org/drawingml/2006/main" xmlns:p="http://schemas.openxmlformats.org/presentationml/2006/main" xmlns:r="http://schemas.openxmlformats.org/officeDocument/2006/relationships">
+<p:sld xmlns:a="http://schemas.openxmlformats.org/drawingml/2006/main" xmlns:r="http://schemas.openxmlformats.org/officeDocument/2006/relationships" xmlns:p="http://schemas.openxmlformats.org/presentationml/2006/main">
   <p:cSld>
     <p:spTree>
       <p:nvGrpSpPr>
@@ -6942,7 +7310,14 @@
         <p:cNvGrpSpPr/>
         <p:nvPr/>
       </p:nvGrpSpPr>
-      <p:grpSpPr/>
+      <p:grpSpPr>
+        <a:xfrm>
+          <a:off x="0" y="0"/>
+          <a:ext cx="0" cy="0"/>
+          <a:chOff x="0" y="0"/>
+          <a:chExt cx="0" cy="0"/>
+        </a:xfrm>
+      </p:grpSpPr>
       <p:sp>
         <p:nvSpPr>
           <p:cNvPr id="2" name="Rectangle 1"/>
@@ -6983,6 +7358,7 @@
           <a:lstStyle/>
           <a:p>
             <a:pPr algn="ctr"/>
+            <a:endParaRPr/>
           </a:p>
         </p:txBody>
       </p:sp>
@@ -7066,8 +7442,8 @@
         </p:nvSpPr>
         <p:spPr>
           <a:xfrm>
-            <a:off x="457200" y="1280160"/>
-            <a:ext cx="5303520" cy="2286000"/>
+            <a:off x="457200" y="1280159"/>
+            <a:ext cx="5638800" cy="4629687"/>
           </a:xfrm>
           <a:prstGeom prst="rect">
             <a:avLst/>
@@ -7100,6 +7476,7 @@
           <a:lstStyle/>
           <a:p>
             <a:pPr algn="ctr"/>
+            <a:endParaRPr/>
           </a:p>
         </p:txBody>
       </p:sp>
@@ -7137,6 +7514,7 @@
               </a:defRPr>
             </a:pPr>
             <a:r>
+              <a:rPr dirty="0"/>
               <a:t>CREATE TABLE riders (</a:t>
             </a:r>
           </a:p>
@@ -7153,7 +7531,16 @@
               </a:defRPr>
             </a:pPr>
             <a:r>
-              <a:t>  rider_id   INT PRIMARY KEY AUTO_INCREMENT,</a:t>
+              <a:rPr dirty="0"/>
+              <a:t>  </a:t>
+            </a:r>
+            <a:r>
+              <a:rPr dirty="0" err="1"/>
+              <a:t>rider_id</a:t>
+            </a:r>
+            <a:r>
+              <a:rPr dirty="0"/>
+              <a:t>   INT PRIMARY KEY AUTO_INCREMENT,</a:t>
             </a:r>
           </a:p>
           <a:p>
@@ -7168,6 +7555,7 @@
                 <a:latin typeface="Consolas"/>
               </a:defRPr>
             </a:pPr>
+            <a:endParaRPr dirty="0"/>
           </a:p>
           <a:p>
             <a:pPr>
@@ -7180,11 +7568,24 @@
                 </a:solidFill>
                 <a:latin typeface="Consolas"/>
               </a:defRPr>
-              <a:shd fill="FFF7E6"/>
-            </a:pPr>
-            <a:r>
-              <a:t>  rider_type ENUM('Stage1_Trunk',  -- 干线</a:t>
-            </a:r>
+            </a:pPr>
+            <a:r>
+              <a:rPr dirty="0"/>
+              <a:t>  </a:t>
+            </a:r>
+            <a:r>
+              <a:rPr dirty="0" err="1"/>
+              <a:t>rider_type</a:t>
+            </a:r>
+            <a:r>
+              <a:rPr dirty="0"/>
+              <a:t> ENUM('Stage1_Trunk',  -- </a:t>
+            </a:r>
+            <a:r>
+              <a:rPr dirty="0" err="1"/>
+              <a:t>干线</a:t>
+            </a:r>
+            <a:endParaRPr dirty="0"/>
           </a:p>
           <a:p>
             <a:pPr>
@@ -7197,11 +7598,16 @@
                 </a:solidFill>
                 <a:latin typeface="Consolas"/>
               </a:defRPr>
-              <a:shd fill="FFF7E6"/>
-            </a:pPr>
-            <a:r>
-              <a:t>                   'Stage2_Floor')  -- 楼栋</a:t>
-            </a:r>
+            </a:pPr>
+            <a:r>
+              <a:rPr dirty="0"/>
+              <a:t>                   'Stage2_Floor')  -- </a:t>
+            </a:r>
+            <a:r>
+              <a:rPr dirty="0" err="1"/>
+              <a:t>楼栋</a:t>
+            </a:r>
+            <a:endParaRPr dirty="0"/>
           </a:p>
           <a:p>
             <a:pPr>
@@ -7216,6 +7622,7 @@
               </a:defRPr>
             </a:pPr>
             <a:r>
+              <a:rPr dirty="0"/>
               <a:t>    NOT NULL,</a:t>
             </a:r>
           </a:p>
@@ -7231,6 +7638,7 @@
                 <a:latin typeface="Consolas"/>
               </a:defRPr>
             </a:pPr>
+            <a:endParaRPr dirty="0"/>
           </a:p>
           <a:p>
             <a:pPr>
@@ -7243,9 +7651,9 @@
                 </a:solidFill>
                 <a:latin typeface="Consolas"/>
               </a:defRPr>
-              <a:shd fill="FFF7E6"/>
-            </a:pPr>
-            <a:r>
+            </a:pPr>
+            <a:r>
+              <a:rPr dirty="0"/>
               <a:t>  status     ENUM('Idle',</a:t>
             </a:r>
           </a:p>
@@ -7260,9 +7668,9 @@
                 </a:solidFill>
                 <a:latin typeface="Consolas"/>
               </a:defRPr>
-              <a:shd fill="FFF7E6"/>
-            </a:pPr>
-            <a:r>
+            </a:pPr>
+            <a:r>
+              <a:rPr dirty="0"/>
               <a:t>                   'Delivering',</a:t>
             </a:r>
           </a:p>
@@ -7277,9 +7685,9 @@
                 </a:solidFill>
                 <a:latin typeface="Consolas"/>
               </a:defRPr>
-              <a:shd fill="FFF7E6"/>
-            </a:pPr>
-            <a:r>
+            </a:pPr>
+            <a:r>
+              <a:rPr dirty="0"/>
               <a:t>                   'Offline')</a:t>
             </a:r>
           </a:p>
@@ -7296,6 +7704,7 @@
               </a:defRPr>
             </a:pPr>
             <a:r>
+              <a:rPr dirty="0"/>
               <a:t>    DEFAULT 'Idle',</a:t>
             </a:r>
           </a:p>
@@ -7312,6 +7721,7 @@
               </a:defRPr>
             </a:pPr>
             <a:r>
+              <a:rPr dirty="0"/>
               <a:t>);</a:t>
             </a:r>
           </a:p>
@@ -7453,6 +7863,7 @@
                 <a:latin typeface="微软雅黑"/>
               </a:defRPr>
             </a:pPr>
+            <a:endParaRPr/>
           </a:p>
           <a:p>
             <a:pPr>
@@ -7546,6 +7957,7 @@
                 <a:latin typeface="微软雅黑"/>
               </a:defRPr>
             </a:pPr>
+            <a:endParaRPr/>
           </a:p>
           <a:p>
             <a:pPr>
@@ -7574,7 +7986,7 @@
 </file>
 
 <file path=ppt/slides/slide16.xml><?xml version="1.0" encoding="utf-8"?>
-<p:sld xmlns:a="http://schemas.openxmlformats.org/drawingml/2006/main" xmlns:p="http://schemas.openxmlformats.org/presentationml/2006/main" xmlns:r="http://schemas.openxmlformats.org/officeDocument/2006/relationships">
+<p:sld xmlns:a="http://schemas.openxmlformats.org/drawingml/2006/main" xmlns:r="http://schemas.openxmlformats.org/officeDocument/2006/relationships" xmlns:p="http://schemas.openxmlformats.org/presentationml/2006/main">
   <p:cSld>
     <p:spTree>
       <p:nvGrpSpPr>
@@ -7582,7 +7994,14 @@
         <p:cNvGrpSpPr/>
         <p:nvPr/>
       </p:nvGrpSpPr>
-      <p:grpSpPr/>
+      <p:grpSpPr>
+        <a:xfrm>
+          <a:off x="0" y="0"/>
+          <a:ext cx="0" cy="0"/>
+          <a:chOff x="0" y="0"/>
+          <a:chExt cx="0" cy="0"/>
+        </a:xfrm>
+      </p:grpSpPr>
       <p:sp>
         <p:nvSpPr>
           <p:cNvPr id="2" name="Rectangle 1"/>
@@ -7623,6 +8042,7 @@
           <a:lstStyle/>
           <a:p>
             <a:pPr algn="ctr"/>
+            <a:endParaRPr/>
           </a:p>
         </p:txBody>
       </p:sp>
@@ -7743,7 +8163,7 @@
 </file>
 
 <file path=ppt/slides/slide17.xml><?xml version="1.0" encoding="utf-8"?>
-<p:sld xmlns:a="http://schemas.openxmlformats.org/drawingml/2006/main" xmlns:p="http://schemas.openxmlformats.org/presentationml/2006/main" xmlns:r="http://schemas.openxmlformats.org/officeDocument/2006/relationships">
+<p:sld xmlns:a="http://schemas.openxmlformats.org/drawingml/2006/main" xmlns:r="http://schemas.openxmlformats.org/officeDocument/2006/relationships" xmlns:p="http://schemas.openxmlformats.org/presentationml/2006/main">
   <p:cSld>
     <p:spTree>
       <p:nvGrpSpPr>
@@ -7751,7 +8171,14 @@
         <p:cNvGrpSpPr/>
         <p:nvPr/>
       </p:nvGrpSpPr>
-      <p:grpSpPr/>
+      <p:grpSpPr>
+        <a:xfrm>
+          <a:off x="0" y="0"/>
+          <a:ext cx="0" cy="0"/>
+          <a:chOff x="0" y="0"/>
+          <a:chExt cx="0" cy="0"/>
+        </a:xfrm>
+      </p:grpSpPr>
       <p:sp>
         <p:nvSpPr>
           <p:cNvPr id="2" name="Rectangle 1"/>
@@ -7792,6 +8219,7 @@
           <a:lstStyle/>
           <a:p>
             <a:pPr algn="ctr"/>
+            <a:endParaRPr/>
           </a:p>
         </p:txBody>
       </p:sp>
@@ -7877,7 +8305,7 @@
         </p:nvGraphicFramePr>
         <p:xfrm>
           <a:off x="274320" y="1188720"/>
-          <a:ext cx="11247120" cy="1737360"/>
+          <a:ext cx="11247120" cy="1877568"/>
         </p:xfrm>
         <a:graphic>
           <a:graphicData uri="http://schemas.openxmlformats.org/drawingml/2006/table">
@@ -7886,10 +8314,34 @@
                 <a:tableStyleId>{5C22544A-7EE6-4342-B048-85BDC9FD1C3A}</a:tableStyleId>
               </a:tblPr>
               <a:tblGrid>
-                <a:gridCol w="2377440"/>
-                <a:gridCol w="1280160"/>
-                <a:gridCol w="2560320"/>
-                <a:gridCol w="5029200"/>
+                <a:gridCol w="2377440">
+                  <a:extLst>
+                    <a:ext uri="{9D8B030D-6E8A-4147-A177-3AD203B41FA5}">
+                      <a16:colId xmlns:a16="http://schemas.microsoft.com/office/drawing/2014/main" val="20000"/>
+                    </a:ext>
+                  </a:extLst>
+                </a:gridCol>
+                <a:gridCol w="1280160">
+                  <a:extLst>
+                    <a:ext uri="{9D8B030D-6E8A-4147-A177-3AD203B41FA5}">
+                      <a16:colId xmlns:a16="http://schemas.microsoft.com/office/drawing/2014/main" val="20001"/>
+                    </a:ext>
+                  </a:extLst>
+                </a:gridCol>
+                <a:gridCol w="2560320">
+                  <a:extLst>
+                    <a:ext uri="{9D8B030D-6E8A-4147-A177-3AD203B41FA5}">
+                      <a16:colId xmlns:a16="http://schemas.microsoft.com/office/drawing/2014/main" val="20002"/>
+                    </a:ext>
+                  </a:extLst>
+                </a:gridCol>
+                <a:gridCol w="5029200">
+                  <a:extLst>
+                    <a:ext uri="{9D8B030D-6E8A-4147-A177-3AD203B41FA5}">
+                      <a16:colId xmlns:a16="http://schemas.microsoft.com/office/drawing/2014/main" val="20003"/>
+                    </a:ext>
+                  </a:extLst>
+                </a:gridCol>
               </a:tblGrid>
               <a:tr h="347472">
                 <a:tc>
@@ -7988,6 +8440,11 @@
                     </a:solidFill>
                   </a:tcPr>
                 </a:tc>
+                <a:extLst>
+                  <a:ext uri="{0D108BD9-81ED-4DB2-BD59-A6C34878D82A}">
+                    <a16:rowId xmlns:a16="http://schemas.microsoft.com/office/drawing/2014/main" val="10000"/>
+                  </a:ext>
+                </a:extLst>
               </a:tr>
               <a:tr h="347472">
                 <a:tc>
@@ -8086,6 +8543,11 @@
                     </a:solidFill>
                   </a:tcPr>
                 </a:tc>
+                <a:extLst>
+                  <a:ext uri="{0D108BD9-81ED-4DB2-BD59-A6C34878D82A}">
+                    <a16:rowId xmlns:a16="http://schemas.microsoft.com/office/drawing/2014/main" val="10001"/>
+                  </a:ext>
+                </a:extLst>
               </a:tr>
               <a:tr h="347472">
                 <a:tc>
@@ -8168,6 +8630,11 @@
                   </a:txBody>
                   <a:tcPr/>
                 </a:tc>
+                <a:extLst>
+                  <a:ext uri="{0D108BD9-81ED-4DB2-BD59-A6C34878D82A}">
+                    <a16:rowId xmlns:a16="http://schemas.microsoft.com/office/drawing/2014/main" val="10002"/>
+                  </a:ext>
+                </a:extLst>
               </a:tr>
               <a:tr h="347472">
                 <a:tc>
@@ -8266,6 +8733,11 @@
                     </a:solidFill>
                   </a:tcPr>
                 </a:tc>
+                <a:extLst>
+                  <a:ext uri="{0D108BD9-81ED-4DB2-BD59-A6C34878D82A}">
+                    <a16:rowId xmlns:a16="http://schemas.microsoft.com/office/drawing/2014/main" val="10003"/>
+                  </a:ext>
+                </a:extLst>
               </a:tr>
               <a:tr h="347472">
                 <a:tc>
@@ -8374,6 +8846,11 @@
                   </a:txBody>
                   <a:tcPr/>
                 </a:tc>
+                <a:extLst>
+                  <a:ext uri="{0D108BD9-81ED-4DB2-BD59-A6C34878D82A}">
+                    <a16:rowId xmlns:a16="http://schemas.microsoft.com/office/drawing/2014/main" val="10004"/>
+                  </a:ext>
+                </a:extLst>
               </a:tr>
             </a:tbl>
           </a:graphicData>
@@ -8498,7 +8975,7 @@
 </file>
 
 <file path=ppt/slides/slide18.xml><?xml version="1.0" encoding="utf-8"?>
-<p:sld xmlns:a="http://schemas.openxmlformats.org/drawingml/2006/main" xmlns:p="http://schemas.openxmlformats.org/presentationml/2006/main" xmlns:r="http://schemas.openxmlformats.org/officeDocument/2006/relationships">
+<p:sld xmlns:a="http://schemas.openxmlformats.org/drawingml/2006/main" xmlns:r="http://schemas.openxmlformats.org/officeDocument/2006/relationships" xmlns:p="http://schemas.openxmlformats.org/presentationml/2006/main">
   <p:cSld>
     <p:spTree>
       <p:nvGrpSpPr>
@@ -8506,7 +8983,14 @@
         <p:cNvGrpSpPr/>
         <p:nvPr/>
       </p:nvGrpSpPr>
-      <p:grpSpPr/>
+      <p:grpSpPr>
+        <a:xfrm>
+          <a:off x="0" y="0"/>
+          <a:ext cx="0" cy="0"/>
+          <a:chOff x="0" y="0"/>
+          <a:chExt cx="0" cy="0"/>
+        </a:xfrm>
+      </p:grpSpPr>
       <p:sp>
         <p:nvSpPr>
           <p:cNvPr id="2" name="Rectangle 1"/>
@@ -8547,6 +9031,7 @@
           <a:lstStyle/>
           <a:p>
             <a:pPr algn="ctr"/>
+            <a:endParaRPr/>
           </a:p>
         </p:txBody>
       </p:sp>
@@ -9155,7 +9640,7 @@
 </file>
 
 <file path=ppt/slides/slide19.xml><?xml version="1.0" encoding="utf-8"?>
-<p:sld xmlns:a="http://schemas.openxmlformats.org/drawingml/2006/main" xmlns:p="http://schemas.openxmlformats.org/presentationml/2006/main" xmlns:r="http://schemas.openxmlformats.org/officeDocument/2006/relationships">
+<p:sld xmlns:a="http://schemas.openxmlformats.org/drawingml/2006/main" xmlns:r="http://schemas.openxmlformats.org/officeDocument/2006/relationships" xmlns:p="http://schemas.openxmlformats.org/presentationml/2006/main">
   <p:cSld>
     <p:spTree>
       <p:nvGrpSpPr>
@@ -9163,7 +9648,14 @@
         <p:cNvGrpSpPr/>
         <p:nvPr/>
       </p:nvGrpSpPr>
-      <p:grpSpPr/>
+      <p:grpSpPr>
+        <a:xfrm>
+          <a:off x="0" y="0"/>
+          <a:ext cx="0" cy="0"/>
+          <a:chOff x="0" y="0"/>
+          <a:chExt cx="0" cy="0"/>
+        </a:xfrm>
+      </p:grpSpPr>
       <p:sp>
         <p:nvSpPr>
           <p:cNvPr id="2" name="Rectangle 1"/>
@@ -9204,6 +9696,7 @@
           <a:lstStyle/>
           <a:p>
             <a:pPr algn="ctr"/>
+            <a:endParaRPr/>
           </a:p>
         </p:txBody>
       </p:sp>
@@ -9324,7 +9817,7 @@
 </file>
 
 <file path=ppt/slides/slide2.xml><?xml version="1.0" encoding="utf-8"?>
-<p:sld xmlns:a="http://schemas.openxmlformats.org/drawingml/2006/main" xmlns:p="http://schemas.openxmlformats.org/presentationml/2006/main" xmlns:r="http://schemas.openxmlformats.org/officeDocument/2006/relationships">
+<p:sld xmlns:a="http://schemas.openxmlformats.org/drawingml/2006/main" xmlns:r="http://schemas.openxmlformats.org/officeDocument/2006/relationships" xmlns:p="http://schemas.openxmlformats.org/presentationml/2006/main">
   <p:cSld>
     <p:spTree>
       <p:nvGrpSpPr>
@@ -9332,7 +9825,14 @@
         <p:cNvGrpSpPr/>
         <p:nvPr/>
       </p:nvGrpSpPr>
-      <p:grpSpPr/>
+      <p:grpSpPr>
+        <a:xfrm>
+          <a:off x="0" y="0"/>
+          <a:ext cx="0" cy="0"/>
+          <a:chOff x="0" y="0"/>
+          <a:chExt cx="0" cy="0"/>
+        </a:xfrm>
+      </p:grpSpPr>
       <p:sp>
         <p:nvSpPr>
           <p:cNvPr id="2" name="Rectangle 1"/>
@@ -9373,6 +9873,7 @@
           <a:lstStyle/>
           <a:p>
             <a:pPr algn="ctr"/>
+            <a:endParaRPr/>
           </a:p>
         </p:txBody>
       </p:sp>
@@ -10393,7 +10894,7 @@
 </file>
 
 <file path=ppt/slides/slide20.xml><?xml version="1.0" encoding="utf-8"?>
-<p:sld xmlns:a="http://schemas.openxmlformats.org/drawingml/2006/main" xmlns:p="http://schemas.openxmlformats.org/presentationml/2006/main" xmlns:r="http://schemas.openxmlformats.org/officeDocument/2006/relationships">
+<p:sld xmlns:a="http://schemas.openxmlformats.org/drawingml/2006/main" xmlns:r="http://schemas.openxmlformats.org/officeDocument/2006/relationships" xmlns:p="http://schemas.openxmlformats.org/presentationml/2006/main">
   <p:cSld>
     <p:spTree>
       <p:nvGrpSpPr>
@@ -10401,7 +10902,14 @@
         <p:cNvGrpSpPr/>
         <p:nvPr/>
       </p:nvGrpSpPr>
-      <p:grpSpPr/>
+      <p:grpSpPr>
+        <a:xfrm>
+          <a:off x="0" y="0"/>
+          <a:ext cx="0" cy="0"/>
+          <a:chOff x="0" y="0"/>
+          <a:chExt cx="0" cy="0"/>
+        </a:xfrm>
+      </p:grpSpPr>
       <p:sp>
         <p:nvSpPr>
           <p:cNvPr id="2" name="Rectangle 1"/>
@@ -10442,6 +10950,7 @@
           <a:lstStyle/>
           <a:p>
             <a:pPr algn="ctr"/>
+            <a:endParaRPr/>
           </a:p>
         </p:txBody>
       </p:sp>
@@ -10565,7 +11074,7 @@
         <p:spPr>
           <a:xfrm>
             <a:off x="457200" y="1828800"/>
-            <a:ext cx="5029200" cy="1828800"/>
+            <a:ext cx="5108980" cy="2221562"/>
           </a:xfrm>
           <a:prstGeom prst="rect">
             <a:avLst/>
@@ -10598,6 +11107,7 @@
           <a:lstStyle/>
           <a:p>
             <a:pPr algn="ctr"/>
+            <a:endParaRPr/>
           </a:p>
         </p:txBody>
       </p:sp>
@@ -10682,6 +11192,7 @@
                 <a:latin typeface="Consolas"/>
               </a:defRPr>
             </a:pPr>
+            <a:endParaRPr/>
           </a:p>
           <a:p>
             <a:pPr>
@@ -10694,7 +11205,6 @@
                 </a:solidFill>
                 <a:latin typeface="Consolas"/>
               </a:defRPr>
-              <a:shd fill="FFF7E6"/>
             </a:pPr>
             <a:r>
               <a:t>INSERT (扣到 0)         INSERT (扣到 -1)</a:t>
@@ -10712,6 +11222,7 @@
                 <a:latin typeface="Consolas"/>
               </a:defRPr>
             </a:pPr>
+            <a:endParaRPr/>
           </a:p>
           <a:p>
             <a:pPr>
@@ -10779,7 +11290,7 @@
         <p:spPr>
           <a:xfrm>
             <a:off x="6400800" y="1828800"/>
-            <a:ext cx="5029200" cy="1828800"/>
+            <a:ext cx="5486400" cy="2847528"/>
           </a:xfrm>
           <a:prstGeom prst="rect">
             <a:avLst/>
@@ -10812,6 +11323,7 @@
           <a:lstStyle/>
           <a:p>
             <a:pPr algn="ctr"/>
+            <a:endParaRPr/>
           </a:p>
         </p:txBody>
       </p:sp>
@@ -10849,7 +11361,24 @@
               </a:defRPr>
             </a:pPr>
             <a:r>
-              <a:t>-- 线程 A               -- 线程 B</a:t>
+              <a:rPr dirty="0"/>
+              <a:t>-- </a:t>
+            </a:r>
+            <a:r>
+              <a:rPr dirty="0" err="1"/>
+              <a:t>线程</a:t>
+            </a:r>
+            <a:r>
+              <a:rPr dirty="0"/>
+              <a:t> A               -- </a:t>
+            </a:r>
+            <a:r>
+              <a:rPr dirty="0" err="1"/>
+              <a:t>线程</a:t>
+            </a:r>
+            <a:r>
+              <a:rPr dirty="0"/>
+              <a:t> B</a:t>
             </a:r>
           </a:p>
           <a:p>
@@ -10865,7 +11394,16 @@
               </a:defRPr>
             </a:pPr>
             <a:r>
-              <a:t>SELECT...FOR UPDATE(X锁)  SELECT...FOR UPDATE</a:t>
+              <a:rPr dirty="0"/>
+              <a:t>SELECT...FOR UPDATE(</a:t>
+            </a:r>
+            <a:r>
+              <a:rPr dirty="0" err="1"/>
+              <a:t>X锁</a:t>
+            </a:r>
+            <a:r>
+              <a:rPr dirty="0"/>
+              <a:t>)  SELECT...FOR UPDATE</a:t>
             </a:r>
           </a:p>
           <a:p>
@@ -10881,7 +11419,24 @@
               </a:defRPr>
             </a:pPr>
             <a:r>
-              <a:t>  → stock=1, 加锁成功      → 阻塞等待...</a:t>
+              <a:rPr dirty="0"/>
+              <a:t>  → stock=1, </a:t>
+            </a:r>
+            <a:r>
+              <a:rPr dirty="0" err="1"/>
+              <a:t>加锁成功</a:t>
+            </a:r>
+            <a:r>
+              <a:rPr dirty="0"/>
+              <a:t>      → </a:t>
+            </a:r>
+            <a:r>
+              <a:rPr dirty="0" err="1"/>
+              <a:t>阻塞等待</a:t>
+            </a:r>
+            <a:r>
+              <a:rPr dirty="0"/>
+              <a:t>...</a:t>
             </a:r>
           </a:p>
           <a:p>
@@ -10896,6 +11451,7 @@
                 <a:latin typeface="Consolas"/>
               </a:defRPr>
             </a:pPr>
+            <a:endParaRPr dirty="0"/>
           </a:p>
           <a:p>
             <a:pPr>
@@ -10910,6 +11466,7 @@
               </a:defRPr>
             </a:pPr>
             <a:r>
+              <a:rPr dirty="0"/>
               <a:t>INSERT stock=0              </a:t>
             </a:r>
           </a:p>
@@ -10924,10 +11481,26 @@
                 </a:solidFill>
                 <a:latin typeface="Consolas"/>
               </a:defRPr>
-              <a:shd fill="FFF7E6"/>
-            </a:pPr>
-            <a:r>
-              <a:t>COMMIT(释放锁)              → 获锁, stock=0</a:t>
+            </a:pPr>
+            <a:r>
+              <a:rPr dirty="0"/>
+              <a:t>COMMIT(</a:t>
+            </a:r>
+            <a:r>
+              <a:rPr dirty="0" err="1"/>
+              <a:t>释放锁</a:t>
+            </a:r>
+            <a:r>
+              <a:rPr dirty="0"/>
+              <a:t>)              → </a:t>
+            </a:r>
+            <a:r>
+              <a:rPr dirty="0" err="1"/>
+              <a:t>获锁</a:t>
+            </a:r>
+            <a:r>
+              <a:rPr dirty="0"/>
+              <a:t>, stock=0</a:t>
             </a:r>
           </a:p>
           <a:p>
@@ -10943,7 +11516,16 @@
               </a:defRPr>
             </a:pPr>
             <a:r>
-              <a:t>                           → 库存不足!拒绝 ✔</a:t>
+              <a:rPr dirty="0"/>
+              <a:t>                           → </a:t>
+            </a:r>
+            <a:r>
+              <a:rPr dirty="0" err="1"/>
+              <a:t>库存不足!拒绝</a:t>
+            </a:r>
+            <a:r>
+              <a:rPr dirty="0"/>
+              <a:t> ✔</a:t>
             </a:r>
           </a:p>
         </p:txBody>
@@ -11051,7 +11633,7 @@
 </file>
 
 <file path=ppt/slides/slide21.xml><?xml version="1.0" encoding="utf-8"?>
-<p:sld xmlns:a="http://schemas.openxmlformats.org/drawingml/2006/main" xmlns:p="http://schemas.openxmlformats.org/presentationml/2006/main" xmlns:r="http://schemas.openxmlformats.org/officeDocument/2006/relationships">
+<p:sld xmlns:a="http://schemas.openxmlformats.org/drawingml/2006/main" xmlns:r="http://schemas.openxmlformats.org/officeDocument/2006/relationships" xmlns:p="http://schemas.openxmlformats.org/presentationml/2006/main">
   <p:cSld>
     <p:spTree>
       <p:nvGrpSpPr>
@@ -11059,7 +11641,14 @@
         <p:cNvGrpSpPr/>
         <p:nvPr/>
       </p:nvGrpSpPr>
-      <p:grpSpPr/>
+      <p:grpSpPr>
+        <a:xfrm>
+          <a:off x="0" y="0"/>
+          <a:ext cx="0" cy="0"/>
+          <a:chOff x="0" y="0"/>
+          <a:chExt cx="0" cy="0"/>
+        </a:xfrm>
+      </p:grpSpPr>
       <p:sp>
         <p:nvSpPr>
           <p:cNvPr id="2" name="Rectangle 1"/>
@@ -11100,6 +11689,7 @@
           <a:lstStyle/>
           <a:p>
             <a:pPr algn="ctr"/>
+            <a:endParaRPr/>
           </a:p>
         </p:txBody>
       </p:sp>
@@ -11217,6 +11807,7 @@
           <a:lstStyle/>
           <a:p>
             <a:pPr algn="ctr"/>
+            <a:endParaRPr/>
           </a:p>
         </p:txBody>
       </p:sp>
@@ -11317,6 +11908,7 @@
                 <a:latin typeface="Consolas"/>
               </a:defRPr>
             </a:pPr>
+            <a:endParaRPr/>
           </a:p>
           <a:p>
             <a:pPr>
@@ -11345,7 +11937,6 @@
                 </a:solidFill>
                 <a:latin typeface="Consolas"/>
               </a:defRPr>
-              <a:shd fill="FFF7E6"/>
             </a:pPr>
             <a:r>
               <a:t>  SELECT stock, status</a:t>
@@ -11362,7 +11953,6 @@
                 </a:solidFill>
                 <a:latin typeface="Consolas"/>
               </a:defRPr>
-              <a:shd fill="FFF7E6"/>
             </a:pPr>
             <a:r>
               <a:t>  INTO v_stock, v_status</a:t>
@@ -11379,7 +11969,6 @@
                 </a:solidFill>
                 <a:latin typeface="Consolas"/>
               </a:defRPr>
-              <a:shd fill="FFF7E6"/>
             </a:pPr>
             <a:r>
               <a:t>  FROM dishes</a:t>
@@ -11396,7 +11985,6 @@
                 </a:solidFill>
                 <a:latin typeface="Consolas"/>
               </a:defRPr>
-              <a:shd fill="FFF7E6"/>
             </a:pPr>
             <a:r>
               <a:t>  WHERE dish_id = NEW.dish_id</a:t>
@@ -11413,7 +12001,6 @@
                 </a:solidFill>
                 <a:latin typeface="Consolas"/>
               </a:defRPr>
-              <a:shd fill="FFF7E6"/>
             </a:pPr>
             <a:r>
               <a:t>  FOR UPDATE;</a:t>
@@ -11431,6 +12018,7 @@
                 <a:latin typeface="Consolas"/>
               </a:defRPr>
             </a:pPr>
+            <a:endParaRPr/>
           </a:p>
           <a:p>
             <a:pPr>
@@ -11524,6 +12112,7 @@
                 <a:latin typeface="Consolas"/>
               </a:defRPr>
             </a:pPr>
+            <a:endParaRPr/>
           </a:p>
           <a:p>
             <a:pPr>
@@ -11775,6 +12364,7 @@
                 <a:latin typeface="微软雅黑"/>
               </a:defRPr>
             </a:pPr>
+            <a:endParaRPr/>
           </a:p>
           <a:p>
             <a:pPr>
@@ -11836,6 +12426,7 @@
                 <a:latin typeface="微软雅黑"/>
               </a:defRPr>
             </a:pPr>
+            <a:endParaRPr/>
           </a:p>
           <a:p>
             <a:pPr>
@@ -11912,7 +12503,7 @@
 </file>
 
 <file path=ppt/slides/slide22.xml><?xml version="1.0" encoding="utf-8"?>
-<p:sld xmlns:a="http://schemas.openxmlformats.org/drawingml/2006/main" xmlns:p="http://schemas.openxmlformats.org/presentationml/2006/main" xmlns:r="http://schemas.openxmlformats.org/officeDocument/2006/relationships">
+<p:sld xmlns:a="http://schemas.openxmlformats.org/drawingml/2006/main" xmlns:r="http://schemas.openxmlformats.org/officeDocument/2006/relationships" xmlns:p="http://schemas.openxmlformats.org/presentationml/2006/main">
   <p:cSld>
     <p:spTree>
       <p:nvGrpSpPr>
@@ -11920,7 +12511,14 @@
         <p:cNvGrpSpPr/>
         <p:nvPr/>
       </p:nvGrpSpPr>
-      <p:grpSpPr/>
+      <p:grpSpPr>
+        <a:xfrm>
+          <a:off x="0" y="0"/>
+          <a:ext cx="0" cy="0"/>
+          <a:chOff x="0" y="0"/>
+          <a:chExt cx="0" cy="0"/>
+        </a:xfrm>
+      </p:grpSpPr>
       <p:sp>
         <p:nvSpPr>
           <p:cNvPr id="2" name="Rectangle 1"/>
@@ -11961,6 +12559,7 @@
           <a:lstStyle/>
           <a:p>
             <a:pPr algn="ctr"/>
+            <a:endParaRPr/>
           </a:p>
         </p:txBody>
       </p:sp>
@@ -12078,6 +12677,7 @@
           <a:lstStyle/>
           <a:p>
             <a:pPr algn="ctr"/>
+            <a:endParaRPr/>
           </a:p>
         </p:txBody>
       </p:sp>
@@ -12178,6 +12778,7 @@
                 <a:latin typeface="Consolas"/>
               </a:defRPr>
             </a:pPr>
+            <a:endParaRPr/>
           </a:p>
           <a:p>
             <a:pPr>
@@ -12190,7 +12791,6 @@
                 </a:solidFill>
                 <a:latin typeface="Consolas"/>
               </a:defRPr>
-              <a:shd fill="FFF7E6"/>
             </a:pPr>
             <a:r>
               <a:t>  UPDATE dishes</a:t>
@@ -12207,7 +12807,6 @@
                 </a:solidFill>
                 <a:latin typeface="Consolas"/>
               </a:defRPr>
-              <a:shd fill="FFF7E6"/>
             </a:pPr>
             <a:r>
               <a:t>  SET stock = stock - NEW.quantity</a:t>
@@ -12224,7 +12823,6 @@
                 </a:solidFill>
                 <a:latin typeface="Consolas"/>
               </a:defRPr>
-              <a:shd fill="FFF7E6"/>
             </a:pPr>
             <a:r>
               <a:t>  WHERE dish_id = NEW.dish_id;</a:t>
@@ -12242,6 +12840,7 @@
                 <a:latin typeface="Consolas"/>
               </a:defRPr>
             </a:pPr>
+            <a:endParaRPr/>
           </a:p>
           <a:p>
             <a:pPr>
@@ -12496,7 +13095,7 @@
 </file>
 
 <file path=ppt/slides/slide23.xml><?xml version="1.0" encoding="utf-8"?>
-<p:sld xmlns:a="http://schemas.openxmlformats.org/drawingml/2006/main" xmlns:p="http://schemas.openxmlformats.org/presentationml/2006/main" xmlns:r="http://schemas.openxmlformats.org/officeDocument/2006/relationships">
+<p:sld xmlns:a="http://schemas.openxmlformats.org/drawingml/2006/main" xmlns:r="http://schemas.openxmlformats.org/officeDocument/2006/relationships" xmlns:p="http://schemas.openxmlformats.org/presentationml/2006/main">
   <p:cSld>
     <p:spTree>
       <p:nvGrpSpPr>
@@ -12504,7 +13103,14 @@
         <p:cNvGrpSpPr/>
         <p:nvPr/>
       </p:nvGrpSpPr>
-      <p:grpSpPr/>
+      <p:grpSpPr>
+        <a:xfrm>
+          <a:off x="0" y="0"/>
+          <a:ext cx="0" cy="0"/>
+          <a:chOff x="0" y="0"/>
+          <a:chExt cx="0" cy="0"/>
+        </a:xfrm>
+      </p:grpSpPr>
       <p:sp>
         <p:nvSpPr>
           <p:cNvPr id="2" name="Rectangle 1"/>
@@ -12545,6 +13151,7 @@
           <a:lstStyle/>
           <a:p>
             <a:pPr algn="ctr"/>
+            <a:endParaRPr/>
           </a:p>
         </p:txBody>
       </p:sp>
@@ -12701,6 +13308,7 @@
           <a:lstStyle/>
           <a:p>
             <a:pPr algn="ctr"/>
+            <a:endParaRPr/>
           </a:p>
         </p:txBody>
       </p:sp>
@@ -12736,7 +13344,6 @@
                 </a:solidFill>
                 <a:latin typeface="Consolas"/>
               </a:defRPr>
-              <a:shd fill="FFF7E6"/>
             </a:pPr>
             <a:r>
               <a:t>-- Trig 3: BEFORE INSERT 检查</a:t>
@@ -12753,7 +13360,6 @@
                 </a:solidFill>
                 <a:latin typeface="Consolas"/>
               </a:defRPr>
-              <a:shd fill="FFF7E6"/>
             </a:pPr>
             <a:r>
               <a:t>IF NEW.stage1_rider_id IS NOT NULL THEN</a:t>
@@ -12770,7 +13376,6 @@
                 </a:solidFill>
                 <a:latin typeface="Consolas"/>
               </a:defRPr>
-              <a:shd fill="FFF7E6"/>
             </a:pPr>
             <a:r>
               <a:t>  IF NOT EXISTS (</a:t>
@@ -12787,7 +13392,6 @@
                 </a:solidFill>
                 <a:latin typeface="Consolas"/>
               </a:defRPr>
-              <a:shd fill="FFF7E6"/>
             </a:pPr>
             <a:r>
               <a:t>    SELECT 1 FROM riders</a:t>
@@ -12804,7 +13408,6 @@
                 </a:solidFill>
                 <a:latin typeface="Consolas"/>
               </a:defRPr>
-              <a:shd fill="FFF7E6"/>
             </a:pPr>
             <a:r>
               <a:t>    WHERE rider_id = NEW.stage1_rider_id</a:t>
@@ -12821,7 +13424,6 @@
                 </a:solidFill>
                 <a:latin typeface="Consolas"/>
               </a:defRPr>
-              <a:shd fill="FFF7E6"/>
             </a:pPr>
             <a:r>
               <a:t>      AND rider_type = 'Stage1_Trunk'</a:t>
@@ -12838,7 +13440,6 @@
                 </a:solidFill>
                 <a:latin typeface="Consolas"/>
               </a:defRPr>
-              <a:shd fill="FFF7E6"/>
             </a:pPr>
             <a:r>
               <a:t>  ) THEN</a:t>
@@ -12855,7 +13456,6 @@
                 </a:solidFill>
                 <a:latin typeface="Consolas"/>
               </a:defRPr>
-              <a:shd fill="FFF7E6"/>
             </a:pPr>
             <a:r>
               <a:t>    SIGNAL '干线骑手必须是Stage1_Trunk!';</a:t>
@@ -12872,7 +13472,6 @@
                 </a:solidFill>
                 <a:latin typeface="Consolas"/>
               </a:defRPr>
-              <a:shd fill="FFF7E6"/>
             </a:pPr>
             <a:r>
               <a:t>  END IF;</a:t>
@@ -12922,6 +13521,7 @@
                 <a:latin typeface="Consolas"/>
               </a:defRPr>
             </a:pPr>
+            <a:endParaRPr/>
           </a:p>
           <a:p>
             <a:pPr>
@@ -12950,7 +13550,6 @@
                 </a:solidFill>
                 <a:latin typeface="Consolas"/>
               </a:defRPr>
-              <a:shd fill="FFF7E6"/>
             </a:pPr>
             <a:r>
               <a:t>-- 仅在骑手ID发生变化时触发（性能优化）</a:t>
@@ -12967,7 +13566,6 @@
                 </a:solidFill>
                 <a:latin typeface="Consolas"/>
               </a:defRPr>
-              <a:shd fill="FFF7E6"/>
             </a:pPr>
             <a:r>
               <a:t>IF NEW.stage1_rider_id != OLD.stage1_rider_id</a:t>
@@ -12984,7 +13582,6 @@
                 </a:solidFill>
                 <a:latin typeface="Consolas"/>
               </a:defRPr>
-              <a:shd fill="FFF7E6"/>
             </a:pPr>
             <a:r>
               <a:t>   OR OLD.stage1_rider_id IS NULL THEN</a:t>
@@ -13001,7 +13598,6 @@
                 </a:solidFill>
                 <a:latin typeface="Consolas"/>
               </a:defRPr>
-              <a:shd fill="FFF7E6"/>
             </a:pPr>
             <a:r>
               <a:t>  -- 同 #3 的检查逻辑</a:t>
@@ -13145,6 +13741,7 @@
                 <a:latin typeface="微软雅黑"/>
               </a:defRPr>
             </a:pPr>
+            <a:endParaRPr/>
           </a:p>
           <a:p>
             <a:pPr>
@@ -13222,6 +13819,7 @@
                 <a:latin typeface="微软雅黑"/>
               </a:defRPr>
             </a:pPr>
+            <a:endParaRPr/>
           </a:p>
           <a:p>
             <a:pPr>
@@ -13298,7 +13896,7 @@
 </file>
 
 <file path=ppt/slides/slide24.xml><?xml version="1.0" encoding="utf-8"?>
-<p:sld xmlns:a="http://schemas.openxmlformats.org/drawingml/2006/main" xmlns:p="http://schemas.openxmlformats.org/presentationml/2006/main" xmlns:r="http://schemas.openxmlformats.org/officeDocument/2006/relationships">
+<p:sld xmlns:a="http://schemas.openxmlformats.org/drawingml/2006/main" xmlns:r="http://schemas.openxmlformats.org/officeDocument/2006/relationships" xmlns:p="http://schemas.openxmlformats.org/presentationml/2006/main">
   <p:cSld>
     <p:spTree>
       <p:nvGrpSpPr>
@@ -13306,7 +13904,14 @@
         <p:cNvGrpSpPr/>
         <p:nvPr/>
       </p:nvGrpSpPr>
-      <p:grpSpPr/>
+      <p:grpSpPr>
+        <a:xfrm>
+          <a:off x="0" y="0"/>
+          <a:ext cx="0" cy="0"/>
+          <a:chOff x="0" y="0"/>
+          <a:chExt cx="0" cy="0"/>
+        </a:xfrm>
+      </p:grpSpPr>
       <p:sp>
         <p:nvSpPr>
           <p:cNvPr id="2" name="Rectangle 1"/>
@@ -13347,6 +13952,7 @@
           <a:lstStyle/>
           <a:p>
             <a:pPr algn="ctr"/>
+            <a:endParaRPr/>
           </a:p>
         </p:txBody>
       </p:sp>
@@ -13441,10 +14047,34 @@
                 <a:tableStyleId>{5C22544A-7EE6-4342-B048-85BDC9FD1C3A}</a:tableStyleId>
               </a:tblPr>
               <a:tblGrid>
-                <a:gridCol w="2011680"/>
-                <a:gridCol w="3200400"/>
-                <a:gridCol w="2743200"/>
-                <a:gridCol w="3200400"/>
+                <a:gridCol w="2011680">
+                  <a:extLst>
+                    <a:ext uri="{9D8B030D-6E8A-4147-A177-3AD203B41FA5}">
+                      <a16:colId xmlns:a16="http://schemas.microsoft.com/office/drawing/2014/main" val="20000"/>
+                    </a:ext>
+                  </a:extLst>
+                </a:gridCol>
+                <a:gridCol w="3200400">
+                  <a:extLst>
+                    <a:ext uri="{9D8B030D-6E8A-4147-A177-3AD203B41FA5}">
+                      <a16:colId xmlns:a16="http://schemas.microsoft.com/office/drawing/2014/main" val="20001"/>
+                    </a:ext>
+                  </a:extLst>
+                </a:gridCol>
+                <a:gridCol w="2743200">
+                  <a:extLst>
+                    <a:ext uri="{9D8B030D-6E8A-4147-A177-3AD203B41FA5}">
+                      <a16:colId xmlns:a16="http://schemas.microsoft.com/office/drawing/2014/main" val="20002"/>
+                    </a:ext>
+                  </a:extLst>
+                </a:gridCol>
+                <a:gridCol w="3200400">
+                  <a:extLst>
+                    <a:ext uri="{9D8B030D-6E8A-4147-A177-3AD203B41FA5}">
+                      <a16:colId xmlns:a16="http://schemas.microsoft.com/office/drawing/2014/main" val="20003"/>
+                    </a:ext>
+                  </a:extLst>
+                </a:gridCol>
               </a:tblGrid>
               <a:tr h="347472">
                 <a:tc>
@@ -13543,6 +14173,11 @@
                     </a:solidFill>
                   </a:tcPr>
                 </a:tc>
+                <a:extLst>
+                  <a:ext uri="{0D108BD9-81ED-4DB2-BD59-A6C34878D82A}">
+                    <a16:rowId xmlns:a16="http://schemas.microsoft.com/office/drawing/2014/main" val="10000"/>
+                  </a:ext>
+                </a:extLst>
               </a:tr>
               <a:tr h="347472">
                 <a:tc>
@@ -13641,6 +14276,11 @@
                     </a:solidFill>
                   </a:tcPr>
                 </a:tc>
+                <a:extLst>
+                  <a:ext uri="{0D108BD9-81ED-4DB2-BD59-A6C34878D82A}">
+                    <a16:rowId xmlns:a16="http://schemas.microsoft.com/office/drawing/2014/main" val="10001"/>
+                  </a:ext>
+                </a:extLst>
               </a:tr>
               <a:tr h="347472">
                 <a:tc>
@@ -13723,6 +14363,11 @@
                   </a:txBody>
                   <a:tcPr/>
                 </a:tc>
+                <a:extLst>
+                  <a:ext uri="{0D108BD9-81ED-4DB2-BD59-A6C34878D82A}">
+                    <a16:rowId xmlns:a16="http://schemas.microsoft.com/office/drawing/2014/main" val="10002"/>
+                  </a:ext>
+                </a:extLst>
               </a:tr>
               <a:tr h="347472">
                 <a:tc>
@@ -13821,6 +14466,11 @@
                     </a:solidFill>
                   </a:tcPr>
                 </a:tc>
+                <a:extLst>
+                  <a:ext uri="{0D108BD9-81ED-4DB2-BD59-A6C34878D82A}">
+                    <a16:rowId xmlns:a16="http://schemas.microsoft.com/office/drawing/2014/main" val="10003"/>
+                  </a:ext>
+                </a:extLst>
               </a:tr>
               <a:tr h="347472">
                 <a:tc>
@@ -13903,6 +14553,11 @@
                   </a:txBody>
                   <a:tcPr/>
                 </a:tc>
+                <a:extLst>
+                  <a:ext uri="{0D108BD9-81ED-4DB2-BD59-A6C34878D82A}">
+                    <a16:rowId xmlns:a16="http://schemas.microsoft.com/office/drawing/2014/main" val="10004"/>
+                  </a:ext>
+                </a:extLst>
               </a:tr>
               <a:tr h="347472">
                 <a:tc>
@@ -14001,6 +14656,11 @@
                     </a:solidFill>
                   </a:tcPr>
                 </a:tc>
+                <a:extLst>
+                  <a:ext uri="{0D108BD9-81ED-4DB2-BD59-A6C34878D82A}">
+                    <a16:rowId xmlns:a16="http://schemas.microsoft.com/office/drawing/2014/main" val="10005"/>
+                  </a:ext>
+                </a:extLst>
               </a:tr>
             </a:tbl>
           </a:graphicData>
@@ -14087,6 +14747,7 @@
           <a:lstStyle/>
           <a:p>
             <a:pPr algn="ctr"/>
+            <a:endParaRPr/>
           </a:p>
         </p:txBody>
       </p:sp>
@@ -14138,7 +14799,6 @@
                 </a:solidFill>
                 <a:latin typeface="Consolas"/>
               </a:defRPr>
-              <a:shd fill="FFF7E6"/>
             </a:pPr>
             <a:r>
               <a:t>IF NEW.order_status = 'Arrived_At_Point' AND OLD.stage1_rider_id IS NOT NULL THEN</a:t>
@@ -14155,7 +14815,6 @@
                 </a:solidFill>
                 <a:latin typeface="Consolas"/>
               </a:defRPr>
-              <a:shd fill="FFF7E6"/>
             </a:pPr>
             <a:r>
               <a:t>  UPDATE riders SET status = 'Idle' WHERE rider_id = OLD.stage1_rider_id;</a:t>
@@ -14172,7 +14831,6 @@
                 </a:solidFill>
                 <a:latin typeface="Consolas"/>
               </a:defRPr>
-              <a:shd fill="FFF7E6"/>
             </a:pPr>
             <a:r>
               <a:t>END IF;</a:t>
@@ -14189,7 +14847,6 @@
                 </a:solidFill>
                 <a:latin typeface="Consolas"/>
               </a:defRPr>
-              <a:shd fill="FFF7E6"/>
             </a:pPr>
             <a:r>
               <a:t>IF NEW.order_status = 'Completed' AND OLD.stage2_rider_id IS NOT NULL THEN</a:t>
@@ -14206,7 +14863,6 @@
                 </a:solidFill>
                 <a:latin typeface="Consolas"/>
               </a:defRPr>
-              <a:shd fill="FFF7E6"/>
             </a:pPr>
             <a:r>
               <a:t>  UPDATE riders SET status = 'Idle' WHERE rider_id = OLD.stage2_rider_id;</a:t>
@@ -14223,7 +14879,6 @@
                 </a:solidFill>
                 <a:latin typeface="Consolas"/>
               </a:defRPr>
-              <a:shd fill="FFF7E6"/>
             </a:pPr>
             <a:r>
               <a:t>END IF;</a:t>
@@ -14256,7 +14911,7 @@
 </file>
 
 <file path=ppt/slides/slide25.xml><?xml version="1.0" encoding="utf-8"?>
-<p:sld xmlns:a="http://schemas.openxmlformats.org/drawingml/2006/main" xmlns:p="http://schemas.openxmlformats.org/presentationml/2006/main" xmlns:r="http://schemas.openxmlformats.org/officeDocument/2006/relationships">
+<p:sld xmlns:a="http://schemas.openxmlformats.org/drawingml/2006/main" xmlns:r="http://schemas.openxmlformats.org/officeDocument/2006/relationships" xmlns:p="http://schemas.openxmlformats.org/presentationml/2006/main">
   <p:cSld>
     <p:spTree>
       <p:nvGrpSpPr>
@@ -14264,7 +14919,14 @@
         <p:cNvGrpSpPr/>
         <p:nvPr/>
       </p:nvGrpSpPr>
-      <p:grpSpPr/>
+      <p:grpSpPr>
+        <a:xfrm>
+          <a:off x="0" y="0"/>
+          <a:ext cx="0" cy="0"/>
+          <a:chOff x="0" y="0"/>
+          <a:chExt cx="0" cy="0"/>
+        </a:xfrm>
+      </p:grpSpPr>
       <p:sp>
         <p:nvSpPr>
           <p:cNvPr id="2" name="Rectangle 1"/>
@@ -14305,6 +14967,7 @@
           <a:lstStyle/>
           <a:p>
             <a:pPr algn="ctr"/>
+            <a:endParaRPr/>
           </a:p>
         </p:txBody>
       </p:sp>
@@ -14461,6 +15124,7 @@
           <a:lstStyle/>
           <a:p>
             <a:pPr algn="ctr"/>
+            <a:endParaRPr/>
           </a:p>
         </p:txBody>
       </p:sp>
@@ -14561,6 +15225,7 @@
                 <a:latin typeface="Consolas"/>
               </a:defRPr>
             </a:pPr>
+            <a:endParaRPr/>
           </a:p>
           <a:p>
             <a:pPr>
@@ -14589,7 +15254,6 @@
                 </a:solidFill>
                 <a:latin typeface="Consolas"/>
               </a:defRPr>
-              <a:shd fill="FFF7E6"/>
             </a:pPr>
             <a:r>
               <a:t>  SELECT current_packages, capacity</a:t>
@@ -14606,7 +15270,6 @@
                 </a:solidFill>
                 <a:latin typeface="Consolas"/>
               </a:defRPr>
-              <a:shd fill="FFF7E6"/>
             </a:pPr>
             <a:r>
               <a:t>  INTO v_pt_current, v_pt_capacity</a:t>
@@ -14623,7 +15286,6 @@
                 </a:solidFill>
                 <a:latin typeface="Consolas"/>
               </a:defRPr>
-              <a:shd fill="FFF7E6"/>
             </a:pPr>
             <a:r>
               <a:t>  FROM pickup_points</a:t>
@@ -14640,7 +15302,6 @@
                 </a:solidFill>
                 <a:latin typeface="Consolas"/>
               </a:defRPr>
-              <a:shd fill="FFF7E6"/>
             </a:pPr>
             <a:r>
               <a:t>  WHERE point_id = NEW.pickup_point_id</a:t>
@@ -14657,7 +15318,6 @@
                 </a:solidFill>
                 <a:latin typeface="Consolas"/>
               </a:defRPr>
-              <a:shd fill="FFF7E6"/>
             </a:pPr>
             <a:r>
               <a:t>  FOR UPDATE;</a:t>
@@ -14675,6 +15335,7 @@
                 <a:latin typeface="Consolas"/>
               </a:defRPr>
             </a:pPr>
+            <a:endParaRPr/>
           </a:p>
           <a:p>
             <a:pPr>
@@ -14687,7 +15348,6 @@
                 </a:solidFill>
                 <a:latin typeface="Consolas"/>
               </a:defRPr>
-              <a:shd fill="FFF7E6"/>
             </a:pPr>
             <a:r>
               <a:t>  IF v_pt_current &gt;= v_pt_capacity THEN</a:t>
@@ -14704,7 +15364,6 @@
                 </a:solidFill>
                 <a:latin typeface="Consolas"/>
               </a:defRPr>
-              <a:shd fill="FFF7E6"/>
             </a:pPr>
             <a:r>
               <a:t>    SIGNAL '45000'</a:t>
@@ -14721,7 +15380,6 @@
                 </a:solidFill>
                 <a:latin typeface="Consolas"/>
               </a:defRPr>
-              <a:shd fill="FFF7E6"/>
             </a:pPr>
             <a:r>
               <a:t>      SET MESSAGE_TEXT = '寄存点已满！'</a:t>
@@ -14842,6 +15500,7 @@
           <a:lstStyle/>
           <a:p>
             <a:pPr algn="ctr"/>
+            <a:endParaRPr/>
           </a:p>
         </p:txBody>
       </p:sp>
@@ -14997,6 +15656,7 @@
           <a:lstStyle/>
           <a:p>
             <a:pPr algn="ctr"/>
+            <a:endParaRPr/>
           </a:p>
         </p:txBody>
       </p:sp>
@@ -15158,7 +15818,7 @@
 </file>
 
 <file path=ppt/slides/slide26.xml><?xml version="1.0" encoding="utf-8"?>
-<p:sld xmlns:a="http://schemas.openxmlformats.org/drawingml/2006/main" xmlns:p="http://schemas.openxmlformats.org/presentationml/2006/main" xmlns:r="http://schemas.openxmlformats.org/officeDocument/2006/relationships">
+<p:sld xmlns:a="http://schemas.openxmlformats.org/drawingml/2006/main" xmlns:r="http://schemas.openxmlformats.org/officeDocument/2006/relationships" xmlns:p="http://schemas.openxmlformats.org/presentationml/2006/main">
   <p:cSld>
     <p:spTree>
       <p:nvGrpSpPr>
@@ -15166,7 +15826,14 @@
         <p:cNvGrpSpPr/>
         <p:nvPr/>
       </p:nvGrpSpPr>
-      <p:grpSpPr/>
+      <p:grpSpPr>
+        <a:xfrm>
+          <a:off x="0" y="0"/>
+          <a:ext cx="0" cy="0"/>
+          <a:chOff x="0" y="0"/>
+          <a:chExt cx="0" cy="0"/>
+        </a:xfrm>
+      </p:grpSpPr>
       <p:sp>
         <p:nvSpPr>
           <p:cNvPr id="2" name="Rectangle 1"/>
@@ -15207,6 +15874,7 @@
           <a:lstStyle/>
           <a:p>
             <a:pPr algn="ctr"/>
+            <a:endParaRPr/>
           </a:p>
         </p:txBody>
       </p:sp>
@@ -15301,12 +15969,48 @@
                 <a:tableStyleId>{5C22544A-7EE6-4342-B048-85BDC9FD1C3A}</a:tableStyleId>
               </a:tblPr>
               <a:tblGrid>
-                <a:gridCol w="365760"/>
-                <a:gridCol w="2286000"/>
-                <a:gridCol w="1280160"/>
-                <a:gridCol w="1280160"/>
-                <a:gridCol w="1280160"/>
-                <a:gridCol w="4572000"/>
+                <a:gridCol w="365760">
+                  <a:extLst>
+                    <a:ext uri="{9D8B030D-6E8A-4147-A177-3AD203B41FA5}">
+                      <a16:colId xmlns:a16="http://schemas.microsoft.com/office/drawing/2014/main" val="20000"/>
+                    </a:ext>
+                  </a:extLst>
+                </a:gridCol>
+                <a:gridCol w="2286000">
+                  <a:extLst>
+                    <a:ext uri="{9D8B030D-6E8A-4147-A177-3AD203B41FA5}">
+                      <a16:colId xmlns:a16="http://schemas.microsoft.com/office/drawing/2014/main" val="20001"/>
+                    </a:ext>
+                  </a:extLst>
+                </a:gridCol>
+                <a:gridCol w="1280160">
+                  <a:extLst>
+                    <a:ext uri="{9D8B030D-6E8A-4147-A177-3AD203B41FA5}">
+                      <a16:colId xmlns:a16="http://schemas.microsoft.com/office/drawing/2014/main" val="20002"/>
+                    </a:ext>
+                  </a:extLst>
+                </a:gridCol>
+                <a:gridCol w="1280160">
+                  <a:extLst>
+                    <a:ext uri="{9D8B030D-6E8A-4147-A177-3AD203B41FA5}">
+                      <a16:colId xmlns:a16="http://schemas.microsoft.com/office/drawing/2014/main" val="20003"/>
+                    </a:ext>
+                  </a:extLst>
+                </a:gridCol>
+                <a:gridCol w="1280160">
+                  <a:extLst>
+                    <a:ext uri="{9D8B030D-6E8A-4147-A177-3AD203B41FA5}">
+                      <a16:colId xmlns:a16="http://schemas.microsoft.com/office/drawing/2014/main" val="20004"/>
+                    </a:ext>
+                  </a:extLst>
+                </a:gridCol>
+                <a:gridCol w="4572000">
+                  <a:extLst>
+                    <a:ext uri="{9D8B030D-6E8A-4147-A177-3AD203B41FA5}">
+                      <a16:colId xmlns:a16="http://schemas.microsoft.com/office/drawing/2014/main" val="20005"/>
+                    </a:ext>
+                  </a:extLst>
+                </a:gridCol>
               </a:tblGrid>
               <a:tr h="347472">
                 <a:tc>
@@ -15453,6 +16157,11 @@
                     </a:solidFill>
                   </a:tcPr>
                 </a:tc>
+                <a:extLst>
+                  <a:ext uri="{0D108BD9-81ED-4DB2-BD59-A6C34878D82A}">
+                    <a16:rowId xmlns:a16="http://schemas.microsoft.com/office/drawing/2014/main" val="10000"/>
+                  </a:ext>
+                </a:extLst>
               </a:tr>
               <a:tr h="347472">
                 <a:tc>
@@ -15599,6 +16308,11 @@
                     </a:solidFill>
                   </a:tcPr>
                 </a:tc>
+                <a:extLst>
+                  <a:ext uri="{0D108BD9-81ED-4DB2-BD59-A6C34878D82A}">
+                    <a16:rowId xmlns:a16="http://schemas.microsoft.com/office/drawing/2014/main" val="10001"/>
+                  </a:ext>
+                </a:extLst>
               </a:tr>
               <a:tr h="347472">
                 <a:tc>
@@ -15721,6 +16435,11 @@
                   </a:txBody>
                   <a:tcPr/>
                 </a:tc>
+                <a:extLst>
+                  <a:ext uri="{0D108BD9-81ED-4DB2-BD59-A6C34878D82A}">
+                    <a16:rowId xmlns:a16="http://schemas.microsoft.com/office/drawing/2014/main" val="10002"/>
+                  </a:ext>
+                </a:extLst>
               </a:tr>
               <a:tr h="347472">
                 <a:tc>
@@ -15867,6 +16586,11 @@
                     </a:solidFill>
                   </a:tcPr>
                 </a:tc>
+                <a:extLst>
+                  <a:ext uri="{0D108BD9-81ED-4DB2-BD59-A6C34878D82A}">
+                    <a16:rowId xmlns:a16="http://schemas.microsoft.com/office/drawing/2014/main" val="10003"/>
+                  </a:ext>
+                </a:extLst>
               </a:tr>
               <a:tr h="347472">
                 <a:tc>
@@ -15989,6 +16713,11 @@
                   </a:txBody>
                   <a:tcPr/>
                 </a:tc>
+                <a:extLst>
+                  <a:ext uri="{0D108BD9-81ED-4DB2-BD59-A6C34878D82A}">
+                    <a16:rowId xmlns:a16="http://schemas.microsoft.com/office/drawing/2014/main" val="10004"/>
+                  </a:ext>
+                </a:extLst>
               </a:tr>
               <a:tr h="347472">
                 <a:tc>
@@ -16135,6 +16864,11 @@
                     </a:solidFill>
                   </a:tcPr>
                 </a:tc>
+                <a:extLst>
+                  <a:ext uri="{0D108BD9-81ED-4DB2-BD59-A6C34878D82A}">
+                    <a16:rowId xmlns:a16="http://schemas.microsoft.com/office/drawing/2014/main" val="10005"/>
+                  </a:ext>
+                </a:extLst>
               </a:tr>
               <a:tr h="347472">
                 <a:tc>
@@ -16257,6 +16991,11 @@
                   </a:txBody>
                   <a:tcPr/>
                 </a:tc>
+                <a:extLst>
+                  <a:ext uri="{0D108BD9-81ED-4DB2-BD59-A6C34878D82A}">
+                    <a16:rowId xmlns:a16="http://schemas.microsoft.com/office/drawing/2014/main" val="10006"/>
+                  </a:ext>
+                </a:extLst>
               </a:tr>
               <a:tr h="347472">
                 <a:tc>
@@ -16403,6 +17142,11 @@
                     </a:solidFill>
                   </a:tcPr>
                 </a:tc>
+                <a:extLst>
+                  <a:ext uri="{0D108BD9-81ED-4DB2-BD59-A6C34878D82A}">
+                    <a16:rowId xmlns:a16="http://schemas.microsoft.com/office/drawing/2014/main" val="10007"/>
+                  </a:ext>
+                </a:extLst>
               </a:tr>
             </a:tbl>
           </a:graphicData>
@@ -16456,7 +17200,7 @@
 </file>
 
 <file path=ppt/slides/slide27.xml><?xml version="1.0" encoding="utf-8"?>
-<p:sld xmlns:a="http://schemas.openxmlformats.org/drawingml/2006/main" xmlns:p="http://schemas.openxmlformats.org/presentationml/2006/main" xmlns:r="http://schemas.openxmlformats.org/officeDocument/2006/relationships">
+<p:sld xmlns:a="http://schemas.openxmlformats.org/drawingml/2006/main" xmlns:r="http://schemas.openxmlformats.org/officeDocument/2006/relationships" xmlns:p="http://schemas.openxmlformats.org/presentationml/2006/main">
   <p:cSld>
     <p:spTree>
       <p:nvGrpSpPr>
@@ -16464,7 +17208,14 @@
         <p:cNvGrpSpPr/>
         <p:nvPr/>
       </p:nvGrpSpPr>
-      <p:grpSpPr/>
+      <p:grpSpPr>
+        <a:xfrm>
+          <a:off x="0" y="0"/>
+          <a:ext cx="0" cy="0"/>
+          <a:chOff x="0" y="0"/>
+          <a:chExt cx="0" cy="0"/>
+        </a:xfrm>
+      </p:grpSpPr>
       <p:sp>
         <p:nvSpPr>
           <p:cNvPr id="2" name="Rectangle 1"/>
@@ -16505,6 +17256,7 @@
           <a:lstStyle/>
           <a:p>
             <a:pPr algn="ctr"/>
+            <a:endParaRPr/>
           </a:p>
         </p:txBody>
       </p:sp>
@@ -16622,6 +17374,7 @@
           <a:lstStyle/>
           <a:p>
             <a:pPr algn="ctr"/>
+            <a:endParaRPr/>
           </a:p>
         </p:txBody>
       </p:sp>
@@ -16665,6 +17418,7 @@
           <a:lstStyle/>
           <a:p>
             <a:pPr algn="ctr"/>
+            <a:endParaRPr/>
           </a:p>
         </p:txBody>
       </p:sp>
@@ -16756,6 +17510,7 @@
                 <a:latin typeface="微软雅黑"/>
               </a:defRPr>
             </a:pPr>
+            <a:endParaRPr/>
           </a:p>
           <a:p>
             <a:pPr>
@@ -16821,6 +17576,7 @@
           <a:lstStyle/>
           <a:p>
             <a:pPr algn="ctr"/>
+            <a:endParaRPr/>
           </a:p>
         </p:txBody>
       </p:sp>
@@ -16864,6 +17620,7 @@
           <a:lstStyle/>
           <a:p>
             <a:pPr algn="ctr"/>
+            <a:endParaRPr/>
           </a:p>
         </p:txBody>
       </p:sp>
@@ -16955,6 +17712,7 @@
                 <a:latin typeface="微软雅黑"/>
               </a:defRPr>
             </a:pPr>
+            <a:endParaRPr/>
           </a:p>
           <a:p>
             <a:pPr>
@@ -17020,6 +17778,7 @@
           <a:lstStyle/>
           <a:p>
             <a:pPr algn="ctr"/>
+            <a:endParaRPr/>
           </a:p>
         </p:txBody>
       </p:sp>
@@ -17063,6 +17822,7 @@
           <a:lstStyle/>
           <a:p>
             <a:pPr algn="ctr"/>
+            <a:endParaRPr/>
           </a:p>
         </p:txBody>
       </p:sp>
@@ -17154,6 +17914,7 @@
                 <a:latin typeface="微软雅黑"/>
               </a:defRPr>
             </a:pPr>
+            <a:endParaRPr/>
           </a:p>
           <a:p>
             <a:pPr>
@@ -17219,6 +17980,7 @@
           <a:lstStyle/>
           <a:p>
             <a:pPr algn="ctr"/>
+            <a:endParaRPr/>
           </a:p>
         </p:txBody>
       </p:sp>
@@ -17262,6 +18024,7 @@
           <a:lstStyle/>
           <a:p>
             <a:pPr algn="ctr"/>
+            <a:endParaRPr/>
           </a:p>
         </p:txBody>
       </p:sp>
@@ -17353,6 +18116,7 @@
                 <a:latin typeface="微软雅黑"/>
               </a:defRPr>
             </a:pPr>
+            <a:endParaRPr/>
           </a:p>
           <a:p>
             <a:pPr>
@@ -17428,7 +18192,7 @@
 </file>
 
 <file path=ppt/slides/slide28.xml><?xml version="1.0" encoding="utf-8"?>
-<p:sld xmlns:a="http://schemas.openxmlformats.org/drawingml/2006/main" xmlns:p="http://schemas.openxmlformats.org/presentationml/2006/main" xmlns:r="http://schemas.openxmlformats.org/officeDocument/2006/relationships">
+<p:sld xmlns:a="http://schemas.openxmlformats.org/drawingml/2006/main" xmlns:r="http://schemas.openxmlformats.org/officeDocument/2006/relationships" xmlns:p="http://schemas.openxmlformats.org/presentationml/2006/main">
   <p:cSld>
     <p:spTree>
       <p:nvGrpSpPr>
@@ -17436,7 +18200,14 @@
         <p:cNvGrpSpPr/>
         <p:nvPr/>
       </p:nvGrpSpPr>
-      <p:grpSpPr/>
+      <p:grpSpPr>
+        <a:xfrm>
+          <a:off x="0" y="0"/>
+          <a:ext cx="0" cy="0"/>
+          <a:chOff x="0" y="0"/>
+          <a:chExt cx="0" cy="0"/>
+        </a:xfrm>
+      </p:grpSpPr>
       <p:sp>
         <p:nvSpPr>
           <p:cNvPr id="2" name="Rectangle 1"/>
@@ -17477,6 +18248,7 @@
           <a:lstStyle/>
           <a:p>
             <a:pPr algn="ctr"/>
+            <a:endParaRPr/>
           </a:p>
         </p:txBody>
       </p:sp>
@@ -17633,6 +18405,7 @@
           <a:lstStyle/>
           <a:p>
             <a:pPr algn="ctr"/>
+            <a:endParaRPr/>
           </a:p>
         </p:txBody>
       </p:sp>
@@ -17701,6 +18474,7 @@
                 <a:latin typeface="Consolas"/>
               </a:defRPr>
             </a:pPr>
+            <a:endParaRPr/>
           </a:p>
           <a:p>
             <a:pPr>
@@ -17762,6 +18536,7 @@
                 <a:latin typeface="Consolas"/>
               </a:defRPr>
             </a:pPr>
+            <a:endParaRPr/>
           </a:p>
           <a:p>
             <a:pPr>
@@ -17807,6 +18582,7 @@
                 <a:latin typeface="Consolas"/>
               </a:defRPr>
             </a:pPr>
+            <a:endParaRPr/>
           </a:p>
           <a:p>
             <a:pPr>
@@ -17907,6 +18683,7 @@
           <a:lstStyle/>
           <a:p>
             <a:pPr algn="ctr"/>
+            <a:endParaRPr/>
           </a:p>
         </p:txBody>
       </p:sp>
@@ -17975,6 +18752,7 @@
                 <a:latin typeface="Consolas"/>
               </a:defRPr>
             </a:pPr>
+            <a:endParaRPr/>
           </a:p>
           <a:p>
             <a:pPr>
@@ -18036,6 +18814,7 @@
                 <a:latin typeface="Consolas"/>
               </a:defRPr>
             </a:pPr>
+            <a:endParaRPr/>
           </a:p>
           <a:p>
             <a:pPr>
@@ -18097,6 +18876,7 @@
                 <a:latin typeface="Consolas"/>
               </a:defRPr>
             </a:pPr>
+            <a:endParaRPr/>
           </a:p>
           <a:p>
             <a:pPr>
@@ -18164,7 +18944,7 @@
 </file>
 
 <file path=ppt/slides/slide29.xml><?xml version="1.0" encoding="utf-8"?>
-<p:sld xmlns:a="http://schemas.openxmlformats.org/drawingml/2006/main" xmlns:p="http://schemas.openxmlformats.org/presentationml/2006/main" xmlns:r="http://schemas.openxmlformats.org/officeDocument/2006/relationships">
+<p:sld xmlns:a="http://schemas.openxmlformats.org/drawingml/2006/main" xmlns:r="http://schemas.openxmlformats.org/officeDocument/2006/relationships" xmlns:p="http://schemas.openxmlformats.org/presentationml/2006/main">
   <p:cSld>
     <p:spTree>
       <p:nvGrpSpPr>
@@ -18172,7 +18952,14 @@
         <p:cNvGrpSpPr/>
         <p:nvPr/>
       </p:nvGrpSpPr>
-      <p:grpSpPr/>
+      <p:grpSpPr>
+        <a:xfrm>
+          <a:off x="0" y="0"/>
+          <a:ext cx="0" cy="0"/>
+          <a:chOff x="0" y="0"/>
+          <a:chExt cx="0" cy="0"/>
+        </a:xfrm>
+      </p:grpSpPr>
       <p:sp>
         <p:nvSpPr>
           <p:cNvPr id="2" name="Rectangle 1"/>
@@ -18213,6 +19000,7 @@
           <a:lstStyle/>
           <a:p>
             <a:pPr algn="ctr"/>
+            <a:endParaRPr/>
           </a:p>
         </p:txBody>
       </p:sp>
@@ -18333,7 +19121,7 @@
 </file>
 
 <file path=ppt/slides/slide3.xml><?xml version="1.0" encoding="utf-8"?>
-<p:sld xmlns:a="http://schemas.openxmlformats.org/drawingml/2006/main" xmlns:p="http://schemas.openxmlformats.org/presentationml/2006/main" xmlns:r="http://schemas.openxmlformats.org/officeDocument/2006/relationships">
+<p:sld xmlns:a="http://schemas.openxmlformats.org/drawingml/2006/main" xmlns:r="http://schemas.openxmlformats.org/officeDocument/2006/relationships" xmlns:p="http://schemas.openxmlformats.org/presentationml/2006/main">
   <p:cSld>
     <p:spTree>
       <p:nvGrpSpPr>
@@ -18341,7 +19129,14 @@
         <p:cNvGrpSpPr/>
         <p:nvPr/>
       </p:nvGrpSpPr>
-      <p:grpSpPr/>
+      <p:grpSpPr>
+        <a:xfrm>
+          <a:off x="0" y="0"/>
+          <a:ext cx="0" cy="0"/>
+          <a:chOff x="0" y="0"/>
+          <a:chExt cx="0" cy="0"/>
+        </a:xfrm>
+      </p:grpSpPr>
       <p:sp>
         <p:nvSpPr>
           <p:cNvPr id="2" name="Rectangle 1"/>
@@ -18382,6 +19177,7 @@
           <a:lstStyle/>
           <a:p>
             <a:pPr algn="ctr"/>
+            <a:endParaRPr/>
           </a:p>
         </p:txBody>
       </p:sp>
@@ -18502,7 +19298,7 @@
 </file>
 
 <file path=ppt/slides/slide30.xml><?xml version="1.0" encoding="utf-8"?>
-<p:sld xmlns:a="http://schemas.openxmlformats.org/drawingml/2006/main" xmlns:p="http://schemas.openxmlformats.org/presentationml/2006/main" xmlns:r="http://schemas.openxmlformats.org/officeDocument/2006/relationships">
+<p:sld xmlns:a="http://schemas.openxmlformats.org/drawingml/2006/main" xmlns:r="http://schemas.openxmlformats.org/officeDocument/2006/relationships" xmlns:p="http://schemas.openxmlformats.org/presentationml/2006/main">
   <p:cSld>
     <p:spTree>
       <p:nvGrpSpPr>
@@ -18510,7 +19306,14 @@
         <p:cNvGrpSpPr/>
         <p:nvPr/>
       </p:nvGrpSpPr>
-      <p:grpSpPr/>
+      <p:grpSpPr>
+        <a:xfrm>
+          <a:off x="0" y="0"/>
+          <a:ext cx="0" cy="0"/>
+          <a:chOff x="0" y="0"/>
+          <a:chExt cx="0" cy="0"/>
+        </a:xfrm>
+      </p:grpSpPr>
       <p:sp>
         <p:nvSpPr>
           <p:cNvPr id="2" name="Rectangle 1"/>
@@ -18551,6 +19354,7 @@
           <a:lstStyle/>
           <a:p>
             <a:pPr algn="ctr"/>
+            <a:endParaRPr/>
           </a:p>
         </p:txBody>
       </p:sp>
@@ -19231,6 +20035,7 @@
           <a:lstStyle/>
           <a:p>
             <a:pPr algn="ctr"/>
+            <a:endParaRPr/>
           </a:p>
         </p:txBody>
       </p:sp>
@@ -19282,7 +20087,6 @@
                 </a:solidFill>
                 <a:latin typeface="Consolas"/>
               </a:defRPr>
-              <a:shd fill="FFF7E6"/>
             </a:pPr>
             <a:r>
               <a:t>DECLARE EXIT HANDLER FOR SQLEXCEPTION</a:t>
@@ -19299,7 +20103,6 @@
                 </a:solidFill>
                 <a:latin typeface="Consolas"/>
               </a:defRPr>
-              <a:shd fill="FFF7E6"/>
             </a:pPr>
             <a:r>
               <a:t>BEGIN</a:t>
@@ -19316,7 +20119,6 @@
                 </a:solidFill>
                 <a:latin typeface="Consolas"/>
               </a:defRPr>
-              <a:shd fill="FFF7E6"/>
             </a:pPr>
             <a:r>
               <a:t>  ROLLBACK;  -- 四步全撤</a:t>
@@ -19333,7 +20135,6 @@
                 </a:solidFill>
                 <a:latin typeface="Consolas"/>
               </a:defRPr>
-              <a:shd fill="FFF7E6"/>
             </a:pPr>
             <a:r>
               <a:t>  RESIGNAL;  -- 向上抛错</a:t>
@@ -19367,6 +20168,7 @@
                 <a:latin typeface="Consolas"/>
               </a:defRPr>
             </a:pPr>
+            <a:endParaRPr/>
           </a:p>
           <a:p>
             <a:pPr>
@@ -19395,7 +20197,6 @@
                 </a:solidFill>
                 <a:latin typeface="Consolas"/>
               </a:defRPr>
-              <a:shd fill="FFF7E6"/>
             </a:pPr>
             <a:r>
               <a:t>  -- 四步操作...</a:t>
@@ -19412,7 +20213,6 @@
                 </a:solidFill>
                 <a:latin typeface="Consolas"/>
               </a:defRPr>
-              <a:shd fill="FFF7E6"/>
             </a:pPr>
             <a:r>
               <a:t>COMMIT;  -- 全成功才提交</a:t>
@@ -19520,7 +20320,7 @@
 </file>
 
 <file path=ppt/slides/slide31.xml><?xml version="1.0" encoding="utf-8"?>
-<p:sld xmlns:a="http://schemas.openxmlformats.org/drawingml/2006/main" xmlns:p="http://schemas.openxmlformats.org/presentationml/2006/main" xmlns:r="http://schemas.openxmlformats.org/officeDocument/2006/relationships">
+<p:sld xmlns:a="http://schemas.openxmlformats.org/drawingml/2006/main" xmlns:r="http://schemas.openxmlformats.org/officeDocument/2006/relationships" xmlns:p="http://schemas.openxmlformats.org/presentationml/2006/main">
   <p:cSld>
     <p:spTree>
       <p:nvGrpSpPr>
@@ -19528,7 +20328,14 @@
         <p:cNvGrpSpPr/>
         <p:nvPr/>
       </p:nvGrpSpPr>
-      <p:grpSpPr/>
+      <p:grpSpPr>
+        <a:xfrm>
+          <a:off x="0" y="0"/>
+          <a:ext cx="0" cy="0"/>
+          <a:chOff x="0" y="0"/>
+          <a:chExt cx="0" cy="0"/>
+        </a:xfrm>
+      </p:grpSpPr>
       <p:sp>
         <p:nvSpPr>
           <p:cNvPr id="2" name="Rectangle 1"/>
@@ -19569,6 +20376,7 @@
           <a:lstStyle/>
           <a:p>
             <a:pPr algn="ctr"/>
+            <a:endParaRPr/>
           </a:p>
         </p:txBody>
       </p:sp>
@@ -19725,6 +20533,7 @@
           <a:lstStyle/>
           <a:p>
             <a:pPr algn="ctr"/>
+            <a:endParaRPr/>
           </a:p>
         </p:txBody>
       </p:sp>
@@ -19777,6 +20586,7 @@
                 <a:latin typeface="Consolas"/>
               </a:defRPr>
             </a:pPr>
+            <a:endParaRPr/>
           </a:p>
           <a:p>
             <a:pPr>
@@ -19870,6 +20680,7 @@
                 <a:latin typeface="Consolas"/>
               </a:defRPr>
             </a:pPr>
+            <a:endParaRPr/>
           </a:p>
           <a:p>
             <a:pPr>
@@ -19963,6 +20774,7 @@
                 <a:latin typeface="Consolas"/>
               </a:defRPr>
             </a:pPr>
+            <a:endParaRPr/>
           </a:p>
           <a:p>
             <a:pPr>
@@ -20079,6 +20891,7 @@
           <a:lstStyle/>
           <a:p>
             <a:pPr algn="ctr"/>
+            <a:endParaRPr/>
           </a:p>
         </p:txBody>
       </p:sp>
@@ -20131,6 +20944,7 @@
                 <a:latin typeface="Consolas"/>
               </a:defRPr>
             </a:pPr>
+            <a:endParaRPr/>
           </a:p>
           <a:p>
             <a:pPr>
@@ -20208,6 +21022,7 @@
                 <a:latin typeface="Consolas"/>
               </a:defRPr>
             </a:pPr>
+            <a:endParaRPr/>
           </a:p>
           <a:p>
             <a:pPr>
@@ -20285,6 +21100,7 @@
                 <a:latin typeface="Consolas"/>
               </a:defRPr>
             </a:pPr>
+            <a:endParaRPr/>
           </a:p>
           <a:p>
             <a:pPr>
@@ -20424,6 +21240,7 @@
                 <a:latin typeface="微软雅黑"/>
               </a:defRPr>
             </a:pPr>
+            <a:endParaRPr/>
           </a:p>
           <a:p>
             <a:pPr>
@@ -20469,6 +21286,7 @@
                 <a:latin typeface="微软雅黑"/>
               </a:defRPr>
             </a:pPr>
+            <a:endParaRPr/>
           </a:p>
           <a:p>
             <a:pPr>
@@ -20530,6 +21348,7 @@
                 <a:latin typeface="微软雅黑"/>
               </a:defRPr>
             </a:pPr>
+            <a:endParaRPr/>
           </a:p>
           <a:p>
             <a:pPr>
@@ -20575,6 +21394,7 @@
                 <a:latin typeface="微软雅黑"/>
               </a:defRPr>
             </a:pPr>
+            <a:endParaRPr/>
           </a:p>
           <a:p>
             <a:pPr>
@@ -20658,7 +21478,7 @@
 </file>
 
 <file path=ppt/slides/slide32.xml><?xml version="1.0" encoding="utf-8"?>
-<p:sld xmlns:a="http://schemas.openxmlformats.org/drawingml/2006/main" xmlns:p="http://schemas.openxmlformats.org/presentationml/2006/main" xmlns:r="http://schemas.openxmlformats.org/officeDocument/2006/relationships">
+<p:sld xmlns:a="http://schemas.openxmlformats.org/drawingml/2006/main" xmlns:r="http://schemas.openxmlformats.org/officeDocument/2006/relationships" xmlns:p="http://schemas.openxmlformats.org/presentationml/2006/main">
   <p:cSld>
     <p:spTree>
       <p:nvGrpSpPr>
@@ -20666,7 +21486,14 @@
         <p:cNvGrpSpPr/>
         <p:nvPr/>
       </p:nvGrpSpPr>
-      <p:grpSpPr/>
+      <p:grpSpPr>
+        <a:xfrm>
+          <a:off x="0" y="0"/>
+          <a:ext cx="0" cy="0"/>
+          <a:chOff x="0" y="0"/>
+          <a:chExt cx="0" cy="0"/>
+        </a:xfrm>
+      </p:grpSpPr>
       <p:sp>
         <p:nvSpPr>
           <p:cNvPr id="2" name="Rectangle 1"/>
@@ -20707,6 +21534,7 @@
           <a:lstStyle/>
           <a:p>
             <a:pPr algn="ctr"/>
+            <a:endParaRPr/>
           </a:p>
         </p:txBody>
       </p:sp>
@@ -20950,6 +21778,7 @@
                 <a:latin typeface="微软雅黑"/>
               </a:defRPr>
             </a:pPr>
+            <a:endParaRPr/>
           </a:p>
           <a:p>
             <a:pPr>
@@ -21160,7 +21989,7 @@
 </file>
 
 <file path=ppt/slides/slide33.xml><?xml version="1.0" encoding="utf-8"?>
-<p:sld xmlns:a="http://schemas.openxmlformats.org/drawingml/2006/main" xmlns:p="http://schemas.openxmlformats.org/presentationml/2006/main" xmlns:r="http://schemas.openxmlformats.org/officeDocument/2006/relationships">
+<p:sld xmlns:a="http://schemas.openxmlformats.org/drawingml/2006/main" xmlns:r="http://schemas.openxmlformats.org/officeDocument/2006/relationships" xmlns:p="http://schemas.openxmlformats.org/presentationml/2006/main">
   <p:cSld>
     <p:spTree>
       <p:nvGrpSpPr>
@@ -21168,7 +21997,14 @@
         <p:cNvGrpSpPr/>
         <p:nvPr/>
       </p:nvGrpSpPr>
-      <p:grpSpPr/>
+      <p:grpSpPr>
+        <a:xfrm>
+          <a:off x="0" y="0"/>
+          <a:ext cx="0" cy="0"/>
+          <a:chOff x="0" y="0"/>
+          <a:chExt cx="0" cy="0"/>
+        </a:xfrm>
+      </p:grpSpPr>
       <p:sp>
         <p:nvSpPr>
           <p:cNvPr id="2" name="Rectangle 1"/>
@@ -21209,6 +22045,7 @@
           <a:lstStyle/>
           <a:p>
             <a:pPr algn="ctr"/>
+            <a:endParaRPr/>
           </a:p>
         </p:txBody>
       </p:sp>
@@ -21329,7 +22166,7 @@
 </file>
 
 <file path=ppt/slides/slide34.xml><?xml version="1.0" encoding="utf-8"?>
-<p:sld xmlns:a="http://schemas.openxmlformats.org/drawingml/2006/main" xmlns:p="http://schemas.openxmlformats.org/presentationml/2006/main" xmlns:r="http://schemas.openxmlformats.org/officeDocument/2006/relationships">
+<p:sld xmlns:a="http://schemas.openxmlformats.org/drawingml/2006/main" xmlns:r="http://schemas.openxmlformats.org/officeDocument/2006/relationships" xmlns:p="http://schemas.openxmlformats.org/presentationml/2006/main">
   <p:cSld>
     <p:spTree>
       <p:nvGrpSpPr>
@@ -21337,7 +22174,14 @@
         <p:cNvGrpSpPr/>
         <p:nvPr/>
       </p:nvGrpSpPr>
-      <p:grpSpPr/>
+      <p:grpSpPr>
+        <a:xfrm>
+          <a:off x="0" y="0"/>
+          <a:ext cx="0" cy="0"/>
+          <a:chOff x="0" y="0"/>
+          <a:chExt cx="0" cy="0"/>
+        </a:xfrm>
+      </p:grpSpPr>
       <p:sp>
         <p:nvSpPr>
           <p:cNvPr id="2" name="Rectangle 1"/>
@@ -21378,6 +22222,7 @@
           <a:lstStyle/>
           <a:p>
             <a:pPr algn="ctr"/>
+            <a:endParaRPr/>
           </a:p>
         </p:txBody>
       </p:sp>
@@ -21495,6 +22340,7 @@
           <a:lstStyle/>
           <a:p>
             <a:pPr algn="ctr"/>
+            <a:endParaRPr/>
           </a:p>
         </p:txBody>
       </p:sp>
@@ -21881,6 +22727,7 @@
                 <a:latin typeface="微软雅黑"/>
               </a:defRPr>
             </a:pPr>
+            <a:endParaRPr/>
           </a:p>
           <a:p>
             <a:pPr>
@@ -21942,6 +22789,7 @@
                 <a:latin typeface="微软雅黑"/>
               </a:defRPr>
             </a:pPr>
+            <a:endParaRPr/>
           </a:p>
           <a:p>
             <a:pPr>
@@ -22003,6 +22851,7 @@
                 <a:latin typeface="微软雅黑"/>
               </a:defRPr>
             </a:pPr>
+            <a:endParaRPr/>
           </a:p>
           <a:p>
             <a:pPr>
@@ -22048,6 +22897,7 @@
                 <a:latin typeface="微软雅黑"/>
               </a:defRPr>
             </a:pPr>
+            <a:endParaRPr/>
           </a:p>
           <a:p>
             <a:pPr>
@@ -22092,7 +22942,7 @@
 </file>
 
 <file path=ppt/slides/slide35.xml><?xml version="1.0" encoding="utf-8"?>
-<p:sld xmlns:a="http://schemas.openxmlformats.org/drawingml/2006/main" xmlns:p="http://schemas.openxmlformats.org/presentationml/2006/main" xmlns:r="http://schemas.openxmlformats.org/officeDocument/2006/relationships">
+<p:sld xmlns:a="http://schemas.openxmlformats.org/drawingml/2006/main" xmlns:r="http://schemas.openxmlformats.org/officeDocument/2006/relationships" xmlns:p="http://schemas.openxmlformats.org/presentationml/2006/main">
   <p:cSld>
     <p:spTree>
       <p:nvGrpSpPr>
@@ -22100,7 +22950,14 @@
         <p:cNvGrpSpPr/>
         <p:nvPr/>
       </p:nvGrpSpPr>
-      <p:grpSpPr/>
+      <p:grpSpPr>
+        <a:xfrm>
+          <a:off x="0" y="0"/>
+          <a:ext cx="0" cy="0"/>
+          <a:chOff x="0" y="0"/>
+          <a:chExt cx="0" cy="0"/>
+        </a:xfrm>
+      </p:grpSpPr>
       <p:sp>
         <p:nvSpPr>
           <p:cNvPr id="2" name="Rectangle 1"/>
@@ -22141,6 +22998,7 @@
           <a:lstStyle/>
           <a:p>
             <a:pPr algn="ctr"/>
+            <a:endParaRPr/>
           </a:p>
         </p:txBody>
       </p:sp>
@@ -22258,6 +23116,7 @@
           <a:lstStyle/>
           <a:p>
             <a:pPr algn="ctr"/>
+            <a:endParaRPr/>
           </a:p>
         </p:txBody>
       </p:sp>
@@ -22374,6 +23233,7 @@
                 <a:latin typeface="Consolas"/>
               </a:defRPr>
             </a:pPr>
+            <a:endParaRPr/>
           </a:p>
           <a:p>
             <a:pPr>
@@ -22402,7 +23262,6 @@
                 </a:solidFill>
                 <a:latin typeface="Consolas"/>
               </a:defRPr>
-              <a:shd fill="FFF7E6"/>
             </a:pPr>
             <a:r>
               <a:t>    ORDER BY SUM(o.total_amount) DESC</a:t>
@@ -22419,7 +23278,6 @@
                 </a:solidFill>
                 <a:latin typeface="Consolas"/>
               </a:defRPr>
-              <a:shd fill="FFF7E6"/>
             </a:pPr>
             <a:r>
               <a:t>  ) AS sales_rank    -- ★ 窗口函数</a:t>
@@ -22436,8 +23294,8 @@
                 </a:solidFill>
                 <a:latin typeface="Consolas"/>
               </a:defRPr>
-              <a:shd fill="FFF7E6"/>
-            </a:pPr>
+            </a:pPr>
+            <a:endParaRPr/>
           </a:p>
           <a:p>
             <a:pPr>
@@ -22625,6 +23483,7 @@
                 <a:latin typeface="微软雅黑"/>
               </a:defRPr>
             </a:pPr>
+            <a:endParaRPr/>
           </a:p>
           <a:p>
             <a:pPr>
@@ -22686,6 +23545,7 @@
                 <a:latin typeface="微软雅黑"/>
               </a:defRPr>
             </a:pPr>
+            <a:endParaRPr/>
           </a:p>
           <a:p>
             <a:pPr>
@@ -22747,6 +23607,7 @@
                 <a:latin typeface="微软雅黑"/>
               </a:defRPr>
             </a:pPr>
+            <a:endParaRPr/>
           </a:p>
           <a:p>
             <a:pPr>
@@ -22823,7 +23684,7 @@
 </file>
 
 <file path=ppt/slides/slide36.xml><?xml version="1.0" encoding="utf-8"?>
-<p:sld xmlns:a="http://schemas.openxmlformats.org/drawingml/2006/main" xmlns:p="http://schemas.openxmlformats.org/presentationml/2006/main" xmlns:r="http://schemas.openxmlformats.org/officeDocument/2006/relationships">
+<p:sld xmlns:a="http://schemas.openxmlformats.org/drawingml/2006/main" xmlns:r="http://schemas.openxmlformats.org/officeDocument/2006/relationships" xmlns:p="http://schemas.openxmlformats.org/presentationml/2006/main">
   <p:cSld>
     <p:spTree>
       <p:nvGrpSpPr>
@@ -22831,7 +23692,14 @@
         <p:cNvGrpSpPr/>
         <p:nvPr/>
       </p:nvGrpSpPr>
-      <p:grpSpPr/>
+      <p:grpSpPr>
+        <a:xfrm>
+          <a:off x="0" y="0"/>
+          <a:ext cx="0" cy="0"/>
+          <a:chOff x="0" y="0"/>
+          <a:chExt cx="0" cy="0"/>
+        </a:xfrm>
+      </p:grpSpPr>
       <p:sp>
         <p:nvSpPr>
           <p:cNvPr id="2" name="Rectangle 1"/>
@@ -22872,6 +23740,7 @@
           <a:lstStyle/>
           <a:p>
             <a:pPr algn="ctr"/>
+            <a:endParaRPr/>
           </a:p>
         </p:txBody>
       </p:sp>
@@ -22957,7 +23826,7 @@
         </p:nvGraphicFramePr>
         <p:xfrm>
           <a:off x="457200" y="1188720"/>
-          <a:ext cx="10972800" cy="1389888"/>
+          <a:ext cx="10972800" cy="2084832"/>
         </p:xfrm>
         <a:graphic>
           <a:graphicData uri="http://schemas.openxmlformats.org/drawingml/2006/table">
@@ -22966,9 +23835,27 @@
                 <a:tableStyleId>{5C22544A-7EE6-4342-B048-85BDC9FD1C3A}</a:tableStyleId>
               </a:tblPr>
               <a:tblGrid>
-                <a:gridCol w="2743200"/>
-                <a:gridCol w="5029200"/>
-                <a:gridCol w="3200400"/>
+                <a:gridCol w="2743200">
+                  <a:extLst>
+                    <a:ext uri="{9D8B030D-6E8A-4147-A177-3AD203B41FA5}">
+                      <a16:colId xmlns:a16="http://schemas.microsoft.com/office/drawing/2014/main" val="20000"/>
+                    </a:ext>
+                  </a:extLst>
+                </a:gridCol>
+                <a:gridCol w="5029200">
+                  <a:extLst>
+                    <a:ext uri="{9D8B030D-6E8A-4147-A177-3AD203B41FA5}">
+                      <a16:colId xmlns:a16="http://schemas.microsoft.com/office/drawing/2014/main" val="20001"/>
+                    </a:ext>
+                  </a:extLst>
+                </a:gridCol>
+                <a:gridCol w="3200400">
+                  <a:extLst>
+                    <a:ext uri="{9D8B030D-6E8A-4147-A177-3AD203B41FA5}">
+                      <a16:colId xmlns:a16="http://schemas.microsoft.com/office/drawing/2014/main" val="20002"/>
+                    </a:ext>
+                  </a:extLst>
+                </a:gridCol>
               </a:tblGrid>
               <a:tr h="347472">
                 <a:tc>
@@ -23043,6 +23930,11 @@
                     </a:solidFill>
                   </a:tcPr>
                 </a:tc>
+                <a:extLst>
+                  <a:ext uri="{0D108BD9-81ED-4DB2-BD59-A6C34878D82A}">
+                    <a16:rowId xmlns:a16="http://schemas.microsoft.com/office/drawing/2014/main" val="10000"/>
+                  </a:ext>
+                </a:extLst>
               </a:tr>
               <a:tr h="347472">
                 <a:tc>
@@ -23143,6 +24035,11 @@
                     </a:solidFill>
                   </a:tcPr>
                 </a:tc>
+                <a:extLst>
+                  <a:ext uri="{0D108BD9-81ED-4DB2-BD59-A6C34878D82A}">
+                    <a16:rowId xmlns:a16="http://schemas.microsoft.com/office/drawing/2014/main" val="10001"/>
+                  </a:ext>
+                </a:extLst>
               </a:tr>
               <a:tr h="347472">
                 <a:tc>
@@ -23231,6 +24128,11 @@
                   </a:txBody>
                   <a:tcPr/>
                 </a:tc>
+                <a:extLst>
+                  <a:ext uri="{0D108BD9-81ED-4DB2-BD59-A6C34878D82A}">
+                    <a16:rowId xmlns:a16="http://schemas.microsoft.com/office/drawing/2014/main" val="10002"/>
+                  </a:ext>
+                </a:extLst>
               </a:tr>
               <a:tr h="347472">
                 <a:tc>
@@ -23318,6 +24220,11 @@
                     </a:solidFill>
                   </a:tcPr>
                 </a:tc>
+                <a:extLst>
+                  <a:ext uri="{0D108BD9-81ED-4DB2-BD59-A6C34878D82A}">
+                    <a16:rowId xmlns:a16="http://schemas.microsoft.com/office/drawing/2014/main" val="10003"/>
+                  </a:ext>
+                </a:extLst>
               </a:tr>
             </a:tbl>
           </a:graphicData>
@@ -23458,7 +24365,7 @@
 </file>
 
 <file path=ppt/slides/slide37.xml><?xml version="1.0" encoding="utf-8"?>
-<p:sld xmlns:a="http://schemas.openxmlformats.org/drawingml/2006/main" xmlns:p="http://schemas.openxmlformats.org/presentationml/2006/main" xmlns:r="http://schemas.openxmlformats.org/officeDocument/2006/relationships">
+<p:sld xmlns:a="http://schemas.openxmlformats.org/drawingml/2006/main" xmlns:r="http://schemas.openxmlformats.org/officeDocument/2006/relationships" xmlns:p="http://schemas.openxmlformats.org/presentationml/2006/main">
   <p:cSld>
     <p:spTree>
       <p:nvGrpSpPr>
@@ -23466,7 +24373,14 @@
         <p:cNvGrpSpPr/>
         <p:nvPr/>
       </p:nvGrpSpPr>
-      <p:grpSpPr/>
+      <p:grpSpPr>
+        <a:xfrm>
+          <a:off x="0" y="0"/>
+          <a:ext cx="0" cy="0"/>
+          <a:chOff x="0" y="0"/>
+          <a:chExt cx="0" cy="0"/>
+        </a:xfrm>
+      </p:grpSpPr>
       <p:sp>
         <p:nvSpPr>
           <p:cNvPr id="2" name="Rectangle 1"/>
@@ -23507,6 +24421,7 @@
           <a:lstStyle/>
           <a:p>
             <a:pPr algn="ctr"/>
+            <a:endParaRPr/>
           </a:p>
         </p:txBody>
       </p:sp>
@@ -23627,7 +24542,7 @@
 </file>
 
 <file path=ppt/slides/slide38.xml><?xml version="1.0" encoding="utf-8"?>
-<p:sld xmlns:a="http://schemas.openxmlformats.org/drawingml/2006/main" xmlns:p="http://schemas.openxmlformats.org/presentationml/2006/main" xmlns:r="http://schemas.openxmlformats.org/officeDocument/2006/relationships">
+<p:sld xmlns:a="http://schemas.openxmlformats.org/drawingml/2006/main" xmlns:r="http://schemas.openxmlformats.org/officeDocument/2006/relationships" xmlns:p="http://schemas.openxmlformats.org/presentationml/2006/main">
   <p:cSld>
     <p:spTree>
       <p:nvGrpSpPr>
@@ -23635,7 +24550,14 @@
         <p:cNvGrpSpPr/>
         <p:nvPr/>
       </p:nvGrpSpPr>
-      <p:grpSpPr/>
+      <p:grpSpPr>
+        <a:xfrm>
+          <a:off x="0" y="0"/>
+          <a:ext cx="0" cy="0"/>
+          <a:chOff x="0" y="0"/>
+          <a:chExt cx="0" cy="0"/>
+        </a:xfrm>
+      </p:grpSpPr>
       <p:sp>
         <p:nvSpPr>
           <p:cNvPr id="2" name="Rectangle 1"/>
@@ -23676,6 +24598,7 @@
           <a:lstStyle/>
           <a:p>
             <a:pPr algn="ctr"/>
+            <a:endParaRPr/>
           </a:p>
         </p:txBody>
       </p:sp>
@@ -23784,7 +24707,7 @@
 </file>
 
 <file path=ppt/slides/slide39.xml><?xml version="1.0" encoding="utf-8"?>
-<p:sld xmlns:a="http://schemas.openxmlformats.org/drawingml/2006/main" xmlns:p="http://schemas.openxmlformats.org/presentationml/2006/main" xmlns:r="http://schemas.openxmlformats.org/officeDocument/2006/relationships">
+<p:sld xmlns:a="http://schemas.openxmlformats.org/drawingml/2006/main" xmlns:r="http://schemas.openxmlformats.org/officeDocument/2006/relationships" xmlns:p="http://schemas.openxmlformats.org/presentationml/2006/main">
   <p:cSld>
     <p:spTree>
       <p:nvGrpSpPr>
@@ -23792,7 +24715,14 @@
         <p:cNvGrpSpPr/>
         <p:nvPr/>
       </p:nvGrpSpPr>
-      <p:grpSpPr/>
+      <p:grpSpPr>
+        <a:xfrm>
+          <a:off x="0" y="0"/>
+          <a:ext cx="0" cy="0"/>
+          <a:chOff x="0" y="0"/>
+          <a:chExt cx="0" cy="0"/>
+        </a:xfrm>
+      </p:grpSpPr>
       <p:sp>
         <p:nvSpPr>
           <p:cNvPr id="2" name="Rectangle 1"/>
@@ -23833,6 +24763,7 @@
           <a:lstStyle/>
           <a:p>
             <a:pPr algn="ctr"/>
+            <a:endParaRPr/>
           </a:p>
         </p:txBody>
       </p:sp>
@@ -23980,7 +24911,7 @@
 </file>
 
 <file path=ppt/slides/slide4.xml><?xml version="1.0" encoding="utf-8"?>
-<p:sld xmlns:a="http://schemas.openxmlformats.org/drawingml/2006/main" xmlns:p="http://schemas.openxmlformats.org/presentationml/2006/main" xmlns:r="http://schemas.openxmlformats.org/officeDocument/2006/relationships">
+<p:sld xmlns:a="http://schemas.openxmlformats.org/drawingml/2006/main" xmlns:r="http://schemas.openxmlformats.org/officeDocument/2006/relationships" xmlns:p="http://schemas.openxmlformats.org/presentationml/2006/main">
   <p:cSld>
     <p:spTree>
       <p:nvGrpSpPr>
@@ -23988,7 +24919,14 @@
         <p:cNvGrpSpPr/>
         <p:nvPr/>
       </p:nvGrpSpPr>
-      <p:grpSpPr/>
+      <p:grpSpPr>
+        <a:xfrm>
+          <a:off x="0" y="0"/>
+          <a:ext cx="0" cy="0"/>
+          <a:chOff x="0" y="0"/>
+          <a:chExt cx="0" cy="0"/>
+        </a:xfrm>
+      </p:grpSpPr>
       <p:sp>
         <p:nvSpPr>
           <p:cNvPr id="2" name="Rectangle 1"/>
@@ -24029,6 +24967,7 @@
           <a:lstStyle/>
           <a:p>
             <a:pPr algn="ctr"/>
+            <a:endParaRPr/>
           </a:p>
         </p:txBody>
       </p:sp>
@@ -24146,6 +25085,7 @@
           <a:lstStyle/>
           <a:p>
             <a:pPr algn="ctr"/>
+            <a:endParaRPr/>
           </a:p>
         </p:txBody>
       </p:sp>
@@ -24269,6 +25209,7 @@
           <a:lstStyle/>
           <a:p>
             <a:pPr algn="ctr"/>
+            <a:endParaRPr/>
           </a:p>
         </p:txBody>
       </p:sp>
@@ -24392,6 +25333,7 @@
           <a:lstStyle/>
           <a:p>
             <a:pPr algn="ctr"/>
+            <a:endParaRPr/>
           </a:p>
         </p:txBody>
       </p:sp>
@@ -24872,7 +25814,7 @@
 </file>
 
 <file path=ppt/slides/slide40.xml><?xml version="1.0" encoding="utf-8"?>
-<p:sld xmlns:a="http://schemas.openxmlformats.org/drawingml/2006/main" xmlns:p="http://schemas.openxmlformats.org/presentationml/2006/main" xmlns:r="http://schemas.openxmlformats.org/officeDocument/2006/relationships">
+<p:sld xmlns:a="http://schemas.openxmlformats.org/drawingml/2006/main" xmlns:r="http://schemas.openxmlformats.org/officeDocument/2006/relationships" xmlns:p="http://schemas.openxmlformats.org/presentationml/2006/main">
   <p:cSld>
     <p:spTree>
       <p:nvGrpSpPr>
@@ -24880,7 +25822,14 @@
         <p:cNvGrpSpPr/>
         <p:nvPr/>
       </p:nvGrpSpPr>
-      <p:grpSpPr/>
+      <p:grpSpPr>
+        <a:xfrm>
+          <a:off x="0" y="0"/>
+          <a:ext cx="0" cy="0"/>
+          <a:chOff x="0" y="0"/>
+          <a:chExt cx="0" cy="0"/>
+        </a:xfrm>
+      </p:grpSpPr>
       <p:sp>
         <p:nvSpPr>
           <p:cNvPr id="2" name="Rectangle 1"/>
@@ -24921,6 +25870,7 @@
           <a:lstStyle/>
           <a:p>
             <a:pPr algn="ctr"/>
+            <a:endParaRPr/>
           </a:p>
         </p:txBody>
       </p:sp>
@@ -25068,7 +26018,7 @@
 </file>
 
 <file path=ppt/slides/slide41.xml><?xml version="1.0" encoding="utf-8"?>
-<p:sld xmlns:a="http://schemas.openxmlformats.org/drawingml/2006/main" xmlns:p="http://schemas.openxmlformats.org/presentationml/2006/main" xmlns:r="http://schemas.openxmlformats.org/officeDocument/2006/relationships">
+<p:sld xmlns:a="http://schemas.openxmlformats.org/drawingml/2006/main" xmlns:r="http://schemas.openxmlformats.org/officeDocument/2006/relationships" xmlns:p="http://schemas.openxmlformats.org/presentationml/2006/main">
   <p:cSld>
     <p:spTree>
       <p:nvGrpSpPr>
@@ -25076,7 +26026,14 @@
         <p:cNvGrpSpPr/>
         <p:nvPr/>
       </p:nvGrpSpPr>
-      <p:grpSpPr/>
+      <p:grpSpPr>
+        <a:xfrm>
+          <a:off x="0" y="0"/>
+          <a:ext cx="0" cy="0"/>
+          <a:chOff x="0" y="0"/>
+          <a:chExt cx="0" cy="0"/>
+        </a:xfrm>
+      </p:grpSpPr>
       <p:sp>
         <p:nvSpPr>
           <p:cNvPr id="2" name="Rectangle 1"/>
@@ -25117,6 +26074,7 @@
           <a:lstStyle/>
           <a:p>
             <a:pPr algn="ctr"/>
+            <a:endParaRPr/>
           </a:p>
         </p:txBody>
       </p:sp>
@@ -25288,7 +26246,7 @@
 </file>
 
 <file path=ppt/slides/slide42.xml><?xml version="1.0" encoding="utf-8"?>
-<p:sld xmlns:a="http://schemas.openxmlformats.org/drawingml/2006/main" xmlns:p="http://schemas.openxmlformats.org/presentationml/2006/main" xmlns:r="http://schemas.openxmlformats.org/officeDocument/2006/relationships">
+<p:sld xmlns:a="http://schemas.openxmlformats.org/drawingml/2006/main" xmlns:r="http://schemas.openxmlformats.org/officeDocument/2006/relationships" xmlns:p="http://schemas.openxmlformats.org/presentationml/2006/main">
   <p:cSld>
     <p:spTree>
       <p:nvGrpSpPr>
@@ -25296,7 +26254,14 @@
         <p:cNvGrpSpPr/>
         <p:nvPr/>
       </p:nvGrpSpPr>
-      <p:grpSpPr/>
+      <p:grpSpPr>
+        <a:xfrm>
+          <a:off x="0" y="0"/>
+          <a:ext cx="0" cy="0"/>
+          <a:chOff x="0" y="0"/>
+          <a:chExt cx="0" cy="0"/>
+        </a:xfrm>
+      </p:grpSpPr>
       <p:sp>
         <p:nvSpPr>
           <p:cNvPr id="2" name="Rectangle 1"/>
@@ -25337,6 +26302,7 @@
           <a:lstStyle/>
           <a:p>
             <a:pPr algn="ctr"/>
+            <a:endParaRPr/>
           </a:p>
         </p:txBody>
       </p:sp>
@@ -25445,7 +26411,7 @@
 </file>
 
 <file path=ppt/slides/slide43.xml><?xml version="1.0" encoding="utf-8"?>
-<p:sld xmlns:a="http://schemas.openxmlformats.org/drawingml/2006/main" xmlns:p="http://schemas.openxmlformats.org/presentationml/2006/main" xmlns:r="http://schemas.openxmlformats.org/officeDocument/2006/relationships">
+<p:sld xmlns:a="http://schemas.openxmlformats.org/drawingml/2006/main" xmlns:r="http://schemas.openxmlformats.org/officeDocument/2006/relationships" xmlns:p="http://schemas.openxmlformats.org/presentationml/2006/main">
   <p:cSld>
     <p:spTree>
       <p:nvGrpSpPr>
@@ -25453,7 +26419,14 @@
         <p:cNvGrpSpPr/>
         <p:nvPr/>
       </p:nvGrpSpPr>
-      <p:grpSpPr/>
+      <p:grpSpPr>
+        <a:xfrm>
+          <a:off x="0" y="0"/>
+          <a:ext cx="0" cy="0"/>
+          <a:chOff x="0" y="0"/>
+          <a:chExt cx="0" cy="0"/>
+        </a:xfrm>
+      </p:grpSpPr>
       <p:sp>
         <p:nvSpPr>
           <p:cNvPr id="2" name="Rectangle 1"/>
@@ -25494,6 +26467,7 @@
           <a:lstStyle/>
           <a:p>
             <a:pPr algn="ctr"/>
+            <a:endParaRPr/>
           </a:p>
         </p:txBody>
       </p:sp>
@@ -25674,7 +26648,7 @@
 </file>
 
 <file path=ppt/slides/slide44.xml><?xml version="1.0" encoding="utf-8"?>
-<p:sld xmlns:a="http://schemas.openxmlformats.org/drawingml/2006/main" xmlns:p="http://schemas.openxmlformats.org/presentationml/2006/main" xmlns:r="http://schemas.openxmlformats.org/officeDocument/2006/relationships">
+<p:sld xmlns:a="http://schemas.openxmlformats.org/drawingml/2006/main" xmlns:r="http://schemas.openxmlformats.org/officeDocument/2006/relationships" xmlns:p="http://schemas.openxmlformats.org/presentationml/2006/main">
   <p:cSld>
     <p:spTree>
       <p:nvGrpSpPr>
@@ -25682,7 +26656,14 @@
         <p:cNvGrpSpPr/>
         <p:nvPr/>
       </p:nvGrpSpPr>
-      <p:grpSpPr/>
+      <p:grpSpPr>
+        <a:xfrm>
+          <a:off x="0" y="0"/>
+          <a:ext cx="0" cy="0"/>
+          <a:chOff x="0" y="0"/>
+          <a:chExt cx="0" cy="0"/>
+        </a:xfrm>
+      </p:grpSpPr>
       <p:sp>
         <p:nvSpPr>
           <p:cNvPr id="2" name="Rectangle 1"/>
@@ -25723,6 +26704,7 @@
           <a:lstStyle/>
           <a:p>
             <a:pPr algn="ctr"/>
+            <a:endParaRPr/>
           </a:p>
         </p:txBody>
       </p:sp>
@@ -25843,7 +26825,7 @@
 </file>
 
 <file path=ppt/slides/slide45.xml><?xml version="1.0" encoding="utf-8"?>
-<p:sld xmlns:a="http://schemas.openxmlformats.org/drawingml/2006/main" xmlns:p="http://schemas.openxmlformats.org/presentationml/2006/main" xmlns:r="http://schemas.openxmlformats.org/officeDocument/2006/relationships">
+<p:sld xmlns:a="http://schemas.openxmlformats.org/drawingml/2006/main" xmlns:r="http://schemas.openxmlformats.org/officeDocument/2006/relationships" xmlns:p="http://schemas.openxmlformats.org/presentationml/2006/main">
   <p:cSld>
     <p:spTree>
       <p:nvGrpSpPr>
@@ -25851,7 +26833,14 @@
         <p:cNvGrpSpPr/>
         <p:nvPr/>
       </p:nvGrpSpPr>
-      <p:grpSpPr/>
+      <p:grpSpPr>
+        <a:xfrm>
+          <a:off x="0" y="0"/>
+          <a:ext cx="0" cy="0"/>
+          <a:chOff x="0" y="0"/>
+          <a:chExt cx="0" cy="0"/>
+        </a:xfrm>
+      </p:grpSpPr>
       <p:sp>
         <p:nvSpPr>
           <p:cNvPr id="2" name="Rectangle 1"/>
@@ -25892,6 +26881,7 @@
           <a:lstStyle/>
           <a:p>
             <a:pPr algn="ctr"/>
+            <a:endParaRPr/>
           </a:p>
         </p:txBody>
       </p:sp>
@@ -26893,7 +27883,7 @@
 </file>
 
 <file path=ppt/slides/slide46.xml><?xml version="1.0" encoding="utf-8"?>
-<p:sld xmlns:a="http://schemas.openxmlformats.org/drawingml/2006/main" xmlns:p="http://schemas.openxmlformats.org/presentationml/2006/main" xmlns:r="http://schemas.openxmlformats.org/officeDocument/2006/relationships">
+<p:sld xmlns:a="http://schemas.openxmlformats.org/drawingml/2006/main" xmlns:r="http://schemas.openxmlformats.org/officeDocument/2006/relationships" xmlns:p="http://schemas.openxmlformats.org/presentationml/2006/main">
   <p:cSld>
     <p:spTree>
       <p:nvGrpSpPr>
@@ -26901,7 +27891,14 @@
         <p:cNvGrpSpPr/>
         <p:nvPr/>
       </p:nvGrpSpPr>
-      <p:grpSpPr/>
+      <p:grpSpPr>
+        <a:xfrm>
+          <a:off x="0" y="0"/>
+          <a:ext cx="0" cy="0"/>
+          <a:chOff x="0" y="0"/>
+          <a:chExt cx="0" cy="0"/>
+        </a:xfrm>
+      </p:grpSpPr>
       <p:sp>
         <p:nvSpPr>
           <p:cNvPr id="2" name="Rectangle 1"/>
@@ -26942,6 +27939,7 @@
           <a:lstStyle/>
           <a:p>
             <a:pPr algn="ctr"/>
+            <a:endParaRPr/>
           </a:p>
         </p:txBody>
       </p:sp>
@@ -27059,6 +28057,7 @@
           <a:lstStyle/>
           <a:p>
             <a:pPr algn="ctr"/>
+            <a:endParaRPr/>
           </a:p>
         </p:txBody>
       </p:sp>
@@ -27102,6 +28101,7 @@
           <a:lstStyle/>
           <a:p>
             <a:pPr algn="ctr"/>
+            <a:endParaRPr/>
           </a:p>
         </p:txBody>
       </p:sp>
@@ -27257,6 +28257,7 @@
           <a:lstStyle/>
           <a:p>
             <a:pPr algn="ctr"/>
+            <a:endParaRPr/>
           </a:p>
         </p:txBody>
       </p:sp>
@@ -27300,6 +28301,7 @@
           <a:lstStyle/>
           <a:p>
             <a:pPr algn="ctr"/>
+            <a:endParaRPr/>
           </a:p>
         </p:txBody>
       </p:sp>
@@ -27455,6 +28457,7 @@
           <a:lstStyle/>
           <a:p>
             <a:pPr algn="ctr"/>
+            <a:endParaRPr/>
           </a:p>
         </p:txBody>
       </p:sp>
@@ -27498,6 +28501,7 @@
           <a:lstStyle/>
           <a:p>
             <a:pPr algn="ctr"/>
+            <a:endParaRPr/>
           </a:p>
         </p:txBody>
       </p:sp>
@@ -27653,6 +28657,7 @@
           <a:lstStyle/>
           <a:p>
             <a:pPr algn="ctr"/>
+            <a:endParaRPr/>
           </a:p>
         </p:txBody>
       </p:sp>
@@ -27696,6 +28701,7 @@
           <a:lstStyle/>
           <a:p>
             <a:pPr algn="ctr"/>
+            <a:endParaRPr/>
           </a:p>
         </p:txBody>
       </p:sp>
@@ -27851,6 +28857,7 @@
           <a:lstStyle/>
           <a:p>
             <a:pPr algn="ctr"/>
+            <a:endParaRPr/>
           </a:p>
         </p:txBody>
       </p:sp>
@@ -27894,6 +28901,7 @@
           <a:lstStyle/>
           <a:p>
             <a:pPr algn="ctr"/>
+            <a:endParaRPr/>
           </a:p>
         </p:txBody>
       </p:sp>
@@ -28055,7 +29063,7 @@
 </file>
 
 <file path=ppt/slides/slide47.xml><?xml version="1.0" encoding="utf-8"?>
-<p:sld xmlns:a="http://schemas.openxmlformats.org/drawingml/2006/main" xmlns:p="http://schemas.openxmlformats.org/presentationml/2006/main" xmlns:r="http://schemas.openxmlformats.org/officeDocument/2006/relationships">
+<p:sld xmlns:a="http://schemas.openxmlformats.org/drawingml/2006/main" xmlns:r="http://schemas.openxmlformats.org/officeDocument/2006/relationships" xmlns:p="http://schemas.openxmlformats.org/presentationml/2006/main">
   <p:cSld>
     <p:spTree>
       <p:nvGrpSpPr>
@@ -28063,7 +29071,14 @@
         <p:cNvGrpSpPr/>
         <p:nvPr/>
       </p:nvGrpSpPr>
-      <p:grpSpPr/>
+      <p:grpSpPr>
+        <a:xfrm>
+          <a:off x="0" y="0"/>
+          <a:ext cx="0" cy="0"/>
+          <a:chOff x="0" y="0"/>
+          <a:chExt cx="0" cy="0"/>
+        </a:xfrm>
+      </p:grpSpPr>
       <p:sp>
         <p:nvSpPr>
           <p:cNvPr id="2" name="Rectangle 1"/>
@@ -28104,6 +29119,7 @@
           <a:lstStyle/>
           <a:p>
             <a:pPr algn="ctr"/>
+            <a:endParaRPr/>
           </a:p>
         </p:txBody>
       </p:sp>
@@ -28221,6 +29237,7 @@
           <a:lstStyle/>
           <a:p>
             <a:pPr algn="ctr"/>
+            <a:endParaRPr/>
           </a:p>
         </p:txBody>
       </p:sp>
@@ -28264,6 +29281,7 @@
           <a:lstStyle/>
           <a:p>
             <a:pPr algn="ctr"/>
+            <a:endParaRPr/>
           </a:p>
         </p:txBody>
       </p:sp>
@@ -28387,6 +29405,7 @@
           <a:lstStyle/>
           <a:p>
             <a:pPr algn="ctr"/>
+            <a:endParaRPr/>
           </a:p>
         </p:txBody>
       </p:sp>
@@ -28430,6 +29449,7 @@
           <a:lstStyle/>
           <a:p>
             <a:pPr algn="ctr"/>
+            <a:endParaRPr/>
           </a:p>
         </p:txBody>
       </p:sp>
@@ -28553,6 +29573,7 @@
           <a:lstStyle/>
           <a:p>
             <a:pPr algn="ctr"/>
+            <a:endParaRPr/>
           </a:p>
         </p:txBody>
       </p:sp>
@@ -28596,6 +29617,7 @@
           <a:lstStyle/>
           <a:p>
             <a:pPr algn="ctr"/>
+            <a:endParaRPr/>
           </a:p>
         </p:txBody>
       </p:sp>
@@ -28719,6 +29741,7 @@
           <a:lstStyle/>
           <a:p>
             <a:pPr algn="ctr"/>
+            <a:endParaRPr/>
           </a:p>
         </p:txBody>
       </p:sp>
@@ -28762,6 +29785,7 @@
           <a:lstStyle/>
           <a:p>
             <a:pPr algn="ctr"/>
+            <a:endParaRPr/>
           </a:p>
         </p:txBody>
       </p:sp>
@@ -28885,6 +29909,7 @@
           <a:lstStyle/>
           <a:p>
             <a:pPr algn="ctr"/>
+            <a:endParaRPr/>
           </a:p>
         </p:txBody>
       </p:sp>
@@ -28928,6 +29953,7 @@
           <a:lstStyle/>
           <a:p>
             <a:pPr algn="ctr"/>
+            <a:endParaRPr/>
           </a:p>
         </p:txBody>
       </p:sp>
@@ -29096,7 +30122,7 @@
 </file>
 
 <file path=ppt/slides/slide5.xml><?xml version="1.0" encoding="utf-8"?>
-<p:sld xmlns:a="http://schemas.openxmlformats.org/drawingml/2006/main" xmlns:p="http://schemas.openxmlformats.org/presentationml/2006/main" xmlns:r="http://schemas.openxmlformats.org/officeDocument/2006/relationships">
+<p:sld xmlns:a="http://schemas.openxmlformats.org/drawingml/2006/main" xmlns:r="http://schemas.openxmlformats.org/officeDocument/2006/relationships" xmlns:p="http://schemas.openxmlformats.org/presentationml/2006/main">
   <p:cSld>
     <p:spTree>
       <p:nvGrpSpPr>
@@ -29104,7 +30130,14 @@
         <p:cNvGrpSpPr/>
         <p:nvPr/>
       </p:nvGrpSpPr>
-      <p:grpSpPr/>
+      <p:grpSpPr>
+        <a:xfrm>
+          <a:off x="0" y="0"/>
+          <a:ext cx="0" cy="0"/>
+          <a:chOff x="0" y="0"/>
+          <a:chExt cx="0" cy="0"/>
+        </a:xfrm>
+      </p:grpSpPr>
       <p:sp>
         <p:nvSpPr>
           <p:cNvPr id="2" name="Rectangle 1"/>
@@ -29145,6 +30178,7 @@
           <a:lstStyle/>
           <a:p>
             <a:pPr algn="ctr"/>
+            <a:endParaRPr/>
           </a:p>
         </p:txBody>
       </p:sp>
@@ -30060,7 +31094,7 @@
 </file>
 
 <file path=ppt/slides/slide6.xml><?xml version="1.0" encoding="utf-8"?>
-<p:sld xmlns:a="http://schemas.openxmlformats.org/drawingml/2006/main" xmlns:p="http://schemas.openxmlformats.org/presentationml/2006/main" xmlns:r="http://schemas.openxmlformats.org/officeDocument/2006/relationships">
+<p:sld xmlns:a="http://schemas.openxmlformats.org/drawingml/2006/main" xmlns:r="http://schemas.openxmlformats.org/officeDocument/2006/relationships" xmlns:p="http://schemas.openxmlformats.org/presentationml/2006/main">
   <p:cSld>
     <p:spTree>
       <p:nvGrpSpPr>
@@ -30068,7 +31102,14 @@
         <p:cNvGrpSpPr/>
         <p:nvPr/>
       </p:nvGrpSpPr>
-      <p:grpSpPr/>
+      <p:grpSpPr>
+        <a:xfrm>
+          <a:off x="0" y="0"/>
+          <a:ext cx="0" cy="0"/>
+          <a:chOff x="0" y="0"/>
+          <a:chExt cx="0" cy="0"/>
+        </a:xfrm>
+      </p:grpSpPr>
       <p:sp>
         <p:nvSpPr>
           <p:cNvPr id="2" name="Rectangle 1"/>
@@ -30109,6 +31150,7 @@
           <a:lstStyle/>
           <a:p>
             <a:pPr algn="ctr"/>
+            <a:endParaRPr/>
           </a:p>
         </p:txBody>
       </p:sp>
@@ -30976,7 +32018,7 @@
 </file>
 
 <file path=ppt/slides/slide7.xml><?xml version="1.0" encoding="utf-8"?>
-<p:sld xmlns:a="http://schemas.openxmlformats.org/drawingml/2006/main" xmlns:p="http://schemas.openxmlformats.org/presentationml/2006/main" xmlns:r="http://schemas.openxmlformats.org/officeDocument/2006/relationships">
+<p:sld xmlns:a="http://schemas.openxmlformats.org/drawingml/2006/main" xmlns:r="http://schemas.openxmlformats.org/officeDocument/2006/relationships" xmlns:p="http://schemas.openxmlformats.org/presentationml/2006/main">
   <p:cSld>
     <p:spTree>
       <p:nvGrpSpPr>
@@ -30984,7 +32026,14 @@
         <p:cNvGrpSpPr/>
         <p:nvPr/>
       </p:nvGrpSpPr>
-      <p:grpSpPr/>
+      <p:grpSpPr>
+        <a:xfrm>
+          <a:off x="0" y="0"/>
+          <a:ext cx="0" cy="0"/>
+          <a:chOff x="0" y="0"/>
+          <a:chExt cx="0" cy="0"/>
+        </a:xfrm>
+      </p:grpSpPr>
       <p:sp>
         <p:nvSpPr>
           <p:cNvPr id="2" name="Rectangle 1"/>
@@ -31025,6 +32074,7 @@
           <a:lstStyle/>
           <a:p>
             <a:pPr algn="ctr"/>
+            <a:endParaRPr/>
           </a:p>
         </p:txBody>
       </p:sp>
@@ -31145,7 +32195,7 @@
 </file>
 
 <file path=ppt/slides/slide8.xml><?xml version="1.0" encoding="utf-8"?>
-<p:sld xmlns:a="http://schemas.openxmlformats.org/drawingml/2006/main" xmlns:p="http://schemas.openxmlformats.org/presentationml/2006/main" xmlns:r="http://schemas.openxmlformats.org/officeDocument/2006/relationships">
+<p:sld xmlns:a="http://schemas.openxmlformats.org/drawingml/2006/main" xmlns:r="http://schemas.openxmlformats.org/officeDocument/2006/relationships" xmlns:p="http://schemas.openxmlformats.org/presentationml/2006/main">
   <p:cSld>
     <p:spTree>
       <p:nvGrpSpPr>
@@ -31153,7 +32203,14 @@
         <p:cNvGrpSpPr/>
         <p:nvPr/>
       </p:nvGrpSpPr>
-      <p:grpSpPr/>
+      <p:grpSpPr>
+        <a:xfrm>
+          <a:off x="0" y="0"/>
+          <a:ext cx="0" cy="0"/>
+          <a:chOff x="0" y="0"/>
+          <a:chExt cx="0" cy="0"/>
+        </a:xfrm>
+      </p:grpSpPr>
       <p:sp>
         <p:nvSpPr>
           <p:cNvPr id="2" name="Rectangle 1"/>
@@ -31194,6 +32251,7 @@
           <a:lstStyle/>
           <a:p>
             <a:pPr algn="ctr"/>
+            <a:endParaRPr/>
           </a:p>
         </p:txBody>
       </p:sp>
@@ -31311,6 +32369,7 @@
           <a:lstStyle/>
           <a:p>
             <a:pPr algn="ctr"/>
+            <a:endParaRPr/>
           </a:p>
         </p:txBody>
       </p:sp>
@@ -31448,6 +32507,7 @@
           <a:lstStyle/>
           <a:p>
             <a:pPr algn="ctr"/>
+            <a:endParaRPr/>
           </a:p>
         </p:txBody>
       </p:sp>
@@ -31585,6 +32645,7 @@
           <a:lstStyle/>
           <a:p>
             <a:pPr algn="ctr"/>
+            <a:endParaRPr/>
           </a:p>
         </p:txBody>
       </p:sp>
@@ -31689,7 +32750,7 @@
 </file>
 
 <file path=ppt/slides/slide9.xml><?xml version="1.0" encoding="utf-8"?>
-<p:sld xmlns:a="http://schemas.openxmlformats.org/drawingml/2006/main" xmlns:p="http://schemas.openxmlformats.org/presentationml/2006/main" xmlns:r="http://schemas.openxmlformats.org/officeDocument/2006/relationships">
+<p:sld xmlns:a="http://schemas.openxmlformats.org/drawingml/2006/main" xmlns:r="http://schemas.openxmlformats.org/officeDocument/2006/relationships" xmlns:p="http://schemas.openxmlformats.org/presentationml/2006/main">
   <p:cSld>
     <p:spTree>
       <p:nvGrpSpPr>
@@ -31697,7 +32758,14 @@
         <p:cNvGrpSpPr/>
         <p:nvPr/>
       </p:nvGrpSpPr>
-      <p:grpSpPr/>
+      <p:grpSpPr>
+        <a:xfrm>
+          <a:off x="0" y="0"/>
+          <a:ext cx="0" cy="0"/>
+          <a:chOff x="0" y="0"/>
+          <a:chExt cx="0" cy="0"/>
+        </a:xfrm>
+      </p:grpSpPr>
       <p:sp>
         <p:nvSpPr>
           <p:cNvPr id="2" name="Rectangle 1"/>
@@ -31738,6 +32806,7 @@
           <a:lstStyle/>
           <a:p>
             <a:pPr algn="ctr"/>
+            <a:endParaRPr/>
           </a:p>
         </p:txBody>
       </p:sp>
@@ -31855,6 +32924,7 @@
           <a:lstStyle/>
           <a:p>
             <a:pPr algn="ctr"/>
+            <a:endParaRPr/>
           </a:p>
         </p:txBody>
       </p:sp>
@@ -31898,6 +32968,7 @@
           <a:lstStyle/>
           <a:p>
             <a:pPr algn="ctr"/>
+            <a:endParaRPr/>
           </a:p>
         </p:txBody>
       </p:sp>
@@ -32053,6 +33124,7 @@
           <a:lstStyle/>
           <a:p>
             <a:pPr algn="ctr"/>
+            <a:endParaRPr/>
           </a:p>
         </p:txBody>
       </p:sp>
@@ -32096,6 +33168,7 @@
           <a:lstStyle/>
           <a:p>
             <a:pPr algn="ctr"/>
+            <a:endParaRPr/>
           </a:p>
         </p:txBody>
       </p:sp>
@@ -32251,6 +33324,7 @@
           <a:lstStyle/>
           <a:p>
             <a:pPr algn="ctr"/>
+            <a:endParaRPr/>
           </a:p>
         </p:txBody>
       </p:sp>
@@ -32294,6 +33368,7 @@
           <a:lstStyle/>
           <a:p>
             <a:pPr algn="ctr"/>
+            <a:endParaRPr/>
           </a:p>
         </p:txBody>
       </p:sp>
@@ -32449,6 +33524,7 @@
           <a:lstStyle/>
           <a:p>
             <a:pPr algn="ctr"/>
+            <a:endParaRPr/>
           </a:p>
         </p:txBody>
       </p:sp>
@@ -32492,6 +33568,7 @@
           <a:lstStyle/>
           <a:p>
             <a:pPr algn="ctr"/>
+            <a:endParaRPr/>
           </a:p>
         </p:txBody>
       </p:sp>
@@ -32647,6 +33724,7 @@
           <a:lstStyle/>
           <a:p>
             <a:pPr algn="ctr"/>
+            <a:endParaRPr/>
           </a:p>
         </p:txBody>
       </p:sp>
@@ -32690,6 +33768,7 @@
           <a:lstStyle/>
           <a:p>
             <a:pPr algn="ctr"/>
+            <a:endParaRPr/>
           </a:p>
         </p:txBody>
       </p:sp>
